--- a/FORTE_TRANSPORTES_DO_BRASIL_LT.pptx
+++ b/FORTE_TRANSPORTES_DO_BRASIL_LT.pptx
@@ -162,7 +162,7 @@
                 <c:formatCode>General</c:formatCode>
                 <c:ptCount val="2"/>
                 <c:pt idx="0">
-                  <c:v>370</c:v>
+                  <c:v>0</c:v>
                 </c:pt>
                 <c:pt idx="1">
                   <c:v>357</c:v>
@@ -211,7 +211,7 @@
                 <c:formatCode>General</c:formatCode>
                 <c:ptCount val="2"/>
                 <c:pt idx="0">
-                  <c:v>2</c:v>
+                  <c:v>0</c:v>
                 </c:pt>
                 <c:pt idx="1">
                   <c:v>4</c:v>
@@ -3688,7 +3688,7 @@
         <p:spPr>
           <a:xfrm>
             <a:off x="1005840" y="2240279"/>
-            <a:ext cx="2377439" cy="891540"/>
+            <a:ext cx="2377440" cy="868680"/>
           </a:xfrm>
           <a:prstGeom prst="rect">
             <a:avLst/>
@@ -3722,8 +3722,8 @@
         </p:nvSpPr>
         <p:spPr>
           <a:xfrm>
-            <a:off x="1005840" y="3058668"/>
-            <a:ext cx="2377439" cy="548640"/>
+            <a:off x="1005840" y="3090672"/>
+            <a:ext cx="2377440" cy="411480"/>
           </a:xfrm>
           <a:prstGeom prst="rect">
             <a:avLst/>
@@ -3803,7 +3803,7 @@
         <p:spPr>
           <a:xfrm>
             <a:off x="3931920" y="2240279"/>
-            <a:ext cx="2377439" cy="891540"/>
+            <a:ext cx="2377440" cy="868680"/>
           </a:xfrm>
           <a:prstGeom prst="rect">
             <a:avLst/>
@@ -3837,8 +3837,8 @@
         </p:nvSpPr>
         <p:spPr>
           <a:xfrm>
-            <a:off x="3931920" y="3058668"/>
-            <a:ext cx="2377439" cy="548640"/>
+            <a:off x="3931920" y="3090672"/>
+            <a:ext cx="2377440" cy="411480"/>
           </a:xfrm>
           <a:prstGeom prst="rect">
             <a:avLst/>
@@ -3918,7 +3918,7 @@
         <p:spPr>
           <a:xfrm>
             <a:off x="6858000" y="2240279"/>
-            <a:ext cx="2377439" cy="891540"/>
+            <a:ext cx="2377440" cy="868680"/>
           </a:xfrm>
           <a:prstGeom prst="rect">
             <a:avLst/>
@@ -3952,8 +3952,8 @@
         </p:nvSpPr>
         <p:spPr>
           <a:xfrm>
-            <a:off x="6858000" y="3058668"/>
-            <a:ext cx="2377439" cy="548640"/>
+            <a:off x="6858000" y="3090672"/>
+            <a:ext cx="2377440" cy="411480"/>
           </a:xfrm>
           <a:prstGeom prst="rect">
             <a:avLst/>
@@ -4033,7 +4033,7 @@
         <p:spPr>
           <a:xfrm>
             <a:off x="9784080" y="2240279"/>
-            <a:ext cx="2377439" cy="891540"/>
+            <a:ext cx="2377440" cy="868680"/>
           </a:xfrm>
           <a:prstGeom prst="rect">
             <a:avLst/>
@@ -4067,8 +4067,8 @@
         </p:nvSpPr>
         <p:spPr>
           <a:xfrm>
-            <a:off x="9784080" y="3058668"/>
-            <a:ext cx="2377439" cy="548640"/>
+            <a:off x="9784080" y="3090672"/>
+            <a:ext cx="2377440" cy="411480"/>
           </a:xfrm>
           <a:prstGeom prst="rect">
             <a:avLst/>
@@ -4121,7 +4121,7 @@
               <a:tr h="475488">
                 <a:tc>
                   <a:txBody>
-                    <a:bodyPr wrap="square"/>
+                    <a:bodyPr/>
                     <a:lstStyle/>
                     <a:p>
                       <a:pPr algn="ctr"/>
@@ -4144,7 +4144,7 @@
                 </a:tc>
                 <a:tc>
                   <a:txBody>
-                    <a:bodyPr wrap="square"/>
+                    <a:bodyPr/>
                     <a:lstStyle/>
                     <a:p>
                       <a:pPr algn="ctr"/>
@@ -4167,7 +4167,7 @@
                 </a:tc>
                 <a:tc>
                   <a:txBody>
-                    <a:bodyPr wrap="square"/>
+                    <a:bodyPr/>
                     <a:lstStyle/>
                     <a:p>
                       <a:pPr algn="ctr"/>
@@ -4190,7 +4190,7 @@
                 </a:tc>
                 <a:tc>
                   <a:txBody>
-                    <a:bodyPr wrap="square"/>
+                    <a:bodyPr/>
                     <a:lstStyle/>
                     <a:p>
                       <a:pPr algn="ctr"/>
@@ -4215,18 +4215,18 @@
               <a:tr h="475488">
                 <a:tc>
                   <a:txBody>
-                    <a:bodyPr wrap="square"/>
-                    <a:lstStyle/>
-                    <a:p>
-                      <a:pPr algn="l"/>
-                      <a:r>
-                        <a:rPr sz="1000" b="0">
-                          <a:solidFill>
-                            <a:srgbClr val="1D1B43"/>
-                          </a:solidFill>
-                          <a:latin typeface="Calibri"/>
-                        </a:rPr>
-                        <a:t>Total Entregas</a:t>
+                    <a:bodyPr/>
+                    <a:lstStyle/>
+                    <a:p>
+                      <a:pPr algn="l"/>
+                      <a:r>
+                        <a:rPr sz="1000" b="0">
+                          <a:solidFill>
+                            <a:srgbClr val="1D1B43"/>
+                          </a:solidFill>
+                          <a:latin typeface="Calibri"/>
+                        </a:rPr>
+                        <a:t>Total</a:t>
                       </a:r>
                     </a:p>
                   </a:txBody>
@@ -4238,18 +4238,18 @@
                 </a:tc>
                 <a:tc>
                   <a:txBody>
-                    <a:bodyPr wrap="square"/>
-                    <a:lstStyle/>
-                    <a:p>
-                      <a:pPr algn="l"/>
-                      <a:r>
-                        <a:rPr sz="1000" b="0">
-                          <a:solidFill>
-                            <a:srgbClr val="1D1B43"/>
-                          </a:solidFill>
-                          <a:latin typeface="Calibri"/>
-                        </a:rPr>
-                        <a:t>372</a:t>
+                    <a:bodyPr/>
+                    <a:lstStyle/>
+                    <a:p>
+                      <a:pPr algn="l"/>
+                      <a:r>
+                        <a:rPr sz="1000" b="0">
+                          <a:solidFill>
+                            <a:srgbClr val="1D1B43"/>
+                          </a:solidFill>
+                          <a:latin typeface="Calibri"/>
+                        </a:rPr>
+                        <a:t>0</a:t>
                       </a:r>
                     </a:p>
                   </a:txBody>
@@ -4261,7 +4261,7 @@
                 </a:tc>
                 <a:tc>
                   <a:txBody>
-                    <a:bodyPr wrap="square"/>
+                    <a:bodyPr/>
                     <a:lstStyle/>
                     <a:p>
                       <a:pPr algn="l"/>
@@ -4284,18 +4284,18 @@
                 </a:tc>
                 <a:tc>
                   <a:txBody>
-                    <a:bodyPr wrap="square"/>
-                    <a:lstStyle/>
-                    <a:p>
-                      <a:pPr algn="l"/>
-                      <a:r>
-                        <a:rPr sz="1000" b="0">
-                          <a:solidFill>
-                            <a:srgbClr val="1D1B43"/>
-                          </a:solidFill>
-                          <a:latin typeface="Calibri"/>
-                        </a:rPr>
-                        <a:t>- 11</a:t>
+                    <a:bodyPr/>
+                    <a:lstStyle/>
+                    <a:p>
+                      <a:pPr algn="l"/>
+                      <a:r>
+                        <a:rPr sz="1000" b="0">
+                          <a:solidFill>
+                            <a:srgbClr val="1D1B43"/>
+                          </a:solidFill>
+                          <a:latin typeface="Calibri"/>
+                        </a:rPr>
+                        <a:t>+ 361</a:t>
                       </a:r>
                     </a:p>
                   </a:txBody>
@@ -4309,7 +4309,7 @@
               <a:tr h="475488">
                 <a:tc>
                   <a:txBody>
-                    <a:bodyPr wrap="square"/>
+                    <a:bodyPr/>
                     <a:lstStyle/>
                     <a:p>
                       <a:pPr algn="l"/>
@@ -4332,18 +4332,18 @@
                 </a:tc>
                 <a:tc>
                   <a:txBody>
-                    <a:bodyPr wrap="square"/>
-                    <a:lstStyle/>
-                    <a:p>
-                      <a:pPr algn="l"/>
-                      <a:r>
-                        <a:rPr sz="1000" b="0">
-                          <a:solidFill>
-                            <a:srgbClr val="1D1B43"/>
-                          </a:solidFill>
-                          <a:latin typeface="Calibri"/>
-                        </a:rPr>
-                        <a:t>370</a:t>
+                    <a:bodyPr/>
+                    <a:lstStyle/>
+                    <a:p>
+                      <a:pPr algn="l"/>
+                      <a:r>
+                        <a:rPr sz="1000" b="0">
+                          <a:solidFill>
+                            <a:srgbClr val="1D1B43"/>
+                          </a:solidFill>
+                          <a:latin typeface="Calibri"/>
+                        </a:rPr>
+                        <a:t>0</a:t>
                       </a:r>
                     </a:p>
                   </a:txBody>
@@ -4355,7 +4355,7 @@
                 </a:tc>
                 <a:tc>
                   <a:txBody>
-                    <a:bodyPr wrap="square"/>
+                    <a:bodyPr/>
                     <a:lstStyle/>
                     <a:p>
                       <a:pPr algn="l"/>
@@ -4378,18 +4378,18 @@
                 </a:tc>
                 <a:tc>
                   <a:txBody>
-                    <a:bodyPr wrap="square"/>
-                    <a:lstStyle/>
-                    <a:p>
-                      <a:pPr algn="l"/>
-                      <a:r>
-                        <a:rPr sz="1000" b="0">
-                          <a:solidFill>
-                            <a:srgbClr val="1D1B43"/>
-                          </a:solidFill>
-                          <a:latin typeface="Calibri"/>
-                        </a:rPr>
-                        <a:t>- 13</a:t>
+                    <a:bodyPr/>
+                    <a:lstStyle/>
+                    <a:p>
+                      <a:pPr algn="l"/>
+                      <a:r>
+                        <a:rPr sz="1000" b="0">
+                          <a:solidFill>
+                            <a:srgbClr val="1D1B43"/>
+                          </a:solidFill>
+                          <a:latin typeface="Calibri"/>
+                        </a:rPr>
+                        <a:t>+ 357</a:t>
                       </a:r>
                     </a:p>
                   </a:txBody>
@@ -4403,18 +4403,18 @@
               <a:tr h="475488">
                 <a:tc>
                   <a:txBody>
-                    <a:bodyPr wrap="square"/>
-                    <a:lstStyle/>
-                    <a:p>
-                      <a:pPr algn="l"/>
-                      <a:r>
-                        <a:rPr sz="1000" b="0">
-                          <a:solidFill>
-                            <a:srgbClr val="1D1B43"/>
-                          </a:solidFill>
-                          <a:latin typeface="Calibri"/>
-                        </a:rPr>
-                        <a:t>Fora do Prazo</a:t>
+                    <a:bodyPr/>
+                    <a:lstStyle/>
+                    <a:p>
+                      <a:pPr algn="l"/>
+                      <a:r>
+                        <a:rPr sz="1000" b="0">
+                          <a:solidFill>
+                            <a:srgbClr val="1D1B43"/>
+                          </a:solidFill>
+                          <a:latin typeface="Calibri"/>
+                        </a:rPr>
+                        <a:t>Fora Prazo</a:t>
                       </a:r>
                     </a:p>
                   </a:txBody>
@@ -4426,18 +4426,18 @@
                 </a:tc>
                 <a:tc>
                   <a:txBody>
-                    <a:bodyPr wrap="square"/>
-                    <a:lstStyle/>
-                    <a:p>
-                      <a:pPr algn="l"/>
-                      <a:r>
-                        <a:rPr sz="1000" b="0">
-                          <a:solidFill>
-                            <a:srgbClr val="1D1B43"/>
-                          </a:solidFill>
-                          <a:latin typeface="Calibri"/>
-                        </a:rPr>
-                        <a:t>2</a:t>
+                    <a:bodyPr/>
+                    <a:lstStyle/>
+                    <a:p>
+                      <a:pPr algn="l"/>
+                      <a:r>
+                        <a:rPr sz="1000" b="0">
+                          <a:solidFill>
+                            <a:srgbClr val="1D1B43"/>
+                          </a:solidFill>
+                          <a:latin typeface="Calibri"/>
+                        </a:rPr>
+                        <a:t>0</a:t>
                       </a:r>
                     </a:p>
                   </a:txBody>
@@ -4449,7 +4449,7 @@
                 </a:tc>
                 <a:tc>
                   <a:txBody>
-                    <a:bodyPr wrap="square"/>
+                    <a:bodyPr/>
                     <a:lstStyle/>
                     <a:p>
                       <a:pPr algn="l"/>
@@ -4472,18 +4472,18 @@
                 </a:tc>
                 <a:tc>
                   <a:txBody>
-                    <a:bodyPr wrap="square"/>
-                    <a:lstStyle/>
-                    <a:p>
-                      <a:pPr algn="l"/>
-                      <a:r>
-                        <a:rPr sz="1000" b="0">
-                          <a:solidFill>
-                            <a:srgbClr val="1D1B43"/>
-                          </a:solidFill>
-                          <a:latin typeface="Calibri"/>
-                        </a:rPr>
-                        <a:t>+ 2</a:t>
+                    <a:bodyPr/>
+                    <a:lstStyle/>
+                    <a:p>
+                      <a:pPr algn="l"/>
+                      <a:r>
+                        <a:rPr sz="1000" b="0">
+                          <a:solidFill>
+                            <a:srgbClr val="1D1B43"/>
+                          </a:solidFill>
+                          <a:latin typeface="Calibri"/>
+                        </a:rPr>
+                        <a:t>+ 4</a:t>
                       </a:r>
                     </a:p>
                   </a:txBody>
@@ -4497,7 +4497,7 @@
               <a:tr h="475488">
                 <a:tc>
                   <a:txBody>
-                    <a:bodyPr wrap="square"/>
+                    <a:bodyPr/>
                     <a:lstStyle/>
                     <a:p>
                       <a:pPr algn="l"/>
@@ -4520,18 +4520,18 @@
                 </a:tc>
                 <a:tc>
                   <a:txBody>
-                    <a:bodyPr wrap="square"/>
-                    <a:lstStyle/>
-                    <a:p>
-                      <a:pPr algn="l"/>
-                      <a:r>
-                        <a:rPr sz="1000" b="0">
-                          <a:solidFill>
-                            <a:srgbClr val="1D1B43"/>
-                          </a:solidFill>
-                          <a:latin typeface="Calibri"/>
-                        </a:rPr>
-                        <a:t>99.5%</a:t>
+                    <a:bodyPr/>
+                    <a:lstStyle/>
+                    <a:p>
+                      <a:pPr algn="l"/>
+                      <a:r>
+                        <a:rPr sz="1000" b="0">
+                          <a:solidFill>
+                            <a:srgbClr val="1D1B43"/>
+                          </a:solidFill>
+                          <a:latin typeface="Calibri"/>
+                        </a:rPr>
+                        <a:t>98.9%</a:t>
                       </a:r>
                     </a:p>
                   </a:txBody>
@@ -4543,7 +4543,7 @@
                 </a:tc>
                 <a:tc>
                   <a:txBody>
-                    <a:bodyPr wrap="square"/>
+                    <a:bodyPr/>
                     <a:lstStyle/>
                     <a:p>
                       <a:pPr algn="l"/>
@@ -4566,18 +4566,18 @@
                 </a:tc>
                 <a:tc>
                   <a:txBody>
-                    <a:bodyPr wrap="square"/>
-                    <a:lstStyle/>
-                    <a:p>
-                      <a:pPr algn="l"/>
-                      <a:r>
-                        <a:rPr sz="1000" b="0">
-                          <a:solidFill>
-                            <a:srgbClr val="1D1B43"/>
-                          </a:solidFill>
-                          <a:latin typeface="Calibri"/>
-                        </a:rPr>
-                        <a:t>- 0.6pp</a:t>
+                    <a:bodyPr/>
+                    <a:lstStyle/>
+                    <a:p>
+                      <a:pPr algn="l"/>
+                      <a:r>
+                        <a:rPr sz="1000" b="0">
+                          <a:solidFill>
+                            <a:srgbClr val="1D1B43"/>
+                          </a:solidFill>
+                          <a:latin typeface="Calibri"/>
+                        </a:rPr>
+                        <a:t>+ 0.0pp</a:t>
                       </a:r>
                     </a:p>
                   </a:txBody>
@@ -4766,7 +4766,7 @@
               <a:tr h="438912">
                 <a:tc>
                   <a:txBody>
-                    <a:bodyPr wrap="square"/>
+                    <a:bodyPr/>
                     <a:lstStyle/>
                     <a:p>
                       <a:pPr algn="ctr"/>
@@ -4789,7 +4789,7 @@
                 </a:tc>
                 <a:tc>
                   <a:txBody>
-                    <a:bodyPr wrap="square"/>
+                    <a:bodyPr/>
                     <a:lstStyle/>
                     <a:p>
                       <a:pPr algn="ctr"/>
@@ -4812,7 +4812,7 @@
                 </a:tc>
                 <a:tc>
                   <a:txBody>
-                    <a:bodyPr wrap="square"/>
+                    <a:bodyPr/>
                     <a:lstStyle/>
                     <a:p>
                       <a:pPr algn="ctr"/>
@@ -4835,7 +4835,7 @@
                 </a:tc>
                 <a:tc>
                   <a:txBody>
-                    <a:bodyPr wrap="square"/>
+                    <a:bodyPr/>
                     <a:lstStyle/>
                     <a:p>
                       <a:pPr algn="ctr"/>
@@ -4858,7 +4858,7 @@
                 </a:tc>
                 <a:tc>
                   <a:txBody>
-                    <a:bodyPr wrap="square"/>
+                    <a:bodyPr/>
                     <a:lstStyle/>
                     <a:p>
                       <a:pPr algn="ctr"/>
@@ -4883,7 +4883,7 @@
               <a:tr h="438912">
                 <a:tc>
                   <a:txBody>
-                    <a:bodyPr wrap="square"/>
+                    <a:bodyPr/>
                     <a:lstStyle/>
                     <a:p>
                       <a:pPr algn="l"/>
@@ -4906,18 +4906,18 @@
                 </a:tc>
                 <a:tc>
                   <a:txBody>
-                    <a:bodyPr wrap="square"/>
-                    <a:lstStyle/>
-                    <a:p>
-                      <a:pPr algn="l"/>
-                      <a:r>
-                        <a:rPr sz="1000" b="0">
-                          <a:solidFill>
-                            <a:srgbClr val="1D1B43"/>
-                          </a:solidFill>
-                          <a:latin typeface="Calibri"/>
-                        </a:rPr>
-                        <a:t>372</a:t>
+                    <a:bodyPr/>
+                    <a:lstStyle/>
+                    <a:p>
+                      <a:pPr algn="l"/>
+                      <a:r>
+                        <a:rPr sz="1000" b="0">
+                          <a:solidFill>
+                            <a:srgbClr val="1D1B43"/>
+                          </a:solidFill>
+                          <a:latin typeface="Calibri"/>
+                        </a:rPr>
+                        <a:t>0</a:t>
                       </a:r>
                     </a:p>
                   </a:txBody>
@@ -4929,18 +4929,18 @@
                 </a:tc>
                 <a:tc>
                   <a:txBody>
-                    <a:bodyPr wrap="square"/>
-                    <a:lstStyle/>
-                    <a:p>
-                      <a:pPr algn="l"/>
-                      <a:r>
-                        <a:rPr sz="1000" b="0">
-                          <a:solidFill>
-                            <a:srgbClr val="1D1B43"/>
-                          </a:solidFill>
-                          <a:latin typeface="Calibri"/>
-                        </a:rPr>
-                        <a:t>370</a:t>
+                    <a:bodyPr/>
+                    <a:lstStyle/>
+                    <a:p>
+                      <a:pPr algn="l"/>
+                      <a:r>
+                        <a:rPr sz="1000" b="0">
+                          <a:solidFill>
+                            <a:srgbClr val="1D1B43"/>
+                          </a:solidFill>
+                          <a:latin typeface="Calibri"/>
+                        </a:rPr>
+                        <a:t>0</a:t>
                       </a:r>
                     </a:p>
                   </a:txBody>
@@ -4952,18 +4952,18 @@
                 </a:tc>
                 <a:tc>
                   <a:txBody>
-                    <a:bodyPr wrap="square"/>
-                    <a:lstStyle/>
-                    <a:p>
-                      <a:pPr algn="l"/>
-                      <a:r>
-                        <a:rPr sz="1000" b="0">
-                          <a:solidFill>
-                            <a:srgbClr val="1D1B43"/>
-                          </a:solidFill>
-                          <a:latin typeface="Calibri"/>
-                        </a:rPr>
-                        <a:t>2</a:t>
+                    <a:bodyPr/>
+                    <a:lstStyle/>
+                    <a:p>
+                      <a:pPr algn="l"/>
+                      <a:r>
+                        <a:rPr sz="1000" b="0">
+                          <a:solidFill>
+                            <a:srgbClr val="1D1B43"/>
+                          </a:solidFill>
+                          <a:latin typeface="Calibri"/>
+                        </a:rPr>
+                        <a:t>0</a:t>
                       </a:r>
                     </a:p>
                   </a:txBody>
@@ -4975,18 +4975,18 @@
                 </a:tc>
                 <a:tc>
                   <a:txBody>
-                    <a:bodyPr wrap="square"/>
-                    <a:lstStyle/>
-                    <a:p>
-                      <a:pPr algn="l"/>
-                      <a:r>
-                        <a:rPr sz="1000" b="0">
-                          <a:solidFill>
-                            <a:srgbClr val="1D1B43"/>
-                          </a:solidFill>
-                          <a:latin typeface="Calibri"/>
-                        </a:rPr>
-                        <a:t>99.5%</a:t>
+                    <a:bodyPr/>
+                    <a:lstStyle/>
+                    <a:p>
+                      <a:pPr algn="l"/>
+                      <a:r>
+                        <a:rPr sz="1000" b="0">
+                          <a:solidFill>
+                            <a:srgbClr val="1D1B43"/>
+                          </a:solidFill>
+                          <a:latin typeface="Calibri"/>
+                        </a:rPr>
+                        <a:t>98.9%</a:t>
                       </a:r>
                     </a:p>
                   </a:txBody>
@@ -5000,7 +5000,7 @@
               <a:tr h="438912">
                 <a:tc>
                   <a:txBody>
-                    <a:bodyPr wrap="square"/>
+                    <a:bodyPr/>
                     <a:lstStyle/>
                     <a:p>
                       <a:pPr algn="l"/>
@@ -5023,7 +5023,7 @@
                 </a:tc>
                 <a:tc>
                   <a:txBody>
-                    <a:bodyPr wrap="square"/>
+                    <a:bodyPr/>
                     <a:lstStyle/>
                     <a:p>
                       <a:pPr algn="l"/>
@@ -5046,7 +5046,7 @@
                 </a:tc>
                 <a:tc>
                   <a:txBody>
-                    <a:bodyPr wrap="square"/>
+                    <a:bodyPr/>
                     <a:lstStyle/>
                     <a:p>
                       <a:pPr algn="l"/>
@@ -5069,7 +5069,7 @@
                 </a:tc>
                 <a:tc>
                   <a:txBody>
-                    <a:bodyPr wrap="square"/>
+                    <a:bodyPr/>
                     <a:lstStyle/>
                     <a:p>
                       <a:pPr algn="l"/>
@@ -5092,7 +5092,7 @@
                 </a:tc>
                 <a:tc>
                   <a:txBody>
-                    <a:bodyPr wrap="square"/>
+                    <a:bodyPr/>
                     <a:lstStyle/>
                     <a:p>
                       <a:pPr algn="l"/>
@@ -5352,7 +5352,7 @@
               <a:tr h="384048">
                 <a:tc>
                   <a:txBody>
-                    <a:bodyPr wrap="square"/>
+                    <a:bodyPr/>
                     <a:lstStyle/>
                     <a:p>
                       <a:pPr algn="ctr"/>
@@ -5375,7 +5375,7 @@
                 </a:tc>
                 <a:tc>
                   <a:txBody>
-                    <a:bodyPr wrap="square"/>
+                    <a:bodyPr/>
                     <a:lstStyle/>
                     <a:p>
                       <a:pPr algn="ctr"/>
@@ -5398,7 +5398,7 @@
                 </a:tc>
                 <a:tc>
                   <a:txBody>
-                    <a:bodyPr wrap="square"/>
+                    <a:bodyPr/>
                     <a:lstStyle/>
                     <a:p>
                       <a:pPr algn="ctr"/>
@@ -5421,7 +5421,7 @@
                 </a:tc>
                 <a:tc>
                   <a:txBody>
-                    <a:bodyPr wrap="square"/>
+                    <a:bodyPr/>
                     <a:lstStyle/>
                     <a:p>
                       <a:pPr algn="ctr"/>
@@ -5444,7 +5444,7 @@
                 </a:tc>
                 <a:tc>
                   <a:txBody>
-                    <a:bodyPr wrap="square"/>
+                    <a:bodyPr/>
                     <a:lstStyle/>
                     <a:p>
                       <a:pPr algn="ctr"/>
@@ -5469,7 +5469,7 @@
               <a:tr h="384048">
                 <a:tc>
                   <a:txBody>
-                    <a:bodyPr wrap="square"/>
+                    <a:bodyPr/>
                     <a:lstStyle/>
                     <a:p>
                       <a:pPr algn="l"/>
@@ -5492,7 +5492,7 @@
                 </a:tc>
                 <a:tc>
                   <a:txBody>
-                    <a:bodyPr wrap="square"/>
+                    <a:bodyPr/>
                     <a:lstStyle/>
                     <a:p>
                       <a:pPr algn="l"/>
@@ -5515,7 +5515,7 @@
                 </a:tc>
                 <a:tc>
                   <a:txBody>
-                    <a:bodyPr wrap="square"/>
+                    <a:bodyPr/>
                     <a:lstStyle/>
                     <a:p>
                       <a:pPr algn="l"/>
@@ -5538,7 +5538,7 @@
                 </a:tc>
                 <a:tc>
                   <a:txBody>
-                    <a:bodyPr wrap="square"/>
+                    <a:bodyPr/>
                     <a:lstStyle/>
                     <a:p>
                       <a:pPr algn="l"/>
@@ -5561,7 +5561,7 @@
                 </a:tc>
                 <a:tc>
                   <a:txBody>
-                    <a:bodyPr wrap="square"/>
+                    <a:bodyPr/>
                     <a:lstStyle/>
                     <a:p>
                       <a:pPr algn="l"/>
@@ -5586,7 +5586,7 @@
               <a:tr h="384048">
                 <a:tc>
                   <a:txBody>
-                    <a:bodyPr wrap="square"/>
+                    <a:bodyPr/>
                     <a:lstStyle/>
                     <a:p>
                       <a:pPr algn="l"/>
@@ -5609,7 +5609,7 @@
                 </a:tc>
                 <a:tc>
                   <a:txBody>
-                    <a:bodyPr wrap="square"/>
+                    <a:bodyPr/>
                     <a:lstStyle/>
                     <a:p>
                       <a:pPr algn="l"/>
@@ -5632,7 +5632,7 @@
                 </a:tc>
                 <a:tc>
                   <a:txBody>
-                    <a:bodyPr wrap="square"/>
+                    <a:bodyPr/>
                     <a:lstStyle/>
                     <a:p>
                       <a:pPr algn="l"/>
@@ -5655,7 +5655,7 @@
                 </a:tc>
                 <a:tc>
                   <a:txBody>
-                    <a:bodyPr wrap="square"/>
+                    <a:bodyPr/>
                     <a:lstStyle/>
                     <a:p>
                       <a:pPr algn="l"/>
@@ -5678,7 +5678,7 @@
                 </a:tc>
                 <a:tc>
                   <a:txBody>
-                    <a:bodyPr wrap="square"/>
+                    <a:bodyPr/>
                     <a:lstStyle/>
                     <a:p>
                       <a:pPr algn="l"/>
@@ -5703,7 +5703,7 @@
               <a:tr h="384048">
                 <a:tc>
                   <a:txBody>
-                    <a:bodyPr wrap="square"/>
+                    <a:bodyPr/>
                     <a:lstStyle/>
                     <a:p>
                       <a:pPr algn="l"/>
@@ -5726,7 +5726,7 @@
                 </a:tc>
                 <a:tc>
                   <a:txBody>
-                    <a:bodyPr wrap="square"/>
+                    <a:bodyPr/>
                     <a:lstStyle/>
                     <a:p>
                       <a:pPr algn="l"/>
@@ -5749,7 +5749,7 @@
                 </a:tc>
                 <a:tc>
                   <a:txBody>
-                    <a:bodyPr wrap="square"/>
+                    <a:bodyPr/>
                     <a:lstStyle/>
                     <a:p>
                       <a:pPr algn="l"/>
@@ -5772,7 +5772,7 @@
                 </a:tc>
                 <a:tc>
                   <a:txBody>
-                    <a:bodyPr wrap="square"/>
+                    <a:bodyPr/>
                     <a:lstStyle/>
                     <a:p>
                       <a:pPr algn="l"/>
@@ -5795,7 +5795,7 @@
                 </a:tc>
                 <a:tc>
                   <a:txBody>
-                    <a:bodyPr wrap="square"/>
+                    <a:bodyPr/>
                     <a:lstStyle/>
                     <a:p>
                       <a:pPr algn="l"/>
@@ -5820,7 +5820,7 @@
               <a:tr h="384048">
                 <a:tc>
                   <a:txBody>
-                    <a:bodyPr wrap="square"/>
+                    <a:bodyPr/>
                     <a:lstStyle/>
                     <a:p>
                       <a:pPr algn="l"/>
@@ -5843,7 +5843,7 @@
                 </a:tc>
                 <a:tc>
                   <a:txBody>
-                    <a:bodyPr wrap="square"/>
+                    <a:bodyPr/>
                     <a:lstStyle/>
                     <a:p>
                       <a:pPr algn="l"/>
@@ -5866,7 +5866,7 @@
                 </a:tc>
                 <a:tc>
                   <a:txBody>
-                    <a:bodyPr wrap="square"/>
+                    <a:bodyPr/>
                     <a:lstStyle/>
                     <a:p>
                       <a:pPr algn="l"/>
@@ -5889,7 +5889,7 @@
                 </a:tc>
                 <a:tc>
                   <a:txBody>
-                    <a:bodyPr wrap="square"/>
+                    <a:bodyPr/>
                     <a:lstStyle/>
                     <a:p>
                       <a:pPr algn="l"/>
@@ -5912,7 +5912,7 @@
                 </a:tc>
                 <a:tc>
                   <a:txBody>
-                    <a:bodyPr wrap="square"/>
+                    <a:bodyPr/>
                     <a:lstStyle/>
                     <a:p>
                       <a:pPr algn="l"/>
@@ -6095,7 +6095,7 @@
               <a:tr h="438912">
                 <a:tc>
                   <a:txBody>
-                    <a:bodyPr wrap="square"/>
+                    <a:bodyPr/>
                     <a:lstStyle/>
                     <a:p>
                       <a:pPr algn="ctr"/>
@@ -6118,7 +6118,7 @@
                 </a:tc>
                 <a:tc>
                   <a:txBody>
-                    <a:bodyPr wrap="square"/>
+                    <a:bodyPr/>
                     <a:lstStyle/>
                     <a:p>
                       <a:pPr algn="ctr"/>
@@ -6141,7 +6141,7 @@
                 </a:tc>
                 <a:tc>
                   <a:txBody>
-                    <a:bodyPr wrap="square"/>
+                    <a:bodyPr/>
                     <a:lstStyle/>
                     <a:p>
                       <a:pPr algn="ctr"/>
@@ -6164,7 +6164,7 @@
                 </a:tc>
                 <a:tc>
                   <a:txBody>
-                    <a:bodyPr wrap="square"/>
+                    <a:bodyPr/>
                     <a:lstStyle/>
                     <a:p>
                       <a:pPr algn="ctr"/>
@@ -6187,7 +6187,7 @@
                 </a:tc>
                 <a:tc>
                   <a:txBody>
-                    <a:bodyPr wrap="square"/>
+                    <a:bodyPr/>
                     <a:lstStyle/>
                     <a:p>
                       <a:pPr algn="ctr"/>
@@ -6210,7 +6210,7 @@
                 </a:tc>
                 <a:tc>
                   <a:txBody>
-                    <a:bodyPr wrap="square"/>
+                    <a:bodyPr/>
                     <a:lstStyle/>
                     <a:p>
                       <a:pPr algn="ctr"/>
@@ -6235,7 +6235,7 @@
               <a:tr h="438912">
                 <a:tc>
                   <a:txBody>
-                    <a:bodyPr wrap="square"/>
+                    <a:bodyPr/>
                     <a:lstStyle/>
                     <a:p>
                       <a:pPr algn="l"/>
@@ -6258,7 +6258,7 @@
                 </a:tc>
                 <a:tc>
                   <a:txBody>
-                    <a:bodyPr wrap="square"/>
+                    <a:bodyPr/>
                     <a:lstStyle/>
                     <a:p>
                       <a:pPr algn="l"/>
@@ -6281,7 +6281,7 @@
                 </a:tc>
                 <a:tc>
                   <a:txBody>
-                    <a:bodyPr wrap="square"/>
+                    <a:bodyPr/>
                     <a:lstStyle/>
                     <a:p>
                       <a:pPr algn="l"/>
@@ -6304,7 +6304,7 @@
                 </a:tc>
                 <a:tc>
                   <a:txBody>
-                    <a:bodyPr wrap="square"/>
+                    <a:bodyPr/>
                     <a:lstStyle/>
                     <a:p>
                       <a:pPr algn="l"/>
@@ -6327,7 +6327,7 @@
                 </a:tc>
                 <a:tc>
                   <a:txBody>
-                    <a:bodyPr wrap="square"/>
+                    <a:bodyPr/>
                     <a:lstStyle/>
                     <a:p>
                       <a:pPr algn="l"/>
@@ -6350,7 +6350,7 @@
                 </a:tc>
                 <a:tc>
                   <a:txBody>
-                    <a:bodyPr wrap="square"/>
+                    <a:bodyPr/>
                     <a:lstStyle/>
                     <a:p>
                       <a:pPr algn="l"/>
@@ -6375,7 +6375,7 @@
               <a:tr h="438912">
                 <a:tc>
                   <a:txBody>
-                    <a:bodyPr wrap="square"/>
+                    <a:bodyPr/>
                     <a:lstStyle/>
                     <a:p>
                       <a:pPr algn="l"/>
@@ -6398,7 +6398,7 @@
                 </a:tc>
                 <a:tc>
                   <a:txBody>
-                    <a:bodyPr wrap="square"/>
+                    <a:bodyPr/>
                     <a:lstStyle/>
                     <a:p>
                       <a:pPr algn="l"/>
@@ -6421,7 +6421,7 @@
                 </a:tc>
                 <a:tc>
                   <a:txBody>
-                    <a:bodyPr wrap="square"/>
+                    <a:bodyPr/>
                     <a:lstStyle/>
                     <a:p>
                       <a:pPr algn="l"/>
@@ -6444,7 +6444,7 @@
                 </a:tc>
                 <a:tc>
                   <a:txBody>
-                    <a:bodyPr wrap="square"/>
+                    <a:bodyPr/>
                     <a:lstStyle/>
                     <a:p>
                       <a:pPr algn="l"/>
@@ -6467,7 +6467,7 @@
                 </a:tc>
                 <a:tc>
                   <a:txBody>
-                    <a:bodyPr wrap="square"/>
+                    <a:bodyPr/>
                     <a:lstStyle/>
                     <a:p>
                       <a:pPr algn="l"/>
@@ -6490,7 +6490,7 @@
                 </a:tc>
                 <a:tc>
                   <a:txBody>
-                    <a:bodyPr wrap="square"/>
+                    <a:bodyPr/>
                     <a:lstStyle/>
                     <a:p>
                       <a:pPr algn="l"/>
@@ -6515,7 +6515,7 @@
               <a:tr h="438912">
                 <a:tc>
                   <a:txBody>
-                    <a:bodyPr wrap="square"/>
+                    <a:bodyPr/>
                     <a:lstStyle/>
                     <a:p>
                       <a:pPr algn="l"/>
@@ -6538,7 +6538,7 @@
                 </a:tc>
                 <a:tc>
                   <a:txBody>
-                    <a:bodyPr wrap="square"/>
+                    <a:bodyPr/>
                     <a:lstStyle/>
                     <a:p>
                       <a:pPr algn="l"/>
@@ -6561,7 +6561,7 @@
                 </a:tc>
                 <a:tc>
                   <a:txBody>
-                    <a:bodyPr wrap="square"/>
+                    <a:bodyPr/>
                     <a:lstStyle/>
                     <a:p>
                       <a:pPr algn="l"/>
@@ -6584,7 +6584,7 @@
                 </a:tc>
                 <a:tc>
                   <a:txBody>
-                    <a:bodyPr wrap="square"/>
+                    <a:bodyPr/>
                     <a:lstStyle/>
                     <a:p>
                       <a:pPr algn="l"/>
@@ -6607,7 +6607,7 @@
                 </a:tc>
                 <a:tc>
                   <a:txBody>
-                    <a:bodyPr wrap="square"/>
+                    <a:bodyPr/>
                     <a:lstStyle/>
                     <a:p>
                       <a:pPr algn="l"/>
@@ -6630,7 +6630,7 @@
                 </a:tc>
                 <a:tc>
                   <a:txBody>
-                    <a:bodyPr wrap="square"/>
+                    <a:bodyPr/>
                     <a:lstStyle/>
                     <a:p>
                       <a:pPr algn="l"/>
@@ -6655,7 +6655,7 @@
               <a:tr h="438912">
                 <a:tc>
                   <a:txBody>
-                    <a:bodyPr wrap="square"/>
+                    <a:bodyPr/>
                     <a:lstStyle/>
                     <a:p>
                       <a:pPr algn="l"/>
@@ -6678,7 +6678,7 @@
                 </a:tc>
                 <a:tc>
                   <a:txBody>
-                    <a:bodyPr wrap="square"/>
+                    <a:bodyPr/>
                     <a:lstStyle/>
                     <a:p>
                       <a:pPr algn="l"/>
@@ -6701,7 +6701,7 @@
                 </a:tc>
                 <a:tc>
                   <a:txBody>
-                    <a:bodyPr wrap="square"/>
+                    <a:bodyPr/>
                     <a:lstStyle/>
                     <a:p>
                       <a:pPr algn="l"/>
@@ -6724,7 +6724,7 @@
                 </a:tc>
                 <a:tc>
                   <a:txBody>
-                    <a:bodyPr wrap="square"/>
+                    <a:bodyPr/>
                     <a:lstStyle/>
                     <a:p>
                       <a:pPr algn="l"/>
@@ -6747,7 +6747,7 @@
                 </a:tc>
                 <a:tc>
                   <a:txBody>
-                    <a:bodyPr wrap="square"/>
+                    <a:bodyPr/>
                     <a:lstStyle/>
                     <a:p>
                       <a:pPr algn="l"/>
@@ -6770,7 +6770,7 @@
                 </a:tc>
                 <a:tc>
                   <a:txBody>
-                    <a:bodyPr wrap="square"/>
+                    <a:bodyPr/>
                     <a:lstStyle/>
                     <a:p>
                       <a:pPr algn="l"/>
@@ -6795,7 +6795,7 @@
               <a:tr h="438912">
                 <a:tc>
                   <a:txBody>
-                    <a:bodyPr wrap="square"/>
+                    <a:bodyPr/>
                     <a:lstStyle/>
                     <a:p>
                       <a:pPr algn="l"/>
@@ -6818,7 +6818,7 @@
                 </a:tc>
                 <a:tc>
                   <a:txBody>
-                    <a:bodyPr wrap="square"/>
+                    <a:bodyPr/>
                     <a:lstStyle/>
                     <a:p>
                       <a:pPr algn="l"/>
@@ -6841,7 +6841,7 @@
                 </a:tc>
                 <a:tc>
                   <a:txBody>
-                    <a:bodyPr wrap="square"/>
+                    <a:bodyPr/>
                     <a:lstStyle/>
                     <a:p>
                       <a:pPr algn="l"/>
@@ -6864,7 +6864,7 @@
                 </a:tc>
                 <a:tc>
                   <a:txBody>
-                    <a:bodyPr wrap="square"/>
+                    <a:bodyPr/>
                     <a:lstStyle/>
                     <a:p>
                       <a:pPr algn="l"/>
@@ -6887,7 +6887,7 @@
                 </a:tc>
                 <a:tc>
                   <a:txBody>
-                    <a:bodyPr wrap="square"/>
+                    <a:bodyPr/>
                     <a:lstStyle/>
                     <a:p>
                       <a:pPr algn="l"/>
@@ -6910,7 +6910,7 @@
                 </a:tc>
                 <a:tc>
                   <a:txBody>
-                    <a:bodyPr wrap="square"/>
+                    <a:bodyPr/>
                     <a:lstStyle/>
                     <a:p>
                       <a:pPr algn="l"/>
@@ -6935,7 +6935,7 @@
               <a:tr h="438912">
                 <a:tc>
                   <a:txBody>
-                    <a:bodyPr wrap="square"/>
+                    <a:bodyPr/>
                     <a:lstStyle/>
                     <a:p>
                       <a:pPr algn="l"/>
@@ -6958,7 +6958,7 @@
                 </a:tc>
                 <a:tc>
                   <a:txBody>
-                    <a:bodyPr wrap="square"/>
+                    <a:bodyPr/>
                     <a:lstStyle/>
                     <a:p>
                       <a:pPr algn="l"/>
@@ -6981,7 +6981,7 @@
                 </a:tc>
                 <a:tc>
                   <a:txBody>
-                    <a:bodyPr wrap="square"/>
+                    <a:bodyPr/>
                     <a:lstStyle/>
                     <a:p>
                       <a:pPr algn="l"/>
@@ -7004,7 +7004,7 @@
                 </a:tc>
                 <a:tc>
                   <a:txBody>
-                    <a:bodyPr wrap="square"/>
+                    <a:bodyPr/>
                     <a:lstStyle/>
                     <a:p>
                       <a:pPr algn="l"/>
@@ -7027,7 +7027,7 @@
                 </a:tc>
                 <a:tc>
                   <a:txBody>
-                    <a:bodyPr wrap="square"/>
+                    <a:bodyPr/>
                     <a:lstStyle/>
                     <a:p>
                       <a:pPr algn="l"/>
@@ -7050,7 +7050,7 @@
                 </a:tc>
                 <a:tc>
                   <a:txBody>
-                    <a:bodyPr wrap="square"/>
+                    <a:bodyPr/>
                     <a:lstStyle/>
                     <a:p>
                       <a:pPr algn="l"/>
@@ -7075,7 +7075,7 @@
               <a:tr h="438912">
                 <a:tc>
                   <a:txBody>
-                    <a:bodyPr wrap="square"/>
+                    <a:bodyPr/>
                     <a:lstStyle/>
                     <a:p>
                       <a:pPr algn="l"/>
@@ -7098,7 +7098,7 @@
                 </a:tc>
                 <a:tc>
                   <a:txBody>
-                    <a:bodyPr wrap="square"/>
+                    <a:bodyPr/>
                     <a:lstStyle/>
                     <a:p>
                       <a:pPr algn="l"/>
@@ -7121,7 +7121,7 @@
                 </a:tc>
                 <a:tc>
                   <a:txBody>
-                    <a:bodyPr wrap="square"/>
+                    <a:bodyPr/>
                     <a:lstStyle/>
                     <a:p>
                       <a:pPr algn="l"/>
@@ -7144,7 +7144,7 @@
                 </a:tc>
                 <a:tc>
                   <a:txBody>
-                    <a:bodyPr wrap="square"/>
+                    <a:bodyPr/>
                     <a:lstStyle/>
                     <a:p>
                       <a:pPr algn="l"/>
@@ -7167,7 +7167,7 @@
                 </a:tc>
                 <a:tc>
                   <a:txBody>
-                    <a:bodyPr wrap="square"/>
+                    <a:bodyPr/>
                     <a:lstStyle/>
                     <a:p>
                       <a:pPr algn="l"/>
@@ -7190,7 +7190,7 @@
                 </a:tc>
                 <a:tc>
                   <a:txBody>
-                    <a:bodyPr wrap="square"/>
+                    <a:bodyPr/>
                     <a:lstStyle/>
                     <a:p>
                       <a:pPr algn="l"/>
@@ -7215,7 +7215,7 @@
               <a:tr h="438912">
                 <a:tc>
                   <a:txBody>
-                    <a:bodyPr wrap="square"/>
+                    <a:bodyPr/>
                     <a:lstStyle/>
                     <a:p>
                       <a:pPr algn="l"/>
@@ -7238,7 +7238,7 @@
                 </a:tc>
                 <a:tc>
                   <a:txBody>
-                    <a:bodyPr wrap="square"/>
+                    <a:bodyPr/>
                     <a:lstStyle/>
                     <a:p>
                       <a:pPr algn="l"/>
@@ -7261,7 +7261,7 @@
                 </a:tc>
                 <a:tc>
                   <a:txBody>
-                    <a:bodyPr wrap="square"/>
+                    <a:bodyPr/>
                     <a:lstStyle/>
                     <a:p>
                       <a:pPr algn="l"/>
@@ -7284,7 +7284,7 @@
                 </a:tc>
                 <a:tc>
                   <a:txBody>
-                    <a:bodyPr wrap="square"/>
+                    <a:bodyPr/>
                     <a:lstStyle/>
                     <a:p>
                       <a:pPr algn="l"/>
@@ -7307,7 +7307,7 @@
                 </a:tc>
                 <a:tc>
                   <a:txBody>
-                    <a:bodyPr wrap="square"/>
+                    <a:bodyPr/>
                     <a:lstStyle/>
                     <a:p>
                       <a:pPr algn="l"/>
@@ -7330,7 +7330,7 @@
                 </a:tc>
                 <a:tc>
                   <a:txBody>
-                    <a:bodyPr wrap="square"/>
+                    <a:bodyPr/>
                     <a:lstStyle/>
                     <a:p>
                       <a:pPr algn="l"/>
@@ -7355,7 +7355,7 @@
               <a:tr h="438912">
                 <a:tc>
                   <a:txBody>
-                    <a:bodyPr wrap="square"/>
+                    <a:bodyPr/>
                     <a:lstStyle/>
                     <a:p>
                       <a:pPr algn="l"/>
@@ -7378,7 +7378,7 @@
                 </a:tc>
                 <a:tc>
                   <a:txBody>
-                    <a:bodyPr wrap="square"/>
+                    <a:bodyPr/>
                     <a:lstStyle/>
                     <a:p>
                       <a:pPr algn="l"/>
@@ -7401,7 +7401,7 @@
                 </a:tc>
                 <a:tc>
                   <a:txBody>
-                    <a:bodyPr wrap="square"/>
+                    <a:bodyPr/>
                     <a:lstStyle/>
                     <a:p>
                       <a:pPr algn="l"/>
@@ -7424,7 +7424,7 @@
                 </a:tc>
                 <a:tc>
                   <a:txBody>
-                    <a:bodyPr wrap="square"/>
+                    <a:bodyPr/>
                     <a:lstStyle/>
                     <a:p>
                       <a:pPr algn="l"/>
@@ -7447,7 +7447,7 @@
                 </a:tc>
                 <a:tc>
                   <a:txBody>
-                    <a:bodyPr wrap="square"/>
+                    <a:bodyPr/>
                     <a:lstStyle/>
                     <a:p>
                       <a:pPr algn="l"/>
@@ -7470,7 +7470,7 @@
                 </a:tc>
                 <a:tc>
                   <a:txBody>
-                    <a:bodyPr wrap="square"/>
+                    <a:bodyPr/>
                     <a:lstStyle/>
                     <a:p>
                       <a:pPr algn="l"/>
@@ -7654,7 +7654,7 @@
               <a:tr h="292608">
                 <a:tc>
                   <a:txBody>
-                    <a:bodyPr wrap="square"/>
+                    <a:bodyPr/>
                     <a:lstStyle/>
                     <a:p>
                       <a:pPr algn="ctr"/>
@@ -7677,7 +7677,7 @@
                 </a:tc>
                 <a:tc>
                   <a:txBody>
-                    <a:bodyPr wrap="square"/>
+                    <a:bodyPr/>
                     <a:lstStyle/>
                     <a:p>
                       <a:pPr algn="ctr"/>
@@ -7700,7 +7700,7 @@
                 </a:tc>
                 <a:tc>
                   <a:txBody>
-                    <a:bodyPr wrap="square"/>
+                    <a:bodyPr/>
                     <a:lstStyle/>
                     <a:p>
                       <a:pPr algn="ctr"/>
@@ -7723,7 +7723,7 @@
                 </a:tc>
                 <a:tc>
                   <a:txBody>
-                    <a:bodyPr wrap="square"/>
+                    <a:bodyPr/>
                     <a:lstStyle/>
                     <a:p>
                       <a:pPr algn="ctr"/>
@@ -7746,7 +7746,7 @@
                 </a:tc>
                 <a:tc>
                   <a:txBody>
-                    <a:bodyPr wrap="square"/>
+                    <a:bodyPr/>
                     <a:lstStyle/>
                     <a:p>
                       <a:pPr algn="ctr"/>
@@ -7769,7 +7769,7 @@
                 </a:tc>
                 <a:tc>
                   <a:txBody>
-                    <a:bodyPr wrap="square"/>
+                    <a:bodyPr/>
                     <a:lstStyle/>
                     <a:p>
                       <a:pPr algn="ctr"/>
@@ -7792,7 +7792,7 @@
                 </a:tc>
                 <a:tc>
                   <a:txBody>
-                    <a:bodyPr wrap="square"/>
+                    <a:bodyPr/>
                     <a:lstStyle/>
                     <a:p>
                       <a:pPr algn="ctr"/>
@@ -7817,7 +7817,7 @@
               <a:tr h="292608">
                 <a:tc>
                   <a:txBody>
-                    <a:bodyPr wrap="square"/>
+                    <a:bodyPr/>
                     <a:lstStyle/>
                     <a:p>
                       <a:pPr algn="l"/>
@@ -7840,7 +7840,7 @@
                 </a:tc>
                 <a:tc>
                   <a:txBody>
-                    <a:bodyPr wrap="square"/>
+                    <a:bodyPr/>
                     <a:lstStyle/>
                     <a:p>
                       <a:pPr algn="l"/>
@@ -7863,7 +7863,7 @@
                 </a:tc>
                 <a:tc>
                   <a:txBody>
-                    <a:bodyPr wrap="square"/>
+                    <a:bodyPr/>
                     <a:lstStyle/>
                     <a:p>
                       <a:pPr algn="l"/>
@@ -7886,7 +7886,7 @@
                 </a:tc>
                 <a:tc>
                   <a:txBody>
-                    <a:bodyPr wrap="square"/>
+                    <a:bodyPr/>
                     <a:lstStyle/>
                     <a:p>
                       <a:pPr algn="l"/>
@@ -7909,7 +7909,7 @@
                 </a:tc>
                 <a:tc>
                   <a:txBody>
-                    <a:bodyPr wrap="square"/>
+                    <a:bodyPr/>
                     <a:lstStyle/>
                     <a:p>
                       <a:pPr algn="l"/>
@@ -7932,7 +7932,7 @@
                 </a:tc>
                 <a:tc>
                   <a:txBody>
-                    <a:bodyPr wrap="square"/>
+                    <a:bodyPr/>
                     <a:lstStyle/>
                     <a:p>
                       <a:pPr algn="l"/>
@@ -7955,7 +7955,7 @@
                 </a:tc>
                 <a:tc>
                   <a:txBody>
-                    <a:bodyPr wrap="square"/>
+                    <a:bodyPr/>
                     <a:lstStyle/>
                     <a:p>
                       <a:pPr algn="l"/>
@@ -7980,7 +7980,7 @@
               <a:tr h="292608">
                 <a:tc>
                   <a:txBody>
-                    <a:bodyPr wrap="square"/>
+                    <a:bodyPr/>
                     <a:lstStyle/>
                     <a:p>
                       <a:pPr algn="l"/>
@@ -8003,7 +8003,7 @@
                 </a:tc>
                 <a:tc>
                   <a:txBody>
-                    <a:bodyPr wrap="square"/>
+                    <a:bodyPr/>
                     <a:lstStyle/>
                     <a:p>
                       <a:pPr algn="l"/>
@@ -8026,7 +8026,7 @@
                 </a:tc>
                 <a:tc>
                   <a:txBody>
-                    <a:bodyPr wrap="square"/>
+                    <a:bodyPr/>
                     <a:lstStyle/>
                     <a:p>
                       <a:pPr algn="l"/>
@@ -8049,7 +8049,7 @@
                 </a:tc>
                 <a:tc>
                   <a:txBody>
-                    <a:bodyPr wrap="square"/>
+                    <a:bodyPr/>
                     <a:lstStyle/>
                     <a:p>
                       <a:pPr algn="l"/>
@@ -8072,7 +8072,7 @@
                 </a:tc>
                 <a:tc>
                   <a:txBody>
-                    <a:bodyPr wrap="square"/>
+                    <a:bodyPr/>
                     <a:lstStyle/>
                     <a:p>
                       <a:pPr algn="l"/>
@@ -8095,7 +8095,7 @@
                 </a:tc>
                 <a:tc>
                   <a:txBody>
-                    <a:bodyPr wrap="square"/>
+                    <a:bodyPr/>
                     <a:lstStyle/>
                     <a:p>
                       <a:pPr algn="l"/>
@@ -8118,7 +8118,7 @@
                 </a:tc>
                 <a:tc>
                   <a:txBody>
-                    <a:bodyPr wrap="square"/>
+                    <a:bodyPr/>
                     <a:lstStyle/>
                     <a:p>
                       <a:pPr algn="l"/>
@@ -8143,7 +8143,7 @@
               <a:tr h="292608">
                 <a:tc>
                   <a:txBody>
-                    <a:bodyPr wrap="square"/>
+                    <a:bodyPr/>
                     <a:lstStyle/>
                     <a:p>
                       <a:pPr algn="l"/>
@@ -8166,7 +8166,7 @@
                 </a:tc>
                 <a:tc>
                   <a:txBody>
-                    <a:bodyPr wrap="square"/>
+                    <a:bodyPr/>
                     <a:lstStyle/>
                     <a:p>
                       <a:pPr algn="l"/>
@@ -8189,7 +8189,7 @@
                 </a:tc>
                 <a:tc>
                   <a:txBody>
-                    <a:bodyPr wrap="square"/>
+                    <a:bodyPr/>
                     <a:lstStyle/>
                     <a:p>
                       <a:pPr algn="l"/>
@@ -8212,7 +8212,7 @@
                 </a:tc>
                 <a:tc>
                   <a:txBody>
-                    <a:bodyPr wrap="square"/>
+                    <a:bodyPr/>
                     <a:lstStyle/>
                     <a:p>
                       <a:pPr algn="l"/>
@@ -8235,7 +8235,7 @@
                 </a:tc>
                 <a:tc>
                   <a:txBody>
-                    <a:bodyPr wrap="square"/>
+                    <a:bodyPr/>
                     <a:lstStyle/>
                     <a:p>
                       <a:pPr algn="l"/>
@@ -8258,7 +8258,7 @@
                 </a:tc>
                 <a:tc>
                   <a:txBody>
-                    <a:bodyPr wrap="square"/>
+                    <a:bodyPr/>
                     <a:lstStyle/>
                     <a:p>
                       <a:pPr algn="l"/>
@@ -8281,7 +8281,7 @@
                 </a:tc>
                 <a:tc>
                   <a:txBody>
-                    <a:bodyPr wrap="square"/>
+                    <a:bodyPr/>
                     <a:lstStyle/>
                     <a:p>
                       <a:pPr algn="l"/>
@@ -8306,7 +8306,7 @@
               <a:tr h="292608">
                 <a:tc>
                   <a:txBody>
-                    <a:bodyPr wrap="square"/>
+                    <a:bodyPr/>
                     <a:lstStyle/>
                     <a:p>
                       <a:pPr algn="l"/>
@@ -8329,7 +8329,7 @@
                 </a:tc>
                 <a:tc>
                   <a:txBody>
-                    <a:bodyPr wrap="square"/>
+                    <a:bodyPr/>
                     <a:lstStyle/>
                     <a:p>
                       <a:pPr algn="l"/>
@@ -8352,7 +8352,7 @@
                 </a:tc>
                 <a:tc>
                   <a:txBody>
-                    <a:bodyPr wrap="square"/>
+                    <a:bodyPr/>
                     <a:lstStyle/>
                     <a:p>
                       <a:pPr algn="l"/>
@@ -8375,7 +8375,7 @@
                 </a:tc>
                 <a:tc>
                   <a:txBody>
-                    <a:bodyPr wrap="square"/>
+                    <a:bodyPr/>
                     <a:lstStyle/>
                     <a:p>
                       <a:pPr algn="l"/>
@@ -8398,7 +8398,7 @@
                 </a:tc>
                 <a:tc>
                   <a:txBody>
-                    <a:bodyPr wrap="square"/>
+                    <a:bodyPr/>
                     <a:lstStyle/>
                     <a:p>
                       <a:pPr algn="l"/>
@@ -8421,7 +8421,7 @@
                 </a:tc>
                 <a:tc>
                   <a:txBody>
-                    <a:bodyPr wrap="square"/>
+                    <a:bodyPr/>
                     <a:lstStyle/>
                     <a:p>
                       <a:pPr algn="l"/>
@@ -8444,7 +8444,7 @@
                 </a:tc>
                 <a:tc>
                   <a:txBody>
-                    <a:bodyPr wrap="square"/>
+                    <a:bodyPr/>
                     <a:lstStyle/>
                     <a:p>
                       <a:pPr algn="l"/>
@@ -8469,7 +8469,7 @@
               <a:tr h="292608">
                 <a:tc>
                   <a:txBody>
-                    <a:bodyPr wrap="square"/>
+                    <a:bodyPr/>
                     <a:lstStyle/>
                     <a:p>
                       <a:pPr algn="l"/>
@@ -8492,7 +8492,7 @@
                 </a:tc>
                 <a:tc>
                   <a:txBody>
-                    <a:bodyPr wrap="square"/>
+                    <a:bodyPr/>
                     <a:lstStyle/>
                     <a:p>
                       <a:pPr algn="l"/>
@@ -8515,7 +8515,7 @@
                 </a:tc>
                 <a:tc>
                   <a:txBody>
-                    <a:bodyPr wrap="square"/>
+                    <a:bodyPr/>
                     <a:lstStyle/>
                     <a:p>
                       <a:pPr algn="l"/>
@@ -8538,7 +8538,7 @@
                 </a:tc>
                 <a:tc>
                   <a:txBody>
-                    <a:bodyPr wrap="square"/>
+                    <a:bodyPr/>
                     <a:lstStyle/>
                     <a:p>
                       <a:pPr algn="l"/>
@@ -8561,7 +8561,7 @@
                 </a:tc>
                 <a:tc>
                   <a:txBody>
-                    <a:bodyPr wrap="square"/>
+                    <a:bodyPr/>
                     <a:lstStyle/>
                     <a:p>
                       <a:pPr algn="l"/>
@@ -8584,7 +8584,7 @@
                 </a:tc>
                 <a:tc>
                   <a:txBody>
-                    <a:bodyPr wrap="square"/>
+                    <a:bodyPr/>
                     <a:lstStyle/>
                     <a:p>
                       <a:pPr algn="l"/>
@@ -8607,7 +8607,7 @@
                 </a:tc>
                 <a:tc>
                   <a:txBody>
-                    <a:bodyPr wrap="square"/>
+                    <a:bodyPr/>
                     <a:lstStyle/>
                     <a:p>
                       <a:pPr algn="l"/>
@@ -8632,7 +8632,7 @@
               <a:tr h="292608">
                 <a:tc>
                   <a:txBody>
-                    <a:bodyPr wrap="square"/>
+                    <a:bodyPr/>
                     <a:lstStyle/>
                     <a:p>
                       <a:pPr algn="l"/>
@@ -8655,7 +8655,7 @@
                 </a:tc>
                 <a:tc>
                   <a:txBody>
-                    <a:bodyPr wrap="square"/>
+                    <a:bodyPr/>
                     <a:lstStyle/>
                     <a:p>
                       <a:pPr algn="l"/>
@@ -8678,7 +8678,7 @@
                 </a:tc>
                 <a:tc>
                   <a:txBody>
-                    <a:bodyPr wrap="square"/>
+                    <a:bodyPr/>
                     <a:lstStyle/>
                     <a:p>
                       <a:pPr algn="l"/>
@@ -8701,7 +8701,7 @@
                 </a:tc>
                 <a:tc>
                   <a:txBody>
-                    <a:bodyPr wrap="square"/>
+                    <a:bodyPr/>
                     <a:lstStyle/>
                     <a:p>
                       <a:pPr algn="l"/>
@@ -8724,7 +8724,7 @@
                 </a:tc>
                 <a:tc>
                   <a:txBody>
-                    <a:bodyPr wrap="square"/>
+                    <a:bodyPr/>
                     <a:lstStyle/>
                     <a:p>
                       <a:pPr algn="l"/>
@@ -8747,7 +8747,7 @@
                 </a:tc>
                 <a:tc>
                   <a:txBody>
-                    <a:bodyPr wrap="square"/>
+                    <a:bodyPr/>
                     <a:lstStyle/>
                     <a:p>
                       <a:pPr algn="l"/>
@@ -8770,7 +8770,7 @@
                 </a:tc>
                 <a:tc>
                   <a:txBody>
-                    <a:bodyPr wrap="square"/>
+                    <a:bodyPr/>
                     <a:lstStyle/>
                     <a:p>
                       <a:pPr algn="l"/>
@@ -8795,7 +8795,7 @@
               <a:tr h="292608">
                 <a:tc>
                   <a:txBody>
-                    <a:bodyPr wrap="square"/>
+                    <a:bodyPr/>
                     <a:lstStyle/>
                     <a:p>
                       <a:pPr algn="l"/>
@@ -8818,7 +8818,7 @@
                 </a:tc>
                 <a:tc>
                   <a:txBody>
-                    <a:bodyPr wrap="square"/>
+                    <a:bodyPr/>
                     <a:lstStyle/>
                     <a:p>
                       <a:pPr algn="l"/>
@@ -8841,7 +8841,7 @@
                 </a:tc>
                 <a:tc>
                   <a:txBody>
-                    <a:bodyPr wrap="square"/>
+                    <a:bodyPr/>
                     <a:lstStyle/>
                     <a:p>
                       <a:pPr algn="l"/>
@@ -8864,7 +8864,7 @@
                 </a:tc>
                 <a:tc>
                   <a:txBody>
-                    <a:bodyPr wrap="square"/>
+                    <a:bodyPr/>
                     <a:lstStyle/>
                     <a:p>
                       <a:pPr algn="l"/>
@@ -8887,7 +8887,7 @@
                 </a:tc>
                 <a:tc>
                   <a:txBody>
-                    <a:bodyPr wrap="square"/>
+                    <a:bodyPr/>
                     <a:lstStyle/>
                     <a:p>
                       <a:pPr algn="l"/>
@@ -8910,7 +8910,7 @@
                 </a:tc>
                 <a:tc>
                   <a:txBody>
-                    <a:bodyPr wrap="square"/>
+                    <a:bodyPr/>
                     <a:lstStyle/>
                     <a:p>
                       <a:pPr algn="l"/>
@@ -8933,7 +8933,7 @@
                 </a:tc>
                 <a:tc>
                   <a:txBody>
-                    <a:bodyPr wrap="square"/>
+                    <a:bodyPr/>
                     <a:lstStyle/>
                     <a:p>
                       <a:pPr algn="l"/>
@@ -8958,7 +8958,7 @@
               <a:tr h="292608">
                 <a:tc>
                   <a:txBody>
-                    <a:bodyPr wrap="square"/>
+                    <a:bodyPr/>
                     <a:lstStyle/>
                     <a:p>
                       <a:pPr algn="l"/>
@@ -8981,7 +8981,7 @@
                 </a:tc>
                 <a:tc>
                   <a:txBody>
-                    <a:bodyPr wrap="square"/>
+                    <a:bodyPr/>
                     <a:lstStyle/>
                     <a:p>
                       <a:pPr algn="l"/>
@@ -9004,7 +9004,7 @@
                 </a:tc>
                 <a:tc>
                   <a:txBody>
-                    <a:bodyPr wrap="square"/>
+                    <a:bodyPr/>
                     <a:lstStyle/>
                     <a:p>
                       <a:pPr algn="l"/>
@@ -9027,7 +9027,7 @@
                 </a:tc>
                 <a:tc>
                   <a:txBody>
-                    <a:bodyPr wrap="square"/>
+                    <a:bodyPr/>
                     <a:lstStyle/>
                     <a:p>
                       <a:pPr algn="l"/>
@@ -9050,7 +9050,7 @@
                 </a:tc>
                 <a:tc>
                   <a:txBody>
-                    <a:bodyPr wrap="square"/>
+                    <a:bodyPr/>
                     <a:lstStyle/>
                     <a:p>
                       <a:pPr algn="l"/>
@@ -9073,7 +9073,7 @@
                 </a:tc>
                 <a:tc>
                   <a:txBody>
-                    <a:bodyPr wrap="square"/>
+                    <a:bodyPr/>
                     <a:lstStyle/>
                     <a:p>
                       <a:pPr algn="l"/>
@@ -9096,7 +9096,7 @@
                 </a:tc>
                 <a:tc>
                   <a:txBody>
-                    <a:bodyPr wrap="square"/>
+                    <a:bodyPr/>
                     <a:lstStyle/>
                     <a:p>
                       <a:pPr algn="l"/>
@@ -9121,7 +9121,7 @@
               <a:tr h="292608">
                 <a:tc>
                   <a:txBody>
-                    <a:bodyPr wrap="square"/>
+                    <a:bodyPr/>
                     <a:lstStyle/>
                     <a:p>
                       <a:pPr algn="l"/>
@@ -9144,7 +9144,7 @@
                 </a:tc>
                 <a:tc>
                   <a:txBody>
-                    <a:bodyPr wrap="square"/>
+                    <a:bodyPr/>
                     <a:lstStyle/>
                     <a:p>
                       <a:pPr algn="l"/>
@@ -9167,7 +9167,7 @@
                 </a:tc>
                 <a:tc>
                   <a:txBody>
-                    <a:bodyPr wrap="square"/>
+                    <a:bodyPr/>
                     <a:lstStyle/>
                     <a:p>
                       <a:pPr algn="l"/>
@@ -9190,7 +9190,7 @@
                 </a:tc>
                 <a:tc>
                   <a:txBody>
-                    <a:bodyPr wrap="square"/>
+                    <a:bodyPr/>
                     <a:lstStyle/>
                     <a:p>
                       <a:pPr algn="l"/>
@@ -9213,7 +9213,7 @@
                 </a:tc>
                 <a:tc>
                   <a:txBody>
-                    <a:bodyPr wrap="square"/>
+                    <a:bodyPr/>
                     <a:lstStyle/>
                     <a:p>
                       <a:pPr algn="l"/>
@@ -9236,7 +9236,7 @@
                 </a:tc>
                 <a:tc>
                   <a:txBody>
-                    <a:bodyPr wrap="square"/>
+                    <a:bodyPr/>
                     <a:lstStyle/>
                     <a:p>
                       <a:pPr algn="l"/>
@@ -9259,7 +9259,7 @@
                 </a:tc>
                 <a:tc>
                   <a:txBody>
-                    <a:bodyPr wrap="square"/>
+                    <a:bodyPr/>
                     <a:lstStyle/>
                     <a:p>
                       <a:pPr algn="l"/>
@@ -9284,7 +9284,7 @@
               <a:tr h="292608">
                 <a:tc>
                   <a:txBody>
-                    <a:bodyPr wrap="square"/>
+                    <a:bodyPr/>
                     <a:lstStyle/>
                     <a:p>
                       <a:pPr algn="l"/>
@@ -9307,7 +9307,7 @@
                 </a:tc>
                 <a:tc>
                   <a:txBody>
-                    <a:bodyPr wrap="square"/>
+                    <a:bodyPr/>
                     <a:lstStyle/>
                     <a:p>
                       <a:pPr algn="l"/>
@@ -9330,7 +9330,7 @@
                 </a:tc>
                 <a:tc>
                   <a:txBody>
-                    <a:bodyPr wrap="square"/>
+                    <a:bodyPr/>
                     <a:lstStyle/>
                     <a:p>
                       <a:pPr algn="l"/>
@@ -9353,7 +9353,7 @@
                 </a:tc>
                 <a:tc>
                   <a:txBody>
-                    <a:bodyPr wrap="square"/>
+                    <a:bodyPr/>
                     <a:lstStyle/>
                     <a:p>
                       <a:pPr algn="l"/>
@@ -9376,7 +9376,7 @@
                 </a:tc>
                 <a:tc>
                   <a:txBody>
-                    <a:bodyPr wrap="square"/>
+                    <a:bodyPr/>
                     <a:lstStyle/>
                     <a:p>
                       <a:pPr algn="l"/>
@@ -9399,7 +9399,7 @@
                 </a:tc>
                 <a:tc>
                   <a:txBody>
-                    <a:bodyPr wrap="square"/>
+                    <a:bodyPr/>
                     <a:lstStyle/>
                     <a:p>
                       <a:pPr algn="l"/>
@@ -9422,7 +9422,7 @@
                 </a:tc>
                 <a:tc>
                   <a:txBody>
-                    <a:bodyPr wrap="square"/>
+                    <a:bodyPr/>
                     <a:lstStyle/>
                     <a:p>
                       <a:pPr algn="l"/>
@@ -9447,7 +9447,7 @@
               <a:tr h="292608">
                 <a:tc>
                   <a:txBody>
-                    <a:bodyPr wrap="square"/>
+                    <a:bodyPr/>
                     <a:lstStyle/>
                     <a:p>
                       <a:pPr algn="l"/>
@@ -9470,7 +9470,7 @@
                 </a:tc>
                 <a:tc>
                   <a:txBody>
-                    <a:bodyPr wrap="square"/>
+                    <a:bodyPr/>
                     <a:lstStyle/>
                     <a:p>
                       <a:pPr algn="l"/>
@@ -9493,7 +9493,7 @@
                 </a:tc>
                 <a:tc>
                   <a:txBody>
-                    <a:bodyPr wrap="square"/>
+                    <a:bodyPr/>
                     <a:lstStyle/>
                     <a:p>
                       <a:pPr algn="l"/>
@@ -9516,7 +9516,7 @@
                 </a:tc>
                 <a:tc>
                   <a:txBody>
-                    <a:bodyPr wrap="square"/>
+                    <a:bodyPr/>
                     <a:lstStyle/>
                     <a:p>
                       <a:pPr algn="l"/>
@@ -9539,7 +9539,7 @@
                 </a:tc>
                 <a:tc>
                   <a:txBody>
-                    <a:bodyPr wrap="square"/>
+                    <a:bodyPr/>
                     <a:lstStyle/>
                     <a:p>
                       <a:pPr algn="l"/>
@@ -9562,7 +9562,7 @@
                 </a:tc>
                 <a:tc>
                   <a:txBody>
-                    <a:bodyPr wrap="square"/>
+                    <a:bodyPr/>
                     <a:lstStyle/>
                     <a:p>
                       <a:pPr algn="l"/>
@@ -9585,7 +9585,7 @@
                 </a:tc>
                 <a:tc>
                   <a:txBody>
-                    <a:bodyPr wrap="square"/>
+                    <a:bodyPr/>
                     <a:lstStyle/>
                     <a:p>
                       <a:pPr algn="l"/>
@@ -9610,7 +9610,7 @@
               <a:tr h="292608">
                 <a:tc>
                   <a:txBody>
-                    <a:bodyPr wrap="square"/>
+                    <a:bodyPr/>
                     <a:lstStyle/>
                     <a:p>
                       <a:pPr algn="l"/>
@@ -9633,7 +9633,7 @@
                 </a:tc>
                 <a:tc>
                   <a:txBody>
-                    <a:bodyPr wrap="square"/>
+                    <a:bodyPr/>
                     <a:lstStyle/>
                     <a:p>
                       <a:pPr algn="l"/>
@@ -9656,7 +9656,7 @@
                 </a:tc>
                 <a:tc>
                   <a:txBody>
-                    <a:bodyPr wrap="square"/>
+                    <a:bodyPr/>
                     <a:lstStyle/>
                     <a:p>
                       <a:pPr algn="l"/>
@@ -9679,7 +9679,7 @@
                 </a:tc>
                 <a:tc>
                   <a:txBody>
-                    <a:bodyPr wrap="square"/>
+                    <a:bodyPr/>
                     <a:lstStyle/>
                     <a:p>
                       <a:pPr algn="l"/>
@@ -9702,7 +9702,7 @@
                 </a:tc>
                 <a:tc>
                   <a:txBody>
-                    <a:bodyPr wrap="square"/>
+                    <a:bodyPr/>
                     <a:lstStyle/>
                     <a:p>
                       <a:pPr algn="l"/>
@@ -9725,7 +9725,7 @@
                 </a:tc>
                 <a:tc>
                   <a:txBody>
-                    <a:bodyPr wrap="square"/>
+                    <a:bodyPr/>
                     <a:lstStyle/>
                     <a:p>
                       <a:pPr algn="l"/>
@@ -9748,7 +9748,7 @@
                 </a:tc>
                 <a:tc>
                   <a:txBody>
-                    <a:bodyPr wrap="square"/>
+                    <a:bodyPr/>
                     <a:lstStyle/>
                     <a:p>
                       <a:pPr algn="l"/>
@@ -9773,7 +9773,7 @@
               <a:tr h="292608">
                 <a:tc>
                   <a:txBody>
-                    <a:bodyPr wrap="square"/>
+                    <a:bodyPr/>
                     <a:lstStyle/>
                     <a:p>
                       <a:pPr algn="l"/>
@@ -9796,7 +9796,7 @@
                 </a:tc>
                 <a:tc>
                   <a:txBody>
-                    <a:bodyPr wrap="square"/>
+                    <a:bodyPr/>
                     <a:lstStyle/>
                     <a:p>
                       <a:pPr algn="l"/>
@@ -9819,7 +9819,7 @@
                 </a:tc>
                 <a:tc>
                   <a:txBody>
-                    <a:bodyPr wrap="square"/>
+                    <a:bodyPr/>
                     <a:lstStyle/>
                     <a:p>
                       <a:pPr algn="l"/>
@@ -9842,7 +9842,7 @@
                 </a:tc>
                 <a:tc>
                   <a:txBody>
-                    <a:bodyPr wrap="square"/>
+                    <a:bodyPr/>
                     <a:lstStyle/>
                     <a:p>
                       <a:pPr algn="l"/>
@@ -9865,7 +9865,7 @@
                 </a:tc>
                 <a:tc>
                   <a:txBody>
-                    <a:bodyPr wrap="square"/>
+                    <a:bodyPr/>
                     <a:lstStyle/>
                     <a:p>
                       <a:pPr algn="l"/>
@@ -9888,7 +9888,7 @@
                 </a:tc>
                 <a:tc>
                   <a:txBody>
-                    <a:bodyPr wrap="square"/>
+                    <a:bodyPr/>
                     <a:lstStyle/>
                     <a:p>
                       <a:pPr algn="l"/>
@@ -9911,7 +9911,7 @@
                 </a:tc>
                 <a:tc>
                   <a:txBody>
-                    <a:bodyPr wrap="square"/>
+                    <a:bodyPr/>
                     <a:lstStyle/>
                     <a:p>
                       <a:pPr algn="l"/>
@@ -9936,7 +9936,7 @@
               <a:tr h="292608">
                 <a:tc>
                   <a:txBody>
-                    <a:bodyPr wrap="square"/>
+                    <a:bodyPr/>
                     <a:lstStyle/>
                     <a:p>
                       <a:pPr algn="l"/>
@@ -9959,7 +9959,7 @@
                 </a:tc>
                 <a:tc>
                   <a:txBody>
-                    <a:bodyPr wrap="square"/>
+                    <a:bodyPr/>
                     <a:lstStyle/>
                     <a:p>
                       <a:pPr algn="l"/>
@@ -9982,7 +9982,7 @@
                 </a:tc>
                 <a:tc>
                   <a:txBody>
-                    <a:bodyPr wrap="square"/>
+                    <a:bodyPr/>
                     <a:lstStyle/>
                     <a:p>
                       <a:pPr algn="l"/>
@@ -10005,7 +10005,7 @@
                 </a:tc>
                 <a:tc>
                   <a:txBody>
-                    <a:bodyPr wrap="square"/>
+                    <a:bodyPr/>
                     <a:lstStyle/>
                     <a:p>
                       <a:pPr algn="l"/>
@@ -10028,7 +10028,7 @@
                 </a:tc>
                 <a:tc>
                   <a:txBody>
-                    <a:bodyPr wrap="square"/>
+                    <a:bodyPr/>
                     <a:lstStyle/>
                     <a:p>
                       <a:pPr algn="l"/>
@@ -10051,7 +10051,7 @@
                 </a:tc>
                 <a:tc>
                   <a:txBody>
-                    <a:bodyPr wrap="square"/>
+                    <a:bodyPr/>
                     <a:lstStyle/>
                     <a:p>
                       <a:pPr algn="l"/>
@@ -10074,7 +10074,7 @@
                 </a:tc>
                 <a:tc>
                   <a:txBody>
-                    <a:bodyPr wrap="square"/>
+                    <a:bodyPr/>
                     <a:lstStyle/>
                     <a:p>
                       <a:pPr algn="l"/>

--- a/FORTE_TRANSPORTES_DO_BRASIL_LT.pptx
+++ b/FORTE_TRANSPORTES_DO_BRASIL_LT.pptx
@@ -147,10 +147,10 @@
               <c:strCache>
                 <c:ptCount val="2"/>
                 <c:pt idx="0">
-                  <c:v>Marco 2026</c:v>
+                  <c:v>Abril 2026</c:v>
                 </c:pt>
                 <c:pt idx="1">
-                  <c:v>Abril 2026</c:v>
+                  <c:v>Maio 2026</c:v>
                 </c:pt>
               </c:strCache>
             </c:strRef>
@@ -162,10 +162,10 @@
                 <c:formatCode>General</c:formatCode>
                 <c:ptCount val="2"/>
                 <c:pt idx="0">
-                  <c:v>0</c:v>
+                  <c:v>359</c:v>
                 </c:pt>
                 <c:pt idx="1">
-                  <c:v>357</c:v>
+                  <c:v>200</c:v>
                 </c:pt>
               </c:numCache>
             </c:numRef>
@@ -196,10 +196,10 @@
               <c:strCache>
                 <c:ptCount val="2"/>
                 <c:pt idx="0">
-                  <c:v>Marco 2026</c:v>
+                  <c:v>Abril 2026</c:v>
                 </c:pt>
                 <c:pt idx="1">
-                  <c:v>Abril 2026</c:v>
+                  <c:v>Maio 2026</c:v>
                 </c:pt>
               </c:strCache>
             </c:strRef>
@@ -211,10 +211,10 @@
                 <c:formatCode>General</c:formatCode>
                 <c:ptCount val="2"/>
                 <c:pt idx="0">
-                  <c:v>0</c:v>
+                  <c:v>1</c:v>
                 </c:pt>
                 <c:pt idx="1">
-                  <c:v>4</c:v>
+                  <c:v>17</c:v>
                 </c:pt>
               </c:numCache>
             </c:numRef>
@@ -3387,7 +3387,7 @@
                 </a:solidFill>
                 <a:latin typeface="Calibri"/>
               </a:rPr>
-              <a:t>INDICADORES ABRIL 2026</a:t>
+              <a:t>INDICADORES MAIO 2026</a:t>
             </a:r>
           </a:p>
         </p:txBody>
@@ -3709,7 +3709,7 @@
                 </a:solidFill>
                 <a:latin typeface="Calibri"/>
               </a:rPr>
-              <a:t>361</a:t>
+              <a:t>217</a:t>
             </a:r>
           </a:p>
         </p:txBody>
@@ -3824,7 +3824,7 @@
                 </a:solidFill>
                 <a:latin typeface="Calibri"/>
               </a:rPr>
-              <a:t>357</a:t>
+              <a:t>200</a:t>
             </a:r>
           </a:p>
         </p:txBody>
@@ -3939,7 +3939,7 @@
                 </a:solidFill>
                 <a:latin typeface="Calibri"/>
               </a:rPr>
-              <a:t>4</a:t>
+              <a:t>17</a:t>
             </a:r>
           </a:p>
         </p:txBody>
@@ -4050,11 +4050,11 @@
             <a:r>
               <a:rPr sz="2800" b="1">
                 <a:solidFill>
-                  <a:srgbClr val="10B981"/>
+                  <a:srgbClr val="F59E0B"/>
                 </a:solidFill>
                 <a:latin typeface="Calibri"/>
               </a:rPr>
-              <a:t>98.9%</a:t>
+              <a:t>92.2%</a:t>
             </a:r>
           </a:p>
         </p:txBody>
@@ -4155,7 +4155,7 @@
                           </a:solidFill>
                           <a:latin typeface="Calibri"/>
                         </a:rPr>
-                        <a:t>Marco 2026</a:t>
+                        <a:t>Abril 2026</a:t>
                       </a:r>
                     </a:p>
                   </a:txBody>
@@ -4178,7 +4178,7 @@
                           </a:solidFill>
                           <a:latin typeface="Calibri"/>
                         </a:rPr>
-                        <a:t>Abril 2026</a:t>
+                        <a:t>Maio 2026</a:t>
                       </a:r>
                     </a:p>
                   </a:txBody>
@@ -4249,53 +4249,53 @@
                           </a:solidFill>
                           <a:latin typeface="Calibri"/>
                         </a:rPr>
-                        <a:t>0</a:t>
-                      </a:r>
-                    </a:p>
-                  </a:txBody>
-                  <a:tcPr>
-                    <a:solidFill>
-                      <a:srgbClr val="FFFFFF"/>
-                    </a:solidFill>
-                  </a:tcPr>
-                </a:tc>
-                <a:tc>
-                  <a:txBody>
-                    <a:bodyPr/>
-                    <a:lstStyle/>
-                    <a:p>
-                      <a:pPr algn="l"/>
-                      <a:r>
-                        <a:rPr sz="1000" b="0">
-                          <a:solidFill>
-                            <a:srgbClr val="1D1B43"/>
-                          </a:solidFill>
-                          <a:latin typeface="Calibri"/>
-                        </a:rPr>
-                        <a:t>361</a:t>
-                      </a:r>
-                    </a:p>
-                  </a:txBody>
-                  <a:tcPr>
-                    <a:solidFill>
-                      <a:srgbClr val="FFFFFF"/>
-                    </a:solidFill>
-                  </a:tcPr>
-                </a:tc>
-                <a:tc>
-                  <a:txBody>
-                    <a:bodyPr/>
-                    <a:lstStyle/>
-                    <a:p>
-                      <a:pPr algn="l"/>
-                      <a:r>
-                        <a:rPr sz="1000" b="0">
-                          <a:solidFill>
-                            <a:srgbClr val="1D1B43"/>
-                          </a:solidFill>
-                          <a:latin typeface="Calibri"/>
-                        </a:rPr>
-                        <a:t>+ 361</a:t>
+                        <a:t>360</a:t>
+                      </a:r>
+                    </a:p>
+                  </a:txBody>
+                  <a:tcPr>
+                    <a:solidFill>
+                      <a:srgbClr val="FFFFFF"/>
+                    </a:solidFill>
+                  </a:tcPr>
+                </a:tc>
+                <a:tc>
+                  <a:txBody>
+                    <a:bodyPr/>
+                    <a:lstStyle/>
+                    <a:p>
+                      <a:pPr algn="l"/>
+                      <a:r>
+                        <a:rPr sz="1000" b="0">
+                          <a:solidFill>
+                            <a:srgbClr val="1D1B43"/>
+                          </a:solidFill>
+                          <a:latin typeface="Calibri"/>
+                        </a:rPr>
+                        <a:t>217</a:t>
+                      </a:r>
+                    </a:p>
+                  </a:txBody>
+                  <a:tcPr>
+                    <a:solidFill>
+                      <a:srgbClr val="FFFFFF"/>
+                    </a:solidFill>
+                  </a:tcPr>
+                </a:tc>
+                <a:tc>
+                  <a:txBody>
+                    <a:bodyPr/>
+                    <a:lstStyle/>
+                    <a:p>
+                      <a:pPr algn="l"/>
+                      <a:r>
+                        <a:rPr sz="1000" b="0">
+                          <a:solidFill>
+                            <a:srgbClr val="1D1B43"/>
+                          </a:solidFill>
+                          <a:latin typeface="Calibri"/>
+                        </a:rPr>
+                        <a:t>- 143</a:t>
                       </a:r>
                     </a:p>
                   </a:txBody>
@@ -4343,53 +4343,53 @@
                           </a:solidFill>
                           <a:latin typeface="Calibri"/>
                         </a:rPr>
-                        <a:t>0</a:t>
-                      </a:r>
-                    </a:p>
-                  </a:txBody>
-                  <a:tcPr>
-                    <a:solidFill>
-                      <a:srgbClr val="F2F2F2"/>
-                    </a:solidFill>
-                  </a:tcPr>
-                </a:tc>
-                <a:tc>
-                  <a:txBody>
-                    <a:bodyPr/>
-                    <a:lstStyle/>
-                    <a:p>
-                      <a:pPr algn="l"/>
-                      <a:r>
-                        <a:rPr sz="1000" b="0">
-                          <a:solidFill>
-                            <a:srgbClr val="1D1B43"/>
-                          </a:solidFill>
-                          <a:latin typeface="Calibri"/>
-                        </a:rPr>
-                        <a:t>357</a:t>
-                      </a:r>
-                    </a:p>
-                  </a:txBody>
-                  <a:tcPr>
-                    <a:solidFill>
-                      <a:srgbClr val="F2F2F2"/>
-                    </a:solidFill>
-                  </a:tcPr>
-                </a:tc>
-                <a:tc>
-                  <a:txBody>
-                    <a:bodyPr/>
-                    <a:lstStyle/>
-                    <a:p>
-                      <a:pPr algn="l"/>
-                      <a:r>
-                        <a:rPr sz="1000" b="0">
-                          <a:solidFill>
-                            <a:srgbClr val="1D1B43"/>
-                          </a:solidFill>
-                          <a:latin typeface="Calibri"/>
-                        </a:rPr>
-                        <a:t>+ 357</a:t>
+                        <a:t>359</a:t>
+                      </a:r>
+                    </a:p>
+                  </a:txBody>
+                  <a:tcPr>
+                    <a:solidFill>
+                      <a:srgbClr val="F2F2F2"/>
+                    </a:solidFill>
+                  </a:tcPr>
+                </a:tc>
+                <a:tc>
+                  <a:txBody>
+                    <a:bodyPr/>
+                    <a:lstStyle/>
+                    <a:p>
+                      <a:pPr algn="l"/>
+                      <a:r>
+                        <a:rPr sz="1000" b="0">
+                          <a:solidFill>
+                            <a:srgbClr val="1D1B43"/>
+                          </a:solidFill>
+                          <a:latin typeface="Calibri"/>
+                        </a:rPr>
+                        <a:t>200</a:t>
+                      </a:r>
+                    </a:p>
+                  </a:txBody>
+                  <a:tcPr>
+                    <a:solidFill>
+                      <a:srgbClr val="F2F2F2"/>
+                    </a:solidFill>
+                  </a:tcPr>
+                </a:tc>
+                <a:tc>
+                  <a:txBody>
+                    <a:bodyPr/>
+                    <a:lstStyle/>
+                    <a:p>
+                      <a:pPr algn="l"/>
+                      <a:r>
+                        <a:rPr sz="1000" b="0">
+                          <a:solidFill>
+                            <a:srgbClr val="1D1B43"/>
+                          </a:solidFill>
+                          <a:latin typeface="Calibri"/>
+                        </a:rPr>
+                        <a:t>- 159</a:t>
                       </a:r>
                     </a:p>
                   </a:txBody>
@@ -4437,53 +4437,53 @@
                           </a:solidFill>
                           <a:latin typeface="Calibri"/>
                         </a:rPr>
-                        <a:t>0</a:t>
-                      </a:r>
-                    </a:p>
-                  </a:txBody>
-                  <a:tcPr>
-                    <a:solidFill>
-                      <a:srgbClr val="FFFFFF"/>
-                    </a:solidFill>
-                  </a:tcPr>
-                </a:tc>
-                <a:tc>
-                  <a:txBody>
-                    <a:bodyPr/>
-                    <a:lstStyle/>
-                    <a:p>
-                      <a:pPr algn="l"/>
-                      <a:r>
-                        <a:rPr sz="1000" b="0">
-                          <a:solidFill>
-                            <a:srgbClr val="1D1B43"/>
-                          </a:solidFill>
-                          <a:latin typeface="Calibri"/>
-                        </a:rPr>
-                        <a:t>4</a:t>
-                      </a:r>
-                    </a:p>
-                  </a:txBody>
-                  <a:tcPr>
-                    <a:solidFill>
-                      <a:srgbClr val="FFFFFF"/>
-                    </a:solidFill>
-                  </a:tcPr>
-                </a:tc>
-                <a:tc>
-                  <a:txBody>
-                    <a:bodyPr/>
-                    <a:lstStyle/>
-                    <a:p>
-                      <a:pPr algn="l"/>
-                      <a:r>
-                        <a:rPr sz="1000" b="0">
-                          <a:solidFill>
-                            <a:srgbClr val="1D1B43"/>
-                          </a:solidFill>
-                          <a:latin typeface="Calibri"/>
-                        </a:rPr>
-                        <a:t>+ 4</a:t>
+                        <a:t>1</a:t>
+                      </a:r>
+                    </a:p>
+                  </a:txBody>
+                  <a:tcPr>
+                    <a:solidFill>
+                      <a:srgbClr val="FFFFFF"/>
+                    </a:solidFill>
+                  </a:tcPr>
+                </a:tc>
+                <a:tc>
+                  <a:txBody>
+                    <a:bodyPr/>
+                    <a:lstStyle/>
+                    <a:p>
+                      <a:pPr algn="l"/>
+                      <a:r>
+                        <a:rPr sz="1000" b="0">
+                          <a:solidFill>
+                            <a:srgbClr val="1D1B43"/>
+                          </a:solidFill>
+                          <a:latin typeface="Calibri"/>
+                        </a:rPr>
+                        <a:t>17</a:t>
+                      </a:r>
+                    </a:p>
+                  </a:txBody>
+                  <a:tcPr>
+                    <a:solidFill>
+                      <a:srgbClr val="FFFFFF"/>
+                    </a:solidFill>
+                  </a:tcPr>
+                </a:tc>
+                <a:tc>
+                  <a:txBody>
+                    <a:bodyPr/>
+                    <a:lstStyle/>
+                    <a:p>
+                      <a:pPr algn="l"/>
+                      <a:r>
+                        <a:rPr sz="1000" b="0">
+                          <a:solidFill>
+                            <a:srgbClr val="1D1B43"/>
+                          </a:solidFill>
+                          <a:latin typeface="Calibri"/>
+                        </a:rPr>
+                        <a:t>+ 16</a:t>
                       </a:r>
                     </a:p>
                   </a:txBody>
@@ -4531,53 +4531,53 @@
                           </a:solidFill>
                           <a:latin typeface="Calibri"/>
                         </a:rPr>
-                        <a:t>98.9%</a:t>
-                      </a:r>
-                    </a:p>
-                  </a:txBody>
-                  <a:tcPr>
-                    <a:solidFill>
-                      <a:srgbClr val="F2F2F2"/>
-                    </a:solidFill>
-                  </a:tcPr>
-                </a:tc>
-                <a:tc>
-                  <a:txBody>
-                    <a:bodyPr/>
-                    <a:lstStyle/>
-                    <a:p>
-                      <a:pPr algn="l"/>
-                      <a:r>
-                        <a:rPr sz="1000" b="0">
-                          <a:solidFill>
-                            <a:srgbClr val="1D1B43"/>
-                          </a:solidFill>
-                          <a:latin typeface="Calibri"/>
-                        </a:rPr>
-                        <a:t>98.9%</a:t>
-                      </a:r>
-                    </a:p>
-                  </a:txBody>
-                  <a:tcPr>
-                    <a:solidFill>
-                      <a:srgbClr val="F2F2F2"/>
-                    </a:solidFill>
-                  </a:tcPr>
-                </a:tc>
-                <a:tc>
-                  <a:txBody>
-                    <a:bodyPr/>
-                    <a:lstStyle/>
-                    <a:p>
-                      <a:pPr algn="l"/>
-                      <a:r>
-                        <a:rPr sz="1000" b="0">
-                          <a:solidFill>
-                            <a:srgbClr val="1D1B43"/>
-                          </a:solidFill>
-                          <a:latin typeface="Calibri"/>
-                        </a:rPr>
-                        <a:t>+ 0.0pp</a:t>
+                        <a:t>99.7%</a:t>
+                      </a:r>
+                    </a:p>
+                  </a:txBody>
+                  <a:tcPr>
+                    <a:solidFill>
+                      <a:srgbClr val="F2F2F2"/>
+                    </a:solidFill>
+                  </a:tcPr>
+                </a:tc>
+                <a:tc>
+                  <a:txBody>
+                    <a:bodyPr/>
+                    <a:lstStyle/>
+                    <a:p>
+                      <a:pPr algn="l"/>
+                      <a:r>
+                        <a:rPr sz="1000" b="0">
+                          <a:solidFill>
+                            <a:srgbClr val="1D1B43"/>
+                          </a:solidFill>
+                          <a:latin typeface="Calibri"/>
+                        </a:rPr>
+                        <a:t>92.2%</a:t>
+                      </a:r>
+                    </a:p>
+                  </a:txBody>
+                  <a:tcPr>
+                    <a:solidFill>
+                      <a:srgbClr val="F2F2F2"/>
+                    </a:solidFill>
+                  </a:tcPr>
+                </a:tc>
+                <a:tc>
+                  <a:txBody>
+                    <a:bodyPr/>
+                    <a:lstStyle/>
+                    <a:p>
+                      <a:pPr algn="l"/>
+                      <a:r>
+                        <a:rPr sz="1000" b="0">
+                          <a:solidFill>
+                            <a:srgbClr val="1D1B43"/>
+                          </a:solidFill>
+                          <a:latin typeface="Calibri"/>
+                        </a:rPr>
+                        <a:t>- 7.5pp</a:t>
                       </a:r>
                     </a:p>
                   </a:txBody>
@@ -4894,99 +4894,99 @@
                           </a:solidFill>
                           <a:latin typeface="Calibri"/>
                         </a:rPr>
-                        <a:t>Marco 2026</a:t>
-                      </a:r>
-                    </a:p>
-                  </a:txBody>
-                  <a:tcPr>
-                    <a:solidFill>
-                      <a:srgbClr val="FFFFFF"/>
-                    </a:solidFill>
-                  </a:tcPr>
-                </a:tc>
-                <a:tc>
-                  <a:txBody>
-                    <a:bodyPr/>
-                    <a:lstStyle/>
-                    <a:p>
-                      <a:pPr algn="l"/>
-                      <a:r>
-                        <a:rPr sz="1000" b="0">
-                          <a:solidFill>
-                            <a:srgbClr val="1D1B43"/>
-                          </a:solidFill>
-                          <a:latin typeface="Calibri"/>
-                        </a:rPr>
-                        <a:t>0</a:t>
-                      </a:r>
-                    </a:p>
-                  </a:txBody>
-                  <a:tcPr>
-                    <a:solidFill>
-                      <a:srgbClr val="FFFFFF"/>
-                    </a:solidFill>
-                  </a:tcPr>
-                </a:tc>
-                <a:tc>
-                  <a:txBody>
-                    <a:bodyPr/>
-                    <a:lstStyle/>
-                    <a:p>
-                      <a:pPr algn="l"/>
-                      <a:r>
-                        <a:rPr sz="1000" b="0">
-                          <a:solidFill>
-                            <a:srgbClr val="1D1B43"/>
-                          </a:solidFill>
-                          <a:latin typeface="Calibri"/>
-                        </a:rPr>
-                        <a:t>0</a:t>
-                      </a:r>
-                    </a:p>
-                  </a:txBody>
-                  <a:tcPr>
-                    <a:solidFill>
-                      <a:srgbClr val="FFFFFF"/>
-                    </a:solidFill>
-                  </a:tcPr>
-                </a:tc>
-                <a:tc>
-                  <a:txBody>
-                    <a:bodyPr/>
-                    <a:lstStyle/>
-                    <a:p>
-                      <a:pPr algn="l"/>
-                      <a:r>
-                        <a:rPr sz="1000" b="0">
-                          <a:solidFill>
-                            <a:srgbClr val="1D1B43"/>
-                          </a:solidFill>
-                          <a:latin typeface="Calibri"/>
-                        </a:rPr>
-                        <a:t>0</a:t>
-                      </a:r>
-                    </a:p>
-                  </a:txBody>
-                  <a:tcPr>
-                    <a:solidFill>
-                      <a:srgbClr val="FFFFFF"/>
-                    </a:solidFill>
-                  </a:tcPr>
-                </a:tc>
-                <a:tc>
-                  <a:txBody>
-                    <a:bodyPr/>
-                    <a:lstStyle/>
-                    <a:p>
-                      <a:pPr algn="l"/>
-                      <a:r>
-                        <a:rPr sz="1000" b="0">
-                          <a:solidFill>
-                            <a:srgbClr val="1D1B43"/>
-                          </a:solidFill>
-                          <a:latin typeface="Calibri"/>
-                        </a:rPr>
-                        <a:t>98.9%</a:t>
+                        <a:t>Abril 2026</a:t>
+                      </a:r>
+                    </a:p>
+                  </a:txBody>
+                  <a:tcPr>
+                    <a:solidFill>
+                      <a:srgbClr val="FFFFFF"/>
+                    </a:solidFill>
+                  </a:tcPr>
+                </a:tc>
+                <a:tc>
+                  <a:txBody>
+                    <a:bodyPr/>
+                    <a:lstStyle/>
+                    <a:p>
+                      <a:pPr algn="l"/>
+                      <a:r>
+                        <a:rPr sz="1000" b="0">
+                          <a:solidFill>
+                            <a:srgbClr val="1D1B43"/>
+                          </a:solidFill>
+                          <a:latin typeface="Calibri"/>
+                        </a:rPr>
+                        <a:t>360</a:t>
+                      </a:r>
+                    </a:p>
+                  </a:txBody>
+                  <a:tcPr>
+                    <a:solidFill>
+                      <a:srgbClr val="FFFFFF"/>
+                    </a:solidFill>
+                  </a:tcPr>
+                </a:tc>
+                <a:tc>
+                  <a:txBody>
+                    <a:bodyPr/>
+                    <a:lstStyle/>
+                    <a:p>
+                      <a:pPr algn="l"/>
+                      <a:r>
+                        <a:rPr sz="1000" b="0">
+                          <a:solidFill>
+                            <a:srgbClr val="1D1B43"/>
+                          </a:solidFill>
+                          <a:latin typeface="Calibri"/>
+                        </a:rPr>
+                        <a:t>359</a:t>
+                      </a:r>
+                    </a:p>
+                  </a:txBody>
+                  <a:tcPr>
+                    <a:solidFill>
+                      <a:srgbClr val="FFFFFF"/>
+                    </a:solidFill>
+                  </a:tcPr>
+                </a:tc>
+                <a:tc>
+                  <a:txBody>
+                    <a:bodyPr/>
+                    <a:lstStyle/>
+                    <a:p>
+                      <a:pPr algn="l"/>
+                      <a:r>
+                        <a:rPr sz="1000" b="0">
+                          <a:solidFill>
+                            <a:srgbClr val="1D1B43"/>
+                          </a:solidFill>
+                          <a:latin typeface="Calibri"/>
+                        </a:rPr>
+                        <a:t>1</a:t>
+                      </a:r>
+                    </a:p>
+                  </a:txBody>
+                  <a:tcPr>
+                    <a:solidFill>
+                      <a:srgbClr val="FFFFFF"/>
+                    </a:solidFill>
+                  </a:tcPr>
+                </a:tc>
+                <a:tc>
+                  <a:txBody>
+                    <a:bodyPr/>
+                    <a:lstStyle/>
+                    <a:p>
+                      <a:pPr algn="l"/>
+                      <a:r>
+                        <a:rPr sz="1000" b="0">
+                          <a:solidFill>
+                            <a:srgbClr val="1D1B43"/>
+                          </a:solidFill>
+                          <a:latin typeface="Calibri"/>
+                        </a:rPr>
+                        <a:t>99.7%</a:t>
                       </a:r>
                     </a:p>
                   </a:txBody>
@@ -5011,99 +5011,99 @@
                           </a:solidFill>
                           <a:latin typeface="Calibri"/>
                         </a:rPr>
-                        <a:t>Abril 2026</a:t>
-                      </a:r>
-                    </a:p>
-                  </a:txBody>
-                  <a:tcPr>
-                    <a:solidFill>
-                      <a:srgbClr val="F2F2F2"/>
-                    </a:solidFill>
-                  </a:tcPr>
-                </a:tc>
-                <a:tc>
-                  <a:txBody>
-                    <a:bodyPr/>
-                    <a:lstStyle/>
-                    <a:p>
-                      <a:pPr algn="l"/>
-                      <a:r>
-                        <a:rPr sz="1000" b="0">
-                          <a:solidFill>
-                            <a:srgbClr val="1D1B43"/>
-                          </a:solidFill>
-                          <a:latin typeface="Calibri"/>
-                        </a:rPr>
-                        <a:t>361</a:t>
-                      </a:r>
-                    </a:p>
-                  </a:txBody>
-                  <a:tcPr>
-                    <a:solidFill>
-                      <a:srgbClr val="F2F2F2"/>
-                    </a:solidFill>
-                  </a:tcPr>
-                </a:tc>
-                <a:tc>
-                  <a:txBody>
-                    <a:bodyPr/>
-                    <a:lstStyle/>
-                    <a:p>
-                      <a:pPr algn="l"/>
-                      <a:r>
-                        <a:rPr sz="1000" b="0">
-                          <a:solidFill>
-                            <a:srgbClr val="1D1B43"/>
-                          </a:solidFill>
-                          <a:latin typeface="Calibri"/>
-                        </a:rPr>
-                        <a:t>357</a:t>
-                      </a:r>
-                    </a:p>
-                  </a:txBody>
-                  <a:tcPr>
-                    <a:solidFill>
-                      <a:srgbClr val="F2F2F2"/>
-                    </a:solidFill>
-                  </a:tcPr>
-                </a:tc>
-                <a:tc>
-                  <a:txBody>
-                    <a:bodyPr/>
-                    <a:lstStyle/>
-                    <a:p>
-                      <a:pPr algn="l"/>
-                      <a:r>
-                        <a:rPr sz="1000" b="0">
-                          <a:solidFill>
-                            <a:srgbClr val="1D1B43"/>
-                          </a:solidFill>
-                          <a:latin typeface="Calibri"/>
-                        </a:rPr>
-                        <a:t>4</a:t>
-                      </a:r>
-                    </a:p>
-                  </a:txBody>
-                  <a:tcPr>
-                    <a:solidFill>
-                      <a:srgbClr val="F2F2F2"/>
-                    </a:solidFill>
-                  </a:tcPr>
-                </a:tc>
-                <a:tc>
-                  <a:txBody>
-                    <a:bodyPr/>
-                    <a:lstStyle/>
-                    <a:p>
-                      <a:pPr algn="l"/>
-                      <a:r>
-                        <a:rPr sz="1000" b="0">
-                          <a:solidFill>
-                            <a:srgbClr val="1D1B43"/>
-                          </a:solidFill>
-                          <a:latin typeface="Calibri"/>
-                        </a:rPr>
-                        <a:t>98.9%</a:t>
+                        <a:t>Maio 2026</a:t>
+                      </a:r>
+                    </a:p>
+                  </a:txBody>
+                  <a:tcPr>
+                    <a:solidFill>
+                      <a:srgbClr val="F2F2F2"/>
+                    </a:solidFill>
+                  </a:tcPr>
+                </a:tc>
+                <a:tc>
+                  <a:txBody>
+                    <a:bodyPr/>
+                    <a:lstStyle/>
+                    <a:p>
+                      <a:pPr algn="l"/>
+                      <a:r>
+                        <a:rPr sz="1000" b="0">
+                          <a:solidFill>
+                            <a:srgbClr val="1D1B43"/>
+                          </a:solidFill>
+                          <a:latin typeface="Calibri"/>
+                        </a:rPr>
+                        <a:t>217</a:t>
+                      </a:r>
+                    </a:p>
+                  </a:txBody>
+                  <a:tcPr>
+                    <a:solidFill>
+                      <a:srgbClr val="F2F2F2"/>
+                    </a:solidFill>
+                  </a:tcPr>
+                </a:tc>
+                <a:tc>
+                  <a:txBody>
+                    <a:bodyPr/>
+                    <a:lstStyle/>
+                    <a:p>
+                      <a:pPr algn="l"/>
+                      <a:r>
+                        <a:rPr sz="1000" b="0">
+                          <a:solidFill>
+                            <a:srgbClr val="1D1B43"/>
+                          </a:solidFill>
+                          <a:latin typeface="Calibri"/>
+                        </a:rPr>
+                        <a:t>200</a:t>
+                      </a:r>
+                    </a:p>
+                  </a:txBody>
+                  <a:tcPr>
+                    <a:solidFill>
+                      <a:srgbClr val="F2F2F2"/>
+                    </a:solidFill>
+                  </a:tcPr>
+                </a:tc>
+                <a:tc>
+                  <a:txBody>
+                    <a:bodyPr/>
+                    <a:lstStyle/>
+                    <a:p>
+                      <a:pPr algn="l"/>
+                      <a:r>
+                        <a:rPr sz="1000" b="0">
+                          <a:solidFill>
+                            <a:srgbClr val="1D1B43"/>
+                          </a:solidFill>
+                          <a:latin typeface="Calibri"/>
+                        </a:rPr>
+                        <a:t>17</a:t>
+                      </a:r>
+                    </a:p>
+                  </a:txBody>
+                  <a:tcPr>
+                    <a:solidFill>
+                      <a:srgbClr val="F2F2F2"/>
+                    </a:solidFill>
+                  </a:tcPr>
+                </a:tc>
+                <a:tc>
+                  <a:txBody>
+                    <a:bodyPr/>
+                    <a:lstStyle/>
+                    <a:p>
+                      <a:pPr algn="l"/>
+                      <a:r>
+                        <a:rPr sz="1000" b="0">
+                          <a:solidFill>
+                            <a:srgbClr val="1D1B43"/>
+                          </a:solidFill>
+                          <a:latin typeface="Calibri"/>
+                        </a:rPr>
+                        <a:t>92.2%</a:t>
                       </a:r>
                     </a:p>
                   </a:txBody>
@@ -5191,7 +5191,7 @@
                 </a:solidFill>
                 <a:latin typeface="Calibri"/>
               </a:rPr>
-              <a:t>PERFORMANCE: 98.9% - EXCELENTE</a:t>
+              <a:t>PERFORMANCE: 92.2% - REGULAR</a:t>
             </a:r>
           </a:p>
         </p:txBody>
@@ -5276,7 +5276,7 @@
                 </a:solidFill>
                 <a:latin typeface="Calibri"/>
               </a:rPr>
-              <a:t>OCORRENCIAS FORA DO PRAZO (4)</a:t>
+              <a:t>OCORRENCIAS FORA DO PRAZO (17)</a:t>
             </a:r>
           </a:p>
         </p:txBody>
@@ -5334,7 +5334,7 @@
         </p:nvGraphicFramePr>
         <p:xfrm>
           <a:off x="457200" y="1828800"/>
-          <a:ext cx="11429999" cy="1920240"/>
+          <a:ext cx="11429999" cy="4572000"/>
         </p:xfrm>
         <a:graphic>
           <a:graphicData uri="http://schemas.openxmlformats.org/drawingml/2006/table">
@@ -5349,7 +5349,7 @@
                 <a:gridCol w="1554480"/>
                 <a:gridCol w="2743200"/>
               </a:tblGrid>
-              <a:tr h="384048">
+              <a:tr h="254000">
                 <a:tc>
                   <a:txBody>
                     <a:bodyPr/>
@@ -5466,21 +5466,723 @@
                   </a:tcPr>
                 </a:tc>
               </a:tr>
-              <a:tr h="384048">
-                <a:tc>
-                  <a:txBody>
-                    <a:bodyPr/>
-                    <a:lstStyle/>
-                    <a:p>
-                      <a:pPr algn="l"/>
-                      <a:r>
-                        <a:rPr sz="1000" b="0">
-                          <a:solidFill>
-                            <a:srgbClr val="1D1B43"/>
-                          </a:solidFill>
-                          <a:latin typeface="Calibri"/>
-                        </a:rPr>
-                        <a:t>277739</a:t>
+              <a:tr h="254000">
+                <a:tc>
+                  <a:txBody>
+                    <a:bodyPr/>
+                    <a:lstStyle/>
+                    <a:p>
+                      <a:pPr algn="l"/>
+                      <a:r>
+                        <a:rPr sz="1000" b="0">
+                          <a:solidFill>
+                            <a:srgbClr val="1D1B43"/>
+                          </a:solidFill>
+                          <a:latin typeface="Calibri"/>
+                        </a:rPr>
+                        <a:t>280872</a:t>
+                      </a:r>
+                    </a:p>
+                  </a:txBody>
+                  <a:tcPr>
+                    <a:solidFill>
+                      <a:srgbClr val="FFFFFF"/>
+                    </a:solidFill>
+                  </a:tcPr>
+                </a:tc>
+                <a:tc>
+                  <a:txBody>
+                    <a:bodyPr/>
+                    <a:lstStyle/>
+                    <a:p>
+                      <a:pPr algn="l"/>
+                      <a:r>
+                        <a:rPr sz="1000" b="0">
+                          <a:solidFill>
+                            <a:srgbClr val="1D1B43"/>
+                          </a:solidFill>
+                          <a:latin typeface="Calibri"/>
+                        </a:rPr>
+                        <a:t>MRH VEICULOS LTDA. - SAO PAULO / SP</a:t>
+                      </a:r>
+                    </a:p>
+                  </a:txBody>
+                  <a:tcPr>
+                    <a:solidFill>
+                      <a:srgbClr val="FFFFFF"/>
+                    </a:solidFill>
+                  </a:tcPr>
+                </a:tc>
+                <a:tc>
+                  <a:txBody>
+                    <a:bodyPr/>
+                    <a:lstStyle/>
+                    <a:p>
+                      <a:pPr algn="l"/>
+                      <a:r>
+                        <a:rPr sz="1000" b="0">
+                          <a:solidFill>
+                            <a:srgbClr val="1D1B43"/>
+                          </a:solidFill>
+                          <a:latin typeface="Calibri"/>
+                        </a:rPr>
+                        <a:t>SAO PAULO/SP</a:t>
+                      </a:r>
+                    </a:p>
+                  </a:txBody>
+                  <a:tcPr>
+                    <a:solidFill>
+                      <a:srgbClr val="FFFFFF"/>
+                    </a:solidFill>
+                  </a:tcPr>
+                </a:tc>
+                <a:tc>
+                  <a:txBody>
+                    <a:bodyPr/>
+                    <a:lstStyle/>
+                    <a:p>
+                      <a:pPr algn="l"/>
+                      <a:r>
+                        <a:rPr sz="1000" b="0">
+                          <a:solidFill>
+                            <a:srgbClr val="1D1B43"/>
+                          </a:solidFill>
+                          <a:latin typeface="Calibri"/>
+                        </a:rPr>
+                        <a:t>05/05/2026</a:t>
+                      </a:r>
+                    </a:p>
+                  </a:txBody>
+                  <a:tcPr>
+                    <a:solidFill>
+                      <a:srgbClr val="FFFFFF"/>
+                    </a:solidFill>
+                  </a:tcPr>
+                </a:tc>
+                <a:tc>
+                  <a:txBody>
+                    <a:bodyPr/>
+                    <a:lstStyle/>
+                    <a:p>
+                      <a:pPr algn="l"/>
+                      <a:r>
+                        <a:rPr sz="1000" b="0">
+                          <a:solidFill>
+                            <a:srgbClr val="1D1B43"/>
+                          </a:solidFill>
+                          <a:latin typeface="Calibri"/>
+                        </a:rPr>
+                        <a:t>FORA DO PRAZO</a:t>
+                      </a:r>
+                    </a:p>
+                  </a:txBody>
+                  <a:tcPr>
+                    <a:solidFill>
+                      <a:srgbClr val="FFFFFF"/>
+                    </a:solidFill>
+                  </a:tcPr>
+                </a:tc>
+              </a:tr>
+              <a:tr h="254000">
+                <a:tc>
+                  <a:txBody>
+                    <a:bodyPr/>
+                    <a:lstStyle/>
+                    <a:p>
+                      <a:pPr algn="l"/>
+                      <a:r>
+                        <a:rPr sz="1000" b="0">
+                          <a:solidFill>
+                            <a:srgbClr val="1D1B43"/>
+                          </a:solidFill>
+                          <a:latin typeface="Calibri"/>
+                        </a:rPr>
+                        <a:t>281230</a:t>
+                      </a:r>
+                    </a:p>
+                  </a:txBody>
+                  <a:tcPr>
+                    <a:solidFill>
+                      <a:srgbClr val="F2F2F2"/>
+                    </a:solidFill>
+                  </a:tcPr>
+                </a:tc>
+                <a:tc>
+                  <a:txBody>
+                    <a:bodyPr/>
+                    <a:lstStyle/>
+                    <a:p>
+                      <a:pPr algn="l"/>
+                      <a:r>
+                        <a:rPr sz="1000" b="0">
+                          <a:solidFill>
+                            <a:srgbClr val="1D1B43"/>
+                          </a:solidFill>
+                          <a:latin typeface="Calibri"/>
+                        </a:rPr>
+                        <a:t>LIA E ANNETTE INDUST - RIO DE JANEIRO / RJ</a:t>
+                      </a:r>
+                    </a:p>
+                  </a:txBody>
+                  <a:tcPr>
+                    <a:solidFill>
+                      <a:srgbClr val="F2F2F2"/>
+                    </a:solidFill>
+                  </a:tcPr>
+                </a:tc>
+                <a:tc>
+                  <a:txBody>
+                    <a:bodyPr/>
+                    <a:lstStyle/>
+                    <a:p>
+                      <a:pPr algn="l"/>
+                      <a:r>
+                        <a:rPr sz="1000" b="0">
+                          <a:solidFill>
+                            <a:srgbClr val="1D1B43"/>
+                          </a:solidFill>
+                          <a:latin typeface="Calibri"/>
+                        </a:rPr>
+                        <a:t>RIO DE JANEIRO/RJ</a:t>
+                      </a:r>
+                    </a:p>
+                  </a:txBody>
+                  <a:tcPr>
+                    <a:solidFill>
+                      <a:srgbClr val="F2F2F2"/>
+                    </a:solidFill>
+                  </a:tcPr>
+                </a:tc>
+                <a:tc>
+                  <a:txBody>
+                    <a:bodyPr/>
+                    <a:lstStyle/>
+                    <a:p>
+                      <a:pPr algn="l"/>
+                      <a:r>
+                        <a:rPr sz="1000" b="0">
+                          <a:solidFill>
+                            <a:srgbClr val="1D1B43"/>
+                          </a:solidFill>
+                          <a:latin typeface="Calibri"/>
+                        </a:rPr>
+                        <a:t>06/05/2026</a:t>
+                      </a:r>
+                    </a:p>
+                  </a:txBody>
+                  <a:tcPr>
+                    <a:solidFill>
+                      <a:srgbClr val="F2F2F2"/>
+                    </a:solidFill>
+                  </a:tcPr>
+                </a:tc>
+                <a:tc>
+                  <a:txBody>
+                    <a:bodyPr/>
+                    <a:lstStyle/>
+                    <a:p>
+                      <a:pPr algn="l"/>
+                      <a:r>
+                        <a:rPr sz="1000" b="0">
+                          <a:solidFill>
+                            <a:srgbClr val="1D1B43"/>
+                          </a:solidFill>
+                          <a:latin typeface="Calibri"/>
+                        </a:rPr>
+                        <a:t>ENTREGUE FORA DO PRAZO</a:t>
+                      </a:r>
+                    </a:p>
+                  </a:txBody>
+                  <a:tcPr>
+                    <a:solidFill>
+                      <a:srgbClr val="F2F2F2"/>
+                    </a:solidFill>
+                  </a:tcPr>
+                </a:tc>
+              </a:tr>
+              <a:tr h="254000">
+                <a:tc>
+                  <a:txBody>
+                    <a:bodyPr/>
+                    <a:lstStyle/>
+                    <a:p>
+                      <a:pPr algn="l"/>
+                      <a:r>
+                        <a:rPr sz="1000" b="0">
+                          <a:solidFill>
+                            <a:srgbClr val="1D1B43"/>
+                          </a:solidFill>
+                          <a:latin typeface="Calibri"/>
+                        </a:rPr>
+                        <a:t>281291</a:t>
+                      </a:r>
+                    </a:p>
+                  </a:txBody>
+                  <a:tcPr>
+                    <a:solidFill>
+                      <a:srgbClr val="FFFFFF"/>
+                    </a:solidFill>
+                  </a:tcPr>
+                </a:tc>
+                <a:tc>
+                  <a:txBody>
+                    <a:bodyPr/>
+                    <a:lstStyle/>
+                    <a:p>
+                      <a:pPr algn="l"/>
+                      <a:r>
+                        <a:rPr sz="1000" b="0">
+                          <a:solidFill>
+                            <a:srgbClr val="1D1B43"/>
+                          </a:solidFill>
+                          <a:latin typeface="Calibri"/>
+                        </a:rPr>
+                        <a:t>MRH VEICULOS LTDA - RIO DE JANEIRO / RJ</a:t>
+                      </a:r>
+                    </a:p>
+                  </a:txBody>
+                  <a:tcPr>
+                    <a:solidFill>
+                      <a:srgbClr val="FFFFFF"/>
+                    </a:solidFill>
+                  </a:tcPr>
+                </a:tc>
+                <a:tc>
+                  <a:txBody>
+                    <a:bodyPr/>
+                    <a:lstStyle/>
+                    <a:p>
+                      <a:pPr algn="l"/>
+                      <a:r>
+                        <a:rPr sz="1000" b="0">
+                          <a:solidFill>
+                            <a:srgbClr val="1D1B43"/>
+                          </a:solidFill>
+                          <a:latin typeface="Calibri"/>
+                        </a:rPr>
+                        <a:t>RIO DE JANEIRO/RJ</a:t>
+                      </a:r>
+                    </a:p>
+                  </a:txBody>
+                  <a:tcPr>
+                    <a:solidFill>
+                      <a:srgbClr val="FFFFFF"/>
+                    </a:solidFill>
+                  </a:tcPr>
+                </a:tc>
+                <a:tc>
+                  <a:txBody>
+                    <a:bodyPr/>
+                    <a:lstStyle/>
+                    <a:p>
+                      <a:pPr algn="l"/>
+                      <a:r>
+                        <a:rPr sz="1000" b="0">
+                          <a:solidFill>
+                            <a:srgbClr val="1D1B43"/>
+                          </a:solidFill>
+                          <a:latin typeface="Calibri"/>
+                        </a:rPr>
+                        <a:t>06/05/2026</a:t>
+                      </a:r>
+                    </a:p>
+                  </a:txBody>
+                  <a:tcPr>
+                    <a:solidFill>
+                      <a:srgbClr val="FFFFFF"/>
+                    </a:solidFill>
+                  </a:tcPr>
+                </a:tc>
+                <a:tc>
+                  <a:txBody>
+                    <a:bodyPr/>
+                    <a:lstStyle/>
+                    <a:p>
+                      <a:pPr algn="l"/>
+                      <a:r>
+                        <a:rPr sz="1000" b="0">
+                          <a:solidFill>
+                            <a:srgbClr val="1D1B43"/>
+                          </a:solidFill>
+                          <a:latin typeface="Calibri"/>
+                        </a:rPr>
+                        <a:t>ENTREGUE FORA DO PRAZO</a:t>
+                      </a:r>
+                    </a:p>
+                  </a:txBody>
+                  <a:tcPr>
+                    <a:solidFill>
+                      <a:srgbClr val="FFFFFF"/>
+                    </a:solidFill>
+                  </a:tcPr>
+                </a:tc>
+              </a:tr>
+              <a:tr h="254000">
+                <a:tc>
+                  <a:txBody>
+                    <a:bodyPr/>
+                    <a:lstStyle/>
+                    <a:p>
+                      <a:pPr algn="l"/>
+                      <a:r>
+                        <a:rPr sz="1000" b="0">
+                          <a:solidFill>
+                            <a:srgbClr val="1D1B43"/>
+                          </a:solidFill>
+                          <a:latin typeface="Calibri"/>
+                        </a:rPr>
+                        <a:t>281633</a:t>
+                      </a:r>
+                    </a:p>
+                  </a:txBody>
+                  <a:tcPr>
+                    <a:solidFill>
+                      <a:srgbClr val="F2F2F2"/>
+                    </a:solidFill>
+                  </a:tcPr>
+                </a:tc>
+                <a:tc>
+                  <a:txBody>
+                    <a:bodyPr/>
+                    <a:lstStyle/>
+                    <a:p>
+                      <a:pPr algn="l"/>
+                      <a:r>
+                        <a:rPr sz="1000" b="0">
+                          <a:solidFill>
+                            <a:srgbClr val="1D1B43"/>
+                          </a:solidFill>
+                          <a:latin typeface="Calibri"/>
+                        </a:rPr>
+                        <a:t>MRH VEICULOS LTDA. - PORTO ALEGRE / RS</a:t>
+                      </a:r>
+                    </a:p>
+                  </a:txBody>
+                  <a:tcPr>
+                    <a:solidFill>
+                      <a:srgbClr val="F2F2F2"/>
+                    </a:solidFill>
+                  </a:tcPr>
+                </a:tc>
+                <a:tc>
+                  <a:txBody>
+                    <a:bodyPr/>
+                    <a:lstStyle/>
+                    <a:p>
+                      <a:pPr algn="l"/>
+                      <a:r>
+                        <a:rPr sz="1000" b="0">
+                          <a:solidFill>
+                            <a:srgbClr val="1D1B43"/>
+                          </a:solidFill>
+                          <a:latin typeface="Calibri"/>
+                        </a:rPr>
+                        <a:t>PORTO ALEGRE/RS</a:t>
+                      </a:r>
+                    </a:p>
+                  </a:txBody>
+                  <a:tcPr>
+                    <a:solidFill>
+                      <a:srgbClr val="F2F2F2"/>
+                    </a:solidFill>
+                  </a:tcPr>
+                </a:tc>
+                <a:tc>
+                  <a:txBody>
+                    <a:bodyPr/>
+                    <a:lstStyle/>
+                    <a:p>
+                      <a:pPr algn="l"/>
+                      <a:r>
+                        <a:rPr sz="1000" b="0">
+                          <a:solidFill>
+                            <a:srgbClr val="1D1B43"/>
+                          </a:solidFill>
+                          <a:latin typeface="Calibri"/>
+                        </a:rPr>
+                        <a:t>07/05/2026</a:t>
+                      </a:r>
+                    </a:p>
+                  </a:txBody>
+                  <a:tcPr>
+                    <a:solidFill>
+                      <a:srgbClr val="F2F2F2"/>
+                    </a:solidFill>
+                  </a:tcPr>
+                </a:tc>
+                <a:tc>
+                  <a:txBody>
+                    <a:bodyPr/>
+                    <a:lstStyle/>
+                    <a:p>
+                      <a:pPr algn="l"/>
+                      <a:r>
+                        <a:rPr sz="1000" b="0">
+                          <a:solidFill>
+                            <a:srgbClr val="1D1B43"/>
+                          </a:solidFill>
+                          <a:latin typeface="Calibri"/>
+                        </a:rPr>
+                        <a:t>ENTREGUE FORA DO PRAZO</a:t>
+                      </a:r>
+                    </a:p>
+                  </a:txBody>
+                  <a:tcPr>
+                    <a:solidFill>
+                      <a:srgbClr val="F2F2F2"/>
+                    </a:solidFill>
+                  </a:tcPr>
+                </a:tc>
+              </a:tr>
+              <a:tr h="254000">
+                <a:tc>
+                  <a:txBody>
+                    <a:bodyPr/>
+                    <a:lstStyle/>
+                    <a:p>
+                      <a:pPr algn="l"/>
+                      <a:r>
+                        <a:rPr sz="1000" b="0">
+                          <a:solidFill>
+                            <a:srgbClr val="1D1B43"/>
+                          </a:solidFill>
+                          <a:latin typeface="Calibri"/>
+                        </a:rPr>
+                        <a:t>281808</a:t>
+                      </a:r>
+                    </a:p>
+                  </a:txBody>
+                  <a:tcPr>
+                    <a:solidFill>
+                      <a:srgbClr val="FFFFFF"/>
+                    </a:solidFill>
+                  </a:tcPr>
+                </a:tc>
+                <a:tc>
+                  <a:txBody>
+                    <a:bodyPr/>
+                    <a:lstStyle/>
+                    <a:p>
+                      <a:pPr algn="l"/>
+                      <a:r>
+                        <a:rPr sz="1000" b="0">
+                          <a:solidFill>
+                            <a:srgbClr val="1D1B43"/>
+                          </a:solidFill>
+                          <a:latin typeface="Calibri"/>
+                        </a:rPr>
+                        <a:t>MRH VEICULOS LTDA. - SAO PAULO / SP</a:t>
+                      </a:r>
+                    </a:p>
+                  </a:txBody>
+                  <a:tcPr>
+                    <a:solidFill>
+                      <a:srgbClr val="FFFFFF"/>
+                    </a:solidFill>
+                  </a:tcPr>
+                </a:tc>
+                <a:tc>
+                  <a:txBody>
+                    <a:bodyPr/>
+                    <a:lstStyle/>
+                    <a:p>
+                      <a:pPr algn="l"/>
+                      <a:r>
+                        <a:rPr sz="1000" b="0">
+                          <a:solidFill>
+                            <a:srgbClr val="1D1B43"/>
+                          </a:solidFill>
+                          <a:latin typeface="Calibri"/>
+                        </a:rPr>
+                        <a:t>SAO PAULO/SP</a:t>
+                      </a:r>
+                    </a:p>
+                  </a:txBody>
+                  <a:tcPr>
+                    <a:solidFill>
+                      <a:srgbClr val="FFFFFF"/>
+                    </a:solidFill>
+                  </a:tcPr>
+                </a:tc>
+                <a:tc>
+                  <a:txBody>
+                    <a:bodyPr/>
+                    <a:lstStyle/>
+                    <a:p>
+                      <a:pPr algn="l"/>
+                      <a:r>
+                        <a:rPr sz="1000" b="0">
+                          <a:solidFill>
+                            <a:srgbClr val="1D1B43"/>
+                          </a:solidFill>
+                          <a:latin typeface="Calibri"/>
+                        </a:rPr>
+                        <a:t>06/05/2026</a:t>
+                      </a:r>
+                    </a:p>
+                  </a:txBody>
+                  <a:tcPr>
+                    <a:solidFill>
+                      <a:srgbClr val="FFFFFF"/>
+                    </a:solidFill>
+                  </a:tcPr>
+                </a:tc>
+                <a:tc>
+                  <a:txBody>
+                    <a:bodyPr/>
+                    <a:lstStyle/>
+                    <a:p>
+                      <a:pPr algn="l"/>
+                      <a:r>
+                        <a:rPr sz="1000" b="0">
+                          <a:solidFill>
+                            <a:srgbClr val="1D1B43"/>
+                          </a:solidFill>
+                          <a:latin typeface="Calibri"/>
+                        </a:rPr>
+                        <a:t>ENTREGUE FORA DO PRAZO</a:t>
+                      </a:r>
+                    </a:p>
+                  </a:txBody>
+                  <a:tcPr>
+                    <a:solidFill>
+                      <a:srgbClr val="FFFFFF"/>
+                    </a:solidFill>
+                  </a:tcPr>
+                </a:tc>
+              </a:tr>
+              <a:tr h="254000">
+                <a:tc>
+                  <a:txBody>
+                    <a:bodyPr/>
+                    <a:lstStyle/>
+                    <a:p>
+                      <a:pPr algn="l"/>
+                      <a:r>
+                        <a:rPr sz="1000" b="0">
+                          <a:solidFill>
+                            <a:srgbClr val="1D1B43"/>
+                          </a:solidFill>
+                          <a:latin typeface="Calibri"/>
+                        </a:rPr>
+                        <a:t>282028</a:t>
+                      </a:r>
+                    </a:p>
+                  </a:txBody>
+                  <a:tcPr>
+                    <a:solidFill>
+                      <a:srgbClr val="F2F2F2"/>
+                    </a:solidFill>
+                  </a:tcPr>
+                </a:tc>
+                <a:tc>
+                  <a:txBody>
+                    <a:bodyPr/>
+                    <a:lstStyle/>
+                    <a:p>
+                      <a:pPr algn="l"/>
+                      <a:r>
+                        <a:rPr sz="1000" b="0">
+                          <a:solidFill>
+                            <a:srgbClr val="1D1B43"/>
+                          </a:solidFill>
+                          <a:latin typeface="Calibri"/>
+                        </a:rPr>
+                        <a:t>FORTE LOGISTICA - ITAJAI / SC</a:t>
+                      </a:r>
+                    </a:p>
+                  </a:txBody>
+                  <a:tcPr>
+                    <a:solidFill>
+                      <a:srgbClr val="F2F2F2"/>
+                    </a:solidFill>
+                  </a:tcPr>
+                </a:tc>
+                <a:tc>
+                  <a:txBody>
+                    <a:bodyPr/>
+                    <a:lstStyle/>
+                    <a:p>
+                      <a:pPr algn="l"/>
+                      <a:r>
+                        <a:rPr sz="1000" b="0">
+                          <a:solidFill>
+                            <a:srgbClr val="1D1B43"/>
+                          </a:solidFill>
+                          <a:latin typeface="Calibri"/>
+                        </a:rPr>
+                        <a:t>ITAJAI/SC</a:t>
+                      </a:r>
+                    </a:p>
+                  </a:txBody>
+                  <a:tcPr>
+                    <a:solidFill>
+                      <a:srgbClr val="F2F2F2"/>
+                    </a:solidFill>
+                  </a:tcPr>
+                </a:tc>
+                <a:tc>
+                  <a:txBody>
+                    <a:bodyPr/>
+                    <a:lstStyle/>
+                    <a:p>
+                      <a:pPr algn="l"/>
+                      <a:r>
+                        <a:rPr sz="1000" b="0">
+                          <a:solidFill>
+                            <a:srgbClr val="1D1B43"/>
+                          </a:solidFill>
+                          <a:latin typeface="Calibri"/>
+                        </a:rPr>
+                        <a:t>12/05/2026</a:t>
+                      </a:r>
+                    </a:p>
+                  </a:txBody>
+                  <a:tcPr>
+                    <a:solidFill>
+                      <a:srgbClr val="F2F2F2"/>
+                    </a:solidFill>
+                  </a:tcPr>
+                </a:tc>
+                <a:tc>
+                  <a:txBody>
+                    <a:bodyPr/>
+                    <a:lstStyle/>
+                    <a:p>
+                      <a:pPr algn="l"/>
+                      <a:r>
+                        <a:rPr sz="1000" b="0">
+                          <a:solidFill>
+                            <a:srgbClr val="1D1B43"/>
+                          </a:solidFill>
+                          <a:latin typeface="Calibri"/>
+                        </a:rPr>
+                        <a:t>ENTREGUE FORA DO PRAZO</a:t>
+                      </a:r>
+                    </a:p>
+                  </a:txBody>
+                  <a:tcPr>
+                    <a:solidFill>
+                      <a:srgbClr val="F2F2F2"/>
+                    </a:solidFill>
+                  </a:tcPr>
+                </a:tc>
+              </a:tr>
+              <a:tr h="254000">
+                <a:tc>
+                  <a:txBody>
+                    <a:bodyPr/>
+                    <a:lstStyle/>
+                    <a:p>
+                      <a:pPr algn="l"/>
+                      <a:r>
+                        <a:rPr sz="1000" b="0">
+                          <a:solidFill>
+                            <a:srgbClr val="1D1B43"/>
+                          </a:solidFill>
+                          <a:latin typeface="Calibri"/>
+                        </a:rPr>
+                        <a:t>282179</a:t>
                       </a:r>
                     </a:p>
                   </a:txBody>
@@ -5549,7 +6251,7 @@
                           </a:solidFill>
                           <a:latin typeface="Calibri"/>
                         </a:rPr>
-                        <a:t>09/04/2026</a:t>
+                        <a:t>12/05/2026</a:t>
                       </a:r>
                     </a:p>
                   </a:txBody>
@@ -5583,90 +6285,90 @@
                   </a:tcPr>
                 </a:tc>
               </a:tr>
-              <a:tr h="384048">
-                <a:tc>
-                  <a:txBody>
-                    <a:bodyPr/>
-                    <a:lstStyle/>
-                    <a:p>
-                      <a:pPr algn="l"/>
-                      <a:r>
-                        <a:rPr sz="1000" b="0">
-                          <a:solidFill>
-                            <a:srgbClr val="1D1B43"/>
-                          </a:solidFill>
-                          <a:latin typeface="Calibri"/>
-                        </a:rPr>
-                        <a:t>279635</a:t>
-                      </a:r>
-                    </a:p>
-                  </a:txBody>
-                  <a:tcPr>
-                    <a:solidFill>
-                      <a:srgbClr val="F2F2F2"/>
-                    </a:solidFill>
-                  </a:tcPr>
-                </a:tc>
-                <a:tc>
-                  <a:txBody>
-                    <a:bodyPr/>
-                    <a:lstStyle/>
-                    <a:p>
-                      <a:pPr algn="l"/>
-                      <a:r>
-                        <a:rPr sz="1000" b="0">
-                          <a:solidFill>
-                            <a:srgbClr val="1D1B43"/>
-                          </a:solidFill>
-                          <a:latin typeface="Calibri"/>
-                        </a:rPr>
-                        <a:t>MRH VEICULOS LTDA - RIBEIRAO PRETO / SP</a:t>
-                      </a:r>
-                    </a:p>
-                  </a:txBody>
-                  <a:tcPr>
-                    <a:solidFill>
-                      <a:srgbClr val="F2F2F2"/>
-                    </a:solidFill>
-                  </a:tcPr>
-                </a:tc>
-                <a:tc>
-                  <a:txBody>
-                    <a:bodyPr/>
-                    <a:lstStyle/>
-                    <a:p>
-                      <a:pPr algn="l"/>
-                      <a:r>
-                        <a:rPr sz="1000" b="0">
-                          <a:solidFill>
-                            <a:srgbClr val="1D1B43"/>
-                          </a:solidFill>
-                          <a:latin typeface="Calibri"/>
-                        </a:rPr>
-                        <a:t>RIBEIRAO PRETO/SP</a:t>
-                      </a:r>
-                    </a:p>
-                  </a:txBody>
-                  <a:tcPr>
-                    <a:solidFill>
-                      <a:srgbClr val="F2F2F2"/>
-                    </a:solidFill>
-                  </a:tcPr>
-                </a:tc>
-                <a:tc>
-                  <a:txBody>
-                    <a:bodyPr/>
-                    <a:lstStyle/>
-                    <a:p>
-                      <a:pPr algn="l"/>
-                      <a:r>
-                        <a:rPr sz="1000" b="0">
-                          <a:solidFill>
-                            <a:srgbClr val="1D1B43"/>
-                          </a:solidFill>
-                          <a:latin typeface="Calibri"/>
-                        </a:rPr>
-                        <a:t>23/04/2026</a:t>
+              <a:tr h="254000">
+                <a:tc>
+                  <a:txBody>
+                    <a:bodyPr/>
+                    <a:lstStyle/>
+                    <a:p>
+                      <a:pPr algn="l"/>
+                      <a:r>
+                        <a:rPr sz="1000" b="0">
+                          <a:solidFill>
+                            <a:srgbClr val="1D1B43"/>
+                          </a:solidFill>
+                          <a:latin typeface="Calibri"/>
+                        </a:rPr>
+                        <a:t>282365</a:t>
+                      </a:r>
+                    </a:p>
+                  </a:txBody>
+                  <a:tcPr>
+                    <a:solidFill>
+                      <a:srgbClr val="F2F2F2"/>
+                    </a:solidFill>
+                  </a:tcPr>
+                </a:tc>
+                <a:tc>
+                  <a:txBody>
+                    <a:bodyPr/>
+                    <a:lstStyle/>
+                    <a:p>
+                      <a:pPr algn="l"/>
+                      <a:r>
+                        <a:rPr sz="1000" b="0">
+                          <a:solidFill>
+                            <a:srgbClr val="1D1B43"/>
+                          </a:solidFill>
+                          <a:latin typeface="Calibri"/>
+                        </a:rPr>
+                        <a:t>CENTRO TECNICO DE VE - SAO PAULO / SP</a:t>
+                      </a:r>
+                    </a:p>
+                  </a:txBody>
+                  <a:tcPr>
+                    <a:solidFill>
+                      <a:srgbClr val="F2F2F2"/>
+                    </a:solidFill>
+                  </a:tcPr>
+                </a:tc>
+                <a:tc>
+                  <a:txBody>
+                    <a:bodyPr/>
+                    <a:lstStyle/>
+                    <a:p>
+                      <a:pPr algn="l"/>
+                      <a:r>
+                        <a:rPr sz="1000" b="0">
+                          <a:solidFill>
+                            <a:srgbClr val="1D1B43"/>
+                          </a:solidFill>
+                          <a:latin typeface="Calibri"/>
+                        </a:rPr>
+                        <a:t>SAO PAULO/SP</a:t>
+                      </a:r>
+                    </a:p>
+                  </a:txBody>
+                  <a:tcPr>
+                    <a:solidFill>
+                      <a:srgbClr val="F2F2F2"/>
+                    </a:solidFill>
+                  </a:tcPr>
+                </a:tc>
+                <a:tc>
+                  <a:txBody>
+                    <a:bodyPr/>
+                    <a:lstStyle/>
+                    <a:p>
+                      <a:pPr algn="l"/>
+                      <a:r>
+                        <a:rPr sz="1000" b="0">
+                          <a:solidFill>
+                            <a:srgbClr val="1D1B43"/>
+                          </a:solidFill>
+                          <a:latin typeface="Calibri"/>
+                        </a:rPr>
+                        <a:t>08/05/2026</a:t>
                       </a:r>
                     </a:p>
                   </a:txBody>
@@ -5700,27 +6402,612 @@
                   </a:tcPr>
                 </a:tc>
               </a:tr>
-              <a:tr h="384048">
-                <a:tc>
-                  <a:txBody>
-                    <a:bodyPr/>
-                    <a:lstStyle/>
-                    <a:p>
-                      <a:pPr algn="l"/>
-                      <a:r>
-                        <a:rPr sz="1000" b="0">
-                          <a:solidFill>
-                            <a:srgbClr val="1D1B43"/>
-                          </a:solidFill>
-                          <a:latin typeface="Calibri"/>
-                        </a:rPr>
-                        <a:t>280197</a:t>
-                      </a:r>
-                    </a:p>
-                  </a:txBody>
-                  <a:tcPr>
-                    <a:solidFill>
-                      <a:srgbClr val="FFFFFF"/>
+              <a:tr h="254000">
+                <a:tc>
+                  <a:txBody>
+                    <a:bodyPr/>
+                    <a:lstStyle/>
+                    <a:p>
+                      <a:pPr algn="l"/>
+                      <a:r>
+                        <a:rPr sz="1000" b="0">
+                          <a:solidFill>
+                            <a:srgbClr val="1D1B43"/>
+                          </a:solidFill>
+                          <a:latin typeface="Calibri"/>
+                        </a:rPr>
+                        <a:t>282369</a:t>
+                      </a:r>
+                    </a:p>
+                  </a:txBody>
+                  <a:tcPr>
+                    <a:solidFill>
+                      <a:srgbClr val="FFFFFF"/>
+                    </a:solidFill>
+                  </a:tcPr>
+                </a:tc>
+                <a:tc>
+                  <a:txBody>
+                    <a:bodyPr/>
+                    <a:lstStyle/>
+                    <a:p>
+                      <a:pPr algn="l"/>
+                      <a:r>
+                        <a:rPr sz="1000" b="0">
+                          <a:solidFill>
+                            <a:srgbClr val="1D1B43"/>
+                          </a:solidFill>
+                          <a:latin typeface="Calibri"/>
+                        </a:rPr>
+                        <a:t>DUO SP COMERCIO DE V - SAO PAULO / SP</a:t>
+                      </a:r>
+                    </a:p>
+                  </a:txBody>
+                  <a:tcPr>
+                    <a:solidFill>
+                      <a:srgbClr val="FFFFFF"/>
+                    </a:solidFill>
+                  </a:tcPr>
+                </a:tc>
+                <a:tc>
+                  <a:txBody>
+                    <a:bodyPr/>
+                    <a:lstStyle/>
+                    <a:p>
+                      <a:pPr algn="l"/>
+                      <a:r>
+                        <a:rPr sz="1000" b="0">
+                          <a:solidFill>
+                            <a:srgbClr val="1D1B43"/>
+                          </a:solidFill>
+                          <a:latin typeface="Calibri"/>
+                        </a:rPr>
+                        <a:t>SAO PAULO/SP</a:t>
+                      </a:r>
+                    </a:p>
+                  </a:txBody>
+                  <a:tcPr>
+                    <a:solidFill>
+                      <a:srgbClr val="FFFFFF"/>
+                    </a:solidFill>
+                  </a:tcPr>
+                </a:tc>
+                <a:tc>
+                  <a:txBody>
+                    <a:bodyPr/>
+                    <a:lstStyle/>
+                    <a:p>
+                      <a:pPr algn="l"/>
+                      <a:r>
+                        <a:rPr sz="1000" b="0">
+                          <a:solidFill>
+                            <a:srgbClr val="1D1B43"/>
+                          </a:solidFill>
+                          <a:latin typeface="Calibri"/>
+                        </a:rPr>
+                        <a:t>08/05/2026</a:t>
+                      </a:r>
+                    </a:p>
+                  </a:txBody>
+                  <a:tcPr>
+                    <a:solidFill>
+                      <a:srgbClr val="FFFFFF"/>
+                    </a:solidFill>
+                  </a:tcPr>
+                </a:tc>
+                <a:tc>
+                  <a:txBody>
+                    <a:bodyPr/>
+                    <a:lstStyle/>
+                    <a:p>
+                      <a:pPr algn="l"/>
+                      <a:r>
+                        <a:rPr sz="1000" b="0">
+                          <a:solidFill>
+                            <a:srgbClr val="1D1B43"/>
+                          </a:solidFill>
+                          <a:latin typeface="Calibri"/>
+                        </a:rPr>
+                        <a:t>ENTREGUE FORA DO PRAZO</a:t>
+                      </a:r>
+                    </a:p>
+                  </a:txBody>
+                  <a:tcPr>
+                    <a:solidFill>
+                      <a:srgbClr val="FFFFFF"/>
+                    </a:solidFill>
+                  </a:tcPr>
+                </a:tc>
+              </a:tr>
+              <a:tr h="254000">
+                <a:tc>
+                  <a:txBody>
+                    <a:bodyPr/>
+                    <a:lstStyle/>
+                    <a:p>
+                      <a:pPr algn="l"/>
+                      <a:r>
+                        <a:rPr sz="1000" b="0">
+                          <a:solidFill>
+                            <a:srgbClr val="1D1B43"/>
+                          </a:solidFill>
+                          <a:latin typeface="Calibri"/>
+                        </a:rPr>
+                        <a:t>282370</a:t>
+                      </a:r>
+                    </a:p>
+                  </a:txBody>
+                  <a:tcPr>
+                    <a:solidFill>
+                      <a:srgbClr val="F2F2F2"/>
+                    </a:solidFill>
+                  </a:tcPr>
+                </a:tc>
+                <a:tc>
+                  <a:txBody>
+                    <a:bodyPr/>
+                    <a:lstStyle/>
+                    <a:p>
+                      <a:pPr algn="l"/>
+                      <a:r>
+                        <a:rPr sz="1000" b="0">
+                          <a:solidFill>
+                            <a:srgbClr val="1D1B43"/>
+                          </a:solidFill>
+                          <a:latin typeface="Calibri"/>
+                        </a:rPr>
+                        <a:t>PORSCHER BRASIL IMPO - SAO PAULO / SP</a:t>
+                      </a:r>
+                    </a:p>
+                  </a:txBody>
+                  <a:tcPr>
+                    <a:solidFill>
+                      <a:srgbClr val="F2F2F2"/>
+                    </a:solidFill>
+                  </a:tcPr>
+                </a:tc>
+                <a:tc>
+                  <a:txBody>
+                    <a:bodyPr/>
+                    <a:lstStyle/>
+                    <a:p>
+                      <a:pPr algn="l"/>
+                      <a:r>
+                        <a:rPr sz="1000" b="0">
+                          <a:solidFill>
+                            <a:srgbClr val="1D1B43"/>
+                          </a:solidFill>
+                          <a:latin typeface="Calibri"/>
+                        </a:rPr>
+                        <a:t>SAO PAULO/SP</a:t>
+                      </a:r>
+                    </a:p>
+                  </a:txBody>
+                  <a:tcPr>
+                    <a:solidFill>
+                      <a:srgbClr val="F2F2F2"/>
+                    </a:solidFill>
+                  </a:tcPr>
+                </a:tc>
+                <a:tc>
+                  <a:txBody>
+                    <a:bodyPr/>
+                    <a:lstStyle/>
+                    <a:p>
+                      <a:pPr algn="l"/>
+                      <a:r>
+                        <a:rPr sz="1000" b="0">
+                          <a:solidFill>
+                            <a:srgbClr val="1D1B43"/>
+                          </a:solidFill>
+                          <a:latin typeface="Calibri"/>
+                        </a:rPr>
+                        <a:t>08/05/2026</a:t>
+                      </a:r>
+                    </a:p>
+                  </a:txBody>
+                  <a:tcPr>
+                    <a:solidFill>
+                      <a:srgbClr val="F2F2F2"/>
+                    </a:solidFill>
+                  </a:tcPr>
+                </a:tc>
+                <a:tc>
+                  <a:txBody>
+                    <a:bodyPr/>
+                    <a:lstStyle/>
+                    <a:p>
+                      <a:pPr algn="l"/>
+                      <a:r>
+                        <a:rPr sz="1000" b="0">
+                          <a:solidFill>
+                            <a:srgbClr val="1D1B43"/>
+                          </a:solidFill>
+                          <a:latin typeface="Calibri"/>
+                        </a:rPr>
+                        <a:t>ENTREGUE FORA DO PRAZO</a:t>
+                      </a:r>
+                    </a:p>
+                  </a:txBody>
+                  <a:tcPr>
+                    <a:solidFill>
+                      <a:srgbClr val="F2F2F2"/>
+                    </a:solidFill>
+                  </a:tcPr>
+                </a:tc>
+              </a:tr>
+              <a:tr h="254000">
+                <a:tc>
+                  <a:txBody>
+                    <a:bodyPr/>
+                    <a:lstStyle/>
+                    <a:p>
+                      <a:pPr algn="l"/>
+                      <a:r>
+                        <a:rPr sz="1000" b="0">
+                          <a:solidFill>
+                            <a:srgbClr val="1D1B43"/>
+                          </a:solidFill>
+                          <a:latin typeface="Calibri"/>
+                        </a:rPr>
+                        <a:t>282372</a:t>
+                      </a:r>
+                    </a:p>
+                  </a:txBody>
+                  <a:tcPr>
+                    <a:solidFill>
+                      <a:srgbClr val="FFFFFF"/>
+                    </a:solidFill>
+                  </a:tcPr>
+                </a:tc>
+                <a:tc>
+                  <a:txBody>
+                    <a:bodyPr/>
+                    <a:lstStyle/>
+                    <a:p>
+                      <a:pPr algn="l"/>
+                      <a:r>
+                        <a:rPr sz="1000" b="0">
+                          <a:solidFill>
+                            <a:srgbClr val="1D1B43"/>
+                          </a:solidFill>
+                          <a:latin typeface="Calibri"/>
+                        </a:rPr>
+                        <a:t>MRH VEICULOS LTDA. - SAO PAULO / SP</a:t>
+                      </a:r>
+                    </a:p>
+                  </a:txBody>
+                  <a:tcPr>
+                    <a:solidFill>
+                      <a:srgbClr val="FFFFFF"/>
+                    </a:solidFill>
+                  </a:tcPr>
+                </a:tc>
+                <a:tc>
+                  <a:txBody>
+                    <a:bodyPr/>
+                    <a:lstStyle/>
+                    <a:p>
+                      <a:pPr algn="l"/>
+                      <a:r>
+                        <a:rPr sz="1000" b="0">
+                          <a:solidFill>
+                            <a:srgbClr val="1D1B43"/>
+                          </a:solidFill>
+                          <a:latin typeface="Calibri"/>
+                        </a:rPr>
+                        <a:t>SAO PAULO/SP</a:t>
+                      </a:r>
+                    </a:p>
+                  </a:txBody>
+                  <a:tcPr>
+                    <a:solidFill>
+                      <a:srgbClr val="FFFFFF"/>
+                    </a:solidFill>
+                  </a:tcPr>
+                </a:tc>
+                <a:tc>
+                  <a:txBody>
+                    <a:bodyPr/>
+                    <a:lstStyle/>
+                    <a:p>
+                      <a:pPr algn="l"/>
+                      <a:r>
+                        <a:rPr sz="1000" b="0">
+                          <a:solidFill>
+                            <a:srgbClr val="1D1B43"/>
+                          </a:solidFill>
+                          <a:latin typeface="Calibri"/>
+                        </a:rPr>
+                        <a:t>08/05/2026</a:t>
+                      </a:r>
+                    </a:p>
+                  </a:txBody>
+                  <a:tcPr>
+                    <a:solidFill>
+                      <a:srgbClr val="FFFFFF"/>
+                    </a:solidFill>
+                  </a:tcPr>
+                </a:tc>
+                <a:tc>
+                  <a:txBody>
+                    <a:bodyPr/>
+                    <a:lstStyle/>
+                    <a:p>
+                      <a:pPr algn="l"/>
+                      <a:r>
+                        <a:rPr sz="1000" b="0">
+                          <a:solidFill>
+                            <a:srgbClr val="1D1B43"/>
+                          </a:solidFill>
+                          <a:latin typeface="Calibri"/>
+                        </a:rPr>
+                        <a:t>ENTREGUE FORA DO PRAZO</a:t>
+                      </a:r>
+                    </a:p>
+                  </a:txBody>
+                  <a:tcPr>
+                    <a:solidFill>
+                      <a:srgbClr val="FFFFFF"/>
+                    </a:solidFill>
+                  </a:tcPr>
+                </a:tc>
+              </a:tr>
+              <a:tr h="254000">
+                <a:tc>
+                  <a:txBody>
+                    <a:bodyPr/>
+                    <a:lstStyle/>
+                    <a:p>
+                      <a:pPr algn="l"/>
+                      <a:r>
+                        <a:rPr sz="1000" b="0">
+                          <a:solidFill>
+                            <a:srgbClr val="1D1B43"/>
+                          </a:solidFill>
+                          <a:latin typeface="Calibri"/>
+                        </a:rPr>
+                        <a:t>282373</a:t>
+                      </a:r>
+                    </a:p>
+                  </a:txBody>
+                  <a:tcPr>
+                    <a:solidFill>
+                      <a:srgbClr val="F2F2F2"/>
+                    </a:solidFill>
+                  </a:tcPr>
+                </a:tc>
+                <a:tc>
+                  <a:txBody>
+                    <a:bodyPr/>
+                    <a:lstStyle/>
+                    <a:p>
+                      <a:pPr algn="l"/>
+                      <a:r>
+                        <a:rPr sz="1000" b="0">
+                          <a:solidFill>
+                            <a:srgbClr val="1D1B43"/>
+                          </a:solidFill>
+                          <a:latin typeface="Calibri"/>
+                        </a:rPr>
+                        <a:t>CENTRO TECNICO DE VE - SAO PAULO / SP</a:t>
+                      </a:r>
+                    </a:p>
+                  </a:txBody>
+                  <a:tcPr>
+                    <a:solidFill>
+                      <a:srgbClr val="F2F2F2"/>
+                    </a:solidFill>
+                  </a:tcPr>
+                </a:tc>
+                <a:tc>
+                  <a:txBody>
+                    <a:bodyPr/>
+                    <a:lstStyle/>
+                    <a:p>
+                      <a:pPr algn="l"/>
+                      <a:r>
+                        <a:rPr sz="1000" b="0">
+                          <a:solidFill>
+                            <a:srgbClr val="1D1B43"/>
+                          </a:solidFill>
+                          <a:latin typeface="Calibri"/>
+                        </a:rPr>
+                        <a:t>SAO PAULO/SP</a:t>
+                      </a:r>
+                    </a:p>
+                  </a:txBody>
+                  <a:tcPr>
+                    <a:solidFill>
+                      <a:srgbClr val="F2F2F2"/>
+                    </a:solidFill>
+                  </a:tcPr>
+                </a:tc>
+                <a:tc>
+                  <a:txBody>
+                    <a:bodyPr/>
+                    <a:lstStyle/>
+                    <a:p>
+                      <a:pPr algn="l"/>
+                      <a:r>
+                        <a:rPr sz="1000" b="0">
+                          <a:solidFill>
+                            <a:srgbClr val="1D1B43"/>
+                          </a:solidFill>
+                          <a:latin typeface="Calibri"/>
+                        </a:rPr>
+                        <a:t>08/05/2026</a:t>
+                      </a:r>
+                    </a:p>
+                  </a:txBody>
+                  <a:tcPr>
+                    <a:solidFill>
+                      <a:srgbClr val="F2F2F2"/>
+                    </a:solidFill>
+                  </a:tcPr>
+                </a:tc>
+                <a:tc>
+                  <a:txBody>
+                    <a:bodyPr/>
+                    <a:lstStyle/>
+                    <a:p>
+                      <a:pPr algn="l"/>
+                      <a:r>
+                        <a:rPr sz="1000" b="0">
+                          <a:solidFill>
+                            <a:srgbClr val="1D1B43"/>
+                          </a:solidFill>
+                          <a:latin typeface="Calibri"/>
+                        </a:rPr>
+                        <a:t>ENTREGUE FORA DO PRAZO</a:t>
+                      </a:r>
+                    </a:p>
+                  </a:txBody>
+                  <a:tcPr>
+                    <a:solidFill>
+                      <a:srgbClr val="F2F2F2"/>
+                    </a:solidFill>
+                  </a:tcPr>
+                </a:tc>
+              </a:tr>
+              <a:tr h="254000">
+                <a:tc>
+                  <a:txBody>
+                    <a:bodyPr/>
+                    <a:lstStyle/>
+                    <a:p>
+                      <a:pPr algn="l"/>
+                      <a:r>
+                        <a:rPr sz="1000" b="0">
+                          <a:solidFill>
+                            <a:srgbClr val="1D1B43"/>
+                          </a:solidFill>
+                          <a:latin typeface="Calibri"/>
+                        </a:rPr>
+                        <a:t>282374</a:t>
+                      </a:r>
+                    </a:p>
+                  </a:txBody>
+                  <a:tcPr>
+                    <a:solidFill>
+                      <a:srgbClr val="FFFFFF"/>
+                    </a:solidFill>
+                  </a:tcPr>
+                </a:tc>
+                <a:tc>
+                  <a:txBody>
+                    <a:bodyPr/>
+                    <a:lstStyle/>
+                    <a:p>
+                      <a:pPr algn="l"/>
+                      <a:r>
+                        <a:rPr sz="1000" b="0">
+                          <a:solidFill>
+                            <a:srgbClr val="1D1B43"/>
+                          </a:solidFill>
+                          <a:latin typeface="Calibri"/>
+                        </a:rPr>
+                        <a:t>DUO SP COMERCIO DE V - SAO PAULO / SP</a:t>
+                      </a:r>
+                    </a:p>
+                  </a:txBody>
+                  <a:tcPr>
+                    <a:solidFill>
+                      <a:srgbClr val="FFFFFF"/>
+                    </a:solidFill>
+                  </a:tcPr>
+                </a:tc>
+                <a:tc>
+                  <a:txBody>
+                    <a:bodyPr/>
+                    <a:lstStyle/>
+                    <a:p>
+                      <a:pPr algn="l"/>
+                      <a:r>
+                        <a:rPr sz="1000" b="0">
+                          <a:solidFill>
+                            <a:srgbClr val="1D1B43"/>
+                          </a:solidFill>
+                          <a:latin typeface="Calibri"/>
+                        </a:rPr>
+                        <a:t>SAO PAULO/SP</a:t>
+                      </a:r>
+                    </a:p>
+                  </a:txBody>
+                  <a:tcPr>
+                    <a:solidFill>
+                      <a:srgbClr val="FFFFFF"/>
+                    </a:solidFill>
+                  </a:tcPr>
+                </a:tc>
+                <a:tc>
+                  <a:txBody>
+                    <a:bodyPr/>
+                    <a:lstStyle/>
+                    <a:p>
+                      <a:pPr algn="l"/>
+                      <a:r>
+                        <a:rPr sz="1000" b="0">
+                          <a:solidFill>
+                            <a:srgbClr val="1D1B43"/>
+                          </a:solidFill>
+                          <a:latin typeface="Calibri"/>
+                        </a:rPr>
+                        <a:t>08/05/2026</a:t>
+                      </a:r>
+                    </a:p>
+                  </a:txBody>
+                  <a:tcPr>
+                    <a:solidFill>
+                      <a:srgbClr val="FFFFFF"/>
+                    </a:solidFill>
+                  </a:tcPr>
+                </a:tc>
+                <a:tc>
+                  <a:txBody>
+                    <a:bodyPr/>
+                    <a:lstStyle/>
+                    <a:p>
+                      <a:pPr algn="l"/>
+                      <a:r>
+                        <a:rPr sz="1000" b="0">
+                          <a:solidFill>
+                            <a:srgbClr val="1D1B43"/>
+                          </a:solidFill>
+                          <a:latin typeface="Calibri"/>
+                        </a:rPr>
+                        <a:t>ENTREGUE FORA DO PRAZO</a:t>
+                      </a:r>
+                    </a:p>
+                  </a:txBody>
+                  <a:tcPr>
+                    <a:solidFill>
+                      <a:srgbClr val="FFFFFF"/>
+                    </a:solidFill>
+                  </a:tcPr>
+                </a:tc>
+              </a:tr>
+              <a:tr h="254000">
+                <a:tc>
+                  <a:txBody>
+                    <a:bodyPr/>
+                    <a:lstStyle/>
+                    <a:p>
+                      <a:pPr algn="l"/>
+                      <a:r>
+                        <a:rPr sz="1000" b="0">
+                          <a:solidFill>
+                            <a:srgbClr val="1D1B43"/>
+                          </a:solidFill>
+                          <a:latin typeface="Calibri"/>
+                        </a:rPr>
+                        <a:t>282882</a:t>
+                      </a:r>
+                    </a:p>
+                  </a:txBody>
+                  <a:tcPr>
+                    <a:solidFill>
+                      <a:srgbClr val="F2F2F2"/>
                     </a:solidFill>
                   </a:tcPr>
                 </a:tc>
@@ -5743,7 +7030,7 @@
                   </a:txBody>
                   <a:tcPr>
                     <a:solidFill>
-                      <a:srgbClr val="FFFFFF"/>
+                      <a:srgbClr val="F2F2F2"/>
                     </a:solidFill>
                   </a:tcPr>
                 </a:tc>
@@ -5766,30 +7053,30 @@
                   </a:txBody>
                   <a:tcPr>
                     <a:solidFill>
-                      <a:srgbClr val="FFFFFF"/>
-                    </a:solidFill>
-                  </a:tcPr>
-                </a:tc>
-                <a:tc>
-                  <a:txBody>
-                    <a:bodyPr/>
-                    <a:lstStyle/>
-                    <a:p>
-                      <a:pPr algn="l"/>
-                      <a:r>
-                        <a:rPr sz="1000" b="0">
-                          <a:solidFill>
-                            <a:srgbClr val="1D1B43"/>
-                          </a:solidFill>
-                          <a:latin typeface="Calibri"/>
-                        </a:rPr>
-                        <a:t>29/04/2026</a:t>
-                      </a:r>
-                    </a:p>
-                  </a:txBody>
-                  <a:tcPr>
-                    <a:solidFill>
-                      <a:srgbClr val="FFFFFF"/>
+                      <a:srgbClr val="F2F2F2"/>
+                    </a:solidFill>
+                  </a:tcPr>
+                </a:tc>
+                <a:tc>
+                  <a:txBody>
+                    <a:bodyPr/>
+                    <a:lstStyle/>
+                    <a:p>
+                      <a:pPr algn="l"/>
+                      <a:r>
+                        <a:rPr sz="1000" b="0">
+                          <a:solidFill>
+                            <a:srgbClr val="1D1B43"/>
+                          </a:solidFill>
+                          <a:latin typeface="Calibri"/>
+                        </a:rPr>
+                        <a:t>18/05/2026</a:t>
+                      </a:r>
+                    </a:p>
+                  </a:txBody>
+                  <a:tcPr>
+                    <a:solidFill>
+                      <a:srgbClr val="F2F2F2"/>
                     </a:solidFill>
                   </a:tcPr>
                 </a:tc>
@@ -5812,101 +7099,101 @@
                   </a:txBody>
                   <a:tcPr>
                     <a:solidFill>
-                      <a:srgbClr val="FFFFFF"/>
+                      <a:srgbClr val="F2F2F2"/>
                     </a:solidFill>
                   </a:tcPr>
                 </a:tc>
               </a:tr>
-              <a:tr h="384048">
-                <a:tc>
-                  <a:txBody>
-                    <a:bodyPr/>
-                    <a:lstStyle/>
-                    <a:p>
-                      <a:pPr algn="l"/>
-                      <a:r>
-                        <a:rPr sz="1000" b="0">
-                          <a:solidFill>
-                            <a:srgbClr val="1D1B43"/>
-                          </a:solidFill>
-                          <a:latin typeface="Calibri"/>
-                        </a:rPr>
-                        <a:t>280978</a:t>
-                      </a:r>
-                    </a:p>
-                  </a:txBody>
-                  <a:tcPr>
-                    <a:solidFill>
-                      <a:srgbClr val="F2F2F2"/>
-                    </a:solidFill>
-                  </a:tcPr>
-                </a:tc>
-                <a:tc>
-                  <a:txBody>
-                    <a:bodyPr/>
-                    <a:lstStyle/>
-                    <a:p>
-                      <a:pPr algn="l"/>
-                      <a:r>
-                        <a:rPr sz="1000" b="0">
-                          <a:solidFill>
-                            <a:srgbClr val="1D1B43"/>
-                          </a:solidFill>
-                          <a:latin typeface="Calibri"/>
-                        </a:rPr>
-                        <a:t>MRH VEICULOS LTDA - RIBEIRAO PRETO / SP</a:t>
-                      </a:r>
-                    </a:p>
-                  </a:txBody>
-                  <a:tcPr>
-                    <a:solidFill>
-                      <a:srgbClr val="F2F2F2"/>
-                    </a:solidFill>
-                  </a:tcPr>
-                </a:tc>
-                <a:tc>
-                  <a:txBody>
-                    <a:bodyPr/>
-                    <a:lstStyle/>
-                    <a:p>
-                      <a:pPr algn="l"/>
-                      <a:r>
-                        <a:rPr sz="1000" b="0">
-                          <a:solidFill>
-                            <a:srgbClr val="1D1B43"/>
-                          </a:solidFill>
-                          <a:latin typeface="Calibri"/>
-                        </a:rPr>
-                        <a:t>RIBEIRAO PRETO/SP</a:t>
-                      </a:r>
-                    </a:p>
-                  </a:txBody>
-                  <a:tcPr>
-                    <a:solidFill>
-                      <a:srgbClr val="F2F2F2"/>
-                    </a:solidFill>
-                  </a:tcPr>
-                </a:tc>
-                <a:tc>
-                  <a:txBody>
-                    <a:bodyPr/>
-                    <a:lstStyle/>
-                    <a:p>
-                      <a:pPr algn="l"/>
-                      <a:r>
-                        <a:rPr sz="1000" b="0">
-                          <a:solidFill>
-                            <a:srgbClr val="1D1B43"/>
-                          </a:solidFill>
-                          <a:latin typeface="Calibri"/>
-                        </a:rPr>
-                        <a:t>30/04/2026</a:t>
-                      </a:r>
-                    </a:p>
-                  </a:txBody>
-                  <a:tcPr>
-                    <a:solidFill>
-                      <a:srgbClr val="F2F2F2"/>
+              <a:tr h="254000">
+                <a:tc>
+                  <a:txBody>
+                    <a:bodyPr/>
+                    <a:lstStyle/>
+                    <a:p>
+                      <a:pPr algn="l"/>
+                      <a:r>
+                        <a:rPr sz="1000" b="0">
+                          <a:solidFill>
+                            <a:srgbClr val="1D1B43"/>
+                          </a:solidFill>
+                          <a:latin typeface="Calibri"/>
+                        </a:rPr>
+                        <a:t>282915</a:t>
+                      </a:r>
+                    </a:p>
+                  </a:txBody>
+                  <a:tcPr>
+                    <a:solidFill>
+                      <a:srgbClr val="FFFFFF"/>
+                    </a:solidFill>
+                  </a:tcPr>
+                </a:tc>
+                <a:tc>
+                  <a:txBody>
+                    <a:bodyPr/>
+                    <a:lstStyle/>
+                    <a:p>
+                      <a:pPr algn="l"/>
+                      <a:r>
+                        <a:rPr sz="1000" b="0">
+                          <a:solidFill>
+                            <a:srgbClr val="1D1B43"/>
+                          </a:solidFill>
+                          <a:latin typeface="Calibri"/>
+                        </a:rPr>
+                        <a:t>BMQ AUTOMOVEIS LTDA - BELO HORIZONTE / MG</a:t>
+                      </a:r>
+                    </a:p>
+                  </a:txBody>
+                  <a:tcPr>
+                    <a:solidFill>
+                      <a:srgbClr val="FFFFFF"/>
+                    </a:solidFill>
+                  </a:tcPr>
+                </a:tc>
+                <a:tc>
+                  <a:txBody>
+                    <a:bodyPr/>
+                    <a:lstStyle/>
+                    <a:p>
+                      <a:pPr algn="l"/>
+                      <a:r>
+                        <a:rPr sz="1000" b="0">
+                          <a:solidFill>
+                            <a:srgbClr val="1D1B43"/>
+                          </a:solidFill>
+                          <a:latin typeface="Calibri"/>
+                        </a:rPr>
+                        <a:t>BELO HORIZONTE/MG</a:t>
+                      </a:r>
+                    </a:p>
+                  </a:txBody>
+                  <a:tcPr>
+                    <a:solidFill>
+                      <a:srgbClr val="FFFFFF"/>
+                    </a:solidFill>
+                  </a:tcPr>
+                </a:tc>
+                <a:tc>
+                  <a:txBody>
+                    <a:bodyPr/>
+                    <a:lstStyle/>
+                    <a:p>
+                      <a:pPr algn="l"/>
+                      <a:r>
+                        <a:rPr sz="1000" b="0">
+                          <a:solidFill>
+                            <a:srgbClr val="1D1B43"/>
+                          </a:solidFill>
+                          <a:latin typeface="Calibri"/>
+                        </a:rPr>
+                        <a:t>18/05/2026</a:t>
+                      </a:r>
+                    </a:p>
+                  </a:txBody>
+                  <a:tcPr>
+                    <a:solidFill>
+                      <a:srgbClr val="FFFFFF"/>
                     </a:solidFill>
                   </a:tcPr>
                 </a:tc>
@@ -5929,7 +7216,241 @@
                   </a:txBody>
                   <a:tcPr>
                     <a:solidFill>
-                      <a:srgbClr val="F2F2F2"/>
+                      <a:srgbClr val="FFFFFF"/>
+                    </a:solidFill>
+                  </a:tcPr>
+                </a:tc>
+              </a:tr>
+              <a:tr h="254000">
+                <a:tc>
+                  <a:txBody>
+                    <a:bodyPr/>
+                    <a:lstStyle/>
+                    <a:p>
+                      <a:pPr algn="l"/>
+                      <a:r>
+                        <a:rPr sz="1000" b="0">
+                          <a:solidFill>
+                            <a:srgbClr val="1D1B43"/>
+                          </a:solidFill>
+                          <a:latin typeface="Calibri"/>
+                        </a:rPr>
+                        <a:t>283081</a:t>
+                      </a:r>
+                    </a:p>
+                  </a:txBody>
+                  <a:tcPr>
+                    <a:solidFill>
+                      <a:srgbClr val="F2F2F2"/>
+                    </a:solidFill>
+                  </a:tcPr>
+                </a:tc>
+                <a:tc>
+                  <a:txBody>
+                    <a:bodyPr/>
+                    <a:lstStyle/>
+                    <a:p>
+                      <a:pPr algn="l"/>
+                      <a:r>
+                        <a:rPr sz="1000" b="0">
+                          <a:solidFill>
+                            <a:srgbClr val="1D1B43"/>
+                          </a:solidFill>
+                          <a:latin typeface="Calibri"/>
+                        </a:rPr>
+                        <a:t>MRH VEICULOS LTDA. - FLORIANOPOLIS / SC</a:t>
+                      </a:r>
+                    </a:p>
+                  </a:txBody>
+                  <a:tcPr>
+                    <a:solidFill>
+                      <a:srgbClr val="F2F2F2"/>
+                    </a:solidFill>
+                  </a:tcPr>
+                </a:tc>
+                <a:tc>
+                  <a:txBody>
+                    <a:bodyPr/>
+                    <a:lstStyle/>
+                    <a:p>
+                      <a:pPr algn="l"/>
+                      <a:r>
+                        <a:rPr sz="1000" b="0">
+                          <a:solidFill>
+                            <a:srgbClr val="1D1B43"/>
+                          </a:solidFill>
+                          <a:latin typeface="Calibri"/>
+                        </a:rPr>
+                        <a:t>FLORIANOPOLIS/SC</a:t>
+                      </a:r>
+                    </a:p>
+                  </a:txBody>
+                  <a:tcPr>
+                    <a:solidFill>
+                      <a:srgbClr val="F2F2F2"/>
+                    </a:solidFill>
+                  </a:tcPr>
+                </a:tc>
+                <a:tc>
+                  <a:txBody>
+                    <a:bodyPr/>
+                    <a:lstStyle/>
+                    <a:p>
+                      <a:pPr algn="l"/>
+                      <a:r>
+                        <a:rPr sz="1000" b="0">
+                          <a:solidFill>
+                            <a:srgbClr val="1D1B43"/>
+                          </a:solidFill>
+                          <a:latin typeface="Calibri"/>
+                        </a:rPr>
+                        <a:t>15/05/2026</a:t>
+                      </a:r>
+                    </a:p>
+                  </a:txBody>
+                  <a:tcPr>
+                    <a:solidFill>
+                      <a:srgbClr val="F2F2F2"/>
+                    </a:solidFill>
+                  </a:tcPr>
+                </a:tc>
+                <a:tc>
+                  <a:txBody>
+                    <a:bodyPr/>
+                    <a:lstStyle/>
+                    <a:p>
+                      <a:pPr algn="l"/>
+                      <a:r>
+                        <a:rPr sz="1000" b="0">
+                          <a:solidFill>
+                            <a:srgbClr val="1D1B43"/>
+                          </a:solidFill>
+                          <a:latin typeface="Calibri"/>
+                        </a:rPr>
+                        <a:t>ENTREGUE FORA DO PRAZO</a:t>
+                      </a:r>
+                    </a:p>
+                  </a:txBody>
+                  <a:tcPr>
+                    <a:solidFill>
+                      <a:srgbClr val="F2F2F2"/>
+                    </a:solidFill>
+                  </a:tcPr>
+                </a:tc>
+              </a:tr>
+              <a:tr h="254000">
+                <a:tc>
+                  <a:txBody>
+                    <a:bodyPr/>
+                    <a:lstStyle/>
+                    <a:p>
+                      <a:pPr algn="l"/>
+                      <a:r>
+                        <a:rPr sz="1000" b="0">
+                          <a:solidFill>
+                            <a:srgbClr val="1D1B43"/>
+                          </a:solidFill>
+                          <a:latin typeface="Calibri"/>
+                        </a:rPr>
+                        <a:t>283317</a:t>
+                      </a:r>
+                    </a:p>
+                  </a:txBody>
+                  <a:tcPr>
+                    <a:solidFill>
+                      <a:srgbClr val="FFFFFF"/>
+                    </a:solidFill>
+                  </a:tcPr>
+                </a:tc>
+                <a:tc>
+                  <a:txBody>
+                    <a:bodyPr/>
+                    <a:lstStyle/>
+                    <a:p>
+                      <a:pPr algn="l"/>
+                      <a:r>
+                        <a:rPr sz="1000" b="0">
+                          <a:solidFill>
+                            <a:srgbClr val="1D1B43"/>
+                          </a:solidFill>
+                          <a:latin typeface="Calibri"/>
+                        </a:rPr>
+                        <a:t>LIA E ANNETTE INDUST - RIO DE JANEIRO / RJ</a:t>
+                      </a:r>
+                    </a:p>
+                  </a:txBody>
+                  <a:tcPr>
+                    <a:solidFill>
+                      <a:srgbClr val="FFFFFF"/>
+                    </a:solidFill>
+                  </a:tcPr>
+                </a:tc>
+                <a:tc>
+                  <a:txBody>
+                    <a:bodyPr/>
+                    <a:lstStyle/>
+                    <a:p>
+                      <a:pPr algn="l"/>
+                      <a:r>
+                        <a:rPr sz="1000" b="0">
+                          <a:solidFill>
+                            <a:srgbClr val="1D1B43"/>
+                          </a:solidFill>
+                          <a:latin typeface="Calibri"/>
+                        </a:rPr>
+                        <a:t>RIO DE JANEIRO/RJ</a:t>
+                      </a:r>
+                    </a:p>
+                  </a:txBody>
+                  <a:tcPr>
+                    <a:solidFill>
+                      <a:srgbClr val="FFFFFF"/>
+                    </a:solidFill>
+                  </a:tcPr>
+                </a:tc>
+                <a:tc>
+                  <a:txBody>
+                    <a:bodyPr/>
+                    <a:lstStyle/>
+                    <a:p>
+                      <a:pPr algn="l"/>
+                      <a:r>
+                        <a:rPr sz="1000" b="0">
+                          <a:solidFill>
+                            <a:srgbClr val="1D1B43"/>
+                          </a:solidFill>
+                          <a:latin typeface="Calibri"/>
+                        </a:rPr>
+                        <a:t>19/05/2026</a:t>
+                      </a:r>
+                    </a:p>
+                  </a:txBody>
+                  <a:tcPr>
+                    <a:solidFill>
+                      <a:srgbClr val="FFFFFF"/>
+                    </a:solidFill>
+                  </a:tcPr>
+                </a:tc>
+                <a:tc>
+                  <a:txBody>
+                    <a:bodyPr/>
+                    <a:lstStyle/>
+                    <a:p>
+                      <a:pPr algn="l"/>
+                      <a:r>
+                        <a:rPr sz="1000" b="0">
+                          <a:solidFill>
+                            <a:srgbClr val="1D1B43"/>
+                          </a:solidFill>
+                          <a:latin typeface="Calibri"/>
+                        </a:rPr>
+                        <a:t>FORA DO PRAZO</a:t>
+                      </a:r>
+                    </a:p>
+                  </a:txBody>
+                  <a:tcPr>
+                    <a:solidFill>
+                      <a:srgbClr val="FFFFFF"/>
                     </a:solidFill>
                   </a:tcPr>
                 </a:tc>
@@ -6076,7 +7597,7 @@
         </p:nvGraphicFramePr>
         <p:xfrm>
           <a:off x="731520" y="1920240"/>
-          <a:ext cx="10698480" cy="4389120"/>
+          <a:ext cx="10698480" cy="4114800"/>
         </p:xfrm>
         <a:graphic>
           <a:graphicData uri="http://schemas.openxmlformats.org/drawingml/2006/table">
@@ -6092,7 +7613,7 @@
                 <a:gridCol w="1554480"/>
                 <a:gridCol w="3108960"/>
               </a:tblGrid>
-              <a:tr h="438912">
+              <a:tr h="457200">
                 <a:tc>
                   <a:txBody>
                     <a:bodyPr/>
@@ -6232,7 +7753,7 @@
                   </a:tcPr>
                 </a:tc>
               </a:tr>
-              <a:tr h="438912">
+              <a:tr h="457200">
                 <a:tc>
                   <a:txBody>
                     <a:bodyPr/>
@@ -6269,36 +7790,176 @@
                           </a:solidFill>
                           <a:latin typeface="Calibri"/>
                         </a:rPr>
-                        <a:t>150</a:t>
-                      </a:r>
-                    </a:p>
-                  </a:txBody>
-                  <a:tcPr>
-                    <a:solidFill>
-                      <a:srgbClr val="FFFFFF"/>
-                    </a:solidFill>
-                  </a:tcPr>
-                </a:tc>
-                <a:tc>
-                  <a:txBody>
-                    <a:bodyPr/>
-                    <a:lstStyle/>
-                    <a:p>
-                      <a:pPr algn="l"/>
-                      <a:r>
-                        <a:rPr sz="1000" b="0">
-                          <a:solidFill>
-                            <a:srgbClr val="1D1B43"/>
-                          </a:solidFill>
-                          <a:latin typeface="Calibri"/>
-                        </a:rPr>
-                        <a:t>148</a:t>
-                      </a:r>
-                    </a:p>
-                  </a:txBody>
-                  <a:tcPr>
-                    <a:solidFill>
-                      <a:srgbClr val="FFFFFF"/>
+                        <a:t>92</a:t>
+                      </a:r>
+                    </a:p>
+                  </a:txBody>
+                  <a:tcPr>
+                    <a:solidFill>
+                      <a:srgbClr val="FFFFFF"/>
+                    </a:solidFill>
+                  </a:tcPr>
+                </a:tc>
+                <a:tc>
+                  <a:txBody>
+                    <a:bodyPr/>
+                    <a:lstStyle/>
+                    <a:p>
+                      <a:pPr algn="l"/>
+                      <a:r>
+                        <a:rPr sz="1000" b="0">
+                          <a:solidFill>
+                            <a:srgbClr val="1D1B43"/>
+                          </a:solidFill>
+                          <a:latin typeface="Calibri"/>
+                        </a:rPr>
+                        <a:t>84</a:t>
+                      </a:r>
+                    </a:p>
+                  </a:txBody>
+                  <a:tcPr>
+                    <a:solidFill>
+                      <a:srgbClr val="FFFFFF"/>
+                    </a:solidFill>
+                  </a:tcPr>
+                </a:tc>
+                <a:tc>
+                  <a:txBody>
+                    <a:bodyPr/>
+                    <a:lstStyle/>
+                    <a:p>
+                      <a:pPr algn="l"/>
+                      <a:r>
+                        <a:rPr sz="1000" b="0">
+                          <a:solidFill>
+                            <a:srgbClr val="1D1B43"/>
+                          </a:solidFill>
+                          <a:latin typeface="Calibri"/>
+                        </a:rPr>
+                        <a:t>8</a:t>
+                      </a:r>
+                    </a:p>
+                  </a:txBody>
+                  <a:tcPr>
+                    <a:solidFill>
+                      <a:srgbClr val="FFFFFF"/>
+                    </a:solidFill>
+                  </a:tcPr>
+                </a:tc>
+                <a:tc>
+                  <a:txBody>
+                    <a:bodyPr/>
+                    <a:lstStyle/>
+                    <a:p>
+                      <a:pPr algn="l"/>
+                      <a:r>
+                        <a:rPr sz="1000" b="0">
+                          <a:solidFill>
+                            <a:srgbClr val="1D1B43"/>
+                          </a:solidFill>
+                          <a:latin typeface="Calibri"/>
+                        </a:rPr>
+                        <a:t>91.3%</a:t>
+                      </a:r>
+                    </a:p>
+                  </a:txBody>
+                  <a:tcPr>
+                    <a:solidFill>
+                      <a:srgbClr val="FFFFFF"/>
+                    </a:solidFill>
+                  </a:tcPr>
+                </a:tc>
+                <a:tc>
+                  <a:txBody>
+                    <a:bodyPr/>
+                    <a:lstStyle/>
+                    <a:p>
+                      <a:pPr algn="l"/>
+                      <a:r>
+                        <a:rPr sz="1000" b="0">
+                          <a:solidFill>
+                            <a:srgbClr val="1D1B43"/>
+                          </a:solidFill>
+                          <a:latin typeface="Calibri"/>
+                        </a:rPr>
+                        <a:t>Regular</a:t>
+                      </a:r>
+                    </a:p>
+                  </a:txBody>
+                  <a:tcPr>
+                    <a:solidFill>
+                      <a:srgbClr val="FFFFFF"/>
+                    </a:solidFill>
+                  </a:tcPr>
+                </a:tc>
+              </a:tr>
+              <a:tr h="457200">
+                <a:tc>
+                  <a:txBody>
+                    <a:bodyPr/>
+                    <a:lstStyle/>
+                    <a:p>
+                      <a:pPr algn="l"/>
+                      <a:r>
+                        <a:rPr sz="1000" b="0">
+                          <a:solidFill>
+                            <a:srgbClr val="1D1B43"/>
+                          </a:solidFill>
+                          <a:latin typeface="Calibri"/>
+                        </a:rPr>
+                        <a:t>SC</a:t>
+                      </a:r>
+                    </a:p>
+                  </a:txBody>
+                  <a:tcPr>
+                    <a:solidFill>
+                      <a:srgbClr val="F2F2F2"/>
+                    </a:solidFill>
+                  </a:tcPr>
+                </a:tc>
+                <a:tc>
+                  <a:txBody>
+                    <a:bodyPr/>
+                    <a:lstStyle/>
+                    <a:p>
+                      <a:pPr algn="l"/>
+                      <a:r>
+                        <a:rPr sz="1000" b="0">
+                          <a:solidFill>
+                            <a:srgbClr val="1D1B43"/>
+                          </a:solidFill>
+                          <a:latin typeface="Calibri"/>
+                        </a:rPr>
+                        <a:t>31</a:t>
+                      </a:r>
+                    </a:p>
+                  </a:txBody>
+                  <a:tcPr>
+                    <a:solidFill>
+                      <a:srgbClr val="F2F2F2"/>
+                    </a:solidFill>
+                  </a:tcPr>
+                </a:tc>
+                <a:tc>
+                  <a:txBody>
+                    <a:bodyPr/>
+                    <a:lstStyle/>
+                    <a:p>
+                      <a:pPr algn="l"/>
+                      <a:r>
+                        <a:rPr sz="1000" b="0">
+                          <a:solidFill>
+                            <a:srgbClr val="1D1B43"/>
+                          </a:solidFill>
+                          <a:latin typeface="Calibri"/>
+                        </a:rPr>
+                        <a:t>29</a:t>
+                      </a:r>
+                    </a:p>
+                  </a:txBody>
+                  <a:tcPr>
+                    <a:solidFill>
+                      <a:srgbClr val="F2F2F2"/>
                     </a:solidFill>
                   </a:tcPr>
                 </a:tc>
@@ -6321,24 +7982,164 @@
                   </a:txBody>
                   <a:tcPr>
                     <a:solidFill>
-                      <a:srgbClr val="FFFFFF"/>
-                    </a:solidFill>
-                  </a:tcPr>
-                </a:tc>
-                <a:tc>
-                  <a:txBody>
-                    <a:bodyPr/>
-                    <a:lstStyle/>
-                    <a:p>
-                      <a:pPr algn="l"/>
-                      <a:r>
-                        <a:rPr sz="1000" b="0">
-                          <a:solidFill>
-                            <a:srgbClr val="1D1B43"/>
-                          </a:solidFill>
-                          <a:latin typeface="Calibri"/>
-                        </a:rPr>
-                        <a:t>98.7%</a:t>
+                      <a:srgbClr val="F2F2F2"/>
+                    </a:solidFill>
+                  </a:tcPr>
+                </a:tc>
+                <a:tc>
+                  <a:txBody>
+                    <a:bodyPr/>
+                    <a:lstStyle/>
+                    <a:p>
+                      <a:pPr algn="l"/>
+                      <a:r>
+                        <a:rPr sz="1000" b="0">
+                          <a:solidFill>
+                            <a:srgbClr val="1D1B43"/>
+                          </a:solidFill>
+                          <a:latin typeface="Calibri"/>
+                        </a:rPr>
+                        <a:t>93.5%</a:t>
+                      </a:r>
+                    </a:p>
+                  </a:txBody>
+                  <a:tcPr>
+                    <a:solidFill>
+                      <a:srgbClr val="F2F2F2"/>
+                    </a:solidFill>
+                  </a:tcPr>
+                </a:tc>
+                <a:tc>
+                  <a:txBody>
+                    <a:bodyPr/>
+                    <a:lstStyle/>
+                    <a:p>
+                      <a:pPr algn="l"/>
+                      <a:r>
+                        <a:rPr sz="1000" b="0">
+                          <a:solidFill>
+                            <a:srgbClr val="1D1B43"/>
+                          </a:solidFill>
+                          <a:latin typeface="Calibri"/>
+                        </a:rPr>
+                        <a:t>Regular</a:t>
+                      </a:r>
+                    </a:p>
+                  </a:txBody>
+                  <a:tcPr>
+                    <a:solidFill>
+                      <a:srgbClr val="F2F2F2"/>
+                    </a:solidFill>
+                  </a:tcPr>
+                </a:tc>
+              </a:tr>
+              <a:tr h="457200">
+                <a:tc>
+                  <a:txBody>
+                    <a:bodyPr/>
+                    <a:lstStyle/>
+                    <a:p>
+                      <a:pPr algn="l"/>
+                      <a:r>
+                        <a:rPr sz="1000" b="0">
+                          <a:solidFill>
+                            <a:srgbClr val="1D1B43"/>
+                          </a:solidFill>
+                          <a:latin typeface="Calibri"/>
+                        </a:rPr>
+                        <a:t>PR</a:t>
+                      </a:r>
+                    </a:p>
+                  </a:txBody>
+                  <a:tcPr>
+                    <a:solidFill>
+                      <a:srgbClr val="FFFFFF"/>
+                    </a:solidFill>
+                  </a:tcPr>
+                </a:tc>
+                <a:tc>
+                  <a:txBody>
+                    <a:bodyPr/>
+                    <a:lstStyle/>
+                    <a:p>
+                      <a:pPr algn="l"/>
+                      <a:r>
+                        <a:rPr sz="1000" b="0">
+                          <a:solidFill>
+                            <a:srgbClr val="1D1B43"/>
+                          </a:solidFill>
+                          <a:latin typeface="Calibri"/>
+                        </a:rPr>
+                        <a:t>25</a:t>
+                      </a:r>
+                    </a:p>
+                  </a:txBody>
+                  <a:tcPr>
+                    <a:solidFill>
+                      <a:srgbClr val="FFFFFF"/>
+                    </a:solidFill>
+                  </a:tcPr>
+                </a:tc>
+                <a:tc>
+                  <a:txBody>
+                    <a:bodyPr/>
+                    <a:lstStyle/>
+                    <a:p>
+                      <a:pPr algn="l"/>
+                      <a:r>
+                        <a:rPr sz="1000" b="0">
+                          <a:solidFill>
+                            <a:srgbClr val="1D1B43"/>
+                          </a:solidFill>
+                          <a:latin typeface="Calibri"/>
+                        </a:rPr>
+                        <a:t>25</a:t>
+                      </a:r>
+                    </a:p>
+                  </a:txBody>
+                  <a:tcPr>
+                    <a:solidFill>
+                      <a:srgbClr val="FFFFFF"/>
+                    </a:solidFill>
+                  </a:tcPr>
+                </a:tc>
+                <a:tc>
+                  <a:txBody>
+                    <a:bodyPr/>
+                    <a:lstStyle/>
+                    <a:p>
+                      <a:pPr algn="l"/>
+                      <a:r>
+                        <a:rPr sz="1000" b="0">
+                          <a:solidFill>
+                            <a:srgbClr val="1D1B43"/>
+                          </a:solidFill>
+                          <a:latin typeface="Calibri"/>
+                        </a:rPr>
+                        <a:t>0</a:t>
+                      </a:r>
+                    </a:p>
+                  </a:txBody>
+                  <a:tcPr>
+                    <a:solidFill>
+                      <a:srgbClr val="FFFFFF"/>
+                    </a:solidFill>
+                  </a:tcPr>
+                </a:tc>
+                <a:tc>
+                  <a:txBody>
+                    <a:bodyPr/>
+                    <a:lstStyle/>
+                    <a:p>
+                      <a:pPr algn="l"/>
+                      <a:r>
+                        <a:rPr sz="1000" b="0">
+                          <a:solidFill>
+                            <a:srgbClr val="1D1B43"/>
+                          </a:solidFill>
+                          <a:latin typeface="Calibri"/>
+                        </a:rPr>
+                        <a:t>100.0%</a:t>
                       </a:r>
                     </a:p>
                   </a:txBody>
@@ -6372,73 +8173,213 @@
                   </a:tcPr>
                 </a:tc>
               </a:tr>
-              <a:tr h="438912">
-                <a:tc>
-                  <a:txBody>
-                    <a:bodyPr/>
-                    <a:lstStyle/>
-                    <a:p>
-                      <a:pPr algn="l"/>
-                      <a:r>
-                        <a:rPr sz="1000" b="0">
-                          <a:solidFill>
-                            <a:srgbClr val="1D1B43"/>
-                          </a:solidFill>
-                          <a:latin typeface="Calibri"/>
-                        </a:rPr>
-                        <a:t>SC</a:t>
-                      </a:r>
-                    </a:p>
-                  </a:txBody>
-                  <a:tcPr>
-                    <a:solidFill>
-                      <a:srgbClr val="F2F2F2"/>
-                    </a:solidFill>
-                  </a:tcPr>
-                </a:tc>
-                <a:tc>
-                  <a:txBody>
-                    <a:bodyPr/>
-                    <a:lstStyle/>
-                    <a:p>
-                      <a:pPr algn="l"/>
-                      <a:r>
-                        <a:rPr sz="1000" b="0">
-                          <a:solidFill>
-                            <a:srgbClr val="1D1B43"/>
-                          </a:solidFill>
-                          <a:latin typeface="Calibri"/>
-                        </a:rPr>
-                        <a:t>44</a:t>
-                      </a:r>
-                    </a:p>
-                  </a:txBody>
-                  <a:tcPr>
-                    <a:solidFill>
-                      <a:srgbClr val="F2F2F2"/>
-                    </a:solidFill>
-                  </a:tcPr>
-                </a:tc>
-                <a:tc>
-                  <a:txBody>
-                    <a:bodyPr/>
-                    <a:lstStyle/>
-                    <a:p>
-                      <a:pPr algn="l"/>
-                      <a:r>
-                        <a:rPr sz="1000" b="0">
-                          <a:solidFill>
-                            <a:srgbClr val="1D1B43"/>
-                          </a:solidFill>
-                          <a:latin typeface="Calibri"/>
-                        </a:rPr>
-                        <a:t>44</a:t>
-                      </a:r>
-                    </a:p>
-                  </a:txBody>
-                  <a:tcPr>
-                    <a:solidFill>
-                      <a:srgbClr val="F2F2F2"/>
+              <a:tr h="457200">
+                <a:tc>
+                  <a:txBody>
+                    <a:bodyPr/>
+                    <a:lstStyle/>
+                    <a:p>
+                      <a:pPr algn="l"/>
+                      <a:r>
+                        <a:rPr sz="1000" b="0">
+                          <a:solidFill>
+                            <a:srgbClr val="1D1B43"/>
+                          </a:solidFill>
+                          <a:latin typeface="Calibri"/>
+                        </a:rPr>
+                        <a:t>RJ</a:t>
+                      </a:r>
+                    </a:p>
+                  </a:txBody>
+                  <a:tcPr>
+                    <a:solidFill>
+                      <a:srgbClr val="F2F2F2"/>
+                    </a:solidFill>
+                  </a:tcPr>
+                </a:tc>
+                <a:tc>
+                  <a:txBody>
+                    <a:bodyPr/>
+                    <a:lstStyle/>
+                    <a:p>
+                      <a:pPr algn="l"/>
+                      <a:r>
+                        <a:rPr sz="1000" b="0">
+                          <a:solidFill>
+                            <a:srgbClr val="1D1B43"/>
+                          </a:solidFill>
+                          <a:latin typeface="Calibri"/>
+                        </a:rPr>
+                        <a:t>21</a:t>
+                      </a:r>
+                    </a:p>
+                  </a:txBody>
+                  <a:tcPr>
+                    <a:solidFill>
+                      <a:srgbClr val="F2F2F2"/>
+                    </a:solidFill>
+                  </a:tcPr>
+                </a:tc>
+                <a:tc>
+                  <a:txBody>
+                    <a:bodyPr/>
+                    <a:lstStyle/>
+                    <a:p>
+                      <a:pPr algn="l"/>
+                      <a:r>
+                        <a:rPr sz="1000" b="0">
+                          <a:solidFill>
+                            <a:srgbClr val="1D1B43"/>
+                          </a:solidFill>
+                          <a:latin typeface="Calibri"/>
+                        </a:rPr>
+                        <a:t>18</a:t>
+                      </a:r>
+                    </a:p>
+                  </a:txBody>
+                  <a:tcPr>
+                    <a:solidFill>
+                      <a:srgbClr val="F2F2F2"/>
+                    </a:solidFill>
+                  </a:tcPr>
+                </a:tc>
+                <a:tc>
+                  <a:txBody>
+                    <a:bodyPr/>
+                    <a:lstStyle/>
+                    <a:p>
+                      <a:pPr algn="l"/>
+                      <a:r>
+                        <a:rPr sz="1000" b="0">
+                          <a:solidFill>
+                            <a:srgbClr val="1D1B43"/>
+                          </a:solidFill>
+                          <a:latin typeface="Calibri"/>
+                        </a:rPr>
+                        <a:t>3</a:t>
+                      </a:r>
+                    </a:p>
+                  </a:txBody>
+                  <a:tcPr>
+                    <a:solidFill>
+                      <a:srgbClr val="F2F2F2"/>
+                    </a:solidFill>
+                  </a:tcPr>
+                </a:tc>
+                <a:tc>
+                  <a:txBody>
+                    <a:bodyPr/>
+                    <a:lstStyle/>
+                    <a:p>
+                      <a:pPr algn="l"/>
+                      <a:r>
+                        <a:rPr sz="1000" b="0">
+                          <a:solidFill>
+                            <a:srgbClr val="1D1B43"/>
+                          </a:solidFill>
+                          <a:latin typeface="Calibri"/>
+                        </a:rPr>
+                        <a:t>85.7%</a:t>
+                      </a:r>
+                    </a:p>
+                  </a:txBody>
+                  <a:tcPr>
+                    <a:solidFill>
+                      <a:srgbClr val="F2F2F2"/>
+                    </a:solidFill>
+                  </a:tcPr>
+                </a:tc>
+                <a:tc>
+                  <a:txBody>
+                    <a:bodyPr/>
+                    <a:lstStyle/>
+                    <a:p>
+                      <a:pPr algn="l"/>
+                      <a:r>
+                        <a:rPr sz="1000" b="0">
+                          <a:solidFill>
+                            <a:srgbClr val="1D1B43"/>
+                          </a:solidFill>
+                          <a:latin typeface="Calibri"/>
+                        </a:rPr>
+                        <a:t>Regular</a:t>
+                      </a:r>
+                    </a:p>
+                  </a:txBody>
+                  <a:tcPr>
+                    <a:solidFill>
+                      <a:srgbClr val="F2F2F2"/>
+                    </a:solidFill>
+                  </a:tcPr>
+                </a:tc>
+              </a:tr>
+              <a:tr h="457200">
+                <a:tc>
+                  <a:txBody>
+                    <a:bodyPr/>
+                    <a:lstStyle/>
+                    <a:p>
+                      <a:pPr algn="l"/>
+                      <a:r>
+                        <a:rPr sz="1000" b="0">
+                          <a:solidFill>
+                            <a:srgbClr val="1D1B43"/>
+                          </a:solidFill>
+                          <a:latin typeface="Calibri"/>
+                        </a:rPr>
+                        <a:t>GO</a:t>
+                      </a:r>
+                    </a:p>
+                  </a:txBody>
+                  <a:tcPr>
+                    <a:solidFill>
+                      <a:srgbClr val="FFFFFF"/>
+                    </a:solidFill>
+                  </a:tcPr>
+                </a:tc>
+                <a:tc>
+                  <a:txBody>
+                    <a:bodyPr/>
+                    <a:lstStyle/>
+                    <a:p>
+                      <a:pPr algn="l"/>
+                      <a:r>
+                        <a:rPr sz="1000" b="0">
+                          <a:solidFill>
+                            <a:srgbClr val="1D1B43"/>
+                          </a:solidFill>
+                          <a:latin typeface="Calibri"/>
+                        </a:rPr>
+                        <a:t>14</a:t>
+                      </a:r>
+                    </a:p>
+                  </a:txBody>
+                  <a:tcPr>
+                    <a:solidFill>
+                      <a:srgbClr val="FFFFFF"/>
+                    </a:solidFill>
+                  </a:tcPr>
+                </a:tc>
+                <a:tc>
+                  <a:txBody>
+                    <a:bodyPr/>
+                    <a:lstStyle/>
+                    <a:p>
+                      <a:pPr algn="l"/>
+                      <a:r>
+                        <a:rPr sz="1000" b="0">
+                          <a:solidFill>
+                            <a:srgbClr val="1D1B43"/>
+                          </a:solidFill>
+                          <a:latin typeface="Calibri"/>
+                        </a:rPr>
+                        <a:t>14</a:t>
+                      </a:r>
+                    </a:p>
+                  </a:txBody>
+                  <a:tcPr>
+                    <a:solidFill>
+                      <a:srgbClr val="FFFFFF"/>
                     </a:solidFill>
                   </a:tcPr>
                 </a:tc>
@@ -6461,7 +8402,7 @@
                   </a:txBody>
                   <a:tcPr>
                     <a:solidFill>
-                      <a:srgbClr val="F2F2F2"/>
+                      <a:srgbClr val="FFFFFF"/>
                     </a:solidFill>
                   </a:tcPr>
                 </a:tc>
@@ -6484,7 +8425,7 @@
                   </a:txBody>
                   <a:tcPr>
                     <a:solidFill>
-                      <a:srgbClr val="F2F2F2"/>
+                      <a:srgbClr val="FFFFFF"/>
                     </a:solidFill>
                   </a:tcPr>
                 </a:tc>
@@ -6507,78 +8448,358 @@
                   </a:txBody>
                   <a:tcPr>
                     <a:solidFill>
-                      <a:srgbClr val="F2F2F2"/>
+                      <a:srgbClr val="FFFFFF"/>
                     </a:solidFill>
                   </a:tcPr>
                 </a:tc>
               </a:tr>
-              <a:tr h="438912">
-                <a:tc>
-                  <a:txBody>
-                    <a:bodyPr/>
-                    <a:lstStyle/>
-                    <a:p>
-                      <a:pPr algn="l"/>
-                      <a:r>
-                        <a:rPr sz="1000" b="0">
-                          <a:solidFill>
-                            <a:srgbClr val="1D1B43"/>
-                          </a:solidFill>
-                          <a:latin typeface="Calibri"/>
-                        </a:rPr>
-                        <a:t>RJ</a:t>
-                      </a:r>
-                    </a:p>
-                  </a:txBody>
-                  <a:tcPr>
-                    <a:solidFill>
-                      <a:srgbClr val="FFFFFF"/>
-                    </a:solidFill>
-                  </a:tcPr>
-                </a:tc>
-                <a:tc>
-                  <a:txBody>
-                    <a:bodyPr/>
-                    <a:lstStyle/>
-                    <a:p>
-                      <a:pPr algn="l"/>
-                      <a:r>
-                        <a:rPr sz="1000" b="0">
-                          <a:solidFill>
-                            <a:srgbClr val="1D1B43"/>
-                          </a:solidFill>
-                          <a:latin typeface="Calibri"/>
-                        </a:rPr>
-                        <a:t>42</a:t>
-                      </a:r>
-                    </a:p>
-                  </a:txBody>
-                  <a:tcPr>
-                    <a:solidFill>
-                      <a:srgbClr val="FFFFFF"/>
-                    </a:solidFill>
-                  </a:tcPr>
-                </a:tc>
-                <a:tc>
-                  <a:txBody>
-                    <a:bodyPr/>
-                    <a:lstStyle/>
-                    <a:p>
-                      <a:pPr algn="l"/>
-                      <a:r>
-                        <a:rPr sz="1000" b="0">
-                          <a:solidFill>
-                            <a:srgbClr val="1D1B43"/>
-                          </a:solidFill>
-                          <a:latin typeface="Calibri"/>
-                        </a:rPr>
-                        <a:t>42</a:t>
-                      </a:r>
-                    </a:p>
-                  </a:txBody>
-                  <a:tcPr>
-                    <a:solidFill>
-                      <a:srgbClr val="FFFFFF"/>
+              <a:tr h="457200">
+                <a:tc>
+                  <a:txBody>
+                    <a:bodyPr/>
+                    <a:lstStyle/>
+                    <a:p>
+                      <a:pPr algn="l"/>
+                      <a:r>
+                        <a:rPr sz="1000" b="0">
+                          <a:solidFill>
+                            <a:srgbClr val="1D1B43"/>
+                          </a:solidFill>
+                          <a:latin typeface="Calibri"/>
+                        </a:rPr>
+                        <a:t>MG</a:t>
+                      </a:r>
+                    </a:p>
+                  </a:txBody>
+                  <a:tcPr>
+                    <a:solidFill>
+                      <a:srgbClr val="F2F2F2"/>
+                    </a:solidFill>
+                  </a:tcPr>
+                </a:tc>
+                <a:tc>
+                  <a:txBody>
+                    <a:bodyPr/>
+                    <a:lstStyle/>
+                    <a:p>
+                      <a:pPr algn="l"/>
+                      <a:r>
+                        <a:rPr sz="1000" b="0">
+                          <a:solidFill>
+                            <a:srgbClr val="1D1B43"/>
+                          </a:solidFill>
+                          <a:latin typeface="Calibri"/>
+                        </a:rPr>
+                        <a:t>13</a:t>
+                      </a:r>
+                    </a:p>
+                  </a:txBody>
+                  <a:tcPr>
+                    <a:solidFill>
+                      <a:srgbClr val="F2F2F2"/>
+                    </a:solidFill>
+                  </a:tcPr>
+                </a:tc>
+                <a:tc>
+                  <a:txBody>
+                    <a:bodyPr/>
+                    <a:lstStyle/>
+                    <a:p>
+                      <a:pPr algn="l"/>
+                      <a:r>
+                        <a:rPr sz="1000" b="0">
+                          <a:solidFill>
+                            <a:srgbClr val="1D1B43"/>
+                          </a:solidFill>
+                          <a:latin typeface="Calibri"/>
+                        </a:rPr>
+                        <a:t>10</a:t>
+                      </a:r>
+                    </a:p>
+                  </a:txBody>
+                  <a:tcPr>
+                    <a:solidFill>
+                      <a:srgbClr val="F2F2F2"/>
+                    </a:solidFill>
+                  </a:tcPr>
+                </a:tc>
+                <a:tc>
+                  <a:txBody>
+                    <a:bodyPr/>
+                    <a:lstStyle/>
+                    <a:p>
+                      <a:pPr algn="l"/>
+                      <a:r>
+                        <a:rPr sz="1000" b="0">
+                          <a:solidFill>
+                            <a:srgbClr val="1D1B43"/>
+                          </a:solidFill>
+                          <a:latin typeface="Calibri"/>
+                        </a:rPr>
+                        <a:t>3</a:t>
+                      </a:r>
+                    </a:p>
+                  </a:txBody>
+                  <a:tcPr>
+                    <a:solidFill>
+                      <a:srgbClr val="F2F2F2"/>
+                    </a:solidFill>
+                  </a:tcPr>
+                </a:tc>
+                <a:tc>
+                  <a:txBody>
+                    <a:bodyPr/>
+                    <a:lstStyle/>
+                    <a:p>
+                      <a:pPr algn="l"/>
+                      <a:r>
+                        <a:rPr sz="1000" b="0">
+                          <a:solidFill>
+                            <a:srgbClr val="1D1B43"/>
+                          </a:solidFill>
+                          <a:latin typeface="Calibri"/>
+                        </a:rPr>
+                        <a:t>76.9%</a:t>
+                      </a:r>
+                    </a:p>
+                  </a:txBody>
+                  <a:tcPr>
+                    <a:solidFill>
+                      <a:srgbClr val="F2F2F2"/>
+                    </a:solidFill>
+                  </a:tcPr>
+                </a:tc>
+                <a:tc>
+                  <a:txBody>
+                    <a:bodyPr/>
+                    <a:lstStyle/>
+                    <a:p>
+                      <a:pPr algn="l"/>
+                      <a:r>
+                        <a:rPr sz="1000" b="0">
+                          <a:solidFill>
+                            <a:srgbClr val="1D1B43"/>
+                          </a:solidFill>
+                          <a:latin typeface="Calibri"/>
+                        </a:rPr>
+                        <a:t>Atencao</a:t>
+                      </a:r>
+                    </a:p>
+                  </a:txBody>
+                  <a:tcPr>
+                    <a:solidFill>
+                      <a:srgbClr val="F2F2F2"/>
+                    </a:solidFill>
+                  </a:tcPr>
+                </a:tc>
+              </a:tr>
+              <a:tr h="457200">
+                <a:tc>
+                  <a:txBody>
+                    <a:bodyPr/>
+                    <a:lstStyle/>
+                    <a:p>
+                      <a:pPr algn="l"/>
+                      <a:r>
+                        <a:rPr sz="1000" b="0">
+                          <a:solidFill>
+                            <a:srgbClr val="1D1B43"/>
+                          </a:solidFill>
+                          <a:latin typeface="Calibri"/>
+                        </a:rPr>
+                        <a:t>RS</a:t>
+                      </a:r>
+                    </a:p>
+                  </a:txBody>
+                  <a:tcPr>
+                    <a:solidFill>
+                      <a:srgbClr val="FFFFFF"/>
+                    </a:solidFill>
+                  </a:tcPr>
+                </a:tc>
+                <a:tc>
+                  <a:txBody>
+                    <a:bodyPr/>
+                    <a:lstStyle/>
+                    <a:p>
+                      <a:pPr algn="l"/>
+                      <a:r>
+                        <a:rPr sz="1000" b="0">
+                          <a:solidFill>
+                            <a:srgbClr val="1D1B43"/>
+                          </a:solidFill>
+                          <a:latin typeface="Calibri"/>
+                        </a:rPr>
+                        <a:t>11</a:t>
+                      </a:r>
+                    </a:p>
+                  </a:txBody>
+                  <a:tcPr>
+                    <a:solidFill>
+                      <a:srgbClr val="FFFFFF"/>
+                    </a:solidFill>
+                  </a:tcPr>
+                </a:tc>
+                <a:tc>
+                  <a:txBody>
+                    <a:bodyPr/>
+                    <a:lstStyle/>
+                    <a:p>
+                      <a:pPr algn="l"/>
+                      <a:r>
+                        <a:rPr sz="1000" b="0">
+                          <a:solidFill>
+                            <a:srgbClr val="1D1B43"/>
+                          </a:solidFill>
+                          <a:latin typeface="Calibri"/>
+                        </a:rPr>
+                        <a:t>10</a:t>
+                      </a:r>
+                    </a:p>
+                  </a:txBody>
+                  <a:tcPr>
+                    <a:solidFill>
+                      <a:srgbClr val="FFFFFF"/>
+                    </a:solidFill>
+                  </a:tcPr>
+                </a:tc>
+                <a:tc>
+                  <a:txBody>
+                    <a:bodyPr/>
+                    <a:lstStyle/>
+                    <a:p>
+                      <a:pPr algn="l"/>
+                      <a:r>
+                        <a:rPr sz="1000" b="0">
+                          <a:solidFill>
+                            <a:srgbClr val="1D1B43"/>
+                          </a:solidFill>
+                          <a:latin typeface="Calibri"/>
+                        </a:rPr>
+                        <a:t>1</a:t>
+                      </a:r>
+                    </a:p>
+                  </a:txBody>
+                  <a:tcPr>
+                    <a:solidFill>
+                      <a:srgbClr val="FFFFFF"/>
+                    </a:solidFill>
+                  </a:tcPr>
+                </a:tc>
+                <a:tc>
+                  <a:txBody>
+                    <a:bodyPr/>
+                    <a:lstStyle/>
+                    <a:p>
+                      <a:pPr algn="l"/>
+                      <a:r>
+                        <a:rPr sz="1000" b="0">
+                          <a:solidFill>
+                            <a:srgbClr val="1D1B43"/>
+                          </a:solidFill>
+                          <a:latin typeface="Calibri"/>
+                        </a:rPr>
+                        <a:t>90.9%</a:t>
+                      </a:r>
+                    </a:p>
+                  </a:txBody>
+                  <a:tcPr>
+                    <a:solidFill>
+                      <a:srgbClr val="FFFFFF"/>
+                    </a:solidFill>
+                  </a:tcPr>
+                </a:tc>
+                <a:tc>
+                  <a:txBody>
+                    <a:bodyPr/>
+                    <a:lstStyle/>
+                    <a:p>
+                      <a:pPr algn="l"/>
+                      <a:r>
+                        <a:rPr sz="1000" b="0">
+                          <a:solidFill>
+                            <a:srgbClr val="1D1B43"/>
+                          </a:solidFill>
+                          <a:latin typeface="Calibri"/>
+                        </a:rPr>
+                        <a:t>Regular</a:t>
+                      </a:r>
+                    </a:p>
+                  </a:txBody>
+                  <a:tcPr>
+                    <a:solidFill>
+                      <a:srgbClr val="FFFFFF"/>
+                    </a:solidFill>
+                  </a:tcPr>
+                </a:tc>
+              </a:tr>
+              <a:tr h="457200">
+                <a:tc>
+                  <a:txBody>
+                    <a:bodyPr/>
+                    <a:lstStyle/>
+                    <a:p>
+                      <a:pPr algn="l"/>
+                      <a:r>
+                        <a:rPr sz="1000" b="0">
+                          <a:solidFill>
+                            <a:srgbClr val="1D1B43"/>
+                          </a:solidFill>
+                          <a:latin typeface="Calibri"/>
+                        </a:rPr>
+                        <a:t>DF</a:t>
+                      </a:r>
+                    </a:p>
+                  </a:txBody>
+                  <a:tcPr>
+                    <a:solidFill>
+                      <a:srgbClr val="F2F2F2"/>
+                    </a:solidFill>
+                  </a:tcPr>
+                </a:tc>
+                <a:tc>
+                  <a:txBody>
+                    <a:bodyPr/>
+                    <a:lstStyle/>
+                    <a:p>
+                      <a:pPr algn="l"/>
+                      <a:r>
+                        <a:rPr sz="1000" b="0">
+                          <a:solidFill>
+                            <a:srgbClr val="1D1B43"/>
+                          </a:solidFill>
+                          <a:latin typeface="Calibri"/>
+                        </a:rPr>
+                        <a:t>10</a:t>
+                      </a:r>
+                    </a:p>
+                  </a:txBody>
+                  <a:tcPr>
+                    <a:solidFill>
+                      <a:srgbClr val="F2F2F2"/>
+                    </a:solidFill>
+                  </a:tcPr>
+                </a:tc>
+                <a:tc>
+                  <a:txBody>
+                    <a:bodyPr/>
+                    <a:lstStyle/>
+                    <a:p>
+                      <a:pPr algn="l"/>
+                      <a:r>
+                        <a:rPr sz="1000" b="0">
+                          <a:solidFill>
+                            <a:srgbClr val="1D1B43"/>
+                          </a:solidFill>
+                          <a:latin typeface="Calibri"/>
+                        </a:rPr>
+                        <a:t>10</a:t>
+                      </a:r>
+                    </a:p>
+                  </a:txBody>
+                  <a:tcPr>
+                    <a:solidFill>
+                      <a:srgbClr val="F2F2F2"/>
                     </a:solidFill>
                   </a:tcPr>
                 </a:tc>
@@ -6601,7 +8822,7 @@
                   </a:txBody>
                   <a:tcPr>
                     <a:solidFill>
-                      <a:srgbClr val="FFFFFF"/>
+                      <a:srgbClr val="F2F2F2"/>
                     </a:solidFill>
                   </a:tcPr>
                 </a:tc>
@@ -6624,7 +8845,7 @@
                   </a:txBody>
                   <a:tcPr>
                     <a:solidFill>
-                      <a:srgbClr val="FFFFFF"/>
+                      <a:srgbClr val="F2F2F2"/>
                     </a:solidFill>
                   </a:tcPr>
                 </a:tc>
@@ -6647,847 +8868,7 @@
                   </a:txBody>
                   <a:tcPr>
                     <a:solidFill>
-                      <a:srgbClr val="FFFFFF"/>
-                    </a:solidFill>
-                  </a:tcPr>
-                </a:tc>
-              </a:tr>
-              <a:tr h="438912">
-                <a:tc>
-                  <a:txBody>
-                    <a:bodyPr/>
-                    <a:lstStyle/>
-                    <a:p>
-                      <a:pPr algn="l"/>
-                      <a:r>
-                        <a:rPr sz="1000" b="0">
-                          <a:solidFill>
-                            <a:srgbClr val="1D1B43"/>
-                          </a:solidFill>
-                          <a:latin typeface="Calibri"/>
-                        </a:rPr>
-                        <a:t>PR</a:t>
-                      </a:r>
-                    </a:p>
-                  </a:txBody>
-                  <a:tcPr>
-                    <a:solidFill>
-                      <a:srgbClr val="F2F2F2"/>
-                    </a:solidFill>
-                  </a:tcPr>
-                </a:tc>
-                <a:tc>
-                  <a:txBody>
-                    <a:bodyPr/>
-                    <a:lstStyle/>
-                    <a:p>
-                      <a:pPr algn="l"/>
-                      <a:r>
-                        <a:rPr sz="1000" b="0">
-                          <a:solidFill>
-                            <a:srgbClr val="1D1B43"/>
-                          </a:solidFill>
-                          <a:latin typeface="Calibri"/>
-                        </a:rPr>
-                        <a:t>38</a:t>
-                      </a:r>
-                    </a:p>
-                  </a:txBody>
-                  <a:tcPr>
-                    <a:solidFill>
-                      <a:srgbClr val="F2F2F2"/>
-                    </a:solidFill>
-                  </a:tcPr>
-                </a:tc>
-                <a:tc>
-                  <a:txBody>
-                    <a:bodyPr/>
-                    <a:lstStyle/>
-                    <a:p>
-                      <a:pPr algn="l"/>
-                      <a:r>
-                        <a:rPr sz="1000" b="0">
-                          <a:solidFill>
-                            <a:srgbClr val="1D1B43"/>
-                          </a:solidFill>
-                          <a:latin typeface="Calibri"/>
-                        </a:rPr>
-                        <a:t>38</a:t>
-                      </a:r>
-                    </a:p>
-                  </a:txBody>
-                  <a:tcPr>
-                    <a:solidFill>
-                      <a:srgbClr val="F2F2F2"/>
-                    </a:solidFill>
-                  </a:tcPr>
-                </a:tc>
-                <a:tc>
-                  <a:txBody>
-                    <a:bodyPr/>
-                    <a:lstStyle/>
-                    <a:p>
-                      <a:pPr algn="l"/>
-                      <a:r>
-                        <a:rPr sz="1000" b="0">
-                          <a:solidFill>
-                            <a:srgbClr val="1D1B43"/>
-                          </a:solidFill>
-                          <a:latin typeface="Calibri"/>
-                        </a:rPr>
-                        <a:t>0</a:t>
-                      </a:r>
-                    </a:p>
-                  </a:txBody>
-                  <a:tcPr>
-                    <a:solidFill>
-                      <a:srgbClr val="F2F2F2"/>
-                    </a:solidFill>
-                  </a:tcPr>
-                </a:tc>
-                <a:tc>
-                  <a:txBody>
-                    <a:bodyPr/>
-                    <a:lstStyle/>
-                    <a:p>
-                      <a:pPr algn="l"/>
-                      <a:r>
-                        <a:rPr sz="1000" b="0">
-                          <a:solidFill>
-                            <a:srgbClr val="1D1B43"/>
-                          </a:solidFill>
-                          <a:latin typeface="Calibri"/>
-                        </a:rPr>
-                        <a:t>100.0%</a:t>
-                      </a:r>
-                    </a:p>
-                  </a:txBody>
-                  <a:tcPr>
-                    <a:solidFill>
-                      <a:srgbClr val="F2F2F2"/>
-                    </a:solidFill>
-                  </a:tcPr>
-                </a:tc>
-                <a:tc>
-                  <a:txBody>
-                    <a:bodyPr/>
-                    <a:lstStyle/>
-                    <a:p>
-                      <a:pPr algn="l"/>
-                      <a:r>
-                        <a:rPr sz="1000" b="0">
-                          <a:solidFill>
-                            <a:srgbClr val="1D1B43"/>
-                          </a:solidFill>
-                          <a:latin typeface="Calibri"/>
-                        </a:rPr>
-                        <a:t>Excelente</a:t>
-                      </a:r>
-                    </a:p>
-                  </a:txBody>
-                  <a:tcPr>
-                    <a:solidFill>
-                      <a:srgbClr val="F2F2F2"/>
-                    </a:solidFill>
-                  </a:tcPr>
-                </a:tc>
-              </a:tr>
-              <a:tr h="438912">
-                <a:tc>
-                  <a:txBody>
-                    <a:bodyPr/>
-                    <a:lstStyle/>
-                    <a:p>
-                      <a:pPr algn="l"/>
-                      <a:r>
-                        <a:rPr sz="1000" b="0">
-                          <a:solidFill>
-                            <a:srgbClr val="1D1B43"/>
-                          </a:solidFill>
-                          <a:latin typeface="Calibri"/>
-                        </a:rPr>
-                        <a:t>MG</a:t>
-                      </a:r>
-                    </a:p>
-                  </a:txBody>
-                  <a:tcPr>
-                    <a:solidFill>
-                      <a:srgbClr val="FFFFFF"/>
-                    </a:solidFill>
-                  </a:tcPr>
-                </a:tc>
-                <a:tc>
-                  <a:txBody>
-                    <a:bodyPr/>
-                    <a:lstStyle/>
-                    <a:p>
-                      <a:pPr algn="l"/>
-                      <a:r>
-                        <a:rPr sz="1000" b="0">
-                          <a:solidFill>
-                            <a:srgbClr val="1D1B43"/>
-                          </a:solidFill>
-                          <a:latin typeface="Calibri"/>
-                        </a:rPr>
-                        <a:t>23</a:t>
-                      </a:r>
-                    </a:p>
-                  </a:txBody>
-                  <a:tcPr>
-                    <a:solidFill>
-                      <a:srgbClr val="FFFFFF"/>
-                    </a:solidFill>
-                  </a:tcPr>
-                </a:tc>
-                <a:tc>
-                  <a:txBody>
-                    <a:bodyPr/>
-                    <a:lstStyle/>
-                    <a:p>
-                      <a:pPr algn="l"/>
-                      <a:r>
-                        <a:rPr sz="1000" b="0">
-                          <a:solidFill>
-                            <a:srgbClr val="1D1B43"/>
-                          </a:solidFill>
-                          <a:latin typeface="Calibri"/>
-                        </a:rPr>
-                        <a:t>21</a:t>
-                      </a:r>
-                    </a:p>
-                  </a:txBody>
-                  <a:tcPr>
-                    <a:solidFill>
-                      <a:srgbClr val="FFFFFF"/>
-                    </a:solidFill>
-                  </a:tcPr>
-                </a:tc>
-                <a:tc>
-                  <a:txBody>
-                    <a:bodyPr/>
-                    <a:lstStyle/>
-                    <a:p>
-                      <a:pPr algn="l"/>
-                      <a:r>
-                        <a:rPr sz="1000" b="0">
-                          <a:solidFill>
-                            <a:srgbClr val="1D1B43"/>
-                          </a:solidFill>
-                          <a:latin typeface="Calibri"/>
-                        </a:rPr>
-                        <a:t>2</a:t>
-                      </a:r>
-                    </a:p>
-                  </a:txBody>
-                  <a:tcPr>
-                    <a:solidFill>
-                      <a:srgbClr val="FFFFFF"/>
-                    </a:solidFill>
-                  </a:tcPr>
-                </a:tc>
-                <a:tc>
-                  <a:txBody>
-                    <a:bodyPr/>
-                    <a:lstStyle/>
-                    <a:p>
-                      <a:pPr algn="l"/>
-                      <a:r>
-                        <a:rPr sz="1000" b="0">
-                          <a:solidFill>
-                            <a:srgbClr val="1D1B43"/>
-                          </a:solidFill>
-                          <a:latin typeface="Calibri"/>
-                        </a:rPr>
-                        <a:t>91.3%</a:t>
-                      </a:r>
-                    </a:p>
-                  </a:txBody>
-                  <a:tcPr>
-                    <a:solidFill>
-                      <a:srgbClr val="FFFFFF"/>
-                    </a:solidFill>
-                  </a:tcPr>
-                </a:tc>
-                <a:tc>
-                  <a:txBody>
-                    <a:bodyPr/>
-                    <a:lstStyle/>
-                    <a:p>
-                      <a:pPr algn="l"/>
-                      <a:r>
-                        <a:rPr sz="1000" b="0">
-                          <a:solidFill>
-                            <a:srgbClr val="1D1B43"/>
-                          </a:solidFill>
-                          <a:latin typeface="Calibri"/>
-                        </a:rPr>
-                        <a:t>Regular</a:t>
-                      </a:r>
-                    </a:p>
-                  </a:txBody>
-                  <a:tcPr>
-                    <a:solidFill>
-                      <a:srgbClr val="FFFFFF"/>
-                    </a:solidFill>
-                  </a:tcPr>
-                </a:tc>
-              </a:tr>
-              <a:tr h="438912">
-                <a:tc>
-                  <a:txBody>
-                    <a:bodyPr/>
-                    <a:lstStyle/>
-                    <a:p>
-                      <a:pPr algn="l"/>
-                      <a:r>
-                        <a:rPr sz="1000" b="0">
-                          <a:solidFill>
-                            <a:srgbClr val="1D1B43"/>
-                          </a:solidFill>
-                          <a:latin typeface="Calibri"/>
-                        </a:rPr>
-                        <a:t>RS</a:t>
-                      </a:r>
-                    </a:p>
-                  </a:txBody>
-                  <a:tcPr>
-                    <a:solidFill>
-                      <a:srgbClr val="F2F2F2"/>
-                    </a:solidFill>
-                  </a:tcPr>
-                </a:tc>
-                <a:tc>
-                  <a:txBody>
-                    <a:bodyPr/>
-                    <a:lstStyle/>
-                    <a:p>
-                      <a:pPr algn="l"/>
-                      <a:r>
-                        <a:rPr sz="1000" b="0">
-                          <a:solidFill>
-                            <a:srgbClr val="1D1B43"/>
-                          </a:solidFill>
-                          <a:latin typeface="Calibri"/>
-                        </a:rPr>
-                        <a:t>23</a:t>
-                      </a:r>
-                    </a:p>
-                  </a:txBody>
-                  <a:tcPr>
-                    <a:solidFill>
-                      <a:srgbClr val="F2F2F2"/>
-                    </a:solidFill>
-                  </a:tcPr>
-                </a:tc>
-                <a:tc>
-                  <a:txBody>
-                    <a:bodyPr/>
-                    <a:lstStyle/>
-                    <a:p>
-                      <a:pPr algn="l"/>
-                      <a:r>
-                        <a:rPr sz="1000" b="0">
-                          <a:solidFill>
-                            <a:srgbClr val="1D1B43"/>
-                          </a:solidFill>
-                          <a:latin typeface="Calibri"/>
-                        </a:rPr>
-                        <a:t>23</a:t>
-                      </a:r>
-                    </a:p>
-                  </a:txBody>
-                  <a:tcPr>
-                    <a:solidFill>
-                      <a:srgbClr val="F2F2F2"/>
-                    </a:solidFill>
-                  </a:tcPr>
-                </a:tc>
-                <a:tc>
-                  <a:txBody>
-                    <a:bodyPr/>
-                    <a:lstStyle/>
-                    <a:p>
-                      <a:pPr algn="l"/>
-                      <a:r>
-                        <a:rPr sz="1000" b="0">
-                          <a:solidFill>
-                            <a:srgbClr val="1D1B43"/>
-                          </a:solidFill>
-                          <a:latin typeface="Calibri"/>
-                        </a:rPr>
-                        <a:t>0</a:t>
-                      </a:r>
-                    </a:p>
-                  </a:txBody>
-                  <a:tcPr>
-                    <a:solidFill>
-                      <a:srgbClr val="F2F2F2"/>
-                    </a:solidFill>
-                  </a:tcPr>
-                </a:tc>
-                <a:tc>
-                  <a:txBody>
-                    <a:bodyPr/>
-                    <a:lstStyle/>
-                    <a:p>
-                      <a:pPr algn="l"/>
-                      <a:r>
-                        <a:rPr sz="1000" b="0">
-                          <a:solidFill>
-                            <a:srgbClr val="1D1B43"/>
-                          </a:solidFill>
-                          <a:latin typeface="Calibri"/>
-                        </a:rPr>
-                        <a:t>100.0%</a:t>
-                      </a:r>
-                    </a:p>
-                  </a:txBody>
-                  <a:tcPr>
-                    <a:solidFill>
-                      <a:srgbClr val="F2F2F2"/>
-                    </a:solidFill>
-                  </a:tcPr>
-                </a:tc>
-                <a:tc>
-                  <a:txBody>
-                    <a:bodyPr/>
-                    <a:lstStyle/>
-                    <a:p>
-                      <a:pPr algn="l"/>
-                      <a:r>
-                        <a:rPr sz="1000" b="0">
-                          <a:solidFill>
-                            <a:srgbClr val="1D1B43"/>
-                          </a:solidFill>
-                          <a:latin typeface="Calibri"/>
-                        </a:rPr>
-                        <a:t>Excelente</a:t>
-                      </a:r>
-                    </a:p>
-                  </a:txBody>
-                  <a:tcPr>
-                    <a:solidFill>
-                      <a:srgbClr val="F2F2F2"/>
-                    </a:solidFill>
-                  </a:tcPr>
-                </a:tc>
-              </a:tr>
-              <a:tr h="438912">
-                <a:tc>
-                  <a:txBody>
-                    <a:bodyPr/>
-                    <a:lstStyle/>
-                    <a:p>
-                      <a:pPr algn="l"/>
-                      <a:r>
-                        <a:rPr sz="1000" b="0">
-                          <a:solidFill>
-                            <a:srgbClr val="1D1B43"/>
-                          </a:solidFill>
-                          <a:latin typeface="Calibri"/>
-                        </a:rPr>
-                        <a:t>GO</a:t>
-                      </a:r>
-                    </a:p>
-                  </a:txBody>
-                  <a:tcPr>
-                    <a:solidFill>
-                      <a:srgbClr val="FFFFFF"/>
-                    </a:solidFill>
-                  </a:tcPr>
-                </a:tc>
-                <a:tc>
-                  <a:txBody>
-                    <a:bodyPr/>
-                    <a:lstStyle/>
-                    <a:p>
-                      <a:pPr algn="l"/>
-                      <a:r>
-                        <a:rPr sz="1000" b="0">
-                          <a:solidFill>
-                            <a:srgbClr val="1D1B43"/>
-                          </a:solidFill>
-                          <a:latin typeface="Calibri"/>
-                        </a:rPr>
-                        <a:t>21</a:t>
-                      </a:r>
-                    </a:p>
-                  </a:txBody>
-                  <a:tcPr>
-                    <a:solidFill>
-                      <a:srgbClr val="FFFFFF"/>
-                    </a:solidFill>
-                  </a:tcPr>
-                </a:tc>
-                <a:tc>
-                  <a:txBody>
-                    <a:bodyPr/>
-                    <a:lstStyle/>
-                    <a:p>
-                      <a:pPr algn="l"/>
-                      <a:r>
-                        <a:rPr sz="1000" b="0">
-                          <a:solidFill>
-                            <a:srgbClr val="1D1B43"/>
-                          </a:solidFill>
-                          <a:latin typeface="Calibri"/>
-                        </a:rPr>
-                        <a:t>21</a:t>
-                      </a:r>
-                    </a:p>
-                  </a:txBody>
-                  <a:tcPr>
-                    <a:solidFill>
-                      <a:srgbClr val="FFFFFF"/>
-                    </a:solidFill>
-                  </a:tcPr>
-                </a:tc>
-                <a:tc>
-                  <a:txBody>
-                    <a:bodyPr/>
-                    <a:lstStyle/>
-                    <a:p>
-                      <a:pPr algn="l"/>
-                      <a:r>
-                        <a:rPr sz="1000" b="0">
-                          <a:solidFill>
-                            <a:srgbClr val="1D1B43"/>
-                          </a:solidFill>
-                          <a:latin typeface="Calibri"/>
-                        </a:rPr>
-                        <a:t>0</a:t>
-                      </a:r>
-                    </a:p>
-                  </a:txBody>
-                  <a:tcPr>
-                    <a:solidFill>
-                      <a:srgbClr val="FFFFFF"/>
-                    </a:solidFill>
-                  </a:tcPr>
-                </a:tc>
-                <a:tc>
-                  <a:txBody>
-                    <a:bodyPr/>
-                    <a:lstStyle/>
-                    <a:p>
-                      <a:pPr algn="l"/>
-                      <a:r>
-                        <a:rPr sz="1000" b="0">
-                          <a:solidFill>
-                            <a:srgbClr val="1D1B43"/>
-                          </a:solidFill>
-                          <a:latin typeface="Calibri"/>
-                        </a:rPr>
-                        <a:t>100.0%</a:t>
-                      </a:r>
-                    </a:p>
-                  </a:txBody>
-                  <a:tcPr>
-                    <a:solidFill>
-                      <a:srgbClr val="FFFFFF"/>
-                    </a:solidFill>
-                  </a:tcPr>
-                </a:tc>
-                <a:tc>
-                  <a:txBody>
-                    <a:bodyPr/>
-                    <a:lstStyle/>
-                    <a:p>
-                      <a:pPr algn="l"/>
-                      <a:r>
-                        <a:rPr sz="1000" b="0">
-                          <a:solidFill>
-                            <a:srgbClr val="1D1B43"/>
-                          </a:solidFill>
-                          <a:latin typeface="Calibri"/>
-                        </a:rPr>
-                        <a:t>Excelente</a:t>
-                      </a:r>
-                    </a:p>
-                  </a:txBody>
-                  <a:tcPr>
-                    <a:solidFill>
-                      <a:srgbClr val="FFFFFF"/>
-                    </a:solidFill>
-                  </a:tcPr>
-                </a:tc>
-              </a:tr>
-              <a:tr h="438912">
-                <a:tc>
-                  <a:txBody>
-                    <a:bodyPr/>
-                    <a:lstStyle/>
-                    <a:p>
-                      <a:pPr algn="l"/>
-                      <a:r>
-                        <a:rPr sz="1000" b="0">
-                          <a:solidFill>
-                            <a:srgbClr val="1D1B43"/>
-                          </a:solidFill>
-                          <a:latin typeface="Calibri"/>
-                        </a:rPr>
-                        <a:t>DF</a:t>
-                      </a:r>
-                    </a:p>
-                  </a:txBody>
-                  <a:tcPr>
-                    <a:solidFill>
-                      <a:srgbClr val="F2F2F2"/>
-                    </a:solidFill>
-                  </a:tcPr>
-                </a:tc>
-                <a:tc>
-                  <a:txBody>
-                    <a:bodyPr/>
-                    <a:lstStyle/>
-                    <a:p>
-                      <a:pPr algn="l"/>
-                      <a:r>
-                        <a:rPr sz="1000" b="0">
-                          <a:solidFill>
-                            <a:srgbClr val="1D1B43"/>
-                          </a:solidFill>
-                          <a:latin typeface="Calibri"/>
-                        </a:rPr>
-                        <a:t>18</a:t>
-                      </a:r>
-                    </a:p>
-                  </a:txBody>
-                  <a:tcPr>
-                    <a:solidFill>
-                      <a:srgbClr val="F2F2F2"/>
-                    </a:solidFill>
-                  </a:tcPr>
-                </a:tc>
-                <a:tc>
-                  <a:txBody>
-                    <a:bodyPr/>
-                    <a:lstStyle/>
-                    <a:p>
-                      <a:pPr algn="l"/>
-                      <a:r>
-                        <a:rPr sz="1000" b="0">
-                          <a:solidFill>
-                            <a:srgbClr val="1D1B43"/>
-                          </a:solidFill>
-                          <a:latin typeface="Calibri"/>
-                        </a:rPr>
-                        <a:t>18</a:t>
-                      </a:r>
-                    </a:p>
-                  </a:txBody>
-                  <a:tcPr>
-                    <a:solidFill>
-                      <a:srgbClr val="F2F2F2"/>
-                    </a:solidFill>
-                  </a:tcPr>
-                </a:tc>
-                <a:tc>
-                  <a:txBody>
-                    <a:bodyPr/>
-                    <a:lstStyle/>
-                    <a:p>
-                      <a:pPr algn="l"/>
-                      <a:r>
-                        <a:rPr sz="1000" b="0">
-                          <a:solidFill>
-                            <a:srgbClr val="1D1B43"/>
-                          </a:solidFill>
-                          <a:latin typeface="Calibri"/>
-                        </a:rPr>
-                        <a:t>0</a:t>
-                      </a:r>
-                    </a:p>
-                  </a:txBody>
-                  <a:tcPr>
-                    <a:solidFill>
-                      <a:srgbClr val="F2F2F2"/>
-                    </a:solidFill>
-                  </a:tcPr>
-                </a:tc>
-                <a:tc>
-                  <a:txBody>
-                    <a:bodyPr/>
-                    <a:lstStyle/>
-                    <a:p>
-                      <a:pPr algn="l"/>
-                      <a:r>
-                        <a:rPr sz="1000" b="0">
-                          <a:solidFill>
-                            <a:srgbClr val="1D1B43"/>
-                          </a:solidFill>
-                          <a:latin typeface="Calibri"/>
-                        </a:rPr>
-                        <a:t>100.0%</a:t>
-                      </a:r>
-                    </a:p>
-                  </a:txBody>
-                  <a:tcPr>
-                    <a:solidFill>
-                      <a:srgbClr val="F2F2F2"/>
-                    </a:solidFill>
-                  </a:tcPr>
-                </a:tc>
-                <a:tc>
-                  <a:txBody>
-                    <a:bodyPr/>
-                    <a:lstStyle/>
-                    <a:p>
-                      <a:pPr algn="l"/>
-                      <a:r>
-                        <a:rPr sz="1000" b="0">
-                          <a:solidFill>
-                            <a:srgbClr val="1D1B43"/>
-                          </a:solidFill>
-                          <a:latin typeface="Calibri"/>
-                        </a:rPr>
-                        <a:t>Excelente</a:t>
-                      </a:r>
-                    </a:p>
-                  </a:txBody>
-                  <a:tcPr>
-                    <a:solidFill>
-                      <a:srgbClr val="F2F2F2"/>
-                    </a:solidFill>
-                  </a:tcPr>
-                </a:tc>
-              </a:tr>
-              <a:tr h="438912">
-                <a:tc>
-                  <a:txBody>
-                    <a:bodyPr/>
-                    <a:lstStyle/>
-                    <a:p>
-                      <a:pPr algn="l"/>
-                      <a:r>
-                        <a:rPr sz="1000" b="0">
-                          <a:solidFill>
-                            <a:srgbClr val="1D1B43"/>
-                          </a:solidFill>
-                          <a:latin typeface="Calibri"/>
-                        </a:rPr>
-                        <a:t>ES</a:t>
-                      </a:r>
-                    </a:p>
-                  </a:txBody>
-                  <a:tcPr>
-                    <a:solidFill>
-                      <a:srgbClr val="FFFFFF"/>
-                    </a:solidFill>
-                  </a:tcPr>
-                </a:tc>
-                <a:tc>
-                  <a:txBody>
-                    <a:bodyPr/>
-                    <a:lstStyle/>
-                    <a:p>
-                      <a:pPr algn="l"/>
-                      <a:r>
-                        <a:rPr sz="1000" b="0">
-                          <a:solidFill>
-                            <a:srgbClr val="1D1B43"/>
-                          </a:solidFill>
-                          <a:latin typeface="Calibri"/>
-                        </a:rPr>
-                        <a:t>2</a:t>
-                      </a:r>
-                    </a:p>
-                  </a:txBody>
-                  <a:tcPr>
-                    <a:solidFill>
-                      <a:srgbClr val="FFFFFF"/>
-                    </a:solidFill>
-                  </a:tcPr>
-                </a:tc>
-                <a:tc>
-                  <a:txBody>
-                    <a:bodyPr/>
-                    <a:lstStyle/>
-                    <a:p>
-                      <a:pPr algn="l"/>
-                      <a:r>
-                        <a:rPr sz="1000" b="0">
-                          <a:solidFill>
-                            <a:srgbClr val="1D1B43"/>
-                          </a:solidFill>
-                          <a:latin typeface="Calibri"/>
-                        </a:rPr>
-                        <a:t>2</a:t>
-                      </a:r>
-                    </a:p>
-                  </a:txBody>
-                  <a:tcPr>
-                    <a:solidFill>
-                      <a:srgbClr val="FFFFFF"/>
-                    </a:solidFill>
-                  </a:tcPr>
-                </a:tc>
-                <a:tc>
-                  <a:txBody>
-                    <a:bodyPr/>
-                    <a:lstStyle/>
-                    <a:p>
-                      <a:pPr algn="l"/>
-                      <a:r>
-                        <a:rPr sz="1000" b="0">
-                          <a:solidFill>
-                            <a:srgbClr val="1D1B43"/>
-                          </a:solidFill>
-                          <a:latin typeface="Calibri"/>
-                        </a:rPr>
-                        <a:t>0</a:t>
-                      </a:r>
-                    </a:p>
-                  </a:txBody>
-                  <a:tcPr>
-                    <a:solidFill>
-                      <a:srgbClr val="FFFFFF"/>
-                    </a:solidFill>
-                  </a:tcPr>
-                </a:tc>
-                <a:tc>
-                  <a:txBody>
-                    <a:bodyPr/>
-                    <a:lstStyle/>
-                    <a:p>
-                      <a:pPr algn="l"/>
-                      <a:r>
-                        <a:rPr sz="1000" b="0">
-                          <a:solidFill>
-                            <a:srgbClr val="1D1B43"/>
-                          </a:solidFill>
-                          <a:latin typeface="Calibri"/>
-                        </a:rPr>
-                        <a:t>100.0%</a:t>
-                      </a:r>
-                    </a:p>
-                  </a:txBody>
-                  <a:tcPr>
-                    <a:solidFill>
-                      <a:srgbClr val="FFFFFF"/>
-                    </a:solidFill>
-                  </a:tcPr>
-                </a:tc>
-                <a:tc>
-                  <a:txBody>
-                    <a:bodyPr/>
-                    <a:lstStyle/>
-                    <a:p>
-                      <a:pPr algn="l"/>
-                      <a:r>
-                        <a:rPr sz="1000" b="0">
-                          <a:solidFill>
-                            <a:srgbClr val="1D1B43"/>
-                          </a:solidFill>
-                          <a:latin typeface="Calibri"/>
-                        </a:rPr>
-                        <a:t>Excelente</a:t>
-                      </a:r>
-                    </a:p>
-                  </a:txBody>
-                  <a:tcPr>
-                    <a:solidFill>
-                      <a:srgbClr val="FFFFFF"/>
+                      <a:srgbClr val="F2F2F2"/>
                     </a:solidFill>
                   </a:tcPr>
                 </a:tc>
@@ -7576,7 +8957,7 @@
                 </a:solidFill>
                 <a:latin typeface="Calibri"/>
               </a:rPr>
-              <a:t>TOP DESTINATARIOS (25 pontos)</a:t>
+              <a:t>TOP DESTINATARIOS (24 pontos)</a:t>
             </a:r>
           </a:p>
         </p:txBody>
@@ -7874,99 +9255,99 @@
                           </a:solidFill>
                           <a:latin typeface="Calibri"/>
                         </a:rPr>
-                        <a:t>45</a:t>
-                      </a:r>
-                    </a:p>
-                  </a:txBody>
-                  <a:tcPr>
-                    <a:solidFill>
-                      <a:srgbClr val="FFFFFF"/>
-                    </a:solidFill>
-                  </a:tcPr>
-                </a:tc>
-                <a:tc>
-                  <a:txBody>
-                    <a:bodyPr/>
-                    <a:lstStyle/>
-                    <a:p>
-                      <a:pPr algn="l"/>
-                      <a:r>
-                        <a:rPr sz="1000" b="0">
-                          <a:solidFill>
-                            <a:srgbClr val="1D1B43"/>
-                          </a:solidFill>
-                          <a:latin typeface="Calibri"/>
-                        </a:rPr>
-                        <a:t>45</a:t>
-                      </a:r>
-                    </a:p>
-                  </a:txBody>
-                  <a:tcPr>
-                    <a:solidFill>
-                      <a:srgbClr val="FFFFFF"/>
-                    </a:solidFill>
-                  </a:tcPr>
-                </a:tc>
-                <a:tc>
-                  <a:txBody>
-                    <a:bodyPr/>
-                    <a:lstStyle/>
-                    <a:p>
-                      <a:pPr algn="l"/>
-                      <a:r>
-                        <a:rPr sz="1000" b="0">
-                          <a:solidFill>
-                            <a:srgbClr val="1D1B43"/>
-                          </a:solidFill>
-                          <a:latin typeface="Calibri"/>
-                        </a:rPr>
-                        <a:t>0</a:t>
-                      </a:r>
-                    </a:p>
-                  </a:txBody>
-                  <a:tcPr>
-                    <a:solidFill>
-                      <a:srgbClr val="FFFFFF"/>
-                    </a:solidFill>
-                  </a:tcPr>
-                </a:tc>
-                <a:tc>
-                  <a:txBody>
-                    <a:bodyPr/>
-                    <a:lstStyle/>
-                    <a:p>
-                      <a:pPr algn="l"/>
-                      <a:r>
-                        <a:rPr sz="1000" b="0">
-                          <a:solidFill>
-                            <a:srgbClr val="1D1B43"/>
-                          </a:solidFill>
-                          <a:latin typeface="Calibri"/>
-                        </a:rPr>
-                        <a:t>100.0%</a:t>
-                      </a:r>
-                    </a:p>
-                  </a:txBody>
-                  <a:tcPr>
-                    <a:solidFill>
-                      <a:srgbClr val="FFFFFF"/>
-                    </a:solidFill>
-                  </a:tcPr>
-                </a:tc>
-                <a:tc>
-                  <a:txBody>
-                    <a:bodyPr/>
-                    <a:lstStyle/>
-                    <a:p>
-                      <a:pPr algn="l"/>
-                      <a:r>
-                        <a:rPr sz="1000" b="0">
-                          <a:solidFill>
-                            <a:srgbClr val="1D1B43"/>
-                          </a:solidFill>
-                          <a:latin typeface="Calibri"/>
-                        </a:rPr>
-                        <a:t>Excelente</a:t>
+                        <a:t>25</a:t>
+                      </a:r>
+                    </a:p>
+                  </a:txBody>
+                  <a:tcPr>
+                    <a:solidFill>
+                      <a:srgbClr val="FFFFFF"/>
+                    </a:solidFill>
+                  </a:tcPr>
+                </a:tc>
+                <a:tc>
+                  <a:txBody>
+                    <a:bodyPr/>
+                    <a:lstStyle/>
+                    <a:p>
+                      <a:pPr algn="l"/>
+                      <a:r>
+                        <a:rPr sz="1000" b="0">
+                          <a:solidFill>
+                            <a:srgbClr val="1D1B43"/>
+                          </a:solidFill>
+                          <a:latin typeface="Calibri"/>
+                        </a:rPr>
+                        <a:t>23</a:t>
+                      </a:r>
+                    </a:p>
+                  </a:txBody>
+                  <a:tcPr>
+                    <a:solidFill>
+                      <a:srgbClr val="FFFFFF"/>
+                    </a:solidFill>
+                  </a:tcPr>
+                </a:tc>
+                <a:tc>
+                  <a:txBody>
+                    <a:bodyPr/>
+                    <a:lstStyle/>
+                    <a:p>
+                      <a:pPr algn="l"/>
+                      <a:r>
+                        <a:rPr sz="1000" b="0">
+                          <a:solidFill>
+                            <a:srgbClr val="1D1B43"/>
+                          </a:solidFill>
+                          <a:latin typeface="Calibri"/>
+                        </a:rPr>
+                        <a:t>2</a:t>
+                      </a:r>
+                    </a:p>
+                  </a:txBody>
+                  <a:tcPr>
+                    <a:solidFill>
+                      <a:srgbClr val="FFFFFF"/>
+                    </a:solidFill>
+                  </a:tcPr>
+                </a:tc>
+                <a:tc>
+                  <a:txBody>
+                    <a:bodyPr/>
+                    <a:lstStyle/>
+                    <a:p>
+                      <a:pPr algn="l"/>
+                      <a:r>
+                        <a:rPr sz="1000" b="0">
+                          <a:solidFill>
+                            <a:srgbClr val="1D1B43"/>
+                          </a:solidFill>
+                          <a:latin typeface="Calibri"/>
+                        </a:rPr>
+                        <a:t>92.0%</a:t>
+                      </a:r>
+                    </a:p>
+                  </a:txBody>
+                  <a:tcPr>
+                    <a:solidFill>
+                      <a:srgbClr val="FFFFFF"/>
+                    </a:solidFill>
+                  </a:tcPr>
+                </a:tc>
+                <a:tc>
+                  <a:txBody>
+                    <a:bodyPr/>
+                    <a:lstStyle/>
+                    <a:p>
+                      <a:pPr algn="l"/>
+                      <a:r>
+                        <a:rPr sz="1000" b="0">
+                          <a:solidFill>
+                            <a:srgbClr val="1D1B43"/>
+                          </a:solidFill>
+                          <a:latin typeface="Calibri"/>
+                        </a:rPr>
+                        <a:t>Regular</a:t>
                       </a:r>
                     </a:p>
                   </a:txBody>
@@ -8037,99 +9418,99 @@
                           </a:solidFill>
                           <a:latin typeface="Calibri"/>
                         </a:rPr>
-                        <a:t>27</a:t>
-                      </a:r>
-                    </a:p>
-                  </a:txBody>
-                  <a:tcPr>
-                    <a:solidFill>
-                      <a:srgbClr val="F2F2F2"/>
-                    </a:solidFill>
-                  </a:tcPr>
-                </a:tc>
-                <a:tc>
-                  <a:txBody>
-                    <a:bodyPr/>
-                    <a:lstStyle/>
-                    <a:p>
-                      <a:pPr algn="l"/>
-                      <a:r>
-                        <a:rPr sz="1000" b="0">
-                          <a:solidFill>
-                            <a:srgbClr val="1D1B43"/>
-                          </a:solidFill>
-                          <a:latin typeface="Calibri"/>
-                        </a:rPr>
-                        <a:t>27</a:t>
-                      </a:r>
-                    </a:p>
-                  </a:txBody>
-                  <a:tcPr>
-                    <a:solidFill>
-                      <a:srgbClr val="F2F2F2"/>
-                    </a:solidFill>
-                  </a:tcPr>
-                </a:tc>
-                <a:tc>
-                  <a:txBody>
-                    <a:bodyPr/>
-                    <a:lstStyle/>
-                    <a:p>
-                      <a:pPr algn="l"/>
-                      <a:r>
-                        <a:rPr sz="1000" b="0">
-                          <a:solidFill>
-                            <a:srgbClr val="1D1B43"/>
-                          </a:solidFill>
-                          <a:latin typeface="Calibri"/>
-                        </a:rPr>
-                        <a:t>0</a:t>
-                      </a:r>
-                    </a:p>
-                  </a:txBody>
-                  <a:tcPr>
-                    <a:solidFill>
-                      <a:srgbClr val="F2F2F2"/>
-                    </a:solidFill>
-                  </a:tcPr>
-                </a:tc>
-                <a:tc>
-                  <a:txBody>
-                    <a:bodyPr/>
-                    <a:lstStyle/>
-                    <a:p>
-                      <a:pPr algn="l"/>
-                      <a:r>
-                        <a:rPr sz="1000" b="0">
-                          <a:solidFill>
-                            <a:srgbClr val="1D1B43"/>
-                          </a:solidFill>
-                          <a:latin typeface="Calibri"/>
-                        </a:rPr>
-                        <a:t>100.0%</a:t>
-                      </a:r>
-                    </a:p>
-                  </a:txBody>
-                  <a:tcPr>
-                    <a:solidFill>
-                      <a:srgbClr val="F2F2F2"/>
-                    </a:solidFill>
-                  </a:tcPr>
-                </a:tc>
-                <a:tc>
-                  <a:txBody>
-                    <a:bodyPr/>
-                    <a:lstStyle/>
-                    <a:p>
-                      <a:pPr algn="l"/>
-                      <a:r>
-                        <a:rPr sz="1000" b="0">
-                          <a:solidFill>
-                            <a:srgbClr val="1D1B43"/>
-                          </a:solidFill>
-                          <a:latin typeface="Calibri"/>
-                        </a:rPr>
-                        <a:t>Excelente</a:t>
+                        <a:t>16</a:t>
+                      </a:r>
+                    </a:p>
+                  </a:txBody>
+                  <a:tcPr>
+                    <a:solidFill>
+                      <a:srgbClr val="F2F2F2"/>
+                    </a:solidFill>
+                  </a:tcPr>
+                </a:tc>
+                <a:tc>
+                  <a:txBody>
+                    <a:bodyPr/>
+                    <a:lstStyle/>
+                    <a:p>
+                      <a:pPr algn="l"/>
+                      <a:r>
+                        <a:rPr sz="1000" b="0">
+                          <a:solidFill>
+                            <a:srgbClr val="1D1B43"/>
+                          </a:solidFill>
+                          <a:latin typeface="Calibri"/>
+                        </a:rPr>
+                        <a:t>13</a:t>
+                      </a:r>
+                    </a:p>
+                  </a:txBody>
+                  <a:tcPr>
+                    <a:solidFill>
+                      <a:srgbClr val="F2F2F2"/>
+                    </a:solidFill>
+                  </a:tcPr>
+                </a:tc>
+                <a:tc>
+                  <a:txBody>
+                    <a:bodyPr/>
+                    <a:lstStyle/>
+                    <a:p>
+                      <a:pPr algn="l"/>
+                      <a:r>
+                        <a:rPr sz="1000" b="0">
+                          <a:solidFill>
+                            <a:srgbClr val="1D1B43"/>
+                          </a:solidFill>
+                          <a:latin typeface="Calibri"/>
+                        </a:rPr>
+                        <a:t>3</a:t>
+                      </a:r>
+                    </a:p>
+                  </a:txBody>
+                  <a:tcPr>
+                    <a:solidFill>
+                      <a:srgbClr val="F2F2F2"/>
+                    </a:solidFill>
+                  </a:tcPr>
+                </a:tc>
+                <a:tc>
+                  <a:txBody>
+                    <a:bodyPr/>
+                    <a:lstStyle/>
+                    <a:p>
+                      <a:pPr algn="l"/>
+                      <a:r>
+                        <a:rPr sz="1000" b="0">
+                          <a:solidFill>
+                            <a:srgbClr val="1D1B43"/>
+                          </a:solidFill>
+                          <a:latin typeface="Calibri"/>
+                        </a:rPr>
+                        <a:t>81.2%</a:t>
+                      </a:r>
+                    </a:p>
+                  </a:txBody>
+                  <a:tcPr>
+                    <a:solidFill>
+                      <a:srgbClr val="F2F2F2"/>
+                    </a:solidFill>
+                  </a:tcPr>
+                </a:tc>
+                <a:tc>
+                  <a:txBody>
+                    <a:bodyPr/>
+                    <a:lstStyle/>
+                    <a:p>
+                      <a:pPr algn="l"/>
+                      <a:r>
+                        <a:rPr sz="1000" b="0">
+                          <a:solidFill>
+                            <a:srgbClr val="1D1B43"/>
+                          </a:solidFill>
+                          <a:latin typeface="Calibri"/>
+                        </a:rPr>
+                        <a:t>Atencao</a:t>
                       </a:r>
                     </a:p>
                   </a:txBody>
@@ -8177,122 +9558,122 @@
                           </a:solidFill>
                           <a:latin typeface="Calibri"/>
                         </a:rPr>
-                        <a:t>BMQ AUTOMOVEIS LTDA - BELO HORIZONTE / MG</a:t>
-                      </a:r>
-                    </a:p>
-                  </a:txBody>
-                  <a:tcPr>
-                    <a:solidFill>
-                      <a:srgbClr val="FFFFFF"/>
-                    </a:solidFill>
-                  </a:tcPr>
-                </a:tc>
-                <a:tc>
-                  <a:txBody>
-                    <a:bodyPr/>
-                    <a:lstStyle/>
-                    <a:p>
-                      <a:pPr algn="l"/>
-                      <a:r>
-                        <a:rPr sz="1000" b="0">
-                          <a:solidFill>
-                            <a:srgbClr val="1D1B43"/>
-                          </a:solidFill>
-                          <a:latin typeface="Calibri"/>
-                        </a:rPr>
-                        <a:t>23</a:t>
-                      </a:r>
-                    </a:p>
-                  </a:txBody>
-                  <a:tcPr>
-                    <a:solidFill>
-                      <a:srgbClr val="FFFFFF"/>
-                    </a:solidFill>
-                  </a:tcPr>
-                </a:tc>
-                <a:tc>
-                  <a:txBody>
-                    <a:bodyPr/>
-                    <a:lstStyle/>
-                    <a:p>
-                      <a:pPr algn="l"/>
-                      <a:r>
-                        <a:rPr sz="1000" b="0">
-                          <a:solidFill>
-                            <a:srgbClr val="1D1B43"/>
-                          </a:solidFill>
-                          <a:latin typeface="Calibri"/>
-                        </a:rPr>
-                        <a:t>21</a:t>
-                      </a:r>
-                    </a:p>
-                  </a:txBody>
-                  <a:tcPr>
-                    <a:solidFill>
-                      <a:srgbClr val="FFFFFF"/>
-                    </a:solidFill>
-                  </a:tcPr>
-                </a:tc>
-                <a:tc>
-                  <a:txBody>
-                    <a:bodyPr/>
-                    <a:lstStyle/>
-                    <a:p>
-                      <a:pPr algn="l"/>
-                      <a:r>
-                        <a:rPr sz="1000" b="0">
-                          <a:solidFill>
-                            <a:srgbClr val="1D1B43"/>
-                          </a:solidFill>
-                          <a:latin typeface="Calibri"/>
-                        </a:rPr>
-                        <a:t>2</a:t>
-                      </a:r>
-                    </a:p>
-                  </a:txBody>
-                  <a:tcPr>
-                    <a:solidFill>
-                      <a:srgbClr val="FFFFFF"/>
-                    </a:solidFill>
-                  </a:tcPr>
-                </a:tc>
-                <a:tc>
-                  <a:txBody>
-                    <a:bodyPr/>
-                    <a:lstStyle/>
-                    <a:p>
-                      <a:pPr algn="l"/>
-                      <a:r>
-                        <a:rPr sz="1000" b="0">
-                          <a:solidFill>
-                            <a:srgbClr val="1D1B43"/>
-                          </a:solidFill>
-                          <a:latin typeface="Calibri"/>
-                        </a:rPr>
-                        <a:t>91.3%</a:t>
-                      </a:r>
-                    </a:p>
-                  </a:txBody>
-                  <a:tcPr>
-                    <a:solidFill>
-                      <a:srgbClr val="FFFFFF"/>
-                    </a:solidFill>
-                  </a:tcPr>
-                </a:tc>
-                <a:tc>
-                  <a:txBody>
-                    <a:bodyPr/>
-                    <a:lstStyle/>
-                    <a:p>
-                      <a:pPr algn="l"/>
-                      <a:r>
-                        <a:rPr sz="1000" b="0">
-                          <a:solidFill>
-                            <a:srgbClr val="1D1B43"/>
-                          </a:solidFill>
-                          <a:latin typeface="Calibri"/>
-                        </a:rPr>
-                        <a:t>Regular</a:t>
+                        <a:t>MRH VEICULOS - CURITIBA / PR</a:t>
+                      </a:r>
+                    </a:p>
+                  </a:txBody>
+                  <a:tcPr>
+                    <a:solidFill>
+                      <a:srgbClr val="FFFFFF"/>
+                    </a:solidFill>
+                  </a:tcPr>
+                </a:tc>
+                <a:tc>
+                  <a:txBody>
+                    <a:bodyPr/>
+                    <a:lstStyle/>
+                    <a:p>
+                      <a:pPr algn="l"/>
+                      <a:r>
+                        <a:rPr sz="1000" b="0">
+                          <a:solidFill>
+                            <a:srgbClr val="1D1B43"/>
+                          </a:solidFill>
+                          <a:latin typeface="Calibri"/>
+                        </a:rPr>
+                        <a:t>14</a:t>
+                      </a:r>
+                    </a:p>
+                  </a:txBody>
+                  <a:tcPr>
+                    <a:solidFill>
+                      <a:srgbClr val="FFFFFF"/>
+                    </a:solidFill>
+                  </a:tcPr>
+                </a:tc>
+                <a:tc>
+                  <a:txBody>
+                    <a:bodyPr/>
+                    <a:lstStyle/>
+                    <a:p>
+                      <a:pPr algn="l"/>
+                      <a:r>
+                        <a:rPr sz="1000" b="0">
+                          <a:solidFill>
+                            <a:srgbClr val="1D1B43"/>
+                          </a:solidFill>
+                          <a:latin typeface="Calibri"/>
+                        </a:rPr>
+                        <a:t>14</a:t>
+                      </a:r>
+                    </a:p>
+                  </a:txBody>
+                  <a:tcPr>
+                    <a:solidFill>
+                      <a:srgbClr val="FFFFFF"/>
+                    </a:solidFill>
+                  </a:tcPr>
+                </a:tc>
+                <a:tc>
+                  <a:txBody>
+                    <a:bodyPr/>
+                    <a:lstStyle/>
+                    <a:p>
+                      <a:pPr algn="l"/>
+                      <a:r>
+                        <a:rPr sz="1000" b="0">
+                          <a:solidFill>
+                            <a:srgbClr val="1D1B43"/>
+                          </a:solidFill>
+                          <a:latin typeface="Calibri"/>
+                        </a:rPr>
+                        <a:t>0</a:t>
+                      </a:r>
+                    </a:p>
+                  </a:txBody>
+                  <a:tcPr>
+                    <a:solidFill>
+                      <a:srgbClr val="FFFFFF"/>
+                    </a:solidFill>
+                  </a:tcPr>
+                </a:tc>
+                <a:tc>
+                  <a:txBody>
+                    <a:bodyPr/>
+                    <a:lstStyle/>
+                    <a:p>
+                      <a:pPr algn="l"/>
+                      <a:r>
+                        <a:rPr sz="1000" b="0">
+                          <a:solidFill>
+                            <a:srgbClr val="1D1B43"/>
+                          </a:solidFill>
+                          <a:latin typeface="Calibri"/>
+                        </a:rPr>
+                        <a:t>100.0%</a:t>
+                      </a:r>
+                    </a:p>
+                  </a:txBody>
+                  <a:tcPr>
+                    <a:solidFill>
+                      <a:srgbClr val="FFFFFF"/>
+                    </a:solidFill>
+                  </a:tcPr>
+                </a:tc>
+                <a:tc>
+                  <a:txBody>
+                    <a:bodyPr/>
+                    <a:lstStyle/>
+                    <a:p>
+                      <a:pPr algn="l"/>
+                      <a:r>
+                        <a:rPr sz="1000" b="0">
+                          <a:solidFill>
+                            <a:srgbClr val="1D1B43"/>
+                          </a:solidFill>
+                          <a:latin typeface="Calibri"/>
+                        </a:rPr>
+                        <a:t>Excelente</a:t>
                       </a:r>
                     </a:p>
                   </a:txBody>
@@ -8340,53 +9721,53 @@
                           </a:solidFill>
                           <a:latin typeface="Calibri"/>
                         </a:rPr>
-                        <a:t>MRH VEICULOS LTDA. - PORTO ALEGRE / RS</a:t>
-                      </a:r>
-                    </a:p>
-                  </a:txBody>
-                  <a:tcPr>
-                    <a:solidFill>
-                      <a:srgbClr val="F2F2F2"/>
-                    </a:solidFill>
-                  </a:tcPr>
-                </a:tc>
-                <a:tc>
-                  <a:txBody>
-                    <a:bodyPr/>
-                    <a:lstStyle/>
-                    <a:p>
-                      <a:pPr algn="l"/>
-                      <a:r>
-                        <a:rPr sz="1000" b="0">
-                          <a:solidFill>
-                            <a:srgbClr val="1D1B43"/>
-                          </a:solidFill>
-                          <a:latin typeface="Calibri"/>
-                        </a:rPr>
-                        <a:t>23</a:t>
-                      </a:r>
-                    </a:p>
-                  </a:txBody>
-                  <a:tcPr>
-                    <a:solidFill>
-                      <a:srgbClr val="F2F2F2"/>
-                    </a:solidFill>
-                  </a:tcPr>
-                </a:tc>
-                <a:tc>
-                  <a:txBody>
-                    <a:bodyPr/>
-                    <a:lstStyle/>
-                    <a:p>
-                      <a:pPr algn="l"/>
-                      <a:r>
-                        <a:rPr sz="1000" b="0">
-                          <a:solidFill>
-                            <a:srgbClr val="1D1B43"/>
-                          </a:solidFill>
-                          <a:latin typeface="Calibri"/>
-                        </a:rPr>
-                        <a:t>23</a:t>
+                        <a:t>BCLV COMERCIO DE VEI - GOIANIA / GO</a:t>
+                      </a:r>
+                    </a:p>
+                  </a:txBody>
+                  <a:tcPr>
+                    <a:solidFill>
+                      <a:srgbClr val="F2F2F2"/>
+                    </a:solidFill>
+                  </a:tcPr>
+                </a:tc>
+                <a:tc>
+                  <a:txBody>
+                    <a:bodyPr/>
+                    <a:lstStyle/>
+                    <a:p>
+                      <a:pPr algn="l"/>
+                      <a:r>
+                        <a:rPr sz="1000" b="0">
+                          <a:solidFill>
+                            <a:srgbClr val="1D1B43"/>
+                          </a:solidFill>
+                          <a:latin typeface="Calibri"/>
+                        </a:rPr>
+                        <a:t>14</a:t>
+                      </a:r>
+                    </a:p>
+                  </a:txBody>
+                  <a:tcPr>
+                    <a:solidFill>
+                      <a:srgbClr val="F2F2F2"/>
+                    </a:solidFill>
+                  </a:tcPr>
+                </a:tc>
+                <a:tc>
+                  <a:txBody>
+                    <a:bodyPr/>
+                    <a:lstStyle/>
+                    <a:p>
+                      <a:pPr algn="l"/>
+                      <a:r>
+                        <a:rPr sz="1000" b="0">
+                          <a:solidFill>
+                            <a:srgbClr val="1D1B43"/>
+                          </a:solidFill>
+                          <a:latin typeface="Calibri"/>
+                        </a:rPr>
+                        <a:t>14</a:t>
                       </a:r>
                     </a:p>
                   </a:txBody>
@@ -8503,122 +9884,122 @@
                           </a:solidFill>
                           <a:latin typeface="Calibri"/>
                         </a:rPr>
-                        <a:t>LIA E ANNETTE INDUST - RIO DE JANEIRO / RJ</a:t>
-                      </a:r>
-                    </a:p>
-                  </a:txBody>
-                  <a:tcPr>
-                    <a:solidFill>
-                      <a:srgbClr val="FFFFFF"/>
-                    </a:solidFill>
-                  </a:tcPr>
-                </a:tc>
-                <a:tc>
-                  <a:txBody>
-                    <a:bodyPr/>
-                    <a:lstStyle/>
-                    <a:p>
-                      <a:pPr algn="l"/>
-                      <a:r>
-                        <a:rPr sz="1000" b="0">
-                          <a:solidFill>
-                            <a:srgbClr val="1D1B43"/>
-                          </a:solidFill>
-                          <a:latin typeface="Calibri"/>
-                        </a:rPr>
-                        <a:t>22</a:t>
-                      </a:r>
-                    </a:p>
-                  </a:txBody>
-                  <a:tcPr>
-                    <a:solidFill>
-                      <a:srgbClr val="FFFFFF"/>
-                    </a:solidFill>
-                  </a:tcPr>
-                </a:tc>
-                <a:tc>
-                  <a:txBody>
-                    <a:bodyPr/>
-                    <a:lstStyle/>
-                    <a:p>
-                      <a:pPr algn="l"/>
-                      <a:r>
-                        <a:rPr sz="1000" b="0">
-                          <a:solidFill>
-                            <a:srgbClr val="1D1B43"/>
-                          </a:solidFill>
-                          <a:latin typeface="Calibri"/>
-                        </a:rPr>
-                        <a:t>22</a:t>
-                      </a:r>
-                    </a:p>
-                  </a:txBody>
-                  <a:tcPr>
-                    <a:solidFill>
-                      <a:srgbClr val="FFFFFF"/>
-                    </a:solidFill>
-                  </a:tcPr>
-                </a:tc>
-                <a:tc>
-                  <a:txBody>
-                    <a:bodyPr/>
-                    <a:lstStyle/>
-                    <a:p>
-                      <a:pPr algn="l"/>
-                      <a:r>
-                        <a:rPr sz="1000" b="0">
-                          <a:solidFill>
-                            <a:srgbClr val="1D1B43"/>
-                          </a:solidFill>
-                          <a:latin typeface="Calibri"/>
-                        </a:rPr>
-                        <a:t>0</a:t>
-                      </a:r>
-                    </a:p>
-                  </a:txBody>
-                  <a:tcPr>
-                    <a:solidFill>
-                      <a:srgbClr val="FFFFFF"/>
-                    </a:solidFill>
-                  </a:tcPr>
-                </a:tc>
-                <a:tc>
-                  <a:txBody>
-                    <a:bodyPr/>
-                    <a:lstStyle/>
-                    <a:p>
-                      <a:pPr algn="l"/>
-                      <a:r>
-                        <a:rPr sz="1000" b="0">
-                          <a:solidFill>
-                            <a:srgbClr val="1D1B43"/>
-                          </a:solidFill>
-                          <a:latin typeface="Calibri"/>
-                        </a:rPr>
-                        <a:t>100.0%</a:t>
-                      </a:r>
-                    </a:p>
-                  </a:txBody>
-                  <a:tcPr>
-                    <a:solidFill>
-                      <a:srgbClr val="FFFFFF"/>
-                    </a:solidFill>
-                  </a:tcPr>
-                </a:tc>
-                <a:tc>
-                  <a:txBody>
-                    <a:bodyPr/>
-                    <a:lstStyle/>
-                    <a:p>
-                      <a:pPr algn="l"/>
-                      <a:r>
-                        <a:rPr sz="1000" b="0">
-                          <a:solidFill>
-                            <a:srgbClr val="1D1B43"/>
-                          </a:solidFill>
-                          <a:latin typeface="Calibri"/>
-                        </a:rPr>
-                        <a:t>Excelente</a:t>
+                        <a:t>BMQ AUTOMOVEIS LTDA - BELO HORIZONTE / MG</a:t>
+                      </a:r>
+                    </a:p>
+                  </a:txBody>
+                  <a:tcPr>
+                    <a:solidFill>
+                      <a:srgbClr val="FFFFFF"/>
+                    </a:solidFill>
+                  </a:tcPr>
+                </a:tc>
+                <a:tc>
+                  <a:txBody>
+                    <a:bodyPr/>
+                    <a:lstStyle/>
+                    <a:p>
+                      <a:pPr algn="l"/>
+                      <a:r>
+                        <a:rPr sz="1000" b="0">
+                          <a:solidFill>
+                            <a:srgbClr val="1D1B43"/>
+                          </a:solidFill>
+                          <a:latin typeface="Calibri"/>
+                        </a:rPr>
+                        <a:t>13</a:t>
+                      </a:r>
+                    </a:p>
+                  </a:txBody>
+                  <a:tcPr>
+                    <a:solidFill>
+                      <a:srgbClr val="FFFFFF"/>
+                    </a:solidFill>
+                  </a:tcPr>
+                </a:tc>
+                <a:tc>
+                  <a:txBody>
+                    <a:bodyPr/>
+                    <a:lstStyle/>
+                    <a:p>
+                      <a:pPr algn="l"/>
+                      <a:r>
+                        <a:rPr sz="1000" b="0">
+                          <a:solidFill>
+                            <a:srgbClr val="1D1B43"/>
+                          </a:solidFill>
+                          <a:latin typeface="Calibri"/>
+                        </a:rPr>
+                        <a:t>10</a:t>
+                      </a:r>
+                    </a:p>
+                  </a:txBody>
+                  <a:tcPr>
+                    <a:solidFill>
+                      <a:srgbClr val="FFFFFF"/>
+                    </a:solidFill>
+                  </a:tcPr>
+                </a:tc>
+                <a:tc>
+                  <a:txBody>
+                    <a:bodyPr/>
+                    <a:lstStyle/>
+                    <a:p>
+                      <a:pPr algn="l"/>
+                      <a:r>
+                        <a:rPr sz="1000" b="0">
+                          <a:solidFill>
+                            <a:srgbClr val="1D1B43"/>
+                          </a:solidFill>
+                          <a:latin typeface="Calibri"/>
+                        </a:rPr>
+                        <a:t>3</a:t>
+                      </a:r>
+                    </a:p>
+                  </a:txBody>
+                  <a:tcPr>
+                    <a:solidFill>
+                      <a:srgbClr val="FFFFFF"/>
+                    </a:solidFill>
+                  </a:tcPr>
+                </a:tc>
+                <a:tc>
+                  <a:txBody>
+                    <a:bodyPr/>
+                    <a:lstStyle/>
+                    <a:p>
+                      <a:pPr algn="l"/>
+                      <a:r>
+                        <a:rPr sz="1000" b="0">
+                          <a:solidFill>
+                            <a:srgbClr val="1D1B43"/>
+                          </a:solidFill>
+                          <a:latin typeface="Calibri"/>
+                        </a:rPr>
+                        <a:t>76.9%</a:t>
+                      </a:r>
+                    </a:p>
+                  </a:txBody>
+                  <a:tcPr>
+                    <a:solidFill>
+                      <a:srgbClr val="FFFFFF"/>
+                    </a:solidFill>
+                  </a:tcPr>
+                </a:tc>
+                <a:tc>
+                  <a:txBody>
+                    <a:bodyPr/>
+                    <a:lstStyle/>
+                    <a:p>
+                      <a:pPr algn="l"/>
+                      <a:r>
+                        <a:rPr sz="1000" b="0">
+                          <a:solidFill>
+                            <a:srgbClr val="1D1B43"/>
+                          </a:solidFill>
+                          <a:latin typeface="Calibri"/>
+                        </a:rPr>
+                        <a:t>Atencao</a:t>
                       </a:r>
                     </a:p>
                   </a:txBody>
@@ -8666,122 +10047,122 @@
                           </a:solidFill>
                           <a:latin typeface="Calibri"/>
                         </a:rPr>
-                        <a:t>MRH VEICULOS - CURITIBA / PR</a:t>
-                      </a:r>
-                    </a:p>
-                  </a:txBody>
-                  <a:tcPr>
-                    <a:solidFill>
-                      <a:srgbClr val="F2F2F2"/>
-                    </a:solidFill>
-                  </a:tcPr>
-                </a:tc>
-                <a:tc>
-                  <a:txBody>
-                    <a:bodyPr/>
-                    <a:lstStyle/>
-                    <a:p>
-                      <a:pPr algn="l"/>
-                      <a:r>
-                        <a:rPr sz="1000" b="0">
-                          <a:solidFill>
-                            <a:srgbClr val="1D1B43"/>
-                          </a:solidFill>
-                          <a:latin typeface="Calibri"/>
-                        </a:rPr>
-                        <a:t>22</a:t>
-                      </a:r>
-                    </a:p>
-                  </a:txBody>
-                  <a:tcPr>
-                    <a:solidFill>
-                      <a:srgbClr val="F2F2F2"/>
-                    </a:solidFill>
-                  </a:tcPr>
-                </a:tc>
-                <a:tc>
-                  <a:txBody>
-                    <a:bodyPr/>
-                    <a:lstStyle/>
-                    <a:p>
-                      <a:pPr algn="l"/>
-                      <a:r>
-                        <a:rPr sz="1000" b="0">
-                          <a:solidFill>
-                            <a:srgbClr val="1D1B43"/>
-                          </a:solidFill>
-                          <a:latin typeface="Calibri"/>
-                        </a:rPr>
-                        <a:t>22</a:t>
-                      </a:r>
-                    </a:p>
-                  </a:txBody>
-                  <a:tcPr>
-                    <a:solidFill>
-                      <a:srgbClr val="F2F2F2"/>
-                    </a:solidFill>
-                  </a:tcPr>
-                </a:tc>
-                <a:tc>
-                  <a:txBody>
-                    <a:bodyPr/>
-                    <a:lstStyle/>
-                    <a:p>
-                      <a:pPr algn="l"/>
-                      <a:r>
-                        <a:rPr sz="1000" b="0">
-                          <a:solidFill>
-                            <a:srgbClr val="1D1B43"/>
-                          </a:solidFill>
-                          <a:latin typeface="Calibri"/>
-                        </a:rPr>
-                        <a:t>0</a:t>
-                      </a:r>
-                    </a:p>
-                  </a:txBody>
-                  <a:tcPr>
-                    <a:solidFill>
-                      <a:srgbClr val="F2F2F2"/>
-                    </a:solidFill>
-                  </a:tcPr>
-                </a:tc>
-                <a:tc>
-                  <a:txBody>
-                    <a:bodyPr/>
-                    <a:lstStyle/>
-                    <a:p>
-                      <a:pPr algn="l"/>
-                      <a:r>
-                        <a:rPr sz="1000" b="0">
-                          <a:solidFill>
-                            <a:srgbClr val="1D1B43"/>
-                          </a:solidFill>
-                          <a:latin typeface="Calibri"/>
-                        </a:rPr>
-                        <a:t>100.0%</a:t>
-                      </a:r>
-                    </a:p>
-                  </a:txBody>
-                  <a:tcPr>
-                    <a:solidFill>
-                      <a:srgbClr val="F2F2F2"/>
-                    </a:solidFill>
-                  </a:tcPr>
-                </a:tc>
-                <a:tc>
-                  <a:txBody>
-                    <a:bodyPr/>
-                    <a:lstStyle/>
-                    <a:p>
-                      <a:pPr algn="l"/>
-                      <a:r>
-                        <a:rPr sz="1000" b="0">
-                          <a:solidFill>
-                            <a:srgbClr val="1D1B43"/>
-                          </a:solidFill>
-                          <a:latin typeface="Calibri"/>
-                        </a:rPr>
-                        <a:t>Excelente</a:t>
+                        <a:t>MRH VEICULOS LTDA. - FLORIANOPOLIS / SC</a:t>
+                      </a:r>
+                    </a:p>
+                  </a:txBody>
+                  <a:tcPr>
+                    <a:solidFill>
+                      <a:srgbClr val="F2F2F2"/>
+                    </a:solidFill>
+                  </a:tcPr>
+                </a:tc>
+                <a:tc>
+                  <a:txBody>
+                    <a:bodyPr/>
+                    <a:lstStyle/>
+                    <a:p>
+                      <a:pPr algn="l"/>
+                      <a:r>
+                        <a:rPr sz="1000" b="0">
+                          <a:solidFill>
+                            <a:srgbClr val="1D1B43"/>
+                          </a:solidFill>
+                          <a:latin typeface="Calibri"/>
+                        </a:rPr>
+                        <a:t>13</a:t>
+                      </a:r>
+                    </a:p>
+                  </a:txBody>
+                  <a:tcPr>
+                    <a:solidFill>
+                      <a:srgbClr val="F2F2F2"/>
+                    </a:solidFill>
+                  </a:tcPr>
+                </a:tc>
+                <a:tc>
+                  <a:txBody>
+                    <a:bodyPr/>
+                    <a:lstStyle/>
+                    <a:p>
+                      <a:pPr algn="l"/>
+                      <a:r>
+                        <a:rPr sz="1000" b="0">
+                          <a:solidFill>
+                            <a:srgbClr val="1D1B43"/>
+                          </a:solidFill>
+                          <a:latin typeface="Calibri"/>
+                        </a:rPr>
+                        <a:t>12</a:t>
+                      </a:r>
+                    </a:p>
+                  </a:txBody>
+                  <a:tcPr>
+                    <a:solidFill>
+                      <a:srgbClr val="F2F2F2"/>
+                    </a:solidFill>
+                  </a:tcPr>
+                </a:tc>
+                <a:tc>
+                  <a:txBody>
+                    <a:bodyPr/>
+                    <a:lstStyle/>
+                    <a:p>
+                      <a:pPr algn="l"/>
+                      <a:r>
+                        <a:rPr sz="1000" b="0">
+                          <a:solidFill>
+                            <a:srgbClr val="1D1B43"/>
+                          </a:solidFill>
+                          <a:latin typeface="Calibri"/>
+                        </a:rPr>
+                        <a:t>1</a:t>
+                      </a:r>
+                    </a:p>
+                  </a:txBody>
+                  <a:tcPr>
+                    <a:solidFill>
+                      <a:srgbClr val="F2F2F2"/>
+                    </a:solidFill>
+                  </a:tcPr>
+                </a:tc>
+                <a:tc>
+                  <a:txBody>
+                    <a:bodyPr/>
+                    <a:lstStyle/>
+                    <a:p>
+                      <a:pPr algn="l"/>
+                      <a:r>
+                        <a:rPr sz="1000" b="0">
+                          <a:solidFill>
+                            <a:srgbClr val="1D1B43"/>
+                          </a:solidFill>
+                          <a:latin typeface="Calibri"/>
+                        </a:rPr>
+                        <a:t>92.3%</a:t>
+                      </a:r>
+                    </a:p>
+                  </a:txBody>
+                  <a:tcPr>
+                    <a:solidFill>
+                      <a:srgbClr val="F2F2F2"/>
+                    </a:solidFill>
+                  </a:tcPr>
+                </a:tc>
+                <a:tc>
+                  <a:txBody>
+                    <a:bodyPr/>
+                    <a:lstStyle/>
+                    <a:p>
+                      <a:pPr algn="l"/>
+                      <a:r>
+                        <a:rPr sz="1000" b="0">
+                          <a:solidFill>
+                            <a:srgbClr val="1D1B43"/>
+                          </a:solidFill>
+                          <a:latin typeface="Calibri"/>
+                        </a:rPr>
+                        <a:t>Regular</a:t>
                       </a:r>
                     </a:p>
                   </a:txBody>
@@ -8829,122 +10210,122 @@
                           </a:solidFill>
                           <a:latin typeface="Calibri"/>
                         </a:rPr>
-                        <a:t>MRH VEICULOS LTDA. - FLORIANOPOLIS / SC</a:t>
-                      </a:r>
-                    </a:p>
-                  </a:txBody>
-                  <a:tcPr>
-                    <a:solidFill>
-                      <a:srgbClr val="FFFFFF"/>
-                    </a:solidFill>
-                  </a:tcPr>
-                </a:tc>
-                <a:tc>
-                  <a:txBody>
-                    <a:bodyPr/>
-                    <a:lstStyle/>
-                    <a:p>
-                      <a:pPr algn="l"/>
-                      <a:r>
-                        <a:rPr sz="1000" b="0">
-                          <a:solidFill>
-                            <a:srgbClr val="1D1B43"/>
-                          </a:solidFill>
-                          <a:latin typeface="Calibri"/>
-                        </a:rPr>
-                        <a:t>22</a:t>
-                      </a:r>
-                    </a:p>
-                  </a:txBody>
-                  <a:tcPr>
-                    <a:solidFill>
-                      <a:srgbClr val="FFFFFF"/>
-                    </a:solidFill>
-                  </a:tcPr>
-                </a:tc>
-                <a:tc>
-                  <a:txBody>
-                    <a:bodyPr/>
-                    <a:lstStyle/>
-                    <a:p>
-                      <a:pPr algn="l"/>
-                      <a:r>
-                        <a:rPr sz="1000" b="0">
-                          <a:solidFill>
-                            <a:srgbClr val="1D1B43"/>
-                          </a:solidFill>
-                          <a:latin typeface="Calibri"/>
-                        </a:rPr>
-                        <a:t>22</a:t>
-                      </a:r>
-                    </a:p>
-                  </a:txBody>
-                  <a:tcPr>
-                    <a:solidFill>
-                      <a:srgbClr val="FFFFFF"/>
-                    </a:solidFill>
-                  </a:tcPr>
-                </a:tc>
-                <a:tc>
-                  <a:txBody>
-                    <a:bodyPr/>
-                    <a:lstStyle/>
-                    <a:p>
-                      <a:pPr algn="l"/>
-                      <a:r>
-                        <a:rPr sz="1000" b="0">
-                          <a:solidFill>
-                            <a:srgbClr val="1D1B43"/>
-                          </a:solidFill>
-                          <a:latin typeface="Calibri"/>
-                        </a:rPr>
-                        <a:t>0</a:t>
-                      </a:r>
-                    </a:p>
-                  </a:txBody>
-                  <a:tcPr>
-                    <a:solidFill>
-                      <a:srgbClr val="FFFFFF"/>
-                    </a:solidFill>
-                  </a:tcPr>
-                </a:tc>
-                <a:tc>
-                  <a:txBody>
-                    <a:bodyPr/>
-                    <a:lstStyle/>
-                    <a:p>
-                      <a:pPr algn="l"/>
-                      <a:r>
-                        <a:rPr sz="1000" b="0">
-                          <a:solidFill>
-                            <a:srgbClr val="1D1B43"/>
-                          </a:solidFill>
-                          <a:latin typeface="Calibri"/>
-                        </a:rPr>
-                        <a:t>100.0%</a:t>
-                      </a:r>
-                    </a:p>
-                  </a:txBody>
-                  <a:tcPr>
-                    <a:solidFill>
-                      <a:srgbClr val="FFFFFF"/>
-                    </a:solidFill>
-                  </a:tcPr>
-                </a:tc>
-                <a:tc>
-                  <a:txBody>
-                    <a:bodyPr/>
-                    <a:lstStyle/>
-                    <a:p>
-                      <a:pPr algn="l"/>
-                      <a:r>
-                        <a:rPr sz="1000" b="0">
-                          <a:solidFill>
-                            <a:srgbClr val="1D1B43"/>
-                          </a:solidFill>
-                          <a:latin typeface="Calibri"/>
-                        </a:rPr>
-                        <a:t>Excelente</a:t>
+                        <a:t>LIA E ANNETTE INDUST - RIO DE JANEIRO / RJ</a:t>
+                      </a:r>
+                    </a:p>
+                  </a:txBody>
+                  <a:tcPr>
+                    <a:solidFill>
+                      <a:srgbClr val="FFFFFF"/>
+                    </a:solidFill>
+                  </a:tcPr>
+                </a:tc>
+                <a:tc>
+                  <a:txBody>
+                    <a:bodyPr/>
+                    <a:lstStyle/>
+                    <a:p>
+                      <a:pPr algn="l"/>
+                      <a:r>
+                        <a:rPr sz="1000" b="0">
+                          <a:solidFill>
+                            <a:srgbClr val="1D1B43"/>
+                          </a:solidFill>
+                          <a:latin typeface="Calibri"/>
+                        </a:rPr>
+                        <a:t>11</a:t>
+                      </a:r>
+                    </a:p>
+                  </a:txBody>
+                  <a:tcPr>
+                    <a:solidFill>
+                      <a:srgbClr val="FFFFFF"/>
+                    </a:solidFill>
+                  </a:tcPr>
+                </a:tc>
+                <a:tc>
+                  <a:txBody>
+                    <a:bodyPr/>
+                    <a:lstStyle/>
+                    <a:p>
+                      <a:pPr algn="l"/>
+                      <a:r>
+                        <a:rPr sz="1000" b="0">
+                          <a:solidFill>
+                            <a:srgbClr val="1D1B43"/>
+                          </a:solidFill>
+                          <a:latin typeface="Calibri"/>
+                        </a:rPr>
+                        <a:t>9</a:t>
+                      </a:r>
+                    </a:p>
+                  </a:txBody>
+                  <a:tcPr>
+                    <a:solidFill>
+                      <a:srgbClr val="FFFFFF"/>
+                    </a:solidFill>
+                  </a:tcPr>
+                </a:tc>
+                <a:tc>
+                  <a:txBody>
+                    <a:bodyPr/>
+                    <a:lstStyle/>
+                    <a:p>
+                      <a:pPr algn="l"/>
+                      <a:r>
+                        <a:rPr sz="1000" b="0">
+                          <a:solidFill>
+                            <a:srgbClr val="1D1B43"/>
+                          </a:solidFill>
+                          <a:latin typeface="Calibri"/>
+                        </a:rPr>
+                        <a:t>2</a:t>
+                      </a:r>
+                    </a:p>
+                  </a:txBody>
+                  <a:tcPr>
+                    <a:solidFill>
+                      <a:srgbClr val="FFFFFF"/>
+                    </a:solidFill>
+                  </a:tcPr>
+                </a:tc>
+                <a:tc>
+                  <a:txBody>
+                    <a:bodyPr/>
+                    <a:lstStyle/>
+                    <a:p>
+                      <a:pPr algn="l"/>
+                      <a:r>
+                        <a:rPr sz="1000" b="0">
+                          <a:solidFill>
+                            <a:srgbClr val="1D1B43"/>
+                          </a:solidFill>
+                          <a:latin typeface="Calibri"/>
+                        </a:rPr>
+                        <a:t>81.8%</a:t>
+                      </a:r>
+                    </a:p>
+                  </a:txBody>
+                  <a:tcPr>
+                    <a:solidFill>
+                      <a:srgbClr val="FFFFFF"/>
+                    </a:solidFill>
+                  </a:tcPr>
+                </a:tc>
+                <a:tc>
+                  <a:txBody>
+                    <a:bodyPr/>
+                    <a:lstStyle/>
+                    <a:p>
+                      <a:pPr algn="l"/>
+                      <a:r>
+                        <a:rPr sz="1000" b="0">
+                          <a:solidFill>
+                            <a:srgbClr val="1D1B43"/>
+                          </a:solidFill>
+                          <a:latin typeface="Calibri"/>
+                        </a:rPr>
+                        <a:t>Atencao</a:t>
                       </a:r>
                     </a:p>
                   </a:txBody>
@@ -8992,122 +10373,122 @@
                           </a:solidFill>
                           <a:latin typeface="Calibri"/>
                         </a:rPr>
-                        <a:t>BCLV COMERCIO DE VEI - GOIANIA / GO</a:t>
-                      </a:r>
-                    </a:p>
-                  </a:txBody>
-                  <a:tcPr>
-                    <a:solidFill>
-                      <a:srgbClr val="F2F2F2"/>
-                    </a:solidFill>
-                  </a:tcPr>
-                </a:tc>
-                <a:tc>
-                  <a:txBody>
-                    <a:bodyPr/>
-                    <a:lstStyle/>
-                    <a:p>
-                      <a:pPr algn="l"/>
-                      <a:r>
-                        <a:rPr sz="1000" b="0">
-                          <a:solidFill>
-                            <a:srgbClr val="1D1B43"/>
-                          </a:solidFill>
-                          <a:latin typeface="Calibri"/>
-                        </a:rPr>
-                        <a:t>21</a:t>
-                      </a:r>
-                    </a:p>
-                  </a:txBody>
-                  <a:tcPr>
-                    <a:solidFill>
-                      <a:srgbClr val="F2F2F2"/>
-                    </a:solidFill>
-                  </a:tcPr>
-                </a:tc>
-                <a:tc>
-                  <a:txBody>
-                    <a:bodyPr/>
-                    <a:lstStyle/>
-                    <a:p>
-                      <a:pPr algn="l"/>
-                      <a:r>
-                        <a:rPr sz="1000" b="0">
-                          <a:solidFill>
-                            <a:srgbClr val="1D1B43"/>
-                          </a:solidFill>
-                          <a:latin typeface="Calibri"/>
-                        </a:rPr>
-                        <a:t>21</a:t>
-                      </a:r>
-                    </a:p>
-                  </a:txBody>
-                  <a:tcPr>
-                    <a:solidFill>
-                      <a:srgbClr val="F2F2F2"/>
-                    </a:solidFill>
-                  </a:tcPr>
-                </a:tc>
-                <a:tc>
-                  <a:txBody>
-                    <a:bodyPr/>
-                    <a:lstStyle/>
-                    <a:p>
-                      <a:pPr algn="l"/>
-                      <a:r>
-                        <a:rPr sz="1000" b="0">
-                          <a:solidFill>
-                            <a:srgbClr val="1D1B43"/>
-                          </a:solidFill>
-                          <a:latin typeface="Calibri"/>
-                        </a:rPr>
-                        <a:t>0</a:t>
-                      </a:r>
-                    </a:p>
-                  </a:txBody>
-                  <a:tcPr>
-                    <a:solidFill>
-                      <a:srgbClr val="F2F2F2"/>
-                    </a:solidFill>
-                  </a:tcPr>
-                </a:tc>
-                <a:tc>
-                  <a:txBody>
-                    <a:bodyPr/>
-                    <a:lstStyle/>
-                    <a:p>
-                      <a:pPr algn="l"/>
-                      <a:r>
-                        <a:rPr sz="1000" b="0">
-                          <a:solidFill>
-                            <a:srgbClr val="1D1B43"/>
-                          </a:solidFill>
-                          <a:latin typeface="Calibri"/>
-                        </a:rPr>
-                        <a:t>100.0%</a:t>
-                      </a:r>
-                    </a:p>
-                  </a:txBody>
-                  <a:tcPr>
-                    <a:solidFill>
-                      <a:srgbClr val="F2F2F2"/>
-                    </a:solidFill>
-                  </a:tcPr>
-                </a:tc>
-                <a:tc>
-                  <a:txBody>
-                    <a:bodyPr/>
-                    <a:lstStyle/>
-                    <a:p>
-                      <a:pPr algn="l"/>
-                      <a:r>
-                        <a:rPr sz="1000" b="0">
-                          <a:solidFill>
-                            <a:srgbClr val="1D1B43"/>
-                          </a:solidFill>
-                          <a:latin typeface="Calibri"/>
-                        </a:rPr>
-                        <a:t>Excelente</a:t>
+                        <a:t>CENTRO TECNICO DE VE - SAO PAULO / SP</a:t>
+                      </a:r>
+                    </a:p>
+                  </a:txBody>
+                  <a:tcPr>
+                    <a:solidFill>
+                      <a:srgbClr val="F2F2F2"/>
+                    </a:solidFill>
+                  </a:tcPr>
+                </a:tc>
+                <a:tc>
+                  <a:txBody>
+                    <a:bodyPr/>
+                    <a:lstStyle/>
+                    <a:p>
+                      <a:pPr algn="l"/>
+                      <a:r>
+                        <a:rPr sz="1000" b="0">
+                          <a:solidFill>
+                            <a:srgbClr val="1D1B43"/>
+                          </a:solidFill>
+                          <a:latin typeface="Calibri"/>
+                        </a:rPr>
+                        <a:t>11</a:t>
+                      </a:r>
+                    </a:p>
+                  </a:txBody>
+                  <a:tcPr>
+                    <a:solidFill>
+                      <a:srgbClr val="F2F2F2"/>
+                    </a:solidFill>
+                  </a:tcPr>
+                </a:tc>
+                <a:tc>
+                  <a:txBody>
+                    <a:bodyPr/>
+                    <a:lstStyle/>
+                    <a:p>
+                      <a:pPr algn="l"/>
+                      <a:r>
+                        <a:rPr sz="1000" b="0">
+                          <a:solidFill>
+                            <a:srgbClr val="1D1B43"/>
+                          </a:solidFill>
+                          <a:latin typeface="Calibri"/>
+                        </a:rPr>
+                        <a:t>9</a:t>
+                      </a:r>
+                    </a:p>
+                  </a:txBody>
+                  <a:tcPr>
+                    <a:solidFill>
+                      <a:srgbClr val="F2F2F2"/>
+                    </a:solidFill>
+                  </a:tcPr>
+                </a:tc>
+                <a:tc>
+                  <a:txBody>
+                    <a:bodyPr/>
+                    <a:lstStyle/>
+                    <a:p>
+                      <a:pPr algn="l"/>
+                      <a:r>
+                        <a:rPr sz="1000" b="0">
+                          <a:solidFill>
+                            <a:srgbClr val="1D1B43"/>
+                          </a:solidFill>
+                          <a:latin typeface="Calibri"/>
+                        </a:rPr>
+                        <a:t>2</a:t>
+                      </a:r>
+                    </a:p>
+                  </a:txBody>
+                  <a:tcPr>
+                    <a:solidFill>
+                      <a:srgbClr val="F2F2F2"/>
+                    </a:solidFill>
+                  </a:tcPr>
+                </a:tc>
+                <a:tc>
+                  <a:txBody>
+                    <a:bodyPr/>
+                    <a:lstStyle/>
+                    <a:p>
+                      <a:pPr algn="l"/>
+                      <a:r>
+                        <a:rPr sz="1000" b="0">
+                          <a:solidFill>
+                            <a:srgbClr val="1D1B43"/>
+                          </a:solidFill>
+                          <a:latin typeface="Calibri"/>
+                        </a:rPr>
+                        <a:t>81.8%</a:t>
+                      </a:r>
+                    </a:p>
+                  </a:txBody>
+                  <a:tcPr>
+                    <a:solidFill>
+                      <a:srgbClr val="F2F2F2"/>
+                    </a:solidFill>
+                  </a:tcPr>
+                </a:tc>
+                <a:tc>
+                  <a:txBody>
+                    <a:bodyPr/>
+                    <a:lstStyle/>
+                    <a:p>
+                      <a:pPr algn="l"/>
+                      <a:r>
+                        <a:rPr sz="1000" b="0">
+                          <a:solidFill>
+                            <a:srgbClr val="1D1B43"/>
+                          </a:solidFill>
+                          <a:latin typeface="Calibri"/>
+                        </a:rPr>
+                        <a:t>Atencao</a:t>
                       </a:r>
                     </a:p>
                   </a:txBody>
@@ -9155,122 +10536,122 @@
                           </a:solidFill>
                           <a:latin typeface="Calibri"/>
                         </a:rPr>
-                        <a:t>CENTRO TECNICO DE VE - SAO PAULO / SP</a:t>
-                      </a:r>
-                    </a:p>
-                  </a:txBody>
-                  <a:tcPr>
-                    <a:solidFill>
-                      <a:srgbClr val="FFFFFF"/>
-                    </a:solidFill>
-                  </a:tcPr>
-                </a:tc>
-                <a:tc>
-                  <a:txBody>
-                    <a:bodyPr/>
-                    <a:lstStyle/>
-                    <a:p>
-                      <a:pPr algn="l"/>
-                      <a:r>
-                        <a:rPr sz="1000" b="0">
-                          <a:solidFill>
-                            <a:srgbClr val="1D1B43"/>
-                          </a:solidFill>
-                          <a:latin typeface="Calibri"/>
-                        </a:rPr>
-                        <a:t>20</a:t>
-                      </a:r>
-                    </a:p>
-                  </a:txBody>
-                  <a:tcPr>
-                    <a:solidFill>
-                      <a:srgbClr val="FFFFFF"/>
-                    </a:solidFill>
-                  </a:tcPr>
-                </a:tc>
-                <a:tc>
-                  <a:txBody>
-                    <a:bodyPr/>
-                    <a:lstStyle/>
-                    <a:p>
-                      <a:pPr algn="l"/>
-                      <a:r>
-                        <a:rPr sz="1000" b="0">
-                          <a:solidFill>
-                            <a:srgbClr val="1D1B43"/>
-                          </a:solidFill>
-                          <a:latin typeface="Calibri"/>
-                        </a:rPr>
-                        <a:t>20</a:t>
-                      </a:r>
-                    </a:p>
-                  </a:txBody>
-                  <a:tcPr>
-                    <a:solidFill>
-                      <a:srgbClr val="FFFFFF"/>
-                    </a:solidFill>
-                  </a:tcPr>
-                </a:tc>
-                <a:tc>
-                  <a:txBody>
-                    <a:bodyPr/>
-                    <a:lstStyle/>
-                    <a:p>
-                      <a:pPr algn="l"/>
-                      <a:r>
-                        <a:rPr sz="1000" b="0">
-                          <a:solidFill>
-                            <a:srgbClr val="1D1B43"/>
-                          </a:solidFill>
-                          <a:latin typeface="Calibri"/>
-                        </a:rPr>
-                        <a:t>0</a:t>
-                      </a:r>
-                    </a:p>
-                  </a:txBody>
-                  <a:tcPr>
-                    <a:solidFill>
-                      <a:srgbClr val="FFFFFF"/>
-                    </a:solidFill>
-                  </a:tcPr>
-                </a:tc>
-                <a:tc>
-                  <a:txBody>
-                    <a:bodyPr/>
-                    <a:lstStyle/>
-                    <a:p>
-                      <a:pPr algn="l"/>
-                      <a:r>
-                        <a:rPr sz="1000" b="0">
-                          <a:solidFill>
-                            <a:srgbClr val="1D1B43"/>
-                          </a:solidFill>
-                          <a:latin typeface="Calibri"/>
-                        </a:rPr>
-                        <a:t>100.0%</a:t>
-                      </a:r>
-                    </a:p>
-                  </a:txBody>
-                  <a:tcPr>
-                    <a:solidFill>
-                      <a:srgbClr val="FFFFFF"/>
-                    </a:solidFill>
-                  </a:tcPr>
-                </a:tc>
-                <a:tc>
-                  <a:txBody>
-                    <a:bodyPr/>
-                    <a:lstStyle/>
-                    <a:p>
-                      <a:pPr algn="l"/>
-                      <a:r>
-                        <a:rPr sz="1000" b="0">
-                          <a:solidFill>
-                            <a:srgbClr val="1D1B43"/>
-                          </a:solidFill>
-                          <a:latin typeface="Calibri"/>
-                        </a:rPr>
-                        <a:t>Excelente</a:t>
+                        <a:t>MRH VEICULOS LTDA. - PORTO ALEGRE / RS</a:t>
+                      </a:r>
+                    </a:p>
+                  </a:txBody>
+                  <a:tcPr>
+                    <a:solidFill>
+                      <a:srgbClr val="FFFFFF"/>
+                    </a:solidFill>
+                  </a:tcPr>
+                </a:tc>
+                <a:tc>
+                  <a:txBody>
+                    <a:bodyPr/>
+                    <a:lstStyle/>
+                    <a:p>
+                      <a:pPr algn="l"/>
+                      <a:r>
+                        <a:rPr sz="1000" b="0">
+                          <a:solidFill>
+                            <a:srgbClr val="1D1B43"/>
+                          </a:solidFill>
+                          <a:latin typeface="Calibri"/>
+                        </a:rPr>
+                        <a:t>11</a:t>
+                      </a:r>
+                    </a:p>
+                  </a:txBody>
+                  <a:tcPr>
+                    <a:solidFill>
+                      <a:srgbClr val="FFFFFF"/>
+                    </a:solidFill>
+                  </a:tcPr>
+                </a:tc>
+                <a:tc>
+                  <a:txBody>
+                    <a:bodyPr/>
+                    <a:lstStyle/>
+                    <a:p>
+                      <a:pPr algn="l"/>
+                      <a:r>
+                        <a:rPr sz="1000" b="0">
+                          <a:solidFill>
+                            <a:srgbClr val="1D1B43"/>
+                          </a:solidFill>
+                          <a:latin typeface="Calibri"/>
+                        </a:rPr>
+                        <a:t>10</a:t>
+                      </a:r>
+                    </a:p>
+                  </a:txBody>
+                  <a:tcPr>
+                    <a:solidFill>
+                      <a:srgbClr val="FFFFFF"/>
+                    </a:solidFill>
+                  </a:tcPr>
+                </a:tc>
+                <a:tc>
+                  <a:txBody>
+                    <a:bodyPr/>
+                    <a:lstStyle/>
+                    <a:p>
+                      <a:pPr algn="l"/>
+                      <a:r>
+                        <a:rPr sz="1000" b="0">
+                          <a:solidFill>
+                            <a:srgbClr val="1D1B43"/>
+                          </a:solidFill>
+                          <a:latin typeface="Calibri"/>
+                        </a:rPr>
+                        <a:t>1</a:t>
+                      </a:r>
+                    </a:p>
+                  </a:txBody>
+                  <a:tcPr>
+                    <a:solidFill>
+                      <a:srgbClr val="FFFFFF"/>
+                    </a:solidFill>
+                  </a:tcPr>
+                </a:tc>
+                <a:tc>
+                  <a:txBody>
+                    <a:bodyPr/>
+                    <a:lstStyle/>
+                    <a:p>
+                      <a:pPr algn="l"/>
+                      <a:r>
+                        <a:rPr sz="1000" b="0">
+                          <a:solidFill>
+                            <a:srgbClr val="1D1B43"/>
+                          </a:solidFill>
+                          <a:latin typeface="Calibri"/>
+                        </a:rPr>
+                        <a:t>90.9%</a:t>
+                      </a:r>
+                    </a:p>
+                  </a:txBody>
+                  <a:tcPr>
+                    <a:solidFill>
+                      <a:srgbClr val="FFFFFF"/>
+                    </a:solidFill>
+                  </a:tcPr>
+                </a:tc>
+                <a:tc>
+                  <a:txBody>
+                    <a:bodyPr/>
+                    <a:lstStyle/>
+                    <a:p>
+                      <a:pPr algn="l"/>
+                      <a:r>
+                        <a:rPr sz="1000" b="0">
+                          <a:solidFill>
+                            <a:srgbClr val="1D1B43"/>
+                          </a:solidFill>
+                          <a:latin typeface="Calibri"/>
+                        </a:rPr>
+                        <a:t>Regular</a:t>
                       </a:r>
                     </a:p>
                   </a:txBody>
@@ -9318,53 +10699,53 @@
                           </a:solidFill>
                           <a:latin typeface="Calibri"/>
                         </a:rPr>
-                        <a:t>MRH VEICULOS LTDA - RIO DE JANEIRO / RJ</a:t>
-                      </a:r>
-                    </a:p>
-                  </a:txBody>
-                  <a:tcPr>
-                    <a:solidFill>
-                      <a:srgbClr val="F2F2F2"/>
-                    </a:solidFill>
-                  </a:tcPr>
-                </a:tc>
-                <a:tc>
-                  <a:txBody>
-                    <a:bodyPr/>
-                    <a:lstStyle/>
-                    <a:p>
-                      <a:pPr algn="l"/>
-                      <a:r>
-                        <a:rPr sz="1000" b="0">
-                          <a:solidFill>
-                            <a:srgbClr val="1D1B43"/>
-                          </a:solidFill>
-                          <a:latin typeface="Calibri"/>
-                        </a:rPr>
-                        <a:t>20</a:t>
-                      </a:r>
-                    </a:p>
-                  </a:txBody>
-                  <a:tcPr>
-                    <a:solidFill>
-                      <a:srgbClr val="F2F2F2"/>
-                    </a:solidFill>
-                  </a:tcPr>
-                </a:tc>
-                <a:tc>
-                  <a:txBody>
-                    <a:bodyPr/>
-                    <a:lstStyle/>
-                    <a:p>
-                      <a:pPr algn="l"/>
-                      <a:r>
-                        <a:rPr sz="1000" b="0">
-                          <a:solidFill>
-                            <a:srgbClr val="1D1B43"/>
-                          </a:solidFill>
-                          <a:latin typeface="Calibri"/>
-                        </a:rPr>
-                        <a:t>20</a:t>
+                        <a:t>MRH VEICULOS LTDA. - MARINGA / PR</a:t>
+                      </a:r>
+                    </a:p>
+                  </a:txBody>
+                  <a:tcPr>
+                    <a:solidFill>
+                      <a:srgbClr val="F2F2F2"/>
+                    </a:solidFill>
+                  </a:tcPr>
+                </a:tc>
+                <a:tc>
+                  <a:txBody>
+                    <a:bodyPr/>
+                    <a:lstStyle/>
+                    <a:p>
+                      <a:pPr algn="l"/>
+                      <a:r>
+                        <a:rPr sz="1000" b="0">
+                          <a:solidFill>
+                            <a:srgbClr val="1D1B43"/>
+                          </a:solidFill>
+                          <a:latin typeface="Calibri"/>
+                        </a:rPr>
+                        <a:t>11</a:t>
+                      </a:r>
+                    </a:p>
+                  </a:txBody>
+                  <a:tcPr>
+                    <a:solidFill>
+                      <a:srgbClr val="F2F2F2"/>
+                    </a:solidFill>
+                  </a:tcPr>
+                </a:tc>
+                <a:tc>
+                  <a:txBody>
+                    <a:bodyPr/>
+                    <a:lstStyle/>
+                    <a:p>
+                      <a:pPr algn="l"/>
+                      <a:r>
+                        <a:rPr sz="1000" b="0">
+                          <a:solidFill>
+                            <a:srgbClr val="1D1B43"/>
+                          </a:solidFill>
+                          <a:latin typeface="Calibri"/>
+                        </a:rPr>
+                        <a:t>11</a:t>
                       </a:r>
                     </a:p>
                   </a:txBody>
@@ -9481,53 +10862,53 @@
                           </a:solidFill>
                           <a:latin typeface="Calibri"/>
                         </a:rPr>
-                        <a:t>BCLV COMERCIO DE VEI - BRASILIA / DF</a:t>
-                      </a:r>
-                    </a:p>
-                  </a:txBody>
-                  <a:tcPr>
-                    <a:solidFill>
-                      <a:srgbClr val="FFFFFF"/>
-                    </a:solidFill>
-                  </a:tcPr>
-                </a:tc>
-                <a:tc>
-                  <a:txBody>
-                    <a:bodyPr/>
-                    <a:lstStyle/>
-                    <a:p>
-                      <a:pPr algn="l"/>
-                      <a:r>
-                        <a:rPr sz="1000" b="0">
-                          <a:solidFill>
-                            <a:srgbClr val="1D1B43"/>
-                          </a:solidFill>
-                          <a:latin typeface="Calibri"/>
-                        </a:rPr>
-                        <a:t>18</a:t>
-                      </a:r>
-                    </a:p>
-                  </a:txBody>
-                  <a:tcPr>
-                    <a:solidFill>
-                      <a:srgbClr val="FFFFFF"/>
-                    </a:solidFill>
-                  </a:tcPr>
-                </a:tc>
-                <a:tc>
-                  <a:txBody>
-                    <a:bodyPr/>
-                    <a:lstStyle/>
-                    <a:p>
-                      <a:pPr algn="l"/>
-                      <a:r>
-                        <a:rPr sz="1000" b="0">
-                          <a:solidFill>
-                            <a:srgbClr val="1D1B43"/>
-                          </a:solidFill>
-                          <a:latin typeface="Calibri"/>
-                        </a:rPr>
-                        <a:t>18</a:t>
+                        <a:t>MRH VEICULOS LTDA - RIBEIRAO PRETO / SP</a:t>
+                      </a:r>
+                    </a:p>
+                  </a:txBody>
+                  <a:tcPr>
+                    <a:solidFill>
+                      <a:srgbClr val="FFFFFF"/>
+                    </a:solidFill>
+                  </a:tcPr>
+                </a:tc>
+                <a:tc>
+                  <a:txBody>
+                    <a:bodyPr/>
+                    <a:lstStyle/>
+                    <a:p>
+                      <a:pPr algn="l"/>
+                      <a:r>
+                        <a:rPr sz="1000" b="0">
+                          <a:solidFill>
+                            <a:srgbClr val="1D1B43"/>
+                          </a:solidFill>
+                          <a:latin typeface="Calibri"/>
+                        </a:rPr>
+                        <a:t>11</a:t>
+                      </a:r>
+                    </a:p>
+                  </a:txBody>
+                  <a:tcPr>
+                    <a:solidFill>
+                      <a:srgbClr val="FFFFFF"/>
+                    </a:solidFill>
+                  </a:tcPr>
+                </a:tc>
+                <a:tc>
+                  <a:txBody>
+                    <a:bodyPr/>
+                    <a:lstStyle/>
+                    <a:p>
+                      <a:pPr algn="l"/>
+                      <a:r>
+                        <a:rPr sz="1000" b="0">
+                          <a:solidFill>
+                            <a:srgbClr val="1D1B43"/>
+                          </a:solidFill>
+                          <a:latin typeface="Calibri"/>
+                        </a:rPr>
+                        <a:t>11</a:t>
                       </a:r>
                     </a:p>
                   </a:txBody>
@@ -9644,122 +11025,122 @@
                           </a:solidFill>
                           <a:latin typeface="Calibri"/>
                         </a:rPr>
-                        <a:t>MRH VEICULOS LTDA. - CAMPINAS / SP</a:t>
-                      </a:r>
-                    </a:p>
-                  </a:txBody>
-                  <a:tcPr>
-                    <a:solidFill>
-                      <a:srgbClr val="F2F2F2"/>
-                    </a:solidFill>
-                  </a:tcPr>
-                </a:tc>
-                <a:tc>
-                  <a:txBody>
-                    <a:bodyPr/>
-                    <a:lstStyle/>
-                    <a:p>
-                      <a:pPr algn="l"/>
-                      <a:r>
-                        <a:rPr sz="1000" b="0">
-                          <a:solidFill>
-                            <a:srgbClr val="1D1B43"/>
-                          </a:solidFill>
-                          <a:latin typeface="Calibri"/>
-                        </a:rPr>
-                        <a:t>18</a:t>
-                      </a:r>
-                    </a:p>
-                  </a:txBody>
-                  <a:tcPr>
-                    <a:solidFill>
-                      <a:srgbClr val="F2F2F2"/>
-                    </a:solidFill>
-                  </a:tcPr>
-                </a:tc>
-                <a:tc>
-                  <a:txBody>
-                    <a:bodyPr/>
-                    <a:lstStyle/>
-                    <a:p>
-                      <a:pPr algn="l"/>
-                      <a:r>
-                        <a:rPr sz="1000" b="0">
-                          <a:solidFill>
-                            <a:srgbClr val="1D1B43"/>
-                          </a:solidFill>
-                          <a:latin typeface="Calibri"/>
-                        </a:rPr>
-                        <a:t>18</a:t>
-                      </a:r>
-                    </a:p>
-                  </a:txBody>
-                  <a:tcPr>
-                    <a:solidFill>
-                      <a:srgbClr val="F2F2F2"/>
-                    </a:solidFill>
-                  </a:tcPr>
-                </a:tc>
-                <a:tc>
-                  <a:txBody>
-                    <a:bodyPr/>
-                    <a:lstStyle/>
-                    <a:p>
-                      <a:pPr algn="l"/>
-                      <a:r>
-                        <a:rPr sz="1000" b="0">
-                          <a:solidFill>
-                            <a:srgbClr val="1D1B43"/>
-                          </a:solidFill>
-                          <a:latin typeface="Calibri"/>
-                        </a:rPr>
-                        <a:t>0</a:t>
-                      </a:r>
-                    </a:p>
-                  </a:txBody>
-                  <a:tcPr>
-                    <a:solidFill>
-                      <a:srgbClr val="F2F2F2"/>
-                    </a:solidFill>
-                  </a:tcPr>
-                </a:tc>
-                <a:tc>
-                  <a:txBody>
-                    <a:bodyPr/>
-                    <a:lstStyle/>
-                    <a:p>
-                      <a:pPr algn="l"/>
-                      <a:r>
-                        <a:rPr sz="1000" b="0">
-                          <a:solidFill>
-                            <a:srgbClr val="1D1B43"/>
-                          </a:solidFill>
-                          <a:latin typeface="Calibri"/>
-                        </a:rPr>
-                        <a:t>100.0%</a:t>
-                      </a:r>
-                    </a:p>
-                  </a:txBody>
-                  <a:tcPr>
-                    <a:solidFill>
-                      <a:srgbClr val="F2F2F2"/>
-                    </a:solidFill>
-                  </a:tcPr>
-                </a:tc>
-                <a:tc>
-                  <a:txBody>
-                    <a:bodyPr/>
-                    <a:lstStyle/>
-                    <a:p>
-                      <a:pPr algn="l"/>
-                      <a:r>
-                        <a:rPr sz="1000" b="0">
-                          <a:solidFill>
-                            <a:srgbClr val="1D1B43"/>
-                          </a:solidFill>
-                          <a:latin typeface="Calibri"/>
-                        </a:rPr>
-                        <a:t>Excelente</a:t>
+                        <a:t>PORSCHER BRASIL IMPO - SAO PAULO / SP</a:t>
+                      </a:r>
+                    </a:p>
+                  </a:txBody>
+                  <a:tcPr>
+                    <a:solidFill>
+                      <a:srgbClr val="F2F2F2"/>
+                    </a:solidFill>
+                  </a:tcPr>
+                </a:tc>
+                <a:tc>
+                  <a:txBody>
+                    <a:bodyPr/>
+                    <a:lstStyle/>
+                    <a:p>
+                      <a:pPr algn="l"/>
+                      <a:r>
+                        <a:rPr sz="1000" b="0">
+                          <a:solidFill>
+                            <a:srgbClr val="1D1B43"/>
+                          </a:solidFill>
+                          <a:latin typeface="Calibri"/>
+                        </a:rPr>
+                        <a:t>11</a:t>
+                      </a:r>
+                    </a:p>
+                  </a:txBody>
+                  <a:tcPr>
+                    <a:solidFill>
+                      <a:srgbClr val="F2F2F2"/>
+                    </a:solidFill>
+                  </a:tcPr>
+                </a:tc>
+                <a:tc>
+                  <a:txBody>
+                    <a:bodyPr/>
+                    <a:lstStyle/>
+                    <a:p>
+                      <a:pPr algn="l"/>
+                      <a:r>
+                        <a:rPr sz="1000" b="0">
+                          <a:solidFill>
+                            <a:srgbClr val="1D1B43"/>
+                          </a:solidFill>
+                          <a:latin typeface="Calibri"/>
+                        </a:rPr>
+                        <a:t>10</a:t>
+                      </a:r>
+                    </a:p>
+                  </a:txBody>
+                  <a:tcPr>
+                    <a:solidFill>
+                      <a:srgbClr val="F2F2F2"/>
+                    </a:solidFill>
+                  </a:tcPr>
+                </a:tc>
+                <a:tc>
+                  <a:txBody>
+                    <a:bodyPr/>
+                    <a:lstStyle/>
+                    <a:p>
+                      <a:pPr algn="l"/>
+                      <a:r>
+                        <a:rPr sz="1000" b="0">
+                          <a:solidFill>
+                            <a:srgbClr val="1D1B43"/>
+                          </a:solidFill>
+                          <a:latin typeface="Calibri"/>
+                        </a:rPr>
+                        <a:t>1</a:t>
+                      </a:r>
+                    </a:p>
+                  </a:txBody>
+                  <a:tcPr>
+                    <a:solidFill>
+                      <a:srgbClr val="F2F2F2"/>
+                    </a:solidFill>
+                  </a:tcPr>
+                </a:tc>
+                <a:tc>
+                  <a:txBody>
+                    <a:bodyPr/>
+                    <a:lstStyle/>
+                    <a:p>
+                      <a:pPr algn="l"/>
+                      <a:r>
+                        <a:rPr sz="1000" b="0">
+                          <a:solidFill>
+                            <a:srgbClr val="1D1B43"/>
+                          </a:solidFill>
+                          <a:latin typeface="Calibri"/>
+                        </a:rPr>
+                        <a:t>90.9%</a:t>
+                      </a:r>
+                    </a:p>
+                  </a:txBody>
+                  <a:tcPr>
+                    <a:solidFill>
+                      <a:srgbClr val="F2F2F2"/>
+                    </a:solidFill>
+                  </a:tcPr>
+                </a:tc>
+                <a:tc>
+                  <a:txBody>
+                    <a:bodyPr/>
+                    <a:lstStyle/>
+                    <a:p>
+                      <a:pPr algn="l"/>
+                      <a:r>
+                        <a:rPr sz="1000" b="0">
+                          <a:solidFill>
+                            <a:srgbClr val="1D1B43"/>
+                          </a:solidFill>
+                          <a:latin typeface="Calibri"/>
+                        </a:rPr>
+                        <a:t>Regular</a:t>
                       </a:r>
                     </a:p>
                   </a:txBody>
@@ -9807,122 +11188,122 @@
                           </a:solidFill>
                           <a:latin typeface="Calibri"/>
                         </a:rPr>
-                        <a:t>MRH VEICULOS LTDA. - MARINGA / PR</a:t>
-                      </a:r>
-                    </a:p>
-                  </a:txBody>
-                  <a:tcPr>
-                    <a:solidFill>
-                      <a:srgbClr val="FFFFFF"/>
-                    </a:solidFill>
-                  </a:tcPr>
-                </a:tc>
-                <a:tc>
-                  <a:txBody>
-                    <a:bodyPr/>
-                    <a:lstStyle/>
-                    <a:p>
-                      <a:pPr algn="l"/>
-                      <a:r>
-                        <a:rPr sz="1000" b="0">
-                          <a:solidFill>
-                            <a:srgbClr val="1D1B43"/>
-                          </a:solidFill>
-                          <a:latin typeface="Calibri"/>
-                        </a:rPr>
-                        <a:t>16</a:t>
-                      </a:r>
-                    </a:p>
-                  </a:txBody>
-                  <a:tcPr>
-                    <a:solidFill>
-                      <a:srgbClr val="FFFFFF"/>
-                    </a:solidFill>
-                  </a:tcPr>
-                </a:tc>
-                <a:tc>
-                  <a:txBody>
-                    <a:bodyPr/>
-                    <a:lstStyle/>
-                    <a:p>
-                      <a:pPr algn="l"/>
-                      <a:r>
-                        <a:rPr sz="1000" b="0">
-                          <a:solidFill>
-                            <a:srgbClr val="1D1B43"/>
-                          </a:solidFill>
-                          <a:latin typeface="Calibri"/>
-                        </a:rPr>
-                        <a:t>16</a:t>
-                      </a:r>
-                    </a:p>
-                  </a:txBody>
-                  <a:tcPr>
-                    <a:solidFill>
-                      <a:srgbClr val="FFFFFF"/>
-                    </a:solidFill>
-                  </a:tcPr>
-                </a:tc>
-                <a:tc>
-                  <a:txBody>
-                    <a:bodyPr/>
-                    <a:lstStyle/>
-                    <a:p>
-                      <a:pPr algn="l"/>
-                      <a:r>
-                        <a:rPr sz="1000" b="0">
-                          <a:solidFill>
-                            <a:srgbClr val="1D1B43"/>
-                          </a:solidFill>
-                          <a:latin typeface="Calibri"/>
-                        </a:rPr>
-                        <a:t>0</a:t>
-                      </a:r>
-                    </a:p>
-                  </a:txBody>
-                  <a:tcPr>
-                    <a:solidFill>
-                      <a:srgbClr val="FFFFFF"/>
-                    </a:solidFill>
-                  </a:tcPr>
-                </a:tc>
-                <a:tc>
-                  <a:txBody>
-                    <a:bodyPr/>
-                    <a:lstStyle/>
-                    <a:p>
-                      <a:pPr algn="l"/>
-                      <a:r>
-                        <a:rPr sz="1000" b="0">
-                          <a:solidFill>
-                            <a:srgbClr val="1D1B43"/>
-                          </a:solidFill>
-                          <a:latin typeface="Calibri"/>
-                        </a:rPr>
-                        <a:t>100.0%</a:t>
-                      </a:r>
-                    </a:p>
-                  </a:txBody>
-                  <a:tcPr>
-                    <a:solidFill>
-                      <a:srgbClr val="FFFFFF"/>
-                    </a:solidFill>
-                  </a:tcPr>
-                </a:tc>
-                <a:tc>
-                  <a:txBody>
-                    <a:bodyPr/>
-                    <a:lstStyle/>
-                    <a:p>
-                      <a:pPr algn="l"/>
-                      <a:r>
-                        <a:rPr sz="1000" b="0">
-                          <a:solidFill>
-                            <a:srgbClr val="1D1B43"/>
-                          </a:solidFill>
-                          <a:latin typeface="Calibri"/>
-                        </a:rPr>
-                        <a:t>Excelente</a:t>
+                        <a:t>MRH VEICULOS LTDA - RIO DE JANEIRO / RJ</a:t>
+                      </a:r>
+                    </a:p>
+                  </a:txBody>
+                  <a:tcPr>
+                    <a:solidFill>
+                      <a:srgbClr val="FFFFFF"/>
+                    </a:solidFill>
+                  </a:tcPr>
+                </a:tc>
+                <a:tc>
+                  <a:txBody>
+                    <a:bodyPr/>
+                    <a:lstStyle/>
+                    <a:p>
+                      <a:pPr algn="l"/>
+                      <a:r>
+                        <a:rPr sz="1000" b="0">
+                          <a:solidFill>
+                            <a:srgbClr val="1D1B43"/>
+                          </a:solidFill>
+                          <a:latin typeface="Calibri"/>
+                        </a:rPr>
+                        <a:t>10</a:t>
+                      </a:r>
+                    </a:p>
+                  </a:txBody>
+                  <a:tcPr>
+                    <a:solidFill>
+                      <a:srgbClr val="FFFFFF"/>
+                    </a:solidFill>
+                  </a:tcPr>
+                </a:tc>
+                <a:tc>
+                  <a:txBody>
+                    <a:bodyPr/>
+                    <a:lstStyle/>
+                    <a:p>
+                      <a:pPr algn="l"/>
+                      <a:r>
+                        <a:rPr sz="1000" b="0">
+                          <a:solidFill>
+                            <a:srgbClr val="1D1B43"/>
+                          </a:solidFill>
+                          <a:latin typeface="Calibri"/>
+                        </a:rPr>
+                        <a:t>9</a:t>
+                      </a:r>
+                    </a:p>
+                  </a:txBody>
+                  <a:tcPr>
+                    <a:solidFill>
+                      <a:srgbClr val="FFFFFF"/>
+                    </a:solidFill>
+                  </a:tcPr>
+                </a:tc>
+                <a:tc>
+                  <a:txBody>
+                    <a:bodyPr/>
+                    <a:lstStyle/>
+                    <a:p>
+                      <a:pPr algn="l"/>
+                      <a:r>
+                        <a:rPr sz="1000" b="0">
+                          <a:solidFill>
+                            <a:srgbClr val="1D1B43"/>
+                          </a:solidFill>
+                          <a:latin typeface="Calibri"/>
+                        </a:rPr>
+                        <a:t>1</a:t>
+                      </a:r>
+                    </a:p>
+                  </a:txBody>
+                  <a:tcPr>
+                    <a:solidFill>
+                      <a:srgbClr val="FFFFFF"/>
+                    </a:solidFill>
+                  </a:tcPr>
+                </a:tc>
+                <a:tc>
+                  <a:txBody>
+                    <a:bodyPr/>
+                    <a:lstStyle/>
+                    <a:p>
+                      <a:pPr algn="l"/>
+                      <a:r>
+                        <a:rPr sz="1000" b="0">
+                          <a:solidFill>
+                            <a:srgbClr val="1D1B43"/>
+                          </a:solidFill>
+                          <a:latin typeface="Calibri"/>
+                        </a:rPr>
+                        <a:t>90.0%</a:t>
+                      </a:r>
+                    </a:p>
+                  </a:txBody>
+                  <a:tcPr>
+                    <a:solidFill>
+                      <a:srgbClr val="FFFFFF"/>
+                    </a:solidFill>
+                  </a:tcPr>
+                </a:tc>
+                <a:tc>
+                  <a:txBody>
+                    <a:bodyPr/>
+                    <a:lstStyle/>
+                    <a:p>
+                      <a:pPr algn="l"/>
+                      <a:r>
+                        <a:rPr sz="1000" b="0">
+                          <a:solidFill>
+                            <a:srgbClr val="1D1B43"/>
+                          </a:solidFill>
+                          <a:latin typeface="Calibri"/>
+                        </a:rPr>
+                        <a:t>Regular</a:t>
                       </a:r>
                     </a:p>
                   </a:txBody>
@@ -9970,122 +11351,122 @@
                           </a:solidFill>
                           <a:latin typeface="Calibri"/>
                         </a:rPr>
-                        <a:t>MRH VEICULOS LTDA - RIBEIRAO PRETO / SP</a:t>
-                      </a:r>
-                    </a:p>
-                  </a:txBody>
-                  <a:tcPr>
-                    <a:solidFill>
-                      <a:srgbClr val="F2F2F2"/>
-                    </a:solidFill>
-                  </a:tcPr>
-                </a:tc>
-                <a:tc>
-                  <a:txBody>
-                    <a:bodyPr/>
-                    <a:lstStyle/>
-                    <a:p>
-                      <a:pPr algn="l"/>
-                      <a:r>
-                        <a:rPr sz="1000" b="0">
-                          <a:solidFill>
-                            <a:srgbClr val="1D1B43"/>
-                          </a:solidFill>
-                          <a:latin typeface="Calibri"/>
-                        </a:rPr>
-                        <a:t>15</a:t>
-                      </a:r>
-                    </a:p>
-                  </a:txBody>
-                  <a:tcPr>
-                    <a:solidFill>
-                      <a:srgbClr val="F2F2F2"/>
-                    </a:solidFill>
-                  </a:tcPr>
-                </a:tc>
-                <a:tc>
-                  <a:txBody>
-                    <a:bodyPr/>
-                    <a:lstStyle/>
-                    <a:p>
-                      <a:pPr algn="l"/>
-                      <a:r>
-                        <a:rPr sz="1000" b="0">
-                          <a:solidFill>
-                            <a:srgbClr val="1D1B43"/>
-                          </a:solidFill>
-                          <a:latin typeface="Calibri"/>
-                        </a:rPr>
-                        <a:t>13</a:t>
-                      </a:r>
-                    </a:p>
-                  </a:txBody>
-                  <a:tcPr>
-                    <a:solidFill>
-                      <a:srgbClr val="F2F2F2"/>
-                    </a:solidFill>
-                  </a:tcPr>
-                </a:tc>
-                <a:tc>
-                  <a:txBody>
-                    <a:bodyPr/>
-                    <a:lstStyle/>
-                    <a:p>
-                      <a:pPr algn="l"/>
-                      <a:r>
-                        <a:rPr sz="1000" b="0">
-                          <a:solidFill>
-                            <a:srgbClr val="1D1B43"/>
-                          </a:solidFill>
-                          <a:latin typeface="Calibri"/>
-                        </a:rPr>
-                        <a:t>2</a:t>
-                      </a:r>
-                    </a:p>
-                  </a:txBody>
-                  <a:tcPr>
-                    <a:solidFill>
-                      <a:srgbClr val="F2F2F2"/>
-                    </a:solidFill>
-                  </a:tcPr>
-                </a:tc>
-                <a:tc>
-                  <a:txBody>
-                    <a:bodyPr/>
-                    <a:lstStyle/>
-                    <a:p>
-                      <a:pPr algn="l"/>
-                      <a:r>
-                        <a:rPr sz="1000" b="0">
-                          <a:solidFill>
-                            <a:srgbClr val="1D1B43"/>
-                          </a:solidFill>
-                          <a:latin typeface="Calibri"/>
-                        </a:rPr>
-                        <a:t>86.7%</a:t>
-                      </a:r>
-                    </a:p>
-                  </a:txBody>
-                  <a:tcPr>
-                    <a:solidFill>
-                      <a:srgbClr val="F2F2F2"/>
-                    </a:solidFill>
-                  </a:tcPr>
-                </a:tc>
-                <a:tc>
-                  <a:txBody>
-                    <a:bodyPr/>
-                    <a:lstStyle/>
-                    <a:p>
-                      <a:pPr algn="l"/>
-                      <a:r>
-                        <a:rPr sz="1000" b="0">
-                          <a:solidFill>
-                            <a:srgbClr val="1D1B43"/>
-                          </a:solidFill>
-                          <a:latin typeface="Calibri"/>
-                        </a:rPr>
-                        <a:t>Regular</a:t>
+                        <a:t>MRH VEICULOS LTDA BL - BLUMENAU / SC</a:t>
+                      </a:r>
+                    </a:p>
+                  </a:txBody>
+                  <a:tcPr>
+                    <a:solidFill>
+                      <a:srgbClr val="F2F2F2"/>
+                    </a:solidFill>
+                  </a:tcPr>
+                </a:tc>
+                <a:tc>
+                  <a:txBody>
+                    <a:bodyPr/>
+                    <a:lstStyle/>
+                    <a:p>
+                      <a:pPr algn="l"/>
+                      <a:r>
+                        <a:rPr sz="1000" b="0">
+                          <a:solidFill>
+                            <a:srgbClr val="1D1B43"/>
+                          </a:solidFill>
+                          <a:latin typeface="Calibri"/>
+                        </a:rPr>
+                        <a:t>10</a:t>
+                      </a:r>
+                    </a:p>
+                  </a:txBody>
+                  <a:tcPr>
+                    <a:solidFill>
+                      <a:srgbClr val="F2F2F2"/>
+                    </a:solidFill>
+                  </a:tcPr>
+                </a:tc>
+                <a:tc>
+                  <a:txBody>
+                    <a:bodyPr/>
+                    <a:lstStyle/>
+                    <a:p>
+                      <a:pPr algn="l"/>
+                      <a:r>
+                        <a:rPr sz="1000" b="0">
+                          <a:solidFill>
+                            <a:srgbClr val="1D1B43"/>
+                          </a:solidFill>
+                          <a:latin typeface="Calibri"/>
+                        </a:rPr>
+                        <a:t>10</a:t>
+                      </a:r>
+                    </a:p>
+                  </a:txBody>
+                  <a:tcPr>
+                    <a:solidFill>
+                      <a:srgbClr val="F2F2F2"/>
+                    </a:solidFill>
+                  </a:tcPr>
+                </a:tc>
+                <a:tc>
+                  <a:txBody>
+                    <a:bodyPr/>
+                    <a:lstStyle/>
+                    <a:p>
+                      <a:pPr algn="l"/>
+                      <a:r>
+                        <a:rPr sz="1000" b="0">
+                          <a:solidFill>
+                            <a:srgbClr val="1D1B43"/>
+                          </a:solidFill>
+                          <a:latin typeface="Calibri"/>
+                        </a:rPr>
+                        <a:t>0</a:t>
+                      </a:r>
+                    </a:p>
+                  </a:txBody>
+                  <a:tcPr>
+                    <a:solidFill>
+                      <a:srgbClr val="F2F2F2"/>
+                    </a:solidFill>
+                  </a:tcPr>
+                </a:tc>
+                <a:tc>
+                  <a:txBody>
+                    <a:bodyPr/>
+                    <a:lstStyle/>
+                    <a:p>
+                      <a:pPr algn="l"/>
+                      <a:r>
+                        <a:rPr sz="1000" b="0">
+                          <a:solidFill>
+                            <a:srgbClr val="1D1B43"/>
+                          </a:solidFill>
+                          <a:latin typeface="Calibri"/>
+                        </a:rPr>
+                        <a:t>100.0%</a:t>
+                      </a:r>
+                    </a:p>
+                  </a:txBody>
+                  <a:tcPr>
+                    <a:solidFill>
+                      <a:srgbClr val="F2F2F2"/>
+                    </a:solidFill>
+                  </a:tcPr>
+                </a:tc>
+                <a:tc>
+                  <a:txBody>
+                    <a:bodyPr/>
+                    <a:lstStyle/>
+                    <a:p>
+                      <a:pPr algn="l"/>
+                      <a:r>
+                        <a:rPr sz="1000" b="0">
+                          <a:solidFill>
+                            <a:srgbClr val="1D1B43"/>
+                          </a:solidFill>
+                          <a:latin typeface="Calibri"/>
+                        </a:rPr>
+                        <a:t>Excelente</a:t>
                       </a:r>
                     </a:p>
                   </a:txBody>

--- a/FORTE_TRANSPORTES_DO_BRASIL_LT.pptx
+++ b/FORTE_TRANSPORTES_DO_BRASIL_LT.pptx
@@ -143,29 +143,23 @@
           </c:spPr>
           <c:cat>
             <c:strRef>
-              <c:f>Sheet1!$A$2:$A$3</c:f>
+              <c:f>Sheet1!$A$2:$A$2</c:f>
               <c:strCache>
-                <c:ptCount val="2"/>
+                <c:ptCount val="1"/>
                 <c:pt idx="0">
                   <c:v>Abril 2026</c:v>
-                </c:pt>
-                <c:pt idx="1">
-                  <c:v>Maio 2026</c:v>
                 </c:pt>
               </c:strCache>
             </c:strRef>
           </c:cat>
           <c:val>
             <c:numRef>
-              <c:f>Sheet1!$B$2:$B$3</c:f>
+              <c:f>Sheet1!$B$2:$B$2</c:f>
               <c:numCache>
                 <c:formatCode>General</c:formatCode>
-                <c:ptCount val="2"/>
+                <c:ptCount val="1"/>
                 <c:pt idx="0">
-                  <c:v>359</c:v>
-                </c:pt>
-                <c:pt idx="1">
-                  <c:v>200</c:v>
+                  <c:v>360</c:v>
                 </c:pt>
               </c:numCache>
             </c:numRef>
@@ -192,29 +186,23 @@
           </c:spPr>
           <c:cat>
             <c:strRef>
-              <c:f>Sheet1!$A$2:$A$3</c:f>
+              <c:f>Sheet1!$A$2:$A$2</c:f>
               <c:strCache>
-                <c:ptCount val="2"/>
+                <c:ptCount val="1"/>
                 <c:pt idx="0">
                   <c:v>Abril 2026</c:v>
-                </c:pt>
-                <c:pt idx="1">
-                  <c:v>Maio 2026</c:v>
                 </c:pt>
               </c:strCache>
             </c:strRef>
           </c:cat>
           <c:val>
             <c:numRef>
-              <c:f>Sheet1!$C$2:$C$3</c:f>
+              <c:f>Sheet1!$C$2:$C$2</c:f>
               <c:numCache>
                 <c:formatCode>General</c:formatCode>
-                <c:ptCount val="2"/>
+                <c:ptCount val="1"/>
                 <c:pt idx="0">
                   <c:v>1</c:v>
-                </c:pt>
-                <c:pt idx="1">
-                  <c:v>17</c:v>
                 </c:pt>
               </c:numCache>
             </c:numRef>
@@ -3387,7 +3375,7 @@
                 </a:solidFill>
                 <a:latin typeface="Calibri"/>
               </a:rPr>
-              <a:t>INDICADORES MAIO 2026</a:t>
+              <a:t>INDICADORES ABRIL 2026</a:t>
             </a:r>
           </a:p>
         </p:txBody>
@@ -3494,14 +3482,13 @@
           <a:p>
             <a:pPr algn="ctr"/>
             <a:r>
-              <a:rPr sz="1600" b="1">
+              <a:rPr sz="1400" b="1">
                 <a:solidFill>
                   <a:srgbClr val="FFFFFF"/>
                 </a:solidFill>
                 <a:latin typeface="Calibri"/>
               </a:rPr>
-              <a:t>Nossa rota e ir alem das
-entregas!</a:t>
+              <a:t>Nossa rota e ir alem das entregas!</a:t>
             </a:r>
           </a:p>
         </p:txBody>
@@ -3709,7 +3696,7 @@
                 </a:solidFill>
                 <a:latin typeface="Calibri"/>
               </a:rPr>
-              <a:t>217</a:t>
+              <a:t>361</a:t>
             </a:r>
           </a:p>
         </p:txBody>
@@ -3824,7 +3811,7 @@
                 </a:solidFill>
                 <a:latin typeface="Calibri"/>
               </a:rPr>
-              <a:t>200</a:t>
+              <a:t>360</a:t>
             </a:r>
           </a:p>
         </p:txBody>
@@ -3939,7 +3926,7 @@
                 </a:solidFill>
                 <a:latin typeface="Calibri"/>
               </a:rPr>
-              <a:t>17</a:t>
+              <a:t>1</a:t>
             </a:r>
           </a:p>
         </p:txBody>
@@ -4050,11 +4037,11 @@
             <a:r>
               <a:rPr sz="2800" b="1">
                 <a:solidFill>
-                  <a:srgbClr val="F59E0B"/>
+                  <a:srgbClr val="10B981"/>
                 </a:solidFill>
                 <a:latin typeface="Calibri"/>
               </a:rPr>
-              <a:t>92.2%</a:t>
+              <a:t>99.7%</a:t>
             </a:r>
           </a:p>
         </p:txBody>
@@ -4155,30 +4142,30 @@
                           </a:solidFill>
                           <a:latin typeface="Calibri"/>
                         </a:rPr>
+                        <a:t>Marco 2026</a:t>
+                      </a:r>
+                    </a:p>
+                  </a:txBody>
+                  <a:tcPr>
+                    <a:solidFill>
+                      <a:srgbClr val="1D1B43"/>
+                    </a:solidFill>
+                  </a:tcPr>
+                </a:tc>
+                <a:tc>
+                  <a:txBody>
+                    <a:bodyPr/>
+                    <a:lstStyle/>
+                    <a:p>
+                      <a:pPr algn="ctr"/>
+                      <a:r>
+                        <a:rPr sz="1100" b="1">
+                          <a:solidFill>
+                            <a:srgbClr val="FFFFFF"/>
+                          </a:solidFill>
+                          <a:latin typeface="Calibri"/>
+                        </a:rPr>
                         <a:t>Abril 2026</a:t>
-                      </a:r>
-                    </a:p>
-                  </a:txBody>
-                  <a:tcPr>
-                    <a:solidFill>
-                      <a:srgbClr val="1D1B43"/>
-                    </a:solidFill>
-                  </a:tcPr>
-                </a:tc>
-                <a:tc>
-                  <a:txBody>
-                    <a:bodyPr/>
-                    <a:lstStyle/>
-                    <a:p>
-                      <a:pPr algn="ctr"/>
-                      <a:r>
-                        <a:rPr sz="1100" b="1">
-                          <a:solidFill>
-                            <a:srgbClr val="FFFFFF"/>
-                          </a:solidFill>
-                          <a:latin typeface="Calibri"/>
-                        </a:rPr>
-                        <a:t>Maio 2026</a:t>
                       </a:r>
                     </a:p>
                   </a:txBody>
@@ -4249,7 +4236,7 @@
                           </a:solidFill>
                           <a:latin typeface="Calibri"/>
                         </a:rPr>
-                        <a:t>360</a:t>
+                        <a:t>-</a:t>
                       </a:r>
                     </a:p>
                   </a:txBody>
@@ -4272,7 +4259,7 @@
                           </a:solidFill>
                           <a:latin typeface="Calibri"/>
                         </a:rPr>
-                        <a:t>217</a:t>
+                        <a:t>361</a:t>
                       </a:r>
                     </a:p>
                   </a:txBody>
@@ -4295,7 +4282,7 @@
                           </a:solidFill>
                           <a:latin typeface="Calibri"/>
                         </a:rPr>
-                        <a:t>- 143</a:t>
+                        <a:t>-</a:t>
                       </a:r>
                     </a:p>
                   </a:txBody>
@@ -4343,7 +4330,7 @@
                           </a:solidFill>
                           <a:latin typeface="Calibri"/>
                         </a:rPr>
-                        <a:t>359</a:t>
+                        <a:t>-</a:t>
                       </a:r>
                     </a:p>
                   </a:txBody>
@@ -4366,7 +4353,7 @@
                           </a:solidFill>
                           <a:latin typeface="Calibri"/>
                         </a:rPr>
-                        <a:t>200</a:t>
+                        <a:t>360</a:t>
                       </a:r>
                     </a:p>
                   </a:txBody>
@@ -4389,7 +4376,7 @@
                           </a:solidFill>
                           <a:latin typeface="Calibri"/>
                         </a:rPr>
-                        <a:t>- 159</a:t>
+                        <a:t>-</a:t>
                       </a:r>
                     </a:p>
                   </a:txBody>
@@ -4437,6 +4424,29 @@
                           </a:solidFill>
                           <a:latin typeface="Calibri"/>
                         </a:rPr>
+                        <a:t>-</a:t>
+                      </a:r>
+                    </a:p>
+                  </a:txBody>
+                  <a:tcPr>
+                    <a:solidFill>
+                      <a:srgbClr val="FFFFFF"/>
+                    </a:solidFill>
+                  </a:tcPr>
+                </a:tc>
+                <a:tc>
+                  <a:txBody>
+                    <a:bodyPr/>
+                    <a:lstStyle/>
+                    <a:p>
+                      <a:pPr algn="l"/>
+                      <a:r>
+                        <a:rPr sz="1000" b="0">
+                          <a:solidFill>
+                            <a:srgbClr val="1D1B43"/>
+                          </a:solidFill>
+                          <a:latin typeface="Calibri"/>
+                        </a:rPr>
                         <a:t>1</a:t>
                       </a:r>
                     </a:p>
@@ -4460,30 +4470,7 @@
                           </a:solidFill>
                           <a:latin typeface="Calibri"/>
                         </a:rPr>
-                        <a:t>17</a:t>
-                      </a:r>
-                    </a:p>
-                  </a:txBody>
-                  <a:tcPr>
-                    <a:solidFill>
-                      <a:srgbClr val="FFFFFF"/>
-                    </a:solidFill>
-                  </a:tcPr>
-                </a:tc>
-                <a:tc>
-                  <a:txBody>
-                    <a:bodyPr/>
-                    <a:lstStyle/>
-                    <a:p>
-                      <a:pPr algn="l"/>
-                      <a:r>
-                        <a:rPr sz="1000" b="0">
-                          <a:solidFill>
-                            <a:srgbClr val="1D1B43"/>
-                          </a:solidFill>
-                          <a:latin typeface="Calibri"/>
-                        </a:rPr>
-                        <a:t>+ 16</a:t>
+                        <a:t>-</a:t>
                       </a:r>
                     </a:p>
                   </a:txBody>
@@ -4531,6 +4518,29 @@
                           </a:solidFill>
                           <a:latin typeface="Calibri"/>
                         </a:rPr>
+                        <a:t>-</a:t>
+                      </a:r>
+                    </a:p>
+                  </a:txBody>
+                  <a:tcPr>
+                    <a:solidFill>
+                      <a:srgbClr val="F2F2F2"/>
+                    </a:solidFill>
+                  </a:tcPr>
+                </a:tc>
+                <a:tc>
+                  <a:txBody>
+                    <a:bodyPr/>
+                    <a:lstStyle/>
+                    <a:p>
+                      <a:pPr algn="l"/>
+                      <a:r>
+                        <a:rPr sz="1000" b="0">
+                          <a:solidFill>
+                            <a:srgbClr val="1D1B43"/>
+                          </a:solidFill>
+                          <a:latin typeface="Calibri"/>
+                        </a:rPr>
                         <a:t>99.7%</a:t>
                       </a:r>
                     </a:p>
@@ -4554,30 +4564,7 @@
                           </a:solidFill>
                           <a:latin typeface="Calibri"/>
                         </a:rPr>
-                        <a:t>92.2%</a:t>
-                      </a:r>
-                    </a:p>
-                  </a:txBody>
-                  <a:tcPr>
-                    <a:solidFill>
-                      <a:srgbClr val="F2F2F2"/>
-                    </a:solidFill>
-                  </a:tcPr>
-                </a:tc>
-                <a:tc>
-                  <a:txBody>
-                    <a:bodyPr/>
-                    <a:lstStyle/>
-                    <a:p>
-                      <a:pPr algn="l"/>
-                      <a:r>
-                        <a:rPr sz="1000" b="0">
-                          <a:solidFill>
-                            <a:srgbClr val="1D1B43"/>
-                          </a:solidFill>
-                          <a:latin typeface="Calibri"/>
-                        </a:rPr>
-                        <a:t>- 7.5pp</a:t>
+                        <a:t>-</a:t>
                       </a:r>
                     </a:p>
                   </a:txBody>
@@ -4748,7 +4735,7 @@
         </p:nvGraphicFramePr>
         <p:xfrm>
           <a:off x="7955279" y="2286000"/>
-          <a:ext cx="4480560" cy="1316736"/>
+          <a:ext cx="4480560" cy="877824"/>
         </p:xfrm>
         <a:graphic>
           <a:graphicData uri="http://schemas.openxmlformats.org/drawingml/2006/table">
@@ -4917,6 +4904,29 @@
                           </a:solidFill>
                           <a:latin typeface="Calibri"/>
                         </a:rPr>
+                        <a:t>361</a:t>
+                      </a:r>
+                    </a:p>
+                  </a:txBody>
+                  <a:tcPr>
+                    <a:solidFill>
+                      <a:srgbClr val="FFFFFF"/>
+                    </a:solidFill>
+                  </a:tcPr>
+                </a:tc>
+                <a:tc>
+                  <a:txBody>
+                    <a:bodyPr/>
+                    <a:lstStyle/>
+                    <a:p>
+                      <a:pPr algn="l"/>
+                      <a:r>
+                        <a:rPr sz="1000" b="0">
+                          <a:solidFill>
+                            <a:srgbClr val="1D1B43"/>
+                          </a:solidFill>
+                          <a:latin typeface="Calibri"/>
+                        </a:rPr>
                         <a:t>360</a:t>
                       </a:r>
                     </a:p>
@@ -4940,7 +4950,7 @@
                           </a:solidFill>
                           <a:latin typeface="Calibri"/>
                         </a:rPr>
-                        <a:t>359</a:t>
+                        <a:t>1</a:t>
                       </a:r>
                     </a:p>
                   </a:txBody>
@@ -4963,153 +4973,13 @@
                           </a:solidFill>
                           <a:latin typeface="Calibri"/>
                         </a:rPr>
-                        <a:t>1</a:t>
+                        <a:t>99.7%</a:t>
                       </a:r>
                     </a:p>
                   </a:txBody>
                   <a:tcPr>
                     <a:solidFill>
                       <a:srgbClr val="FFFFFF"/>
-                    </a:solidFill>
-                  </a:tcPr>
-                </a:tc>
-                <a:tc>
-                  <a:txBody>
-                    <a:bodyPr/>
-                    <a:lstStyle/>
-                    <a:p>
-                      <a:pPr algn="l"/>
-                      <a:r>
-                        <a:rPr sz="1000" b="0">
-                          <a:solidFill>
-                            <a:srgbClr val="1D1B43"/>
-                          </a:solidFill>
-                          <a:latin typeface="Calibri"/>
-                        </a:rPr>
-                        <a:t>99.7%</a:t>
-                      </a:r>
-                    </a:p>
-                  </a:txBody>
-                  <a:tcPr>
-                    <a:solidFill>
-                      <a:srgbClr val="FFFFFF"/>
-                    </a:solidFill>
-                  </a:tcPr>
-                </a:tc>
-              </a:tr>
-              <a:tr h="438912">
-                <a:tc>
-                  <a:txBody>
-                    <a:bodyPr/>
-                    <a:lstStyle/>
-                    <a:p>
-                      <a:pPr algn="l"/>
-                      <a:r>
-                        <a:rPr sz="1000" b="0">
-                          <a:solidFill>
-                            <a:srgbClr val="1D1B43"/>
-                          </a:solidFill>
-                          <a:latin typeface="Calibri"/>
-                        </a:rPr>
-                        <a:t>Maio 2026</a:t>
-                      </a:r>
-                    </a:p>
-                  </a:txBody>
-                  <a:tcPr>
-                    <a:solidFill>
-                      <a:srgbClr val="F2F2F2"/>
-                    </a:solidFill>
-                  </a:tcPr>
-                </a:tc>
-                <a:tc>
-                  <a:txBody>
-                    <a:bodyPr/>
-                    <a:lstStyle/>
-                    <a:p>
-                      <a:pPr algn="l"/>
-                      <a:r>
-                        <a:rPr sz="1000" b="0">
-                          <a:solidFill>
-                            <a:srgbClr val="1D1B43"/>
-                          </a:solidFill>
-                          <a:latin typeface="Calibri"/>
-                        </a:rPr>
-                        <a:t>217</a:t>
-                      </a:r>
-                    </a:p>
-                  </a:txBody>
-                  <a:tcPr>
-                    <a:solidFill>
-                      <a:srgbClr val="F2F2F2"/>
-                    </a:solidFill>
-                  </a:tcPr>
-                </a:tc>
-                <a:tc>
-                  <a:txBody>
-                    <a:bodyPr/>
-                    <a:lstStyle/>
-                    <a:p>
-                      <a:pPr algn="l"/>
-                      <a:r>
-                        <a:rPr sz="1000" b="0">
-                          <a:solidFill>
-                            <a:srgbClr val="1D1B43"/>
-                          </a:solidFill>
-                          <a:latin typeface="Calibri"/>
-                        </a:rPr>
-                        <a:t>200</a:t>
-                      </a:r>
-                    </a:p>
-                  </a:txBody>
-                  <a:tcPr>
-                    <a:solidFill>
-                      <a:srgbClr val="F2F2F2"/>
-                    </a:solidFill>
-                  </a:tcPr>
-                </a:tc>
-                <a:tc>
-                  <a:txBody>
-                    <a:bodyPr/>
-                    <a:lstStyle/>
-                    <a:p>
-                      <a:pPr algn="l"/>
-                      <a:r>
-                        <a:rPr sz="1000" b="0">
-                          <a:solidFill>
-                            <a:srgbClr val="1D1B43"/>
-                          </a:solidFill>
-                          <a:latin typeface="Calibri"/>
-                        </a:rPr>
-                        <a:t>17</a:t>
-                      </a:r>
-                    </a:p>
-                  </a:txBody>
-                  <a:tcPr>
-                    <a:solidFill>
-                      <a:srgbClr val="F2F2F2"/>
-                    </a:solidFill>
-                  </a:tcPr>
-                </a:tc>
-                <a:tc>
-                  <a:txBody>
-                    <a:bodyPr/>
-                    <a:lstStyle/>
-                    <a:p>
-                      <a:pPr algn="l"/>
-                      <a:r>
-                        <a:rPr sz="1000" b="0">
-                          <a:solidFill>
-                            <a:srgbClr val="1D1B43"/>
-                          </a:solidFill>
-                          <a:latin typeface="Calibri"/>
-                        </a:rPr>
-                        <a:t>92.2%</a:t>
-                      </a:r>
-                    </a:p>
-                  </a:txBody>
-                  <a:tcPr>
-                    <a:solidFill>
-                      <a:srgbClr val="F2F2F2"/>
                     </a:solidFill>
                   </a:tcPr>
                 </a:tc>
@@ -5191,7 +5061,7 @@
                 </a:solidFill>
                 <a:latin typeface="Calibri"/>
               </a:rPr>
-              <a:t>PERFORMANCE: 92.2% - REGULAR</a:t>
+              <a:t>PERFORMANCE: 99.7% - EXCELENTE</a:t>
             </a:r>
           </a:p>
         </p:txBody>
@@ -5276,7 +5146,7 @@
                 </a:solidFill>
                 <a:latin typeface="Calibri"/>
               </a:rPr>
-              <a:t>OCORRENCIAS FORA DO PRAZO (17)</a:t>
+              <a:t>OCORRENCIAS FORA DO PRAZO (1)</a:t>
             </a:r>
           </a:p>
         </p:txBody>
@@ -5334,7 +5204,7 @@
         </p:nvGraphicFramePr>
         <p:xfrm>
           <a:off x="457200" y="1828800"/>
-          <a:ext cx="11429999" cy="4572000"/>
+          <a:ext cx="11429999" cy="768096"/>
         </p:xfrm>
         <a:graphic>
           <a:graphicData uri="http://schemas.openxmlformats.org/drawingml/2006/table">
@@ -5349,7 +5219,7 @@
                 <a:gridCol w="1554480"/>
                 <a:gridCol w="2743200"/>
               </a:tblGrid>
-              <a:tr h="254000">
+              <a:tr h="384048">
                 <a:tc>
                   <a:txBody>
                     <a:bodyPr/>
@@ -5466,21 +5336,21 @@
                   </a:tcPr>
                 </a:tc>
               </a:tr>
-              <a:tr h="254000">
-                <a:tc>
-                  <a:txBody>
-                    <a:bodyPr/>
-                    <a:lstStyle/>
-                    <a:p>
-                      <a:pPr algn="l"/>
-                      <a:r>
-                        <a:rPr sz="1000" b="0">
-                          <a:solidFill>
-                            <a:srgbClr val="1D1B43"/>
-                          </a:solidFill>
-                          <a:latin typeface="Calibri"/>
-                        </a:rPr>
-                        <a:t>280872</a:t>
+              <a:tr h="384048">
+                <a:tc>
+                  <a:txBody>
+                    <a:bodyPr/>
+                    <a:lstStyle/>
+                    <a:p>
+                      <a:pPr algn="l"/>
+                      <a:r>
+                        <a:rPr sz="1000" b="0">
+                          <a:solidFill>
+                            <a:srgbClr val="1D1B43"/>
+                          </a:solidFill>
+                          <a:latin typeface="Calibri"/>
+                        </a:rPr>
+                        <a:t>279635</a:t>
                       </a:r>
                     </a:p>
                   </a:txBody>
@@ -5503,7 +5373,7 @@
                           </a:solidFill>
                           <a:latin typeface="Calibri"/>
                         </a:rPr>
-                        <a:t>MRH VEICULOS LTDA. - SAO PAULO / SP</a:t>
+                        <a:t>MRH VEICULOS LTDA - RIBEIRAO PRETO / SP</a:t>
                       </a:r>
                     </a:p>
                   </a:txBody>
@@ -5526,7 +5396,7 @@
                           </a:solidFill>
                           <a:latin typeface="Calibri"/>
                         </a:rPr>
-                        <a:t>SAO PAULO/SP</a:t>
+                        <a:t>RIBEIRAO PRETO/SP</a:t>
                       </a:r>
                     </a:p>
                   </a:txBody>
@@ -5549,7 +5419,7 @@
                           </a:solidFill>
                           <a:latin typeface="Calibri"/>
                         </a:rPr>
-                        <a:t>05/05/2026</a:t>
+                        <a:t>23/04/2026</a:t>
                       </a:r>
                     </a:p>
                   </a:txBody>
@@ -5572,1879 +5442,7 @@
                           </a:solidFill>
                           <a:latin typeface="Calibri"/>
                         </a:rPr>
-                        <a:t>FORA DO PRAZO</a:t>
-                      </a:r>
-                    </a:p>
-                  </a:txBody>
-                  <a:tcPr>
-                    <a:solidFill>
-                      <a:srgbClr val="FFFFFF"/>
-                    </a:solidFill>
-                  </a:tcPr>
-                </a:tc>
-              </a:tr>
-              <a:tr h="254000">
-                <a:tc>
-                  <a:txBody>
-                    <a:bodyPr/>
-                    <a:lstStyle/>
-                    <a:p>
-                      <a:pPr algn="l"/>
-                      <a:r>
-                        <a:rPr sz="1000" b="0">
-                          <a:solidFill>
-                            <a:srgbClr val="1D1B43"/>
-                          </a:solidFill>
-                          <a:latin typeface="Calibri"/>
-                        </a:rPr>
-                        <a:t>281230</a:t>
-                      </a:r>
-                    </a:p>
-                  </a:txBody>
-                  <a:tcPr>
-                    <a:solidFill>
-                      <a:srgbClr val="F2F2F2"/>
-                    </a:solidFill>
-                  </a:tcPr>
-                </a:tc>
-                <a:tc>
-                  <a:txBody>
-                    <a:bodyPr/>
-                    <a:lstStyle/>
-                    <a:p>
-                      <a:pPr algn="l"/>
-                      <a:r>
-                        <a:rPr sz="1000" b="0">
-                          <a:solidFill>
-                            <a:srgbClr val="1D1B43"/>
-                          </a:solidFill>
-                          <a:latin typeface="Calibri"/>
-                        </a:rPr>
-                        <a:t>LIA E ANNETTE INDUST - RIO DE JANEIRO / RJ</a:t>
-                      </a:r>
-                    </a:p>
-                  </a:txBody>
-                  <a:tcPr>
-                    <a:solidFill>
-                      <a:srgbClr val="F2F2F2"/>
-                    </a:solidFill>
-                  </a:tcPr>
-                </a:tc>
-                <a:tc>
-                  <a:txBody>
-                    <a:bodyPr/>
-                    <a:lstStyle/>
-                    <a:p>
-                      <a:pPr algn="l"/>
-                      <a:r>
-                        <a:rPr sz="1000" b="0">
-                          <a:solidFill>
-                            <a:srgbClr val="1D1B43"/>
-                          </a:solidFill>
-                          <a:latin typeface="Calibri"/>
-                        </a:rPr>
-                        <a:t>RIO DE JANEIRO/RJ</a:t>
-                      </a:r>
-                    </a:p>
-                  </a:txBody>
-                  <a:tcPr>
-                    <a:solidFill>
-                      <a:srgbClr val="F2F2F2"/>
-                    </a:solidFill>
-                  </a:tcPr>
-                </a:tc>
-                <a:tc>
-                  <a:txBody>
-                    <a:bodyPr/>
-                    <a:lstStyle/>
-                    <a:p>
-                      <a:pPr algn="l"/>
-                      <a:r>
-                        <a:rPr sz="1000" b="0">
-                          <a:solidFill>
-                            <a:srgbClr val="1D1B43"/>
-                          </a:solidFill>
-                          <a:latin typeface="Calibri"/>
-                        </a:rPr>
-                        <a:t>06/05/2026</a:t>
-                      </a:r>
-                    </a:p>
-                  </a:txBody>
-                  <a:tcPr>
-                    <a:solidFill>
-                      <a:srgbClr val="F2F2F2"/>
-                    </a:solidFill>
-                  </a:tcPr>
-                </a:tc>
-                <a:tc>
-                  <a:txBody>
-                    <a:bodyPr/>
-                    <a:lstStyle/>
-                    <a:p>
-                      <a:pPr algn="l"/>
-                      <a:r>
-                        <a:rPr sz="1000" b="0">
-                          <a:solidFill>
-                            <a:srgbClr val="1D1B43"/>
-                          </a:solidFill>
-                          <a:latin typeface="Calibri"/>
-                        </a:rPr>
                         <a:t>ENTREGUE FORA DO PRAZO</a:t>
-                      </a:r>
-                    </a:p>
-                  </a:txBody>
-                  <a:tcPr>
-                    <a:solidFill>
-                      <a:srgbClr val="F2F2F2"/>
-                    </a:solidFill>
-                  </a:tcPr>
-                </a:tc>
-              </a:tr>
-              <a:tr h="254000">
-                <a:tc>
-                  <a:txBody>
-                    <a:bodyPr/>
-                    <a:lstStyle/>
-                    <a:p>
-                      <a:pPr algn="l"/>
-                      <a:r>
-                        <a:rPr sz="1000" b="0">
-                          <a:solidFill>
-                            <a:srgbClr val="1D1B43"/>
-                          </a:solidFill>
-                          <a:latin typeface="Calibri"/>
-                        </a:rPr>
-                        <a:t>281291</a:t>
-                      </a:r>
-                    </a:p>
-                  </a:txBody>
-                  <a:tcPr>
-                    <a:solidFill>
-                      <a:srgbClr val="FFFFFF"/>
-                    </a:solidFill>
-                  </a:tcPr>
-                </a:tc>
-                <a:tc>
-                  <a:txBody>
-                    <a:bodyPr/>
-                    <a:lstStyle/>
-                    <a:p>
-                      <a:pPr algn="l"/>
-                      <a:r>
-                        <a:rPr sz="1000" b="0">
-                          <a:solidFill>
-                            <a:srgbClr val="1D1B43"/>
-                          </a:solidFill>
-                          <a:latin typeface="Calibri"/>
-                        </a:rPr>
-                        <a:t>MRH VEICULOS LTDA - RIO DE JANEIRO / RJ</a:t>
-                      </a:r>
-                    </a:p>
-                  </a:txBody>
-                  <a:tcPr>
-                    <a:solidFill>
-                      <a:srgbClr val="FFFFFF"/>
-                    </a:solidFill>
-                  </a:tcPr>
-                </a:tc>
-                <a:tc>
-                  <a:txBody>
-                    <a:bodyPr/>
-                    <a:lstStyle/>
-                    <a:p>
-                      <a:pPr algn="l"/>
-                      <a:r>
-                        <a:rPr sz="1000" b="0">
-                          <a:solidFill>
-                            <a:srgbClr val="1D1B43"/>
-                          </a:solidFill>
-                          <a:latin typeface="Calibri"/>
-                        </a:rPr>
-                        <a:t>RIO DE JANEIRO/RJ</a:t>
-                      </a:r>
-                    </a:p>
-                  </a:txBody>
-                  <a:tcPr>
-                    <a:solidFill>
-                      <a:srgbClr val="FFFFFF"/>
-                    </a:solidFill>
-                  </a:tcPr>
-                </a:tc>
-                <a:tc>
-                  <a:txBody>
-                    <a:bodyPr/>
-                    <a:lstStyle/>
-                    <a:p>
-                      <a:pPr algn="l"/>
-                      <a:r>
-                        <a:rPr sz="1000" b="0">
-                          <a:solidFill>
-                            <a:srgbClr val="1D1B43"/>
-                          </a:solidFill>
-                          <a:latin typeface="Calibri"/>
-                        </a:rPr>
-                        <a:t>06/05/2026</a:t>
-                      </a:r>
-                    </a:p>
-                  </a:txBody>
-                  <a:tcPr>
-                    <a:solidFill>
-                      <a:srgbClr val="FFFFFF"/>
-                    </a:solidFill>
-                  </a:tcPr>
-                </a:tc>
-                <a:tc>
-                  <a:txBody>
-                    <a:bodyPr/>
-                    <a:lstStyle/>
-                    <a:p>
-                      <a:pPr algn="l"/>
-                      <a:r>
-                        <a:rPr sz="1000" b="0">
-                          <a:solidFill>
-                            <a:srgbClr val="1D1B43"/>
-                          </a:solidFill>
-                          <a:latin typeface="Calibri"/>
-                        </a:rPr>
-                        <a:t>ENTREGUE FORA DO PRAZO</a:t>
-                      </a:r>
-                    </a:p>
-                  </a:txBody>
-                  <a:tcPr>
-                    <a:solidFill>
-                      <a:srgbClr val="FFFFFF"/>
-                    </a:solidFill>
-                  </a:tcPr>
-                </a:tc>
-              </a:tr>
-              <a:tr h="254000">
-                <a:tc>
-                  <a:txBody>
-                    <a:bodyPr/>
-                    <a:lstStyle/>
-                    <a:p>
-                      <a:pPr algn="l"/>
-                      <a:r>
-                        <a:rPr sz="1000" b="0">
-                          <a:solidFill>
-                            <a:srgbClr val="1D1B43"/>
-                          </a:solidFill>
-                          <a:latin typeface="Calibri"/>
-                        </a:rPr>
-                        <a:t>281633</a:t>
-                      </a:r>
-                    </a:p>
-                  </a:txBody>
-                  <a:tcPr>
-                    <a:solidFill>
-                      <a:srgbClr val="F2F2F2"/>
-                    </a:solidFill>
-                  </a:tcPr>
-                </a:tc>
-                <a:tc>
-                  <a:txBody>
-                    <a:bodyPr/>
-                    <a:lstStyle/>
-                    <a:p>
-                      <a:pPr algn="l"/>
-                      <a:r>
-                        <a:rPr sz="1000" b="0">
-                          <a:solidFill>
-                            <a:srgbClr val="1D1B43"/>
-                          </a:solidFill>
-                          <a:latin typeface="Calibri"/>
-                        </a:rPr>
-                        <a:t>MRH VEICULOS LTDA. - PORTO ALEGRE / RS</a:t>
-                      </a:r>
-                    </a:p>
-                  </a:txBody>
-                  <a:tcPr>
-                    <a:solidFill>
-                      <a:srgbClr val="F2F2F2"/>
-                    </a:solidFill>
-                  </a:tcPr>
-                </a:tc>
-                <a:tc>
-                  <a:txBody>
-                    <a:bodyPr/>
-                    <a:lstStyle/>
-                    <a:p>
-                      <a:pPr algn="l"/>
-                      <a:r>
-                        <a:rPr sz="1000" b="0">
-                          <a:solidFill>
-                            <a:srgbClr val="1D1B43"/>
-                          </a:solidFill>
-                          <a:latin typeface="Calibri"/>
-                        </a:rPr>
-                        <a:t>PORTO ALEGRE/RS</a:t>
-                      </a:r>
-                    </a:p>
-                  </a:txBody>
-                  <a:tcPr>
-                    <a:solidFill>
-                      <a:srgbClr val="F2F2F2"/>
-                    </a:solidFill>
-                  </a:tcPr>
-                </a:tc>
-                <a:tc>
-                  <a:txBody>
-                    <a:bodyPr/>
-                    <a:lstStyle/>
-                    <a:p>
-                      <a:pPr algn="l"/>
-                      <a:r>
-                        <a:rPr sz="1000" b="0">
-                          <a:solidFill>
-                            <a:srgbClr val="1D1B43"/>
-                          </a:solidFill>
-                          <a:latin typeface="Calibri"/>
-                        </a:rPr>
-                        <a:t>07/05/2026</a:t>
-                      </a:r>
-                    </a:p>
-                  </a:txBody>
-                  <a:tcPr>
-                    <a:solidFill>
-                      <a:srgbClr val="F2F2F2"/>
-                    </a:solidFill>
-                  </a:tcPr>
-                </a:tc>
-                <a:tc>
-                  <a:txBody>
-                    <a:bodyPr/>
-                    <a:lstStyle/>
-                    <a:p>
-                      <a:pPr algn="l"/>
-                      <a:r>
-                        <a:rPr sz="1000" b="0">
-                          <a:solidFill>
-                            <a:srgbClr val="1D1B43"/>
-                          </a:solidFill>
-                          <a:latin typeface="Calibri"/>
-                        </a:rPr>
-                        <a:t>ENTREGUE FORA DO PRAZO</a:t>
-                      </a:r>
-                    </a:p>
-                  </a:txBody>
-                  <a:tcPr>
-                    <a:solidFill>
-                      <a:srgbClr val="F2F2F2"/>
-                    </a:solidFill>
-                  </a:tcPr>
-                </a:tc>
-              </a:tr>
-              <a:tr h="254000">
-                <a:tc>
-                  <a:txBody>
-                    <a:bodyPr/>
-                    <a:lstStyle/>
-                    <a:p>
-                      <a:pPr algn="l"/>
-                      <a:r>
-                        <a:rPr sz="1000" b="0">
-                          <a:solidFill>
-                            <a:srgbClr val="1D1B43"/>
-                          </a:solidFill>
-                          <a:latin typeface="Calibri"/>
-                        </a:rPr>
-                        <a:t>281808</a:t>
-                      </a:r>
-                    </a:p>
-                  </a:txBody>
-                  <a:tcPr>
-                    <a:solidFill>
-                      <a:srgbClr val="FFFFFF"/>
-                    </a:solidFill>
-                  </a:tcPr>
-                </a:tc>
-                <a:tc>
-                  <a:txBody>
-                    <a:bodyPr/>
-                    <a:lstStyle/>
-                    <a:p>
-                      <a:pPr algn="l"/>
-                      <a:r>
-                        <a:rPr sz="1000" b="0">
-                          <a:solidFill>
-                            <a:srgbClr val="1D1B43"/>
-                          </a:solidFill>
-                          <a:latin typeface="Calibri"/>
-                        </a:rPr>
-                        <a:t>MRH VEICULOS LTDA. - SAO PAULO / SP</a:t>
-                      </a:r>
-                    </a:p>
-                  </a:txBody>
-                  <a:tcPr>
-                    <a:solidFill>
-                      <a:srgbClr val="FFFFFF"/>
-                    </a:solidFill>
-                  </a:tcPr>
-                </a:tc>
-                <a:tc>
-                  <a:txBody>
-                    <a:bodyPr/>
-                    <a:lstStyle/>
-                    <a:p>
-                      <a:pPr algn="l"/>
-                      <a:r>
-                        <a:rPr sz="1000" b="0">
-                          <a:solidFill>
-                            <a:srgbClr val="1D1B43"/>
-                          </a:solidFill>
-                          <a:latin typeface="Calibri"/>
-                        </a:rPr>
-                        <a:t>SAO PAULO/SP</a:t>
-                      </a:r>
-                    </a:p>
-                  </a:txBody>
-                  <a:tcPr>
-                    <a:solidFill>
-                      <a:srgbClr val="FFFFFF"/>
-                    </a:solidFill>
-                  </a:tcPr>
-                </a:tc>
-                <a:tc>
-                  <a:txBody>
-                    <a:bodyPr/>
-                    <a:lstStyle/>
-                    <a:p>
-                      <a:pPr algn="l"/>
-                      <a:r>
-                        <a:rPr sz="1000" b="0">
-                          <a:solidFill>
-                            <a:srgbClr val="1D1B43"/>
-                          </a:solidFill>
-                          <a:latin typeface="Calibri"/>
-                        </a:rPr>
-                        <a:t>06/05/2026</a:t>
-                      </a:r>
-                    </a:p>
-                  </a:txBody>
-                  <a:tcPr>
-                    <a:solidFill>
-                      <a:srgbClr val="FFFFFF"/>
-                    </a:solidFill>
-                  </a:tcPr>
-                </a:tc>
-                <a:tc>
-                  <a:txBody>
-                    <a:bodyPr/>
-                    <a:lstStyle/>
-                    <a:p>
-                      <a:pPr algn="l"/>
-                      <a:r>
-                        <a:rPr sz="1000" b="0">
-                          <a:solidFill>
-                            <a:srgbClr val="1D1B43"/>
-                          </a:solidFill>
-                          <a:latin typeface="Calibri"/>
-                        </a:rPr>
-                        <a:t>ENTREGUE FORA DO PRAZO</a:t>
-                      </a:r>
-                    </a:p>
-                  </a:txBody>
-                  <a:tcPr>
-                    <a:solidFill>
-                      <a:srgbClr val="FFFFFF"/>
-                    </a:solidFill>
-                  </a:tcPr>
-                </a:tc>
-              </a:tr>
-              <a:tr h="254000">
-                <a:tc>
-                  <a:txBody>
-                    <a:bodyPr/>
-                    <a:lstStyle/>
-                    <a:p>
-                      <a:pPr algn="l"/>
-                      <a:r>
-                        <a:rPr sz="1000" b="0">
-                          <a:solidFill>
-                            <a:srgbClr val="1D1B43"/>
-                          </a:solidFill>
-                          <a:latin typeface="Calibri"/>
-                        </a:rPr>
-                        <a:t>282028</a:t>
-                      </a:r>
-                    </a:p>
-                  </a:txBody>
-                  <a:tcPr>
-                    <a:solidFill>
-                      <a:srgbClr val="F2F2F2"/>
-                    </a:solidFill>
-                  </a:tcPr>
-                </a:tc>
-                <a:tc>
-                  <a:txBody>
-                    <a:bodyPr/>
-                    <a:lstStyle/>
-                    <a:p>
-                      <a:pPr algn="l"/>
-                      <a:r>
-                        <a:rPr sz="1000" b="0">
-                          <a:solidFill>
-                            <a:srgbClr val="1D1B43"/>
-                          </a:solidFill>
-                          <a:latin typeface="Calibri"/>
-                        </a:rPr>
-                        <a:t>FORTE LOGISTICA - ITAJAI / SC</a:t>
-                      </a:r>
-                    </a:p>
-                  </a:txBody>
-                  <a:tcPr>
-                    <a:solidFill>
-                      <a:srgbClr val="F2F2F2"/>
-                    </a:solidFill>
-                  </a:tcPr>
-                </a:tc>
-                <a:tc>
-                  <a:txBody>
-                    <a:bodyPr/>
-                    <a:lstStyle/>
-                    <a:p>
-                      <a:pPr algn="l"/>
-                      <a:r>
-                        <a:rPr sz="1000" b="0">
-                          <a:solidFill>
-                            <a:srgbClr val="1D1B43"/>
-                          </a:solidFill>
-                          <a:latin typeface="Calibri"/>
-                        </a:rPr>
-                        <a:t>ITAJAI/SC</a:t>
-                      </a:r>
-                    </a:p>
-                  </a:txBody>
-                  <a:tcPr>
-                    <a:solidFill>
-                      <a:srgbClr val="F2F2F2"/>
-                    </a:solidFill>
-                  </a:tcPr>
-                </a:tc>
-                <a:tc>
-                  <a:txBody>
-                    <a:bodyPr/>
-                    <a:lstStyle/>
-                    <a:p>
-                      <a:pPr algn="l"/>
-                      <a:r>
-                        <a:rPr sz="1000" b="0">
-                          <a:solidFill>
-                            <a:srgbClr val="1D1B43"/>
-                          </a:solidFill>
-                          <a:latin typeface="Calibri"/>
-                        </a:rPr>
-                        <a:t>12/05/2026</a:t>
-                      </a:r>
-                    </a:p>
-                  </a:txBody>
-                  <a:tcPr>
-                    <a:solidFill>
-                      <a:srgbClr val="F2F2F2"/>
-                    </a:solidFill>
-                  </a:tcPr>
-                </a:tc>
-                <a:tc>
-                  <a:txBody>
-                    <a:bodyPr/>
-                    <a:lstStyle/>
-                    <a:p>
-                      <a:pPr algn="l"/>
-                      <a:r>
-                        <a:rPr sz="1000" b="0">
-                          <a:solidFill>
-                            <a:srgbClr val="1D1B43"/>
-                          </a:solidFill>
-                          <a:latin typeface="Calibri"/>
-                        </a:rPr>
-                        <a:t>ENTREGUE FORA DO PRAZO</a:t>
-                      </a:r>
-                    </a:p>
-                  </a:txBody>
-                  <a:tcPr>
-                    <a:solidFill>
-                      <a:srgbClr val="F2F2F2"/>
-                    </a:solidFill>
-                  </a:tcPr>
-                </a:tc>
-              </a:tr>
-              <a:tr h="254000">
-                <a:tc>
-                  <a:txBody>
-                    <a:bodyPr/>
-                    <a:lstStyle/>
-                    <a:p>
-                      <a:pPr algn="l"/>
-                      <a:r>
-                        <a:rPr sz="1000" b="0">
-                          <a:solidFill>
-                            <a:srgbClr val="1D1B43"/>
-                          </a:solidFill>
-                          <a:latin typeface="Calibri"/>
-                        </a:rPr>
-                        <a:t>282179</a:t>
-                      </a:r>
-                    </a:p>
-                  </a:txBody>
-                  <a:tcPr>
-                    <a:solidFill>
-                      <a:srgbClr val="FFFFFF"/>
-                    </a:solidFill>
-                  </a:tcPr>
-                </a:tc>
-                <a:tc>
-                  <a:txBody>
-                    <a:bodyPr/>
-                    <a:lstStyle/>
-                    <a:p>
-                      <a:pPr algn="l"/>
-                      <a:r>
-                        <a:rPr sz="1000" b="0">
-                          <a:solidFill>
-                            <a:srgbClr val="1D1B43"/>
-                          </a:solidFill>
-                          <a:latin typeface="Calibri"/>
-                        </a:rPr>
-                        <a:t>BMQ AUTOMOVEIS LTDA - BELO HORIZONTE / MG</a:t>
-                      </a:r>
-                    </a:p>
-                  </a:txBody>
-                  <a:tcPr>
-                    <a:solidFill>
-                      <a:srgbClr val="FFFFFF"/>
-                    </a:solidFill>
-                  </a:tcPr>
-                </a:tc>
-                <a:tc>
-                  <a:txBody>
-                    <a:bodyPr/>
-                    <a:lstStyle/>
-                    <a:p>
-                      <a:pPr algn="l"/>
-                      <a:r>
-                        <a:rPr sz="1000" b="0">
-                          <a:solidFill>
-                            <a:srgbClr val="1D1B43"/>
-                          </a:solidFill>
-                          <a:latin typeface="Calibri"/>
-                        </a:rPr>
-                        <a:t>BELO HORIZONTE/MG</a:t>
-                      </a:r>
-                    </a:p>
-                  </a:txBody>
-                  <a:tcPr>
-                    <a:solidFill>
-                      <a:srgbClr val="FFFFFF"/>
-                    </a:solidFill>
-                  </a:tcPr>
-                </a:tc>
-                <a:tc>
-                  <a:txBody>
-                    <a:bodyPr/>
-                    <a:lstStyle/>
-                    <a:p>
-                      <a:pPr algn="l"/>
-                      <a:r>
-                        <a:rPr sz="1000" b="0">
-                          <a:solidFill>
-                            <a:srgbClr val="1D1B43"/>
-                          </a:solidFill>
-                          <a:latin typeface="Calibri"/>
-                        </a:rPr>
-                        <a:t>12/05/2026</a:t>
-                      </a:r>
-                    </a:p>
-                  </a:txBody>
-                  <a:tcPr>
-                    <a:solidFill>
-                      <a:srgbClr val="FFFFFF"/>
-                    </a:solidFill>
-                  </a:tcPr>
-                </a:tc>
-                <a:tc>
-                  <a:txBody>
-                    <a:bodyPr/>
-                    <a:lstStyle/>
-                    <a:p>
-                      <a:pPr algn="l"/>
-                      <a:r>
-                        <a:rPr sz="1000" b="0">
-                          <a:solidFill>
-                            <a:srgbClr val="1D1B43"/>
-                          </a:solidFill>
-                          <a:latin typeface="Calibri"/>
-                        </a:rPr>
-                        <a:t>ENTREGUE FORA DO PRAZO</a:t>
-                      </a:r>
-                    </a:p>
-                  </a:txBody>
-                  <a:tcPr>
-                    <a:solidFill>
-                      <a:srgbClr val="FFFFFF"/>
-                    </a:solidFill>
-                  </a:tcPr>
-                </a:tc>
-              </a:tr>
-              <a:tr h="254000">
-                <a:tc>
-                  <a:txBody>
-                    <a:bodyPr/>
-                    <a:lstStyle/>
-                    <a:p>
-                      <a:pPr algn="l"/>
-                      <a:r>
-                        <a:rPr sz="1000" b="0">
-                          <a:solidFill>
-                            <a:srgbClr val="1D1B43"/>
-                          </a:solidFill>
-                          <a:latin typeface="Calibri"/>
-                        </a:rPr>
-                        <a:t>282365</a:t>
-                      </a:r>
-                    </a:p>
-                  </a:txBody>
-                  <a:tcPr>
-                    <a:solidFill>
-                      <a:srgbClr val="F2F2F2"/>
-                    </a:solidFill>
-                  </a:tcPr>
-                </a:tc>
-                <a:tc>
-                  <a:txBody>
-                    <a:bodyPr/>
-                    <a:lstStyle/>
-                    <a:p>
-                      <a:pPr algn="l"/>
-                      <a:r>
-                        <a:rPr sz="1000" b="0">
-                          <a:solidFill>
-                            <a:srgbClr val="1D1B43"/>
-                          </a:solidFill>
-                          <a:latin typeface="Calibri"/>
-                        </a:rPr>
-                        <a:t>CENTRO TECNICO DE VE - SAO PAULO / SP</a:t>
-                      </a:r>
-                    </a:p>
-                  </a:txBody>
-                  <a:tcPr>
-                    <a:solidFill>
-                      <a:srgbClr val="F2F2F2"/>
-                    </a:solidFill>
-                  </a:tcPr>
-                </a:tc>
-                <a:tc>
-                  <a:txBody>
-                    <a:bodyPr/>
-                    <a:lstStyle/>
-                    <a:p>
-                      <a:pPr algn="l"/>
-                      <a:r>
-                        <a:rPr sz="1000" b="0">
-                          <a:solidFill>
-                            <a:srgbClr val="1D1B43"/>
-                          </a:solidFill>
-                          <a:latin typeface="Calibri"/>
-                        </a:rPr>
-                        <a:t>SAO PAULO/SP</a:t>
-                      </a:r>
-                    </a:p>
-                  </a:txBody>
-                  <a:tcPr>
-                    <a:solidFill>
-                      <a:srgbClr val="F2F2F2"/>
-                    </a:solidFill>
-                  </a:tcPr>
-                </a:tc>
-                <a:tc>
-                  <a:txBody>
-                    <a:bodyPr/>
-                    <a:lstStyle/>
-                    <a:p>
-                      <a:pPr algn="l"/>
-                      <a:r>
-                        <a:rPr sz="1000" b="0">
-                          <a:solidFill>
-                            <a:srgbClr val="1D1B43"/>
-                          </a:solidFill>
-                          <a:latin typeface="Calibri"/>
-                        </a:rPr>
-                        <a:t>08/05/2026</a:t>
-                      </a:r>
-                    </a:p>
-                  </a:txBody>
-                  <a:tcPr>
-                    <a:solidFill>
-                      <a:srgbClr val="F2F2F2"/>
-                    </a:solidFill>
-                  </a:tcPr>
-                </a:tc>
-                <a:tc>
-                  <a:txBody>
-                    <a:bodyPr/>
-                    <a:lstStyle/>
-                    <a:p>
-                      <a:pPr algn="l"/>
-                      <a:r>
-                        <a:rPr sz="1000" b="0">
-                          <a:solidFill>
-                            <a:srgbClr val="1D1B43"/>
-                          </a:solidFill>
-                          <a:latin typeface="Calibri"/>
-                        </a:rPr>
-                        <a:t>ENTREGUE FORA DO PRAZO</a:t>
-                      </a:r>
-                    </a:p>
-                  </a:txBody>
-                  <a:tcPr>
-                    <a:solidFill>
-                      <a:srgbClr val="F2F2F2"/>
-                    </a:solidFill>
-                  </a:tcPr>
-                </a:tc>
-              </a:tr>
-              <a:tr h="254000">
-                <a:tc>
-                  <a:txBody>
-                    <a:bodyPr/>
-                    <a:lstStyle/>
-                    <a:p>
-                      <a:pPr algn="l"/>
-                      <a:r>
-                        <a:rPr sz="1000" b="0">
-                          <a:solidFill>
-                            <a:srgbClr val="1D1B43"/>
-                          </a:solidFill>
-                          <a:latin typeface="Calibri"/>
-                        </a:rPr>
-                        <a:t>282369</a:t>
-                      </a:r>
-                    </a:p>
-                  </a:txBody>
-                  <a:tcPr>
-                    <a:solidFill>
-                      <a:srgbClr val="FFFFFF"/>
-                    </a:solidFill>
-                  </a:tcPr>
-                </a:tc>
-                <a:tc>
-                  <a:txBody>
-                    <a:bodyPr/>
-                    <a:lstStyle/>
-                    <a:p>
-                      <a:pPr algn="l"/>
-                      <a:r>
-                        <a:rPr sz="1000" b="0">
-                          <a:solidFill>
-                            <a:srgbClr val="1D1B43"/>
-                          </a:solidFill>
-                          <a:latin typeface="Calibri"/>
-                        </a:rPr>
-                        <a:t>DUO SP COMERCIO DE V - SAO PAULO / SP</a:t>
-                      </a:r>
-                    </a:p>
-                  </a:txBody>
-                  <a:tcPr>
-                    <a:solidFill>
-                      <a:srgbClr val="FFFFFF"/>
-                    </a:solidFill>
-                  </a:tcPr>
-                </a:tc>
-                <a:tc>
-                  <a:txBody>
-                    <a:bodyPr/>
-                    <a:lstStyle/>
-                    <a:p>
-                      <a:pPr algn="l"/>
-                      <a:r>
-                        <a:rPr sz="1000" b="0">
-                          <a:solidFill>
-                            <a:srgbClr val="1D1B43"/>
-                          </a:solidFill>
-                          <a:latin typeface="Calibri"/>
-                        </a:rPr>
-                        <a:t>SAO PAULO/SP</a:t>
-                      </a:r>
-                    </a:p>
-                  </a:txBody>
-                  <a:tcPr>
-                    <a:solidFill>
-                      <a:srgbClr val="FFFFFF"/>
-                    </a:solidFill>
-                  </a:tcPr>
-                </a:tc>
-                <a:tc>
-                  <a:txBody>
-                    <a:bodyPr/>
-                    <a:lstStyle/>
-                    <a:p>
-                      <a:pPr algn="l"/>
-                      <a:r>
-                        <a:rPr sz="1000" b="0">
-                          <a:solidFill>
-                            <a:srgbClr val="1D1B43"/>
-                          </a:solidFill>
-                          <a:latin typeface="Calibri"/>
-                        </a:rPr>
-                        <a:t>08/05/2026</a:t>
-                      </a:r>
-                    </a:p>
-                  </a:txBody>
-                  <a:tcPr>
-                    <a:solidFill>
-                      <a:srgbClr val="FFFFFF"/>
-                    </a:solidFill>
-                  </a:tcPr>
-                </a:tc>
-                <a:tc>
-                  <a:txBody>
-                    <a:bodyPr/>
-                    <a:lstStyle/>
-                    <a:p>
-                      <a:pPr algn="l"/>
-                      <a:r>
-                        <a:rPr sz="1000" b="0">
-                          <a:solidFill>
-                            <a:srgbClr val="1D1B43"/>
-                          </a:solidFill>
-                          <a:latin typeface="Calibri"/>
-                        </a:rPr>
-                        <a:t>ENTREGUE FORA DO PRAZO</a:t>
-                      </a:r>
-                    </a:p>
-                  </a:txBody>
-                  <a:tcPr>
-                    <a:solidFill>
-                      <a:srgbClr val="FFFFFF"/>
-                    </a:solidFill>
-                  </a:tcPr>
-                </a:tc>
-              </a:tr>
-              <a:tr h="254000">
-                <a:tc>
-                  <a:txBody>
-                    <a:bodyPr/>
-                    <a:lstStyle/>
-                    <a:p>
-                      <a:pPr algn="l"/>
-                      <a:r>
-                        <a:rPr sz="1000" b="0">
-                          <a:solidFill>
-                            <a:srgbClr val="1D1B43"/>
-                          </a:solidFill>
-                          <a:latin typeface="Calibri"/>
-                        </a:rPr>
-                        <a:t>282370</a:t>
-                      </a:r>
-                    </a:p>
-                  </a:txBody>
-                  <a:tcPr>
-                    <a:solidFill>
-                      <a:srgbClr val="F2F2F2"/>
-                    </a:solidFill>
-                  </a:tcPr>
-                </a:tc>
-                <a:tc>
-                  <a:txBody>
-                    <a:bodyPr/>
-                    <a:lstStyle/>
-                    <a:p>
-                      <a:pPr algn="l"/>
-                      <a:r>
-                        <a:rPr sz="1000" b="0">
-                          <a:solidFill>
-                            <a:srgbClr val="1D1B43"/>
-                          </a:solidFill>
-                          <a:latin typeface="Calibri"/>
-                        </a:rPr>
-                        <a:t>PORSCHER BRASIL IMPO - SAO PAULO / SP</a:t>
-                      </a:r>
-                    </a:p>
-                  </a:txBody>
-                  <a:tcPr>
-                    <a:solidFill>
-                      <a:srgbClr val="F2F2F2"/>
-                    </a:solidFill>
-                  </a:tcPr>
-                </a:tc>
-                <a:tc>
-                  <a:txBody>
-                    <a:bodyPr/>
-                    <a:lstStyle/>
-                    <a:p>
-                      <a:pPr algn="l"/>
-                      <a:r>
-                        <a:rPr sz="1000" b="0">
-                          <a:solidFill>
-                            <a:srgbClr val="1D1B43"/>
-                          </a:solidFill>
-                          <a:latin typeface="Calibri"/>
-                        </a:rPr>
-                        <a:t>SAO PAULO/SP</a:t>
-                      </a:r>
-                    </a:p>
-                  </a:txBody>
-                  <a:tcPr>
-                    <a:solidFill>
-                      <a:srgbClr val="F2F2F2"/>
-                    </a:solidFill>
-                  </a:tcPr>
-                </a:tc>
-                <a:tc>
-                  <a:txBody>
-                    <a:bodyPr/>
-                    <a:lstStyle/>
-                    <a:p>
-                      <a:pPr algn="l"/>
-                      <a:r>
-                        <a:rPr sz="1000" b="0">
-                          <a:solidFill>
-                            <a:srgbClr val="1D1B43"/>
-                          </a:solidFill>
-                          <a:latin typeface="Calibri"/>
-                        </a:rPr>
-                        <a:t>08/05/2026</a:t>
-                      </a:r>
-                    </a:p>
-                  </a:txBody>
-                  <a:tcPr>
-                    <a:solidFill>
-                      <a:srgbClr val="F2F2F2"/>
-                    </a:solidFill>
-                  </a:tcPr>
-                </a:tc>
-                <a:tc>
-                  <a:txBody>
-                    <a:bodyPr/>
-                    <a:lstStyle/>
-                    <a:p>
-                      <a:pPr algn="l"/>
-                      <a:r>
-                        <a:rPr sz="1000" b="0">
-                          <a:solidFill>
-                            <a:srgbClr val="1D1B43"/>
-                          </a:solidFill>
-                          <a:latin typeface="Calibri"/>
-                        </a:rPr>
-                        <a:t>ENTREGUE FORA DO PRAZO</a:t>
-                      </a:r>
-                    </a:p>
-                  </a:txBody>
-                  <a:tcPr>
-                    <a:solidFill>
-                      <a:srgbClr val="F2F2F2"/>
-                    </a:solidFill>
-                  </a:tcPr>
-                </a:tc>
-              </a:tr>
-              <a:tr h="254000">
-                <a:tc>
-                  <a:txBody>
-                    <a:bodyPr/>
-                    <a:lstStyle/>
-                    <a:p>
-                      <a:pPr algn="l"/>
-                      <a:r>
-                        <a:rPr sz="1000" b="0">
-                          <a:solidFill>
-                            <a:srgbClr val="1D1B43"/>
-                          </a:solidFill>
-                          <a:latin typeface="Calibri"/>
-                        </a:rPr>
-                        <a:t>282372</a:t>
-                      </a:r>
-                    </a:p>
-                  </a:txBody>
-                  <a:tcPr>
-                    <a:solidFill>
-                      <a:srgbClr val="FFFFFF"/>
-                    </a:solidFill>
-                  </a:tcPr>
-                </a:tc>
-                <a:tc>
-                  <a:txBody>
-                    <a:bodyPr/>
-                    <a:lstStyle/>
-                    <a:p>
-                      <a:pPr algn="l"/>
-                      <a:r>
-                        <a:rPr sz="1000" b="0">
-                          <a:solidFill>
-                            <a:srgbClr val="1D1B43"/>
-                          </a:solidFill>
-                          <a:latin typeface="Calibri"/>
-                        </a:rPr>
-                        <a:t>MRH VEICULOS LTDA. - SAO PAULO / SP</a:t>
-                      </a:r>
-                    </a:p>
-                  </a:txBody>
-                  <a:tcPr>
-                    <a:solidFill>
-                      <a:srgbClr val="FFFFFF"/>
-                    </a:solidFill>
-                  </a:tcPr>
-                </a:tc>
-                <a:tc>
-                  <a:txBody>
-                    <a:bodyPr/>
-                    <a:lstStyle/>
-                    <a:p>
-                      <a:pPr algn="l"/>
-                      <a:r>
-                        <a:rPr sz="1000" b="0">
-                          <a:solidFill>
-                            <a:srgbClr val="1D1B43"/>
-                          </a:solidFill>
-                          <a:latin typeface="Calibri"/>
-                        </a:rPr>
-                        <a:t>SAO PAULO/SP</a:t>
-                      </a:r>
-                    </a:p>
-                  </a:txBody>
-                  <a:tcPr>
-                    <a:solidFill>
-                      <a:srgbClr val="FFFFFF"/>
-                    </a:solidFill>
-                  </a:tcPr>
-                </a:tc>
-                <a:tc>
-                  <a:txBody>
-                    <a:bodyPr/>
-                    <a:lstStyle/>
-                    <a:p>
-                      <a:pPr algn="l"/>
-                      <a:r>
-                        <a:rPr sz="1000" b="0">
-                          <a:solidFill>
-                            <a:srgbClr val="1D1B43"/>
-                          </a:solidFill>
-                          <a:latin typeface="Calibri"/>
-                        </a:rPr>
-                        <a:t>08/05/2026</a:t>
-                      </a:r>
-                    </a:p>
-                  </a:txBody>
-                  <a:tcPr>
-                    <a:solidFill>
-                      <a:srgbClr val="FFFFFF"/>
-                    </a:solidFill>
-                  </a:tcPr>
-                </a:tc>
-                <a:tc>
-                  <a:txBody>
-                    <a:bodyPr/>
-                    <a:lstStyle/>
-                    <a:p>
-                      <a:pPr algn="l"/>
-                      <a:r>
-                        <a:rPr sz="1000" b="0">
-                          <a:solidFill>
-                            <a:srgbClr val="1D1B43"/>
-                          </a:solidFill>
-                          <a:latin typeface="Calibri"/>
-                        </a:rPr>
-                        <a:t>ENTREGUE FORA DO PRAZO</a:t>
-                      </a:r>
-                    </a:p>
-                  </a:txBody>
-                  <a:tcPr>
-                    <a:solidFill>
-                      <a:srgbClr val="FFFFFF"/>
-                    </a:solidFill>
-                  </a:tcPr>
-                </a:tc>
-              </a:tr>
-              <a:tr h="254000">
-                <a:tc>
-                  <a:txBody>
-                    <a:bodyPr/>
-                    <a:lstStyle/>
-                    <a:p>
-                      <a:pPr algn="l"/>
-                      <a:r>
-                        <a:rPr sz="1000" b="0">
-                          <a:solidFill>
-                            <a:srgbClr val="1D1B43"/>
-                          </a:solidFill>
-                          <a:latin typeface="Calibri"/>
-                        </a:rPr>
-                        <a:t>282373</a:t>
-                      </a:r>
-                    </a:p>
-                  </a:txBody>
-                  <a:tcPr>
-                    <a:solidFill>
-                      <a:srgbClr val="F2F2F2"/>
-                    </a:solidFill>
-                  </a:tcPr>
-                </a:tc>
-                <a:tc>
-                  <a:txBody>
-                    <a:bodyPr/>
-                    <a:lstStyle/>
-                    <a:p>
-                      <a:pPr algn="l"/>
-                      <a:r>
-                        <a:rPr sz="1000" b="0">
-                          <a:solidFill>
-                            <a:srgbClr val="1D1B43"/>
-                          </a:solidFill>
-                          <a:latin typeface="Calibri"/>
-                        </a:rPr>
-                        <a:t>CENTRO TECNICO DE VE - SAO PAULO / SP</a:t>
-                      </a:r>
-                    </a:p>
-                  </a:txBody>
-                  <a:tcPr>
-                    <a:solidFill>
-                      <a:srgbClr val="F2F2F2"/>
-                    </a:solidFill>
-                  </a:tcPr>
-                </a:tc>
-                <a:tc>
-                  <a:txBody>
-                    <a:bodyPr/>
-                    <a:lstStyle/>
-                    <a:p>
-                      <a:pPr algn="l"/>
-                      <a:r>
-                        <a:rPr sz="1000" b="0">
-                          <a:solidFill>
-                            <a:srgbClr val="1D1B43"/>
-                          </a:solidFill>
-                          <a:latin typeface="Calibri"/>
-                        </a:rPr>
-                        <a:t>SAO PAULO/SP</a:t>
-                      </a:r>
-                    </a:p>
-                  </a:txBody>
-                  <a:tcPr>
-                    <a:solidFill>
-                      <a:srgbClr val="F2F2F2"/>
-                    </a:solidFill>
-                  </a:tcPr>
-                </a:tc>
-                <a:tc>
-                  <a:txBody>
-                    <a:bodyPr/>
-                    <a:lstStyle/>
-                    <a:p>
-                      <a:pPr algn="l"/>
-                      <a:r>
-                        <a:rPr sz="1000" b="0">
-                          <a:solidFill>
-                            <a:srgbClr val="1D1B43"/>
-                          </a:solidFill>
-                          <a:latin typeface="Calibri"/>
-                        </a:rPr>
-                        <a:t>08/05/2026</a:t>
-                      </a:r>
-                    </a:p>
-                  </a:txBody>
-                  <a:tcPr>
-                    <a:solidFill>
-                      <a:srgbClr val="F2F2F2"/>
-                    </a:solidFill>
-                  </a:tcPr>
-                </a:tc>
-                <a:tc>
-                  <a:txBody>
-                    <a:bodyPr/>
-                    <a:lstStyle/>
-                    <a:p>
-                      <a:pPr algn="l"/>
-                      <a:r>
-                        <a:rPr sz="1000" b="0">
-                          <a:solidFill>
-                            <a:srgbClr val="1D1B43"/>
-                          </a:solidFill>
-                          <a:latin typeface="Calibri"/>
-                        </a:rPr>
-                        <a:t>ENTREGUE FORA DO PRAZO</a:t>
-                      </a:r>
-                    </a:p>
-                  </a:txBody>
-                  <a:tcPr>
-                    <a:solidFill>
-                      <a:srgbClr val="F2F2F2"/>
-                    </a:solidFill>
-                  </a:tcPr>
-                </a:tc>
-              </a:tr>
-              <a:tr h="254000">
-                <a:tc>
-                  <a:txBody>
-                    <a:bodyPr/>
-                    <a:lstStyle/>
-                    <a:p>
-                      <a:pPr algn="l"/>
-                      <a:r>
-                        <a:rPr sz="1000" b="0">
-                          <a:solidFill>
-                            <a:srgbClr val="1D1B43"/>
-                          </a:solidFill>
-                          <a:latin typeface="Calibri"/>
-                        </a:rPr>
-                        <a:t>282374</a:t>
-                      </a:r>
-                    </a:p>
-                  </a:txBody>
-                  <a:tcPr>
-                    <a:solidFill>
-                      <a:srgbClr val="FFFFFF"/>
-                    </a:solidFill>
-                  </a:tcPr>
-                </a:tc>
-                <a:tc>
-                  <a:txBody>
-                    <a:bodyPr/>
-                    <a:lstStyle/>
-                    <a:p>
-                      <a:pPr algn="l"/>
-                      <a:r>
-                        <a:rPr sz="1000" b="0">
-                          <a:solidFill>
-                            <a:srgbClr val="1D1B43"/>
-                          </a:solidFill>
-                          <a:latin typeface="Calibri"/>
-                        </a:rPr>
-                        <a:t>DUO SP COMERCIO DE V - SAO PAULO / SP</a:t>
-                      </a:r>
-                    </a:p>
-                  </a:txBody>
-                  <a:tcPr>
-                    <a:solidFill>
-                      <a:srgbClr val="FFFFFF"/>
-                    </a:solidFill>
-                  </a:tcPr>
-                </a:tc>
-                <a:tc>
-                  <a:txBody>
-                    <a:bodyPr/>
-                    <a:lstStyle/>
-                    <a:p>
-                      <a:pPr algn="l"/>
-                      <a:r>
-                        <a:rPr sz="1000" b="0">
-                          <a:solidFill>
-                            <a:srgbClr val="1D1B43"/>
-                          </a:solidFill>
-                          <a:latin typeface="Calibri"/>
-                        </a:rPr>
-                        <a:t>SAO PAULO/SP</a:t>
-                      </a:r>
-                    </a:p>
-                  </a:txBody>
-                  <a:tcPr>
-                    <a:solidFill>
-                      <a:srgbClr val="FFFFFF"/>
-                    </a:solidFill>
-                  </a:tcPr>
-                </a:tc>
-                <a:tc>
-                  <a:txBody>
-                    <a:bodyPr/>
-                    <a:lstStyle/>
-                    <a:p>
-                      <a:pPr algn="l"/>
-                      <a:r>
-                        <a:rPr sz="1000" b="0">
-                          <a:solidFill>
-                            <a:srgbClr val="1D1B43"/>
-                          </a:solidFill>
-                          <a:latin typeface="Calibri"/>
-                        </a:rPr>
-                        <a:t>08/05/2026</a:t>
-                      </a:r>
-                    </a:p>
-                  </a:txBody>
-                  <a:tcPr>
-                    <a:solidFill>
-                      <a:srgbClr val="FFFFFF"/>
-                    </a:solidFill>
-                  </a:tcPr>
-                </a:tc>
-                <a:tc>
-                  <a:txBody>
-                    <a:bodyPr/>
-                    <a:lstStyle/>
-                    <a:p>
-                      <a:pPr algn="l"/>
-                      <a:r>
-                        <a:rPr sz="1000" b="0">
-                          <a:solidFill>
-                            <a:srgbClr val="1D1B43"/>
-                          </a:solidFill>
-                          <a:latin typeface="Calibri"/>
-                        </a:rPr>
-                        <a:t>ENTREGUE FORA DO PRAZO</a:t>
-                      </a:r>
-                    </a:p>
-                  </a:txBody>
-                  <a:tcPr>
-                    <a:solidFill>
-                      <a:srgbClr val="FFFFFF"/>
-                    </a:solidFill>
-                  </a:tcPr>
-                </a:tc>
-              </a:tr>
-              <a:tr h="254000">
-                <a:tc>
-                  <a:txBody>
-                    <a:bodyPr/>
-                    <a:lstStyle/>
-                    <a:p>
-                      <a:pPr algn="l"/>
-                      <a:r>
-                        <a:rPr sz="1000" b="0">
-                          <a:solidFill>
-                            <a:srgbClr val="1D1B43"/>
-                          </a:solidFill>
-                          <a:latin typeface="Calibri"/>
-                        </a:rPr>
-                        <a:t>282882</a:t>
-                      </a:r>
-                    </a:p>
-                  </a:txBody>
-                  <a:tcPr>
-                    <a:solidFill>
-                      <a:srgbClr val="F2F2F2"/>
-                    </a:solidFill>
-                  </a:tcPr>
-                </a:tc>
-                <a:tc>
-                  <a:txBody>
-                    <a:bodyPr/>
-                    <a:lstStyle/>
-                    <a:p>
-                      <a:pPr algn="l"/>
-                      <a:r>
-                        <a:rPr sz="1000" b="0">
-                          <a:solidFill>
-                            <a:srgbClr val="1D1B43"/>
-                          </a:solidFill>
-                          <a:latin typeface="Calibri"/>
-                        </a:rPr>
-                        <a:t>BMQ AUTOMOVEIS LTDA - BELO HORIZONTE / MG</a:t>
-                      </a:r>
-                    </a:p>
-                  </a:txBody>
-                  <a:tcPr>
-                    <a:solidFill>
-                      <a:srgbClr val="F2F2F2"/>
-                    </a:solidFill>
-                  </a:tcPr>
-                </a:tc>
-                <a:tc>
-                  <a:txBody>
-                    <a:bodyPr/>
-                    <a:lstStyle/>
-                    <a:p>
-                      <a:pPr algn="l"/>
-                      <a:r>
-                        <a:rPr sz="1000" b="0">
-                          <a:solidFill>
-                            <a:srgbClr val="1D1B43"/>
-                          </a:solidFill>
-                          <a:latin typeface="Calibri"/>
-                        </a:rPr>
-                        <a:t>BELO HORIZONTE/MG</a:t>
-                      </a:r>
-                    </a:p>
-                  </a:txBody>
-                  <a:tcPr>
-                    <a:solidFill>
-                      <a:srgbClr val="F2F2F2"/>
-                    </a:solidFill>
-                  </a:tcPr>
-                </a:tc>
-                <a:tc>
-                  <a:txBody>
-                    <a:bodyPr/>
-                    <a:lstStyle/>
-                    <a:p>
-                      <a:pPr algn="l"/>
-                      <a:r>
-                        <a:rPr sz="1000" b="0">
-                          <a:solidFill>
-                            <a:srgbClr val="1D1B43"/>
-                          </a:solidFill>
-                          <a:latin typeface="Calibri"/>
-                        </a:rPr>
-                        <a:t>18/05/2026</a:t>
-                      </a:r>
-                    </a:p>
-                  </a:txBody>
-                  <a:tcPr>
-                    <a:solidFill>
-                      <a:srgbClr val="F2F2F2"/>
-                    </a:solidFill>
-                  </a:tcPr>
-                </a:tc>
-                <a:tc>
-                  <a:txBody>
-                    <a:bodyPr/>
-                    <a:lstStyle/>
-                    <a:p>
-                      <a:pPr algn="l"/>
-                      <a:r>
-                        <a:rPr sz="1000" b="0">
-                          <a:solidFill>
-                            <a:srgbClr val="1D1B43"/>
-                          </a:solidFill>
-                          <a:latin typeface="Calibri"/>
-                        </a:rPr>
-                        <a:t>ENTREGUE FORA DO PRAZO</a:t>
-                      </a:r>
-                    </a:p>
-                  </a:txBody>
-                  <a:tcPr>
-                    <a:solidFill>
-                      <a:srgbClr val="F2F2F2"/>
-                    </a:solidFill>
-                  </a:tcPr>
-                </a:tc>
-              </a:tr>
-              <a:tr h="254000">
-                <a:tc>
-                  <a:txBody>
-                    <a:bodyPr/>
-                    <a:lstStyle/>
-                    <a:p>
-                      <a:pPr algn="l"/>
-                      <a:r>
-                        <a:rPr sz="1000" b="0">
-                          <a:solidFill>
-                            <a:srgbClr val="1D1B43"/>
-                          </a:solidFill>
-                          <a:latin typeface="Calibri"/>
-                        </a:rPr>
-                        <a:t>282915</a:t>
-                      </a:r>
-                    </a:p>
-                  </a:txBody>
-                  <a:tcPr>
-                    <a:solidFill>
-                      <a:srgbClr val="FFFFFF"/>
-                    </a:solidFill>
-                  </a:tcPr>
-                </a:tc>
-                <a:tc>
-                  <a:txBody>
-                    <a:bodyPr/>
-                    <a:lstStyle/>
-                    <a:p>
-                      <a:pPr algn="l"/>
-                      <a:r>
-                        <a:rPr sz="1000" b="0">
-                          <a:solidFill>
-                            <a:srgbClr val="1D1B43"/>
-                          </a:solidFill>
-                          <a:latin typeface="Calibri"/>
-                        </a:rPr>
-                        <a:t>BMQ AUTOMOVEIS LTDA - BELO HORIZONTE / MG</a:t>
-                      </a:r>
-                    </a:p>
-                  </a:txBody>
-                  <a:tcPr>
-                    <a:solidFill>
-                      <a:srgbClr val="FFFFFF"/>
-                    </a:solidFill>
-                  </a:tcPr>
-                </a:tc>
-                <a:tc>
-                  <a:txBody>
-                    <a:bodyPr/>
-                    <a:lstStyle/>
-                    <a:p>
-                      <a:pPr algn="l"/>
-                      <a:r>
-                        <a:rPr sz="1000" b="0">
-                          <a:solidFill>
-                            <a:srgbClr val="1D1B43"/>
-                          </a:solidFill>
-                          <a:latin typeface="Calibri"/>
-                        </a:rPr>
-                        <a:t>BELO HORIZONTE/MG</a:t>
-                      </a:r>
-                    </a:p>
-                  </a:txBody>
-                  <a:tcPr>
-                    <a:solidFill>
-                      <a:srgbClr val="FFFFFF"/>
-                    </a:solidFill>
-                  </a:tcPr>
-                </a:tc>
-                <a:tc>
-                  <a:txBody>
-                    <a:bodyPr/>
-                    <a:lstStyle/>
-                    <a:p>
-                      <a:pPr algn="l"/>
-                      <a:r>
-                        <a:rPr sz="1000" b="0">
-                          <a:solidFill>
-                            <a:srgbClr val="1D1B43"/>
-                          </a:solidFill>
-                          <a:latin typeface="Calibri"/>
-                        </a:rPr>
-                        <a:t>18/05/2026</a:t>
-                      </a:r>
-                    </a:p>
-                  </a:txBody>
-                  <a:tcPr>
-                    <a:solidFill>
-                      <a:srgbClr val="FFFFFF"/>
-                    </a:solidFill>
-                  </a:tcPr>
-                </a:tc>
-                <a:tc>
-                  <a:txBody>
-                    <a:bodyPr/>
-                    <a:lstStyle/>
-                    <a:p>
-                      <a:pPr algn="l"/>
-                      <a:r>
-                        <a:rPr sz="1000" b="0">
-                          <a:solidFill>
-                            <a:srgbClr val="1D1B43"/>
-                          </a:solidFill>
-                          <a:latin typeface="Calibri"/>
-                        </a:rPr>
-                        <a:t>ENTREGUE FORA DO PRAZO</a:t>
-                      </a:r>
-                    </a:p>
-                  </a:txBody>
-                  <a:tcPr>
-                    <a:solidFill>
-                      <a:srgbClr val="FFFFFF"/>
-                    </a:solidFill>
-                  </a:tcPr>
-                </a:tc>
-              </a:tr>
-              <a:tr h="254000">
-                <a:tc>
-                  <a:txBody>
-                    <a:bodyPr/>
-                    <a:lstStyle/>
-                    <a:p>
-                      <a:pPr algn="l"/>
-                      <a:r>
-                        <a:rPr sz="1000" b="0">
-                          <a:solidFill>
-                            <a:srgbClr val="1D1B43"/>
-                          </a:solidFill>
-                          <a:latin typeface="Calibri"/>
-                        </a:rPr>
-                        <a:t>283081</a:t>
-                      </a:r>
-                    </a:p>
-                  </a:txBody>
-                  <a:tcPr>
-                    <a:solidFill>
-                      <a:srgbClr val="F2F2F2"/>
-                    </a:solidFill>
-                  </a:tcPr>
-                </a:tc>
-                <a:tc>
-                  <a:txBody>
-                    <a:bodyPr/>
-                    <a:lstStyle/>
-                    <a:p>
-                      <a:pPr algn="l"/>
-                      <a:r>
-                        <a:rPr sz="1000" b="0">
-                          <a:solidFill>
-                            <a:srgbClr val="1D1B43"/>
-                          </a:solidFill>
-                          <a:latin typeface="Calibri"/>
-                        </a:rPr>
-                        <a:t>MRH VEICULOS LTDA. - FLORIANOPOLIS / SC</a:t>
-                      </a:r>
-                    </a:p>
-                  </a:txBody>
-                  <a:tcPr>
-                    <a:solidFill>
-                      <a:srgbClr val="F2F2F2"/>
-                    </a:solidFill>
-                  </a:tcPr>
-                </a:tc>
-                <a:tc>
-                  <a:txBody>
-                    <a:bodyPr/>
-                    <a:lstStyle/>
-                    <a:p>
-                      <a:pPr algn="l"/>
-                      <a:r>
-                        <a:rPr sz="1000" b="0">
-                          <a:solidFill>
-                            <a:srgbClr val="1D1B43"/>
-                          </a:solidFill>
-                          <a:latin typeface="Calibri"/>
-                        </a:rPr>
-                        <a:t>FLORIANOPOLIS/SC</a:t>
-                      </a:r>
-                    </a:p>
-                  </a:txBody>
-                  <a:tcPr>
-                    <a:solidFill>
-                      <a:srgbClr val="F2F2F2"/>
-                    </a:solidFill>
-                  </a:tcPr>
-                </a:tc>
-                <a:tc>
-                  <a:txBody>
-                    <a:bodyPr/>
-                    <a:lstStyle/>
-                    <a:p>
-                      <a:pPr algn="l"/>
-                      <a:r>
-                        <a:rPr sz="1000" b="0">
-                          <a:solidFill>
-                            <a:srgbClr val="1D1B43"/>
-                          </a:solidFill>
-                          <a:latin typeface="Calibri"/>
-                        </a:rPr>
-                        <a:t>15/05/2026</a:t>
-                      </a:r>
-                    </a:p>
-                  </a:txBody>
-                  <a:tcPr>
-                    <a:solidFill>
-                      <a:srgbClr val="F2F2F2"/>
-                    </a:solidFill>
-                  </a:tcPr>
-                </a:tc>
-                <a:tc>
-                  <a:txBody>
-                    <a:bodyPr/>
-                    <a:lstStyle/>
-                    <a:p>
-                      <a:pPr algn="l"/>
-                      <a:r>
-                        <a:rPr sz="1000" b="0">
-                          <a:solidFill>
-                            <a:srgbClr val="1D1B43"/>
-                          </a:solidFill>
-                          <a:latin typeface="Calibri"/>
-                        </a:rPr>
-                        <a:t>ENTREGUE FORA DO PRAZO</a:t>
-                      </a:r>
-                    </a:p>
-                  </a:txBody>
-                  <a:tcPr>
-                    <a:solidFill>
-                      <a:srgbClr val="F2F2F2"/>
-                    </a:solidFill>
-                  </a:tcPr>
-                </a:tc>
-              </a:tr>
-              <a:tr h="254000">
-                <a:tc>
-                  <a:txBody>
-                    <a:bodyPr/>
-                    <a:lstStyle/>
-                    <a:p>
-                      <a:pPr algn="l"/>
-                      <a:r>
-                        <a:rPr sz="1000" b="0">
-                          <a:solidFill>
-                            <a:srgbClr val="1D1B43"/>
-                          </a:solidFill>
-                          <a:latin typeface="Calibri"/>
-                        </a:rPr>
-                        <a:t>283317</a:t>
-                      </a:r>
-                    </a:p>
-                  </a:txBody>
-                  <a:tcPr>
-                    <a:solidFill>
-                      <a:srgbClr val="FFFFFF"/>
-                    </a:solidFill>
-                  </a:tcPr>
-                </a:tc>
-                <a:tc>
-                  <a:txBody>
-                    <a:bodyPr/>
-                    <a:lstStyle/>
-                    <a:p>
-                      <a:pPr algn="l"/>
-                      <a:r>
-                        <a:rPr sz="1000" b="0">
-                          <a:solidFill>
-                            <a:srgbClr val="1D1B43"/>
-                          </a:solidFill>
-                          <a:latin typeface="Calibri"/>
-                        </a:rPr>
-                        <a:t>LIA E ANNETTE INDUST - RIO DE JANEIRO / RJ</a:t>
-                      </a:r>
-                    </a:p>
-                  </a:txBody>
-                  <a:tcPr>
-                    <a:solidFill>
-                      <a:srgbClr val="FFFFFF"/>
-                    </a:solidFill>
-                  </a:tcPr>
-                </a:tc>
-                <a:tc>
-                  <a:txBody>
-                    <a:bodyPr/>
-                    <a:lstStyle/>
-                    <a:p>
-                      <a:pPr algn="l"/>
-                      <a:r>
-                        <a:rPr sz="1000" b="0">
-                          <a:solidFill>
-                            <a:srgbClr val="1D1B43"/>
-                          </a:solidFill>
-                          <a:latin typeface="Calibri"/>
-                        </a:rPr>
-                        <a:t>RIO DE JANEIRO/RJ</a:t>
-                      </a:r>
-                    </a:p>
-                  </a:txBody>
-                  <a:tcPr>
-                    <a:solidFill>
-                      <a:srgbClr val="FFFFFF"/>
-                    </a:solidFill>
-                  </a:tcPr>
-                </a:tc>
-                <a:tc>
-                  <a:txBody>
-                    <a:bodyPr/>
-                    <a:lstStyle/>
-                    <a:p>
-                      <a:pPr algn="l"/>
-                      <a:r>
-                        <a:rPr sz="1000" b="0">
-                          <a:solidFill>
-                            <a:srgbClr val="1D1B43"/>
-                          </a:solidFill>
-                          <a:latin typeface="Calibri"/>
-                        </a:rPr>
-                        <a:t>19/05/2026</a:t>
-                      </a:r>
-                    </a:p>
-                  </a:txBody>
-                  <a:tcPr>
-                    <a:solidFill>
-                      <a:srgbClr val="FFFFFF"/>
-                    </a:solidFill>
-                  </a:tcPr>
-                </a:tc>
-                <a:tc>
-                  <a:txBody>
-                    <a:bodyPr/>
-                    <a:lstStyle/>
-                    <a:p>
-                      <a:pPr algn="l"/>
-                      <a:r>
-                        <a:rPr sz="1000" b="0">
-                          <a:solidFill>
-                            <a:srgbClr val="1D1B43"/>
-                          </a:solidFill>
-                          <a:latin typeface="Calibri"/>
-                        </a:rPr>
-                        <a:t>FORA DO PRAZO</a:t>
                       </a:r>
                     </a:p>
                   </a:txBody>
@@ -7597,7 +5595,7 @@
         </p:nvGraphicFramePr>
         <p:xfrm>
           <a:off x="731520" y="1920240"/>
-          <a:ext cx="10698480" cy="4114800"/>
+          <a:ext cx="10698480" cy="4389120"/>
         </p:xfrm>
         <a:graphic>
           <a:graphicData uri="http://schemas.openxmlformats.org/drawingml/2006/table">
@@ -7613,7 +5611,7 @@
                 <a:gridCol w="1554480"/>
                 <a:gridCol w="3108960"/>
               </a:tblGrid>
-              <a:tr h="457200">
+              <a:tr h="438912">
                 <a:tc>
                   <a:txBody>
                     <a:bodyPr/>
@@ -7753,7 +5751,7 @@
                   </a:tcPr>
                 </a:tc>
               </a:tr>
-              <a:tr h="457200">
+              <a:tr h="438912">
                 <a:tc>
                   <a:txBody>
                     <a:bodyPr/>
@@ -7790,7 +5788,7 @@
                           </a:solidFill>
                           <a:latin typeface="Calibri"/>
                         </a:rPr>
-                        <a:t>92</a:t>
+                        <a:t>150</a:t>
                       </a:r>
                     </a:p>
                   </a:txBody>
@@ -7813,7 +5811,7 @@
                           </a:solidFill>
                           <a:latin typeface="Calibri"/>
                         </a:rPr>
-                        <a:t>84</a:t>
+                        <a:t>149</a:t>
                       </a:r>
                     </a:p>
                   </a:txBody>
@@ -7836,7 +5834,7 @@
                           </a:solidFill>
                           <a:latin typeface="Calibri"/>
                         </a:rPr>
-                        <a:t>8</a:t>
+                        <a:t>1</a:t>
                       </a:r>
                     </a:p>
                   </a:txBody>
@@ -7859,7 +5857,7 @@
                           </a:solidFill>
                           <a:latin typeface="Calibri"/>
                         </a:rPr>
-                        <a:t>91.3%</a:t>
+                        <a:t>99.3%</a:t>
                       </a:r>
                     </a:p>
                   </a:txBody>
@@ -7882,7 +5880,7 @@
                           </a:solidFill>
                           <a:latin typeface="Calibri"/>
                         </a:rPr>
-                        <a:t>Regular</a:t>
+                        <a:t>Excelente</a:t>
                       </a:r>
                     </a:p>
                   </a:txBody>
@@ -7893,7 +5891,7 @@
                   </a:tcPr>
                 </a:tc>
               </a:tr>
-              <a:tr h="457200">
+              <a:tr h="438912">
                 <a:tc>
                   <a:txBody>
                     <a:bodyPr/>
@@ -7930,7 +5928,7 @@
                           </a:solidFill>
                           <a:latin typeface="Calibri"/>
                         </a:rPr>
-                        <a:t>31</a:t>
+                        <a:t>44</a:t>
                       </a:r>
                     </a:p>
                   </a:txBody>
@@ -7953,7 +5951,7 @@
                           </a:solidFill>
                           <a:latin typeface="Calibri"/>
                         </a:rPr>
-                        <a:t>29</a:t>
+                        <a:t>44</a:t>
                       </a:r>
                     </a:p>
                   </a:txBody>
@@ -7976,83 +5974,946 @@
                           </a:solidFill>
                           <a:latin typeface="Calibri"/>
                         </a:rPr>
+                        <a:t>0</a:t>
+                      </a:r>
+                    </a:p>
+                  </a:txBody>
+                  <a:tcPr>
+                    <a:solidFill>
+                      <a:srgbClr val="F2F2F2"/>
+                    </a:solidFill>
+                  </a:tcPr>
+                </a:tc>
+                <a:tc>
+                  <a:txBody>
+                    <a:bodyPr/>
+                    <a:lstStyle/>
+                    <a:p>
+                      <a:pPr algn="l"/>
+                      <a:r>
+                        <a:rPr sz="1000" b="0">
+                          <a:solidFill>
+                            <a:srgbClr val="1D1B43"/>
+                          </a:solidFill>
+                          <a:latin typeface="Calibri"/>
+                        </a:rPr>
+                        <a:t>100.0%</a:t>
+                      </a:r>
+                    </a:p>
+                  </a:txBody>
+                  <a:tcPr>
+                    <a:solidFill>
+                      <a:srgbClr val="F2F2F2"/>
+                    </a:solidFill>
+                  </a:tcPr>
+                </a:tc>
+                <a:tc>
+                  <a:txBody>
+                    <a:bodyPr/>
+                    <a:lstStyle/>
+                    <a:p>
+                      <a:pPr algn="l"/>
+                      <a:r>
+                        <a:rPr sz="1000" b="0">
+                          <a:solidFill>
+                            <a:srgbClr val="1D1B43"/>
+                          </a:solidFill>
+                          <a:latin typeface="Calibri"/>
+                        </a:rPr>
+                        <a:t>Excelente</a:t>
+                      </a:r>
+                    </a:p>
+                  </a:txBody>
+                  <a:tcPr>
+                    <a:solidFill>
+                      <a:srgbClr val="F2F2F2"/>
+                    </a:solidFill>
+                  </a:tcPr>
+                </a:tc>
+              </a:tr>
+              <a:tr h="438912">
+                <a:tc>
+                  <a:txBody>
+                    <a:bodyPr/>
+                    <a:lstStyle/>
+                    <a:p>
+                      <a:pPr algn="l"/>
+                      <a:r>
+                        <a:rPr sz="1000" b="0">
+                          <a:solidFill>
+                            <a:srgbClr val="1D1B43"/>
+                          </a:solidFill>
+                          <a:latin typeface="Calibri"/>
+                        </a:rPr>
+                        <a:t>RJ</a:t>
+                      </a:r>
+                    </a:p>
+                  </a:txBody>
+                  <a:tcPr>
+                    <a:solidFill>
+                      <a:srgbClr val="FFFFFF"/>
+                    </a:solidFill>
+                  </a:tcPr>
+                </a:tc>
+                <a:tc>
+                  <a:txBody>
+                    <a:bodyPr/>
+                    <a:lstStyle/>
+                    <a:p>
+                      <a:pPr algn="l"/>
+                      <a:r>
+                        <a:rPr sz="1000" b="0">
+                          <a:solidFill>
+                            <a:srgbClr val="1D1B43"/>
+                          </a:solidFill>
+                          <a:latin typeface="Calibri"/>
+                        </a:rPr>
+                        <a:t>42</a:t>
+                      </a:r>
+                    </a:p>
+                  </a:txBody>
+                  <a:tcPr>
+                    <a:solidFill>
+                      <a:srgbClr val="FFFFFF"/>
+                    </a:solidFill>
+                  </a:tcPr>
+                </a:tc>
+                <a:tc>
+                  <a:txBody>
+                    <a:bodyPr/>
+                    <a:lstStyle/>
+                    <a:p>
+                      <a:pPr algn="l"/>
+                      <a:r>
+                        <a:rPr sz="1000" b="0">
+                          <a:solidFill>
+                            <a:srgbClr val="1D1B43"/>
+                          </a:solidFill>
+                          <a:latin typeface="Calibri"/>
+                        </a:rPr>
+                        <a:t>42</a:t>
+                      </a:r>
+                    </a:p>
+                  </a:txBody>
+                  <a:tcPr>
+                    <a:solidFill>
+                      <a:srgbClr val="FFFFFF"/>
+                    </a:solidFill>
+                  </a:tcPr>
+                </a:tc>
+                <a:tc>
+                  <a:txBody>
+                    <a:bodyPr/>
+                    <a:lstStyle/>
+                    <a:p>
+                      <a:pPr algn="l"/>
+                      <a:r>
+                        <a:rPr sz="1000" b="0">
+                          <a:solidFill>
+                            <a:srgbClr val="1D1B43"/>
+                          </a:solidFill>
+                          <a:latin typeface="Calibri"/>
+                        </a:rPr>
+                        <a:t>0</a:t>
+                      </a:r>
+                    </a:p>
+                  </a:txBody>
+                  <a:tcPr>
+                    <a:solidFill>
+                      <a:srgbClr val="FFFFFF"/>
+                    </a:solidFill>
+                  </a:tcPr>
+                </a:tc>
+                <a:tc>
+                  <a:txBody>
+                    <a:bodyPr/>
+                    <a:lstStyle/>
+                    <a:p>
+                      <a:pPr algn="l"/>
+                      <a:r>
+                        <a:rPr sz="1000" b="0">
+                          <a:solidFill>
+                            <a:srgbClr val="1D1B43"/>
+                          </a:solidFill>
+                          <a:latin typeface="Calibri"/>
+                        </a:rPr>
+                        <a:t>100.0%</a:t>
+                      </a:r>
+                    </a:p>
+                  </a:txBody>
+                  <a:tcPr>
+                    <a:solidFill>
+                      <a:srgbClr val="FFFFFF"/>
+                    </a:solidFill>
+                  </a:tcPr>
+                </a:tc>
+                <a:tc>
+                  <a:txBody>
+                    <a:bodyPr/>
+                    <a:lstStyle/>
+                    <a:p>
+                      <a:pPr algn="l"/>
+                      <a:r>
+                        <a:rPr sz="1000" b="0">
+                          <a:solidFill>
+                            <a:srgbClr val="1D1B43"/>
+                          </a:solidFill>
+                          <a:latin typeface="Calibri"/>
+                        </a:rPr>
+                        <a:t>Excelente</a:t>
+                      </a:r>
+                    </a:p>
+                  </a:txBody>
+                  <a:tcPr>
+                    <a:solidFill>
+                      <a:srgbClr val="FFFFFF"/>
+                    </a:solidFill>
+                  </a:tcPr>
+                </a:tc>
+              </a:tr>
+              <a:tr h="438912">
+                <a:tc>
+                  <a:txBody>
+                    <a:bodyPr/>
+                    <a:lstStyle/>
+                    <a:p>
+                      <a:pPr algn="l"/>
+                      <a:r>
+                        <a:rPr sz="1000" b="0">
+                          <a:solidFill>
+                            <a:srgbClr val="1D1B43"/>
+                          </a:solidFill>
+                          <a:latin typeface="Calibri"/>
+                        </a:rPr>
+                        <a:t>PR</a:t>
+                      </a:r>
+                    </a:p>
+                  </a:txBody>
+                  <a:tcPr>
+                    <a:solidFill>
+                      <a:srgbClr val="F2F2F2"/>
+                    </a:solidFill>
+                  </a:tcPr>
+                </a:tc>
+                <a:tc>
+                  <a:txBody>
+                    <a:bodyPr/>
+                    <a:lstStyle/>
+                    <a:p>
+                      <a:pPr algn="l"/>
+                      <a:r>
+                        <a:rPr sz="1000" b="0">
+                          <a:solidFill>
+                            <a:srgbClr val="1D1B43"/>
+                          </a:solidFill>
+                          <a:latin typeface="Calibri"/>
+                        </a:rPr>
+                        <a:t>38</a:t>
+                      </a:r>
+                    </a:p>
+                  </a:txBody>
+                  <a:tcPr>
+                    <a:solidFill>
+                      <a:srgbClr val="F2F2F2"/>
+                    </a:solidFill>
+                  </a:tcPr>
+                </a:tc>
+                <a:tc>
+                  <a:txBody>
+                    <a:bodyPr/>
+                    <a:lstStyle/>
+                    <a:p>
+                      <a:pPr algn="l"/>
+                      <a:r>
+                        <a:rPr sz="1000" b="0">
+                          <a:solidFill>
+                            <a:srgbClr val="1D1B43"/>
+                          </a:solidFill>
+                          <a:latin typeface="Calibri"/>
+                        </a:rPr>
+                        <a:t>38</a:t>
+                      </a:r>
+                    </a:p>
+                  </a:txBody>
+                  <a:tcPr>
+                    <a:solidFill>
+                      <a:srgbClr val="F2F2F2"/>
+                    </a:solidFill>
+                  </a:tcPr>
+                </a:tc>
+                <a:tc>
+                  <a:txBody>
+                    <a:bodyPr/>
+                    <a:lstStyle/>
+                    <a:p>
+                      <a:pPr algn="l"/>
+                      <a:r>
+                        <a:rPr sz="1000" b="0">
+                          <a:solidFill>
+                            <a:srgbClr val="1D1B43"/>
+                          </a:solidFill>
+                          <a:latin typeface="Calibri"/>
+                        </a:rPr>
+                        <a:t>0</a:t>
+                      </a:r>
+                    </a:p>
+                  </a:txBody>
+                  <a:tcPr>
+                    <a:solidFill>
+                      <a:srgbClr val="F2F2F2"/>
+                    </a:solidFill>
+                  </a:tcPr>
+                </a:tc>
+                <a:tc>
+                  <a:txBody>
+                    <a:bodyPr/>
+                    <a:lstStyle/>
+                    <a:p>
+                      <a:pPr algn="l"/>
+                      <a:r>
+                        <a:rPr sz="1000" b="0">
+                          <a:solidFill>
+                            <a:srgbClr val="1D1B43"/>
+                          </a:solidFill>
+                          <a:latin typeface="Calibri"/>
+                        </a:rPr>
+                        <a:t>100.0%</a:t>
+                      </a:r>
+                    </a:p>
+                  </a:txBody>
+                  <a:tcPr>
+                    <a:solidFill>
+                      <a:srgbClr val="F2F2F2"/>
+                    </a:solidFill>
+                  </a:tcPr>
+                </a:tc>
+                <a:tc>
+                  <a:txBody>
+                    <a:bodyPr/>
+                    <a:lstStyle/>
+                    <a:p>
+                      <a:pPr algn="l"/>
+                      <a:r>
+                        <a:rPr sz="1000" b="0">
+                          <a:solidFill>
+                            <a:srgbClr val="1D1B43"/>
+                          </a:solidFill>
+                          <a:latin typeface="Calibri"/>
+                        </a:rPr>
+                        <a:t>Excelente</a:t>
+                      </a:r>
+                    </a:p>
+                  </a:txBody>
+                  <a:tcPr>
+                    <a:solidFill>
+                      <a:srgbClr val="F2F2F2"/>
+                    </a:solidFill>
+                  </a:tcPr>
+                </a:tc>
+              </a:tr>
+              <a:tr h="438912">
+                <a:tc>
+                  <a:txBody>
+                    <a:bodyPr/>
+                    <a:lstStyle/>
+                    <a:p>
+                      <a:pPr algn="l"/>
+                      <a:r>
+                        <a:rPr sz="1000" b="0">
+                          <a:solidFill>
+                            <a:srgbClr val="1D1B43"/>
+                          </a:solidFill>
+                          <a:latin typeface="Calibri"/>
+                        </a:rPr>
+                        <a:t>MG</a:t>
+                      </a:r>
+                    </a:p>
+                  </a:txBody>
+                  <a:tcPr>
+                    <a:solidFill>
+                      <a:srgbClr val="FFFFFF"/>
+                    </a:solidFill>
+                  </a:tcPr>
+                </a:tc>
+                <a:tc>
+                  <a:txBody>
+                    <a:bodyPr/>
+                    <a:lstStyle/>
+                    <a:p>
+                      <a:pPr algn="l"/>
+                      <a:r>
+                        <a:rPr sz="1000" b="0">
+                          <a:solidFill>
+                            <a:srgbClr val="1D1B43"/>
+                          </a:solidFill>
+                          <a:latin typeface="Calibri"/>
+                        </a:rPr>
+                        <a:t>23</a:t>
+                      </a:r>
+                    </a:p>
+                  </a:txBody>
+                  <a:tcPr>
+                    <a:solidFill>
+                      <a:srgbClr val="FFFFFF"/>
+                    </a:solidFill>
+                  </a:tcPr>
+                </a:tc>
+                <a:tc>
+                  <a:txBody>
+                    <a:bodyPr/>
+                    <a:lstStyle/>
+                    <a:p>
+                      <a:pPr algn="l"/>
+                      <a:r>
+                        <a:rPr sz="1000" b="0">
+                          <a:solidFill>
+                            <a:srgbClr val="1D1B43"/>
+                          </a:solidFill>
+                          <a:latin typeface="Calibri"/>
+                        </a:rPr>
+                        <a:t>23</a:t>
+                      </a:r>
+                    </a:p>
+                  </a:txBody>
+                  <a:tcPr>
+                    <a:solidFill>
+                      <a:srgbClr val="FFFFFF"/>
+                    </a:solidFill>
+                  </a:tcPr>
+                </a:tc>
+                <a:tc>
+                  <a:txBody>
+                    <a:bodyPr/>
+                    <a:lstStyle/>
+                    <a:p>
+                      <a:pPr algn="l"/>
+                      <a:r>
+                        <a:rPr sz="1000" b="0">
+                          <a:solidFill>
+                            <a:srgbClr val="1D1B43"/>
+                          </a:solidFill>
+                          <a:latin typeface="Calibri"/>
+                        </a:rPr>
+                        <a:t>0</a:t>
+                      </a:r>
+                    </a:p>
+                  </a:txBody>
+                  <a:tcPr>
+                    <a:solidFill>
+                      <a:srgbClr val="FFFFFF"/>
+                    </a:solidFill>
+                  </a:tcPr>
+                </a:tc>
+                <a:tc>
+                  <a:txBody>
+                    <a:bodyPr/>
+                    <a:lstStyle/>
+                    <a:p>
+                      <a:pPr algn="l"/>
+                      <a:r>
+                        <a:rPr sz="1000" b="0">
+                          <a:solidFill>
+                            <a:srgbClr val="1D1B43"/>
+                          </a:solidFill>
+                          <a:latin typeface="Calibri"/>
+                        </a:rPr>
+                        <a:t>100.0%</a:t>
+                      </a:r>
+                    </a:p>
+                  </a:txBody>
+                  <a:tcPr>
+                    <a:solidFill>
+                      <a:srgbClr val="FFFFFF"/>
+                    </a:solidFill>
+                  </a:tcPr>
+                </a:tc>
+                <a:tc>
+                  <a:txBody>
+                    <a:bodyPr/>
+                    <a:lstStyle/>
+                    <a:p>
+                      <a:pPr algn="l"/>
+                      <a:r>
+                        <a:rPr sz="1000" b="0">
+                          <a:solidFill>
+                            <a:srgbClr val="1D1B43"/>
+                          </a:solidFill>
+                          <a:latin typeface="Calibri"/>
+                        </a:rPr>
+                        <a:t>Excelente</a:t>
+                      </a:r>
+                    </a:p>
+                  </a:txBody>
+                  <a:tcPr>
+                    <a:solidFill>
+                      <a:srgbClr val="FFFFFF"/>
+                    </a:solidFill>
+                  </a:tcPr>
+                </a:tc>
+              </a:tr>
+              <a:tr h="438912">
+                <a:tc>
+                  <a:txBody>
+                    <a:bodyPr/>
+                    <a:lstStyle/>
+                    <a:p>
+                      <a:pPr algn="l"/>
+                      <a:r>
+                        <a:rPr sz="1000" b="0">
+                          <a:solidFill>
+                            <a:srgbClr val="1D1B43"/>
+                          </a:solidFill>
+                          <a:latin typeface="Calibri"/>
+                        </a:rPr>
+                        <a:t>RS</a:t>
+                      </a:r>
+                    </a:p>
+                  </a:txBody>
+                  <a:tcPr>
+                    <a:solidFill>
+                      <a:srgbClr val="F2F2F2"/>
+                    </a:solidFill>
+                  </a:tcPr>
+                </a:tc>
+                <a:tc>
+                  <a:txBody>
+                    <a:bodyPr/>
+                    <a:lstStyle/>
+                    <a:p>
+                      <a:pPr algn="l"/>
+                      <a:r>
+                        <a:rPr sz="1000" b="0">
+                          <a:solidFill>
+                            <a:srgbClr val="1D1B43"/>
+                          </a:solidFill>
+                          <a:latin typeface="Calibri"/>
+                        </a:rPr>
+                        <a:t>23</a:t>
+                      </a:r>
+                    </a:p>
+                  </a:txBody>
+                  <a:tcPr>
+                    <a:solidFill>
+                      <a:srgbClr val="F2F2F2"/>
+                    </a:solidFill>
+                  </a:tcPr>
+                </a:tc>
+                <a:tc>
+                  <a:txBody>
+                    <a:bodyPr/>
+                    <a:lstStyle/>
+                    <a:p>
+                      <a:pPr algn="l"/>
+                      <a:r>
+                        <a:rPr sz="1000" b="0">
+                          <a:solidFill>
+                            <a:srgbClr val="1D1B43"/>
+                          </a:solidFill>
+                          <a:latin typeface="Calibri"/>
+                        </a:rPr>
+                        <a:t>23</a:t>
+                      </a:r>
+                    </a:p>
+                  </a:txBody>
+                  <a:tcPr>
+                    <a:solidFill>
+                      <a:srgbClr val="F2F2F2"/>
+                    </a:solidFill>
+                  </a:tcPr>
+                </a:tc>
+                <a:tc>
+                  <a:txBody>
+                    <a:bodyPr/>
+                    <a:lstStyle/>
+                    <a:p>
+                      <a:pPr algn="l"/>
+                      <a:r>
+                        <a:rPr sz="1000" b="0">
+                          <a:solidFill>
+                            <a:srgbClr val="1D1B43"/>
+                          </a:solidFill>
+                          <a:latin typeface="Calibri"/>
+                        </a:rPr>
+                        <a:t>0</a:t>
+                      </a:r>
+                    </a:p>
+                  </a:txBody>
+                  <a:tcPr>
+                    <a:solidFill>
+                      <a:srgbClr val="F2F2F2"/>
+                    </a:solidFill>
+                  </a:tcPr>
+                </a:tc>
+                <a:tc>
+                  <a:txBody>
+                    <a:bodyPr/>
+                    <a:lstStyle/>
+                    <a:p>
+                      <a:pPr algn="l"/>
+                      <a:r>
+                        <a:rPr sz="1000" b="0">
+                          <a:solidFill>
+                            <a:srgbClr val="1D1B43"/>
+                          </a:solidFill>
+                          <a:latin typeface="Calibri"/>
+                        </a:rPr>
+                        <a:t>100.0%</a:t>
+                      </a:r>
+                    </a:p>
+                  </a:txBody>
+                  <a:tcPr>
+                    <a:solidFill>
+                      <a:srgbClr val="F2F2F2"/>
+                    </a:solidFill>
+                  </a:tcPr>
+                </a:tc>
+                <a:tc>
+                  <a:txBody>
+                    <a:bodyPr/>
+                    <a:lstStyle/>
+                    <a:p>
+                      <a:pPr algn="l"/>
+                      <a:r>
+                        <a:rPr sz="1000" b="0">
+                          <a:solidFill>
+                            <a:srgbClr val="1D1B43"/>
+                          </a:solidFill>
+                          <a:latin typeface="Calibri"/>
+                        </a:rPr>
+                        <a:t>Excelente</a:t>
+                      </a:r>
+                    </a:p>
+                  </a:txBody>
+                  <a:tcPr>
+                    <a:solidFill>
+                      <a:srgbClr val="F2F2F2"/>
+                    </a:solidFill>
+                  </a:tcPr>
+                </a:tc>
+              </a:tr>
+              <a:tr h="438912">
+                <a:tc>
+                  <a:txBody>
+                    <a:bodyPr/>
+                    <a:lstStyle/>
+                    <a:p>
+                      <a:pPr algn="l"/>
+                      <a:r>
+                        <a:rPr sz="1000" b="0">
+                          <a:solidFill>
+                            <a:srgbClr val="1D1B43"/>
+                          </a:solidFill>
+                          <a:latin typeface="Calibri"/>
+                        </a:rPr>
+                        <a:t>GO</a:t>
+                      </a:r>
+                    </a:p>
+                  </a:txBody>
+                  <a:tcPr>
+                    <a:solidFill>
+                      <a:srgbClr val="FFFFFF"/>
+                    </a:solidFill>
+                  </a:tcPr>
+                </a:tc>
+                <a:tc>
+                  <a:txBody>
+                    <a:bodyPr/>
+                    <a:lstStyle/>
+                    <a:p>
+                      <a:pPr algn="l"/>
+                      <a:r>
+                        <a:rPr sz="1000" b="0">
+                          <a:solidFill>
+                            <a:srgbClr val="1D1B43"/>
+                          </a:solidFill>
+                          <a:latin typeface="Calibri"/>
+                        </a:rPr>
+                        <a:t>21</a:t>
+                      </a:r>
+                    </a:p>
+                  </a:txBody>
+                  <a:tcPr>
+                    <a:solidFill>
+                      <a:srgbClr val="FFFFFF"/>
+                    </a:solidFill>
+                  </a:tcPr>
+                </a:tc>
+                <a:tc>
+                  <a:txBody>
+                    <a:bodyPr/>
+                    <a:lstStyle/>
+                    <a:p>
+                      <a:pPr algn="l"/>
+                      <a:r>
+                        <a:rPr sz="1000" b="0">
+                          <a:solidFill>
+                            <a:srgbClr val="1D1B43"/>
+                          </a:solidFill>
+                          <a:latin typeface="Calibri"/>
+                        </a:rPr>
+                        <a:t>21</a:t>
+                      </a:r>
+                    </a:p>
+                  </a:txBody>
+                  <a:tcPr>
+                    <a:solidFill>
+                      <a:srgbClr val="FFFFFF"/>
+                    </a:solidFill>
+                  </a:tcPr>
+                </a:tc>
+                <a:tc>
+                  <a:txBody>
+                    <a:bodyPr/>
+                    <a:lstStyle/>
+                    <a:p>
+                      <a:pPr algn="l"/>
+                      <a:r>
+                        <a:rPr sz="1000" b="0">
+                          <a:solidFill>
+                            <a:srgbClr val="1D1B43"/>
+                          </a:solidFill>
+                          <a:latin typeface="Calibri"/>
+                        </a:rPr>
+                        <a:t>0</a:t>
+                      </a:r>
+                    </a:p>
+                  </a:txBody>
+                  <a:tcPr>
+                    <a:solidFill>
+                      <a:srgbClr val="FFFFFF"/>
+                    </a:solidFill>
+                  </a:tcPr>
+                </a:tc>
+                <a:tc>
+                  <a:txBody>
+                    <a:bodyPr/>
+                    <a:lstStyle/>
+                    <a:p>
+                      <a:pPr algn="l"/>
+                      <a:r>
+                        <a:rPr sz="1000" b="0">
+                          <a:solidFill>
+                            <a:srgbClr val="1D1B43"/>
+                          </a:solidFill>
+                          <a:latin typeface="Calibri"/>
+                        </a:rPr>
+                        <a:t>100.0%</a:t>
+                      </a:r>
+                    </a:p>
+                  </a:txBody>
+                  <a:tcPr>
+                    <a:solidFill>
+                      <a:srgbClr val="FFFFFF"/>
+                    </a:solidFill>
+                  </a:tcPr>
+                </a:tc>
+                <a:tc>
+                  <a:txBody>
+                    <a:bodyPr/>
+                    <a:lstStyle/>
+                    <a:p>
+                      <a:pPr algn="l"/>
+                      <a:r>
+                        <a:rPr sz="1000" b="0">
+                          <a:solidFill>
+                            <a:srgbClr val="1D1B43"/>
+                          </a:solidFill>
+                          <a:latin typeface="Calibri"/>
+                        </a:rPr>
+                        <a:t>Excelente</a:t>
+                      </a:r>
+                    </a:p>
+                  </a:txBody>
+                  <a:tcPr>
+                    <a:solidFill>
+                      <a:srgbClr val="FFFFFF"/>
+                    </a:solidFill>
+                  </a:tcPr>
+                </a:tc>
+              </a:tr>
+              <a:tr h="438912">
+                <a:tc>
+                  <a:txBody>
+                    <a:bodyPr/>
+                    <a:lstStyle/>
+                    <a:p>
+                      <a:pPr algn="l"/>
+                      <a:r>
+                        <a:rPr sz="1000" b="0">
+                          <a:solidFill>
+                            <a:srgbClr val="1D1B43"/>
+                          </a:solidFill>
+                          <a:latin typeface="Calibri"/>
+                        </a:rPr>
+                        <a:t>DF</a:t>
+                      </a:r>
+                    </a:p>
+                  </a:txBody>
+                  <a:tcPr>
+                    <a:solidFill>
+                      <a:srgbClr val="F2F2F2"/>
+                    </a:solidFill>
+                  </a:tcPr>
+                </a:tc>
+                <a:tc>
+                  <a:txBody>
+                    <a:bodyPr/>
+                    <a:lstStyle/>
+                    <a:p>
+                      <a:pPr algn="l"/>
+                      <a:r>
+                        <a:rPr sz="1000" b="0">
+                          <a:solidFill>
+                            <a:srgbClr val="1D1B43"/>
+                          </a:solidFill>
+                          <a:latin typeface="Calibri"/>
+                        </a:rPr>
+                        <a:t>18</a:t>
+                      </a:r>
+                    </a:p>
+                  </a:txBody>
+                  <a:tcPr>
+                    <a:solidFill>
+                      <a:srgbClr val="F2F2F2"/>
+                    </a:solidFill>
+                  </a:tcPr>
+                </a:tc>
+                <a:tc>
+                  <a:txBody>
+                    <a:bodyPr/>
+                    <a:lstStyle/>
+                    <a:p>
+                      <a:pPr algn="l"/>
+                      <a:r>
+                        <a:rPr sz="1000" b="0">
+                          <a:solidFill>
+                            <a:srgbClr val="1D1B43"/>
+                          </a:solidFill>
+                          <a:latin typeface="Calibri"/>
+                        </a:rPr>
+                        <a:t>18</a:t>
+                      </a:r>
+                    </a:p>
+                  </a:txBody>
+                  <a:tcPr>
+                    <a:solidFill>
+                      <a:srgbClr val="F2F2F2"/>
+                    </a:solidFill>
+                  </a:tcPr>
+                </a:tc>
+                <a:tc>
+                  <a:txBody>
+                    <a:bodyPr/>
+                    <a:lstStyle/>
+                    <a:p>
+                      <a:pPr algn="l"/>
+                      <a:r>
+                        <a:rPr sz="1000" b="0">
+                          <a:solidFill>
+                            <a:srgbClr val="1D1B43"/>
+                          </a:solidFill>
+                          <a:latin typeface="Calibri"/>
+                        </a:rPr>
+                        <a:t>0</a:t>
+                      </a:r>
+                    </a:p>
+                  </a:txBody>
+                  <a:tcPr>
+                    <a:solidFill>
+                      <a:srgbClr val="F2F2F2"/>
+                    </a:solidFill>
+                  </a:tcPr>
+                </a:tc>
+                <a:tc>
+                  <a:txBody>
+                    <a:bodyPr/>
+                    <a:lstStyle/>
+                    <a:p>
+                      <a:pPr algn="l"/>
+                      <a:r>
+                        <a:rPr sz="1000" b="0">
+                          <a:solidFill>
+                            <a:srgbClr val="1D1B43"/>
+                          </a:solidFill>
+                          <a:latin typeface="Calibri"/>
+                        </a:rPr>
+                        <a:t>100.0%</a:t>
+                      </a:r>
+                    </a:p>
+                  </a:txBody>
+                  <a:tcPr>
+                    <a:solidFill>
+                      <a:srgbClr val="F2F2F2"/>
+                    </a:solidFill>
+                  </a:tcPr>
+                </a:tc>
+                <a:tc>
+                  <a:txBody>
+                    <a:bodyPr/>
+                    <a:lstStyle/>
+                    <a:p>
+                      <a:pPr algn="l"/>
+                      <a:r>
+                        <a:rPr sz="1000" b="0">
+                          <a:solidFill>
+                            <a:srgbClr val="1D1B43"/>
+                          </a:solidFill>
+                          <a:latin typeface="Calibri"/>
+                        </a:rPr>
+                        <a:t>Excelente</a:t>
+                      </a:r>
+                    </a:p>
+                  </a:txBody>
+                  <a:tcPr>
+                    <a:solidFill>
+                      <a:srgbClr val="F2F2F2"/>
+                    </a:solidFill>
+                  </a:tcPr>
+                </a:tc>
+              </a:tr>
+              <a:tr h="438912">
+                <a:tc>
+                  <a:txBody>
+                    <a:bodyPr/>
+                    <a:lstStyle/>
+                    <a:p>
+                      <a:pPr algn="l"/>
+                      <a:r>
+                        <a:rPr sz="1000" b="0">
+                          <a:solidFill>
+                            <a:srgbClr val="1D1B43"/>
+                          </a:solidFill>
+                          <a:latin typeface="Calibri"/>
+                        </a:rPr>
+                        <a:t>ES</a:t>
+                      </a:r>
+                    </a:p>
+                  </a:txBody>
+                  <a:tcPr>
+                    <a:solidFill>
+                      <a:srgbClr val="FFFFFF"/>
+                    </a:solidFill>
+                  </a:tcPr>
+                </a:tc>
+                <a:tc>
+                  <a:txBody>
+                    <a:bodyPr/>
+                    <a:lstStyle/>
+                    <a:p>
+                      <a:pPr algn="l"/>
+                      <a:r>
+                        <a:rPr sz="1000" b="0">
+                          <a:solidFill>
+                            <a:srgbClr val="1D1B43"/>
+                          </a:solidFill>
+                          <a:latin typeface="Calibri"/>
+                        </a:rPr>
                         <a:t>2</a:t>
                       </a:r>
                     </a:p>
                   </a:txBody>
                   <a:tcPr>
                     <a:solidFill>
-                      <a:srgbClr val="F2F2F2"/>
-                    </a:solidFill>
-                  </a:tcPr>
-                </a:tc>
-                <a:tc>
-                  <a:txBody>
-                    <a:bodyPr/>
-                    <a:lstStyle/>
-                    <a:p>
-                      <a:pPr algn="l"/>
-                      <a:r>
-                        <a:rPr sz="1000" b="0">
-                          <a:solidFill>
-                            <a:srgbClr val="1D1B43"/>
-                          </a:solidFill>
-                          <a:latin typeface="Calibri"/>
-                        </a:rPr>
-                        <a:t>93.5%</a:t>
-                      </a:r>
-                    </a:p>
-                  </a:txBody>
-                  <a:tcPr>
-                    <a:solidFill>
-                      <a:srgbClr val="F2F2F2"/>
-                    </a:solidFill>
-                  </a:tcPr>
-                </a:tc>
-                <a:tc>
-                  <a:txBody>
-                    <a:bodyPr/>
-                    <a:lstStyle/>
-                    <a:p>
-                      <a:pPr algn="l"/>
-                      <a:r>
-                        <a:rPr sz="1000" b="0">
-                          <a:solidFill>
-                            <a:srgbClr val="1D1B43"/>
-                          </a:solidFill>
-                          <a:latin typeface="Calibri"/>
-                        </a:rPr>
-                        <a:t>Regular</a:t>
-                      </a:r>
-                    </a:p>
-                  </a:txBody>
-                  <a:tcPr>
-                    <a:solidFill>
-                      <a:srgbClr val="F2F2F2"/>
-                    </a:solidFill>
-                  </a:tcPr>
-                </a:tc>
-              </a:tr>
-              <a:tr h="457200">
-                <a:tc>
-                  <a:txBody>
-                    <a:bodyPr/>
-                    <a:lstStyle/>
-                    <a:p>
-                      <a:pPr algn="l"/>
-                      <a:r>
-                        <a:rPr sz="1000" b="0">
-                          <a:solidFill>
-                            <a:srgbClr val="1D1B43"/>
-                          </a:solidFill>
-                          <a:latin typeface="Calibri"/>
-                        </a:rPr>
-                        <a:t>PR</a:t>
-                      </a:r>
-                    </a:p>
-                  </a:txBody>
-                  <a:tcPr>
-                    <a:solidFill>
                       <a:srgbClr val="FFFFFF"/>
                     </a:solidFill>
                   </a:tcPr>
@@ -8070,7 +6931,7 @@
                           </a:solidFill>
                           <a:latin typeface="Calibri"/>
                         </a:rPr>
-                        <a:t>25</a:t>
+                        <a:t>2</a:t>
                       </a:r>
                     </a:p>
                   </a:txBody>
@@ -8093,7 +6954,7 @@
                           </a:solidFill>
                           <a:latin typeface="Calibri"/>
                         </a:rPr>
-                        <a:t>25</a:t>
+                        <a:t>0</a:t>
                       </a:r>
                     </a:p>
                   </a:txBody>
@@ -8116,7 +6977,7 @@
                           </a:solidFill>
                           <a:latin typeface="Calibri"/>
                         </a:rPr>
-                        <a:t>0</a:t>
+                        <a:t>100.0%</a:t>
                       </a:r>
                     </a:p>
                   </a:txBody>
@@ -8139,736 +7000,13 @@
                           </a:solidFill>
                           <a:latin typeface="Calibri"/>
                         </a:rPr>
-                        <a:t>100.0%</a:t>
+                        <a:t>Excelente</a:t>
                       </a:r>
                     </a:p>
                   </a:txBody>
                   <a:tcPr>
                     <a:solidFill>
                       <a:srgbClr val="FFFFFF"/>
-                    </a:solidFill>
-                  </a:tcPr>
-                </a:tc>
-                <a:tc>
-                  <a:txBody>
-                    <a:bodyPr/>
-                    <a:lstStyle/>
-                    <a:p>
-                      <a:pPr algn="l"/>
-                      <a:r>
-                        <a:rPr sz="1000" b="0">
-                          <a:solidFill>
-                            <a:srgbClr val="1D1B43"/>
-                          </a:solidFill>
-                          <a:latin typeface="Calibri"/>
-                        </a:rPr>
-                        <a:t>Excelente</a:t>
-                      </a:r>
-                    </a:p>
-                  </a:txBody>
-                  <a:tcPr>
-                    <a:solidFill>
-                      <a:srgbClr val="FFFFFF"/>
-                    </a:solidFill>
-                  </a:tcPr>
-                </a:tc>
-              </a:tr>
-              <a:tr h="457200">
-                <a:tc>
-                  <a:txBody>
-                    <a:bodyPr/>
-                    <a:lstStyle/>
-                    <a:p>
-                      <a:pPr algn="l"/>
-                      <a:r>
-                        <a:rPr sz="1000" b="0">
-                          <a:solidFill>
-                            <a:srgbClr val="1D1B43"/>
-                          </a:solidFill>
-                          <a:latin typeface="Calibri"/>
-                        </a:rPr>
-                        <a:t>RJ</a:t>
-                      </a:r>
-                    </a:p>
-                  </a:txBody>
-                  <a:tcPr>
-                    <a:solidFill>
-                      <a:srgbClr val="F2F2F2"/>
-                    </a:solidFill>
-                  </a:tcPr>
-                </a:tc>
-                <a:tc>
-                  <a:txBody>
-                    <a:bodyPr/>
-                    <a:lstStyle/>
-                    <a:p>
-                      <a:pPr algn="l"/>
-                      <a:r>
-                        <a:rPr sz="1000" b="0">
-                          <a:solidFill>
-                            <a:srgbClr val="1D1B43"/>
-                          </a:solidFill>
-                          <a:latin typeface="Calibri"/>
-                        </a:rPr>
-                        <a:t>21</a:t>
-                      </a:r>
-                    </a:p>
-                  </a:txBody>
-                  <a:tcPr>
-                    <a:solidFill>
-                      <a:srgbClr val="F2F2F2"/>
-                    </a:solidFill>
-                  </a:tcPr>
-                </a:tc>
-                <a:tc>
-                  <a:txBody>
-                    <a:bodyPr/>
-                    <a:lstStyle/>
-                    <a:p>
-                      <a:pPr algn="l"/>
-                      <a:r>
-                        <a:rPr sz="1000" b="0">
-                          <a:solidFill>
-                            <a:srgbClr val="1D1B43"/>
-                          </a:solidFill>
-                          <a:latin typeface="Calibri"/>
-                        </a:rPr>
-                        <a:t>18</a:t>
-                      </a:r>
-                    </a:p>
-                  </a:txBody>
-                  <a:tcPr>
-                    <a:solidFill>
-                      <a:srgbClr val="F2F2F2"/>
-                    </a:solidFill>
-                  </a:tcPr>
-                </a:tc>
-                <a:tc>
-                  <a:txBody>
-                    <a:bodyPr/>
-                    <a:lstStyle/>
-                    <a:p>
-                      <a:pPr algn="l"/>
-                      <a:r>
-                        <a:rPr sz="1000" b="0">
-                          <a:solidFill>
-                            <a:srgbClr val="1D1B43"/>
-                          </a:solidFill>
-                          <a:latin typeface="Calibri"/>
-                        </a:rPr>
-                        <a:t>3</a:t>
-                      </a:r>
-                    </a:p>
-                  </a:txBody>
-                  <a:tcPr>
-                    <a:solidFill>
-                      <a:srgbClr val="F2F2F2"/>
-                    </a:solidFill>
-                  </a:tcPr>
-                </a:tc>
-                <a:tc>
-                  <a:txBody>
-                    <a:bodyPr/>
-                    <a:lstStyle/>
-                    <a:p>
-                      <a:pPr algn="l"/>
-                      <a:r>
-                        <a:rPr sz="1000" b="0">
-                          <a:solidFill>
-                            <a:srgbClr val="1D1B43"/>
-                          </a:solidFill>
-                          <a:latin typeface="Calibri"/>
-                        </a:rPr>
-                        <a:t>85.7%</a:t>
-                      </a:r>
-                    </a:p>
-                  </a:txBody>
-                  <a:tcPr>
-                    <a:solidFill>
-                      <a:srgbClr val="F2F2F2"/>
-                    </a:solidFill>
-                  </a:tcPr>
-                </a:tc>
-                <a:tc>
-                  <a:txBody>
-                    <a:bodyPr/>
-                    <a:lstStyle/>
-                    <a:p>
-                      <a:pPr algn="l"/>
-                      <a:r>
-                        <a:rPr sz="1000" b="0">
-                          <a:solidFill>
-                            <a:srgbClr val="1D1B43"/>
-                          </a:solidFill>
-                          <a:latin typeface="Calibri"/>
-                        </a:rPr>
-                        <a:t>Regular</a:t>
-                      </a:r>
-                    </a:p>
-                  </a:txBody>
-                  <a:tcPr>
-                    <a:solidFill>
-                      <a:srgbClr val="F2F2F2"/>
-                    </a:solidFill>
-                  </a:tcPr>
-                </a:tc>
-              </a:tr>
-              <a:tr h="457200">
-                <a:tc>
-                  <a:txBody>
-                    <a:bodyPr/>
-                    <a:lstStyle/>
-                    <a:p>
-                      <a:pPr algn="l"/>
-                      <a:r>
-                        <a:rPr sz="1000" b="0">
-                          <a:solidFill>
-                            <a:srgbClr val="1D1B43"/>
-                          </a:solidFill>
-                          <a:latin typeface="Calibri"/>
-                        </a:rPr>
-                        <a:t>GO</a:t>
-                      </a:r>
-                    </a:p>
-                  </a:txBody>
-                  <a:tcPr>
-                    <a:solidFill>
-                      <a:srgbClr val="FFFFFF"/>
-                    </a:solidFill>
-                  </a:tcPr>
-                </a:tc>
-                <a:tc>
-                  <a:txBody>
-                    <a:bodyPr/>
-                    <a:lstStyle/>
-                    <a:p>
-                      <a:pPr algn="l"/>
-                      <a:r>
-                        <a:rPr sz="1000" b="0">
-                          <a:solidFill>
-                            <a:srgbClr val="1D1B43"/>
-                          </a:solidFill>
-                          <a:latin typeface="Calibri"/>
-                        </a:rPr>
-                        <a:t>14</a:t>
-                      </a:r>
-                    </a:p>
-                  </a:txBody>
-                  <a:tcPr>
-                    <a:solidFill>
-                      <a:srgbClr val="FFFFFF"/>
-                    </a:solidFill>
-                  </a:tcPr>
-                </a:tc>
-                <a:tc>
-                  <a:txBody>
-                    <a:bodyPr/>
-                    <a:lstStyle/>
-                    <a:p>
-                      <a:pPr algn="l"/>
-                      <a:r>
-                        <a:rPr sz="1000" b="0">
-                          <a:solidFill>
-                            <a:srgbClr val="1D1B43"/>
-                          </a:solidFill>
-                          <a:latin typeface="Calibri"/>
-                        </a:rPr>
-                        <a:t>14</a:t>
-                      </a:r>
-                    </a:p>
-                  </a:txBody>
-                  <a:tcPr>
-                    <a:solidFill>
-                      <a:srgbClr val="FFFFFF"/>
-                    </a:solidFill>
-                  </a:tcPr>
-                </a:tc>
-                <a:tc>
-                  <a:txBody>
-                    <a:bodyPr/>
-                    <a:lstStyle/>
-                    <a:p>
-                      <a:pPr algn="l"/>
-                      <a:r>
-                        <a:rPr sz="1000" b="0">
-                          <a:solidFill>
-                            <a:srgbClr val="1D1B43"/>
-                          </a:solidFill>
-                          <a:latin typeface="Calibri"/>
-                        </a:rPr>
-                        <a:t>0</a:t>
-                      </a:r>
-                    </a:p>
-                  </a:txBody>
-                  <a:tcPr>
-                    <a:solidFill>
-                      <a:srgbClr val="FFFFFF"/>
-                    </a:solidFill>
-                  </a:tcPr>
-                </a:tc>
-                <a:tc>
-                  <a:txBody>
-                    <a:bodyPr/>
-                    <a:lstStyle/>
-                    <a:p>
-                      <a:pPr algn="l"/>
-                      <a:r>
-                        <a:rPr sz="1000" b="0">
-                          <a:solidFill>
-                            <a:srgbClr val="1D1B43"/>
-                          </a:solidFill>
-                          <a:latin typeface="Calibri"/>
-                        </a:rPr>
-                        <a:t>100.0%</a:t>
-                      </a:r>
-                    </a:p>
-                  </a:txBody>
-                  <a:tcPr>
-                    <a:solidFill>
-                      <a:srgbClr val="FFFFFF"/>
-                    </a:solidFill>
-                  </a:tcPr>
-                </a:tc>
-                <a:tc>
-                  <a:txBody>
-                    <a:bodyPr/>
-                    <a:lstStyle/>
-                    <a:p>
-                      <a:pPr algn="l"/>
-                      <a:r>
-                        <a:rPr sz="1000" b="0">
-                          <a:solidFill>
-                            <a:srgbClr val="1D1B43"/>
-                          </a:solidFill>
-                          <a:latin typeface="Calibri"/>
-                        </a:rPr>
-                        <a:t>Excelente</a:t>
-                      </a:r>
-                    </a:p>
-                  </a:txBody>
-                  <a:tcPr>
-                    <a:solidFill>
-                      <a:srgbClr val="FFFFFF"/>
-                    </a:solidFill>
-                  </a:tcPr>
-                </a:tc>
-              </a:tr>
-              <a:tr h="457200">
-                <a:tc>
-                  <a:txBody>
-                    <a:bodyPr/>
-                    <a:lstStyle/>
-                    <a:p>
-                      <a:pPr algn="l"/>
-                      <a:r>
-                        <a:rPr sz="1000" b="0">
-                          <a:solidFill>
-                            <a:srgbClr val="1D1B43"/>
-                          </a:solidFill>
-                          <a:latin typeface="Calibri"/>
-                        </a:rPr>
-                        <a:t>MG</a:t>
-                      </a:r>
-                    </a:p>
-                  </a:txBody>
-                  <a:tcPr>
-                    <a:solidFill>
-                      <a:srgbClr val="F2F2F2"/>
-                    </a:solidFill>
-                  </a:tcPr>
-                </a:tc>
-                <a:tc>
-                  <a:txBody>
-                    <a:bodyPr/>
-                    <a:lstStyle/>
-                    <a:p>
-                      <a:pPr algn="l"/>
-                      <a:r>
-                        <a:rPr sz="1000" b="0">
-                          <a:solidFill>
-                            <a:srgbClr val="1D1B43"/>
-                          </a:solidFill>
-                          <a:latin typeface="Calibri"/>
-                        </a:rPr>
-                        <a:t>13</a:t>
-                      </a:r>
-                    </a:p>
-                  </a:txBody>
-                  <a:tcPr>
-                    <a:solidFill>
-                      <a:srgbClr val="F2F2F2"/>
-                    </a:solidFill>
-                  </a:tcPr>
-                </a:tc>
-                <a:tc>
-                  <a:txBody>
-                    <a:bodyPr/>
-                    <a:lstStyle/>
-                    <a:p>
-                      <a:pPr algn="l"/>
-                      <a:r>
-                        <a:rPr sz="1000" b="0">
-                          <a:solidFill>
-                            <a:srgbClr val="1D1B43"/>
-                          </a:solidFill>
-                          <a:latin typeface="Calibri"/>
-                        </a:rPr>
-                        <a:t>10</a:t>
-                      </a:r>
-                    </a:p>
-                  </a:txBody>
-                  <a:tcPr>
-                    <a:solidFill>
-                      <a:srgbClr val="F2F2F2"/>
-                    </a:solidFill>
-                  </a:tcPr>
-                </a:tc>
-                <a:tc>
-                  <a:txBody>
-                    <a:bodyPr/>
-                    <a:lstStyle/>
-                    <a:p>
-                      <a:pPr algn="l"/>
-                      <a:r>
-                        <a:rPr sz="1000" b="0">
-                          <a:solidFill>
-                            <a:srgbClr val="1D1B43"/>
-                          </a:solidFill>
-                          <a:latin typeface="Calibri"/>
-                        </a:rPr>
-                        <a:t>3</a:t>
-                      </a:r>
-                    </a:p>
-                  </a:txBody>
-                  <a:tcPr>
-                    <a:solidFill>
-                      <a:srgbClr val="F2F2F2"/>
-                    </a:solidFill>
-                  </a:tcPr>
-                </a:tc>
-                <a:tc>
-                  <a:txBody>
-                    <a:bodyPr/>
-                    <a:lstStyle/>
-                    <a:p>
-                      <a:pPr algn="l"/>
-                      <a:r>
-                        <a:rPr sz="1000" b="0">
-                          <a:solidFill>
-                            <a:srgbClr val="1D1B43"/>
-                          </a:solidFill>
-                          <a:latin typeface="Calibri"/>
-                        </a:rPr>
-                        <a:t>76.9%</a:t>
-                      </a:r>
-                    </a:p>
-                  </a:txBody>
-                  <a:tcPr>
-                    <a:solidFill>
-                      <a:srgbClr val="F2F2F2"/>
-                    </a:solidFill>
-                  </a:tcPr>
-                </a:tc>
-                <a:tc>
-                  <a:txBody>
-                    <a:bodyPr/>
-                    <a:lstStyle/>
-                    <a:p>
-                      <a:pPr algn="l"/>
-                      <a:r>
-                        <a:rPr sz="1000" b="0">
-                          <a:solidFill>
-                            <a:srgbClr val="1D1B43"/>
-                          </a:solidFill>
-                          <a:latin typeface="Calibri"/>
-                        </a:rPr>
-                        <a:t>Atencao</a:t>
-                      </a:r>
-                    </a:p>
-                  </a:txBody>
-                  <a:tcPr>
-                    <a:solidFill>
-                      <a:srgbClr val="F2F2F2"/>
-                    </a:solidFill>
-                  </a:tcPr>
-                </a:tc>
-              </a:tr>
-              <a:tr h="457200">
-                <a:tc>
-                  <a:txBody>
-                    <a:bodyPr/>
-                    <a:lstStyle/>
-                    <a:p>
-                      <a:pPr algn="l"/>
-                      <a:r>
-                        <a:rPr sz="1000" b="0">
-                          <a:solidFill>
-                            <a:srgbClr val="1D1B43"/>
-                          </a:solidFill>
-                          <a:latin typeface="Calibri"/>
-                        </a:rPr>
-                        <a:t>RS</a:t>
-                      </a:r>
-                    </a:p>
-                  </a:txBody>
-                  <a:tcPr>
-                    <a:solidFill>
-                      <a:srgbClr val="FFFFFF"/>
-                    </a:solidFill>
-                  </a:tcPr>
-                </a:tc>
-                <a:tc>
-                  <a:txBody>
-                    <a:bodyPr/>
-                    <a:lstStyle/>
-                    <a:p>
-                      <a:pPr algn="l"/>
-                      <a:r>
-                        <a:rPr sz="1000" b="0">
-                          <a:solidFill>
-                            <a:srgbClr val="1D1B43"/>
-                          </a:solidFill>
-                          <a:latin typeface="Calibri"/>
-                        </a:rPr>
-                        <a:t>11</a:t>
-                      </a:r>
-                    </a:p>
-                  </a:txBody>
-                  <a:tcPr>
-                    <a:solidFill>
-                      <a:srgbClr val="FFFFFF"/>
-                    </a:solidFill>
-                  </a:tcPr>
-                </a:tc>
-                <a:tc>
-                  <a:txBody>
-                    <a:bodyPr/>
-                    <a:lstStyle/>
-                    <a:p>
-                      <a:pPr algn="l"/>
-                      <a:r>
-                        <a:rPr sz="1000" b="0">
-                          <a:solidFill>
-                            <a:srgbClr val="1D1B43"/>
-                          </a:solidFill>
-                          <a:latin typeface="Calibri"/>
-                        </a:rPr>
-                        <a:t>10</a:t>
-                      </a:r>
-                    </a:p>
-                  </a:txBody>
-                  <a:tcPr>
-                    <a:solidFill>
-                      <a:srgbClr val="FFFFFF"/>
-                    </a:solidFill>
-                  </a:tcPr>
-                </a:tc>
-                <a:tc>
-                  <a:txBody>
-                    <a:bodyPr/>
-                    <a:lstStyle/>
-                    <a:p>
-                      <a:pPr algn="l"/>
-                      <a:r>
-                        <a:rPr sz="1000" b="0">
-                          <a:solidFill>
-                            <a:srgbClr val="1D1B43"/>
-                          </a:solidFill>
-                          <a:latin typeface="Calibri"/>
-                        </a:rPr>
-                        <a:t>1</a:t>
-                      </a:r>
-                    </a:p>
-                  </a:txBody>
-                  <a:tcPr>
-                    <a:solidFill>
-                      <a:srgbClr val="FFFFFF"/>
-                    </a:solidFill>
-                  </a:tcPr>
-                </a:tc>
-                <a:tc>
-                  <a:txBody>
-                    <a:bodyPr/>
-                    <a:lstStyle/>
-                    <a:p>
-                      <a:pPr algn="l"/>
-                      <a:r>
-                        <a:rPr sz="1000" b="0">
-                          <a:solidFill>
-                            <a:srgbClr val="1D1B43"/>
-                          </a:solidFill>
-                          <a:latin typeface="Calibri"/>
-                        </a:rPr>
-                        <a:t>90.9%</a:t>
-                      </a:r>
-                    </a:p>
-                  </a:txBody>
-                  <a:tcPr>
-                    <a:solidFill>
-                      <a:srgbClr val="FFFFFF"/>
-                    </a:solidFill>
-                  </a:tcPr>
-                </a:tc>
-                <a:tc>
-                  <a:txBody>
-                    <a:bodyPr/>
-                    <a:lstStyle/>
-                    <a:p>
-                      <a:pPr algn="l"/>
-                      <a:r>
-                        <a:rPr sz="1000" b="0">
-                          <a:solidFill>
-                            <a:srgbClr val="1D1B43"/>
-                          </a:solidFill>
-                          <a:latin typeface="Calibri"/>
-                        </a:rPr>
-                        <a:t>Regular</a:t>
-                      </a:r>
-                    </a:p>
-                  </a:txBody>
-                  <a:tcPr>
-                    <a:solidFill>
-                      <a:srgbClr val="FFFFFF"/>
-                    </a:solidFill>
-                  </a:tcPr>
-                </a:tc>
-              </a:tr>
-              <a:tr h="457200">
-                <a:tc>
-                  <a:txBody>
-                    <a:bodyPr/>
-                    <a:lstStyle/>
-                    <a:p>
-                      <a:pPr algn="l"/>
-                      <a:r>
-                        <a:rPr sz="1000" b="0">
-                          <a:solidFill>
-                            <a:srgbClr val="1D1B43"/>
-                          </a:solidFill>
-                          <a:latin typeface="Calibri"/>
-                        </a:rPr>
-                        <a:t>DF</a:t>
-                      </a:r>
-                    </a:p>
-                  </a:txBody>
-                  <a:tcPr>
-                    <a:solidFill>
-                      <a:srgbClr val="F2F2F2"/>
-                    </a:solidFill>
-                  </a:tcPr>
-                </a:tc>
-                <a:tc>
-                  <a:txBody>
-                    <a:bodyPr/>
-                    <a:lstStyle/>
-                    <a:p>
-                      <a:pPr algn="l"/>
-                      <a:r>
-                        <a:rPr sz="1000" b="0">
-                          <a:solidFill>
-                            <a:srgbClr val="1D1B43"/>
-                          </a:solidFill>
-                          <a:latin typeface="Calibri"/>
-                        </a:rPr>
-                        <a:t>10</a:t>
-                      </a:r>
-                    </a:p>
-                  </a:txBody>
-                  <a:tcPr>
-                    <a:solidFill>
-                      <a:srgbClr val="F2F2F2"/>
-                    </a:solidFill>
-                  </a:tcPr>
-                </a:tc>
-                <a:tc>
-                  <a:txBody>
-                    <a:bodyPr/>
-                    <a:lstStyle/>
-                    <a:p>
-                      <a:pPr algn="l"/>
-                      <a:r>
-                        <a:rPr sz="1000" b="0">
-                          <a:solidFill>
-                            <a:srgbClr val="1D1B43"/>
-                          </a:solidFill>
-                          <a:latin typeface="Calibri"/>
-                        </a:rPr>
-                        <a:t>10</a:t>
-                      </a:r>
-                    </a:p>
-                  </a:txBody>
-                  <a:tcPr>
-                    <a:solidFill>
-                      <a:srgbClr val="F2F2F2"/>
-                    </a:solidFill>
-                  </a:tcPr>
-                </a:tc>
-                <a:tc>
-                  <a:txBody>
-                    <a:bodyPr/>
-                    <a:lstStyle/>
-                    <a:p>
-                      <a:pPr algn="l"/>
-                      <a:r>
-                        <a:rPr sz="1000" b="0">
-                          <a:solidFill>
-                            <a:srgbClr val="1D1B43"/>
-                          </a:solidFill>
-                          <a:latin typeface="Calibri"/>
-                        </a:rPr>
-                        <a:t>0</a:t>
-                      </a:r>
-                    </a:p>
-                  </a:txBody>
-                  <a:tcPr>
-                    <a:solidFill>
-                      <a:srgbClr val="F2F2F2"/>
-                    </a:solidFill>
-                  </a:tcPr>
-                </a:tc>
-                <a:tc>
-                  <a:txBody>
-                    <a:bodyPr/>
-                    <a:lstStyle/>
-                    <a:p>
-                      <a:pPr algn="l"/>
-                      <a:r>
-                        <a:rPr sz="1000" b="0">
-                          <a:solidFill>
-                            <a:srgbClr val="1D1B43"/>
-                          </a:solidFill>
-                          <a:latin typeface="Calibri"/>
-                        </a:rPr>
-                        <a:t>100.0%</a:t>
-                      </a:r>
-                    </a:p>
-                  </a:txBody>
-                  <a:tcPr>
-                    <a:solidFill>
-                      <a:srgbClr val="F2F2F2"/>
-                    </a:solidFill>
-                  </a:tcPr>
-                </a:tc>
-                <a:tc>
-                  <a:txBody>
-                    <a:bodyPr/>
-                    <a:lstStyle/>
-                    <a:p>
-                      <a:pPr algn="l"/>
-                      <a:r>
-                        <a:rPr sz="1000" b="0">
-                          <a:solidFill>
-                            <a:srgbClr val="1D1B43"/>
-                          </a:solidFill>
-                          <a:latin typeface="Calibri"/>
-                        </a:rPr>
-                        <a:t>Excelente</a:t>
-                      </a:r>
-                    </a:p>
-                  </a:txBody>
-                  <a:tcPr>
-                    <a:solidFill>
-                      <a:srgbClr val="F2F2F2"/>
                     </a:solidFill>
                   </a:tcPr>
                 </a:tc>
@@ -8957,7 +7095,7 @@
                 </a:solidFill>
                 <a:latin typeface="Calibri"/>
               </a:rPr>
-              <a:t>TOP DESTINATARIOS (24 pontos)</a:t>
+              <a:t>TOP DESTINATARIOS (25 pontos)</a:t>
             </a:r>
           </a:p>
         </p:txBody>
@@ -9255,7 +7393,7 @@
                           </a:solidFill>
                           <a:latin typeface="Calibri"/>
                         </a:rPr>
-                        <a:t>25</a:t>
+                        <a:t>45</a:t>
                       </a:r>
                     </a:p>
                   </a:txBody>
@@ -9278,7 +7416,7 @@
                           </a:solidFill>
                           <a:latin typeface="Calibri"/>
                         </a:rPr>
-                        <a:t>23</a:t>
+                        <a:t>45</a:t>
                       </a:r>
                     </a:p>
                   </a:txBody>
@@ -9301,7 +7439,7 @@
                           </a:solidFill>
                           <a:latin typeface="Calibri"/>
                         </a:rPr>
-                        <a:t>2</a:t>
+                        <a:t>0</a:t>
                       </a:r>
                     </a:p>
                   </a:txBody>
@@ -9324,7 +7462,7 @@
                           </a:solidFill>
                           <a:latin typeface="Calibri"/>
                         </a:rPr>
-                        <a:t>92.0%</a:t>
+                        <a:t>100.0%</a:t>
                       </a:r>
                     </a:p>
                   </a:txBody>
@@ -9347,7 +7485,7 @@
                           </a:solidFill>
                           <a:latin typeface="Calibri"/>
                         </a:rPr>
-                        <a:t>Regular</a:t>
+                        <a:t>Excelente</a:t>
                       </a:r>
                     </a:p>
                   </a:txBody>
@@ -9418,7 +7556,7 @@
                           </a:solidFill>
                           <a:latin typeface="Calibri"/>
                         </a:rPr>
-                        <a:t>16</a:t>
+                        <a:t>27</a:t>
                       </a:r>
                     </a:p>
                   </a:txBody>
@@ -9441,7 +7579,7 @@
                           </a:solidFill>
                           <a:latin typeface="Calibri"/>
                         </a:rPr>
-                        <a:t>13</a:t>
+                        <a:t>27</a:t>
                       </a:r>
                     </a:p>
                   </a:txBody>
@@ -9464,7 +7602,7 @@
                           </a:solidFill>
                           <a:latin typeface="Calibri"/>
                         </a:rPr>
-                        <a:t>3</a:t>
+                        <a:t>0</a:t>
                       </a:r>
                     </a:p>
                   </a:txBody>
@@ -9487,7 +7625,7 @@
                           </a:solidFill>
                           <a:latin typeface="Calibri"/>
                         </a:rPr>
-                        <a:t>81.2%</a:t>
+                        <a:t>100.0%</a:t>
                       </a:r>
                     </a:p>
                   </a:txBody>
@@ -9510,7 +7648,7 @@
                           </a:solidFill>
                           <a:latin typeface="Calibri"/>
                         </a:rPr>
-                        <a:t>Atencao</a:t>
+                        <a:t>Excelente</a:t>
                       </a:r>
                     </a:p>
                   </a:txBody>
@@ -9558,7 +7696,7 @@
                           </a:solidFill>
                           <a:latin typeface="Calibri"/>
                         </a:rPr>
-                        <a:t>MRH VEICULOS - CURITIBA / PR</a:t>
+                        <a:t>BMQ AUTOMOVEIS LTDA - BELO HORIZONTE / MG</a:t>
                       </a:r>
                     </a:p>
                   </a:txBody>
@@ -9581,7 +7719,7 @@
                           </a:solidFill>
                           <a:latin typeface="Calibri"/>
                         </a:rPr>
-                        <a:t>14</a:t>
+                        <a:t>23</a:t>
                       </a:r>
                     </a:p>
                   </a:txBody>
@@ -9604,7 +7742,7 @@
                           </a:solidFill>
                           <a:latin typeface="Calibri"/>
                         </a:rPr>
-                        <a:t>14</a:t>
+                        <a:t>23</a:t>
                       </a:r>
                     </a:p>
                   </a:txBody>
@@ -9721,7 +7859,7 @@
                           </a:solidFill>
                           <a:latin typeface="Calibri"/>
                         </a:rPr>
-                        <a:t>BCLV COMERCIO DE VEI - GOIANIA / GO</a:t>
+                        <a:t>MRH VEICULOS LTDA. - PORTO ALEGRE / RS</a:t>
                       </a:r>
                     </a:p>
                   </a:txBody>
@@ -9744,7 +7882,7 @@
                           </a:solidFill>
                           <a:latin typeface="Calibri"/>
                         </a:rPr>
-                        <a:t>14</a:t>
+                        <a:t>23</a:t>
                       </a:r>
                     </a:p>
                   </a:txBody>
@@ -9767,7 +7905,7 @@
                           </a:solidFill>
                           <a:latin typeface="Calibri"/>
                         </a:rPr>
-                        <a:t>14</a:t>
+                        <a:t>23</a:t>
                       </a:r>
                     </a:p>
                   </a:txBody>
@@ -9884,7 +8022,7 @@
                           </a:solidFill>
                           <a:latin typeface="Calibri"/>
                         </a:rPr>
-                        <a:t>BMQ AUTOMOVEIS LTDA - BELO HORIZONTE / MG</a:t>
+                        <a:t>LIA E ANNETTE INDUST - RIO DE JANEIRO / RJ</a:t>
                       </a:r>
                     </a:p>
                   </a:txBody>
@@ -9907,7 +8045,7 @@
                           </a:solidFill>
                           <a:latin typeface="Calibri"/>
                         </a:rPr>
-                        <a:t>13</a:t>
+                        <a:t>22</a:t>
                       </a:r>
                     </a:p>
                   </a:txBody>
@@ -9930,7 +8068,7 @@
                           </a:solidFill>
                           <a:latin typeface="Calibri"/>
                         </a:rPr>
-                        <a:t>10</a:t>
+                        <a:t>22</a:t>
                       </a:r>
                     </a:p>
                   </a:txBody>
@@ -9953,7 +8091,7 @@
                           </a:solidFill>
                           <a:latin typeface="Calibri"/>
                         </a:rPr>
-                        <a:t>3</a:t>
+                        <a:t>0</a:t>
                       </a:r>
                     </a:p>
                   </a:txBody>
@@ -9976,7 +8114,7 @@
                           </a:solidFill>
                           <a:latin typeface="Calibri"/>
                         </a:rPr>
-                        <a:t>76.9%</a:t>
+                        <a:t>100.0%</a:t>
                       </a:r>
                     </a:p>
                   </a:txBody>
@@ -9999,7 +8137,7 @@
                           </a:solidFill>
                           <a:latin typeface="Calibri"/>
                         </a:rPr>
-                        <a:t>Atencao</a:t>
+                        <a:t>Excelente</a:t>
                       </a:r>
                     </a:p>
                   </a:txBody>
@@ -10047,7 +8185,7 @@
                           </a:solidFill>
                           <a:latin typeface="Calibri"/>
                         </a:rPr>
-                        <a:t>MRH VEICULOS LTDA. - FLORIANOPOLIS / SC</a:t>
+                        <a:t>MRH VEICULOS - CURITIBA / PR</a:t>
                       </a:r>
                     </a:p>
                   </a:txBody>
@@ -10070,7 +8208,7 @@
                           </a:solidFill>
                           <a:latin typeface="Calibri"/>
                         </a:rPr>
-                        <a:t>13</a:t>
+                        <a:t>22</a:t>
                       </a:r>
                     </a:p>
                   </a:txBody>
@@ -10093,7 +8231,7 @@
                           </a:solidFill>
                           <a:latin typeface="Calibri"/>
                         </a:rPr>
-                        <a:t>12</a:t>
+                        <a:t>22</a:t>
                       </a:r>
                     </a:p>
                   </a:txBody>
@@ -10116,7 +8254,7 @@
                           </a:solidFill>
                           <a:latin typeface="Calibri"/>
                         </a:rPr>
-                        <a:t>1</a:t>
+                        <a:t>0</a:t>
                       </a:r>
                     </a:p>
                   </a:txBody>
@@ -10139,7 +8277,7 @@
                           </a:solidFill>
                           <a:latin typeface="Calibri"/>
                         </a:rPr>
-                        <a:t>92.3%</a:t>
+                        <a:t>100.0%</a:t>
                       </a:r>
                     </a:p>
                   </a:txBody>
@@ -10162,7 +8300,7 @@
                           </a:solidFill>
                           <a:latin typeface="Calibri"/>
                         </a:rPr>
-                        <a:t>Regular</a:t>
+                        <a:t>Excelente</a:t>
                       </a:r>
                     </a:p>
                   </a:txBody>
@@ -10210,7 +8348,7 @@
                           </a:solidFill>
                           <a:latin typeface="Calibri"/>
                         </a:rPr>
-                        <a:t>LIA E ANNETTE INDUST - RIO DE JANEIRO / RJ</a:t>
+                        <a:t>MRH VEICULOS LTDA. - FLORIANOPOLIS / SC</a:t>
                       </a:r>
                     </a:p>
                   </a:txBody>
@@ -10233,7 +8371,7 @@
                           </a:solidFill>
                           <a:latin typeface="Calibri"/>
                         </a:rPr>
-                        <a:t>11</a:t>
+                        <a:t>22</a:t>
                       </a:r>
                     </a:p>
                   </a:txBody>
@@ -10256,7 +8394,7 @@
                           </a:solidFill>
                           <a:latin typeface="Calibri"/>
                         </a:rPr>
-                        <a:t>9</a:t>
+                        <a:t>22</a:t>
                       </a:r>
                     </a:p>
                   </a:txBody>
@@ -10279,7 +8417,7 @@
                           </a:solidFill>
                           <a:latin typeface="Calibri"/>
                         </a:rPr>
-                        <a:t>2</a:t>
+                        <a:t>0</a:t>
                       </a:r>
                     </a:p>
                   </a:txBody>
@@ -10302,7 +8440,7 @@
                           </a:solidFill>
                           <a:latin typeface="Calibri"/>
                         </a:rPr>
-                        <a:t>81.8%</a:t>
+                        <a:t>100.0%</a:t>
                       </a:r>
                     </a:p>
                   </a:txBody>
@@ -10325,7 +8463,7 @@
                           </a:solidFill>
                           <a:latin typeface="Calibri"/>
                         </a:rPr>
-                        <a:t>Atencao</a:t>
+                        <a:t>Excelente</a:t>
                       </a:r>
                     </a:p>
                   </a:txBody>
@@ -10373,7 +8511,7 @@
                           </a:solidFill>
                           <a:latin typeface="Calibri"/>
                         </a:rPr>
-                        <a:t>CENTRO TECNICO DE VE - SAO PAULO / SP</a:t>
+                        <a:t>BCLV COMERCIO DE VEI - GOIANIA / GO</a:t>
                       </a:r>
                     </a:p>
                   </a:txBody>
@@ -10396,7 +8534,7 @@
                           </a:solidFill>
                           <a:latin typeface="Calibri"/>
                         </a:rPr>
-                        <a:t>11</a:t>
+                        <a:t>21</a:t>
                       </a:r>
                     </a:p>
                   </a:txBody>
@@ -10419,7 +8557,7 @@
                           </a:solidFill>
                           <a:latin typeface="Calibri"/>
                         </a:rPr>
-                        <a:t>9</a:t>
+                        <a:t>21</a:t>
                       </a:r>
                     </a:p>
                   </a:txBody>
@@ -10442,7 +8580,7 @@
                           </a:solidFill>
                           <a:latin typeface="Calibri"/>
                         </a:rPr>
-                        <a:t>2</a:t>
+                        <a:t>0</a:t>
                       </a:r>
                     </a:p>
                   </a:txBody>
@@ -10465,7 +8603,7 @@
                           </a:solidFill>
                           <a:latin typeface="Calibri"/>
                         </a:rPr>
-                        <a:t>81.8%</a:t>
+                        <a:t>100.0%</a:t>
                       </a:r>
                     </a:p>
                   </a:txBody>
@@ -10488,7 +8626,7 @@
                           </a:solidFill>
                           <a:latin typeface="Calibri"/>
                         </a:rPr>
-                        <a:t>Atencao</a:t>
+                        <a:t>Excelente</a:t>
                       </a:r>
                     </a:p>
                   </a:txBody>
@@ -10536,7 +8674,7 @@
                           </a:solidFill>
                           <a:latin typeface="Calibri"/>
                         </a:rPr>
-                        <a:t>MRH VEICULOS LTDA. - PORTO ALEGRE / RS</a:t>
+                        <a:t>CENTRO TECNICO DE VE - SAO PAULO / SP</a:t>
                       </a:r>
                     </a:p>
                   </a:txBody>
@@ -10559,7 +8697,7 @@
                           </a:solidFill>
                           <a:latin typeface="Calibri"/>
                         </a:rPr>
-                        <a:t>11</a:t>
+                        <a:t>20</a:t>
                       </a:r>
                     </a:p>
                   </a:txBody>
@@ -10582,7 +8720,7 @@
                           </a:solidFill>
                           <a:latin typeface="Calibri"/>
                         </a:rPr>
-                        <a:t>10</a:t>
+                        <a:t>20</a:t>
                       </a:r>
                     </a:p>
                   </a:txBody>
@@ -10605,7 +8743,7 @@
                           </a:solidFill>
                           <a:latin typeface="Calibri"/>
                         </a:rPr>
-                        <a:t>1</a:t>
+                        <a:t>0</a:t>
                       </a:r>
                     </a:p>
                   </a:txBody>
@@ -10628,7 +8766,7 @@
                           </a:solidFill>
                           <a:latin typeface="Calibri"/>
                         </a:rPr>
-                        <a:t>90.9%</a:t>
+                        <a:t>100.0%</a:t>
                       </a:r>
                     </a:p>
                   </a:txBody>
@@ -10651,7 +8789,7 @@
                           </a:solidFill>
                           <a:latin typeface="Calibri"/>
                         </a:rPr>
-                        <a:t>Regular</a:t>
+                        <a:t>Excelente</a:t>
                       </a:r>
                     </a:p>
                   </a:txBody>
@@ -10699,7 +8837,7 @@
                           </a:solidFill>
                           <a:latin typeface="Calibri"/>
                         </a:rPr>
-                        <a:t>MRH VEICULOS LTDA. - MARINGA / PR</a:t>
+                        <a:t>MRH VEICULOS LTDA - RIO DE JANEIRO / RJ</a:t>
                       </a:r>
                     </a:p>
                   </a:txBody>
@@ -10722,7 +8860,7 @@
                           </a:solidFill>
                           <a:latin typeface="Calibri"/>
                         </a:rPr>
-                        <a:t>11</a:t>
+                        <a:t>20</a:t>
                       </a:r>
                     </a:p>
                   </a:txBody>
@@ -10745,7 +8883,7 @@
                           </a:solidFill>
                           <a:latin typeface="Calibri"/>
                         </a:rPr>
-                        <a:t>11</a:t>
+                        <a:t>20</a:t>
                       </a:r>
                     </a:p>
                   </a:txBody>
@@ -10862,7 +9000,7 @@
                           </a:solidFill>
                           <a:latin typeface="Calibri"/>
                         </a:rPr>
-                        <a:t>MRH VEICULOS LTDA - RIBEIRAO PRETO / SP</a:t>
+                        <a:t>BCLV COMERCIO DE VEI - BRASILIA / DF</a:t>
                       </a:r>
                     </a:p>
                   </a:txBody>
@@ -10885,7 +9023,7 @@
                           </a:solidFill>
                           <a:latin typeface="Calibri"/>
                         </a:rPr>
-                        <a:t>11</a:t>
+                        <a:t>18</a:t>
                       </a:r>
                     </a:p>
                   </a:txBody>
@@ -10908,7 +9046,7 @@
                           </a:solidFill>
                           <a:latin typeface="Calibri"/>
                         </a:rPr>
-                        <a:t>11</a:t>
+                        <a:t>18</a:t>
                       </a:r>
                     </a:p>
                   </a:txBody>
@@ -11025,7 +9163,7 @@
                           </a:solidFill>
                           <a:latin typeface="Calibri"/>
                         </a:rPr>
-                        <a:t>PORSCHER BRASIL IMPO - SAO PAULO / SP</a:t>
+                        <a:t>MRH VEICULOS LTDA. - CAMPINAS / SP</a:t>
                       </a:r>
                     </a:p>
                   </a:txBody>
@@ -11048,7 +9186,7 @@
                           </a:solidFill>
                           <a:latin typeface="Calibri"/>
                         </a:rPr>
-                        <a:t>11</a:t>
+                        <a:t>18</a:t>
                       </a:r>
                     </a:p>
                   </a:txBody>
@@ -11071,7 +9209,7 @@
                           </a:solidFill>
                           <a:latin typeface="Calibri"/>
                         </a:rPr>
-                        <a:t>10</a:t>
+                        <a:t>18</a:t>
                       </a:r>
                     </a:p>
                   </a:txBody>
@@ -11094,7 +9232,7 @@
                           </a:solidFill>
                           <a:latin typeface="Calibri"/>
                         </a:rPr>
-                        <a:t>1</a:t>
+                        <a:t>0</a:t>
                       </a:r>
                     </a:p>
                   </a:txBody>
@@ -11117,7 +9255,7 @@
                           </a:solidFill>
                           <a:latin typeface="Calibri"/>
                         </a:rPr>
-                        <a:t>90.9%</a:t>
+                        <a:t>100.0%</a:t>
                       </a:r>
                     </a:p>
                   </a:txBody>
@@ -11140,7 +9278,7 @@
                           </a:solidFill>
                           <a:latin typeface="Calibri"/>
                         </a:rPr>
-                        <a:t>Regular</a:t>
+                        <a:t>Excelente</a:t>
                       </a:r>
                     </a:p>
                   </a:txBody>
@@ -11188,7 +9326,7 @@
                           </a:solidFill>
                           <a:latin typeface="Calibri"/>
                         </a:rPr>
-                        <a:t>MRH VEICULOS LTDA - RIO DE JANEIRO / RJ</a:t>
+                        <a:t>MRH VEICULOS LTDA. - MARINGA / PR</a:t>
                       </a:r>
                     </a:p>
                   </a:txBody>
@@ -11211,7 +9349,7 @@
                           </a:solidFill>
                           <a:latin typeface="Calibri"/>
                         </a:rPr>
-                        <a:t>10</a:t>
+                        <a:t>16</a:t>
                       </a:r>
                     </a:p>
                   </a:txBody>
@@ -11234,7 +9372,7 @@
                           </a:solidFill>
                           <a:latin typeface="Calibri"/>
                         </a:rPr>
-                        <a:t>9</a:t>
+                        <a:t>16</a:t>
                       </a:r>
                     </a:p>
                   </a:txBody>
@@ -11257,7 +9395,7 @@
                           </a:solidFill>
                           <a:latin typeface="Calibri"/>
                         </a:rPr>
-                        <a:t>1</a:t>
+                        <a:t>0</a:t>
                       </a:r>
                     </a:p>
                   </a:txBody>
@@ -11280,7 +9418,7 @@
                           </a:solidFill>
                           <a:latin typeface="Calibri"/>
                         </a:rPr>
-                        <a:t>90.0%</a:t>
+                        <a:t>100.0%</a:t>
                       </a:r>
                     </a:p>
                   </a:txBody>
@@ -11303,7 +9441,7 @@
                           </a:solidFill>
                           <a:latin typeface="Calibri"/>
                         </a:rPr>
-                        <a:t>Regular</a:t>
+                        <a:t>Excelente</a:t>
                       </a:r>
                     </a:p>
                   </a:txBody>
@@ -11351,7 +9489,7 @@
                           </a:solidFill>
                           <a:latin typeface="Calibri"/>
                         </a:rPr>
-                        <a:t>MRH VEICULOS LTDA BL - BLUMENAU / SC</a:t>
+                        <a:t>MRH VEICULOS LTDA - RIBEIRAO PRETO / SP</a:t>
                       </a:r>
                     </a:p>
                   </a:txBody>
@@ -11374,7 +9512,7 @@
                           </a:solidFill>
                           <a:latin typeface="Calibri"/>
                         </a:rPr>
-                        <a:t>10</a:t>
+                        <a:t>15</a:t>
                       </a:r>
                     </a:p>
                   </a:txBody>
@@ -11397,7 +9535,7 @@
                           </a:solidFill>
                           <a:latin typeface="Calibri"/>
                         </a:rPr>
-                        <a:t>10</a:t>
+                        <a:t>14</a:t>
                       </a:r>
                     </a:p>
                   </a:txBody>
@@ -11420,7 +9558,7 @@
                           </a:solidFill>
                           <a:latin typeface="Calibri"/>
                         </a:rPr>
-                        <a:t>0</a:t>
+                        <a:t>1</a:t>
                       </a:r>
                     </a:p>
                   </a:txBody>
@@ -11443,7 +9581,7 @@
                           </a:solidFill>
                           <a:latin typeface="Calibri"/>
                         </a:rPr>
-                        <a:t>100.0%</a:t>
+                        <a:t>93.3%</a:t>
                       </a:r>
                     </a:p>
                   </a:txBody>
@@ -11466,7 +9604,7 @@
                           </a:solidFill>
                           <a:latin typeface="Calibri"/>
                         </a:rPr>
-                        <a:t>Excelente</a:t>
+                        <a:t>Regular</a:t>
                       </a:r>
                     </a:p>
                   </a:txBody>

--- a/FORTE_TRANSPORTES_DO_BRASIL_LT.pptx
+++ b/FORTE_TRANSPORTES_DO_BRASIL_LT.pptx
@@ -143,10 +143,13 @@
           </c:spPr>
           <c:cat>
             <c:strRef>
-              <c:f>Sheet1!$A$2:$A$2</c:f>
+              <c:f>Sheet1!$A$2:$A$3</c:f>
               <c:strCache>
-                <c:ptCount val="1"/>
+                <c:ptCount val="2"/>
                 <c:pt idx="0">
+                  <c:v>Maio 2026</c:v>
+                </c:pt>
+                <c:pt idx="1">
                   <c:v>Abril 2026</c:v>
                 </c:pt>
               </c:strCache>
@@ -154,11 +157,14 @@
           </c:cat>
           <c:val>
             <c:numRef>
-              <c:f>Sheet1!$B$2:$B$2</c:f>
+              <c:f>Sheet1!$B$2:$B$3</c:f>
               <c:numCache>
                 <c:formatCode>General</c:formatCode>
-                <c:ptCount val="1"/>
+                <c:ptCount val="2"/>
                 <c:pt idx="0">
+                  <c:v>199</c:v>
+                </c:pt>
+                <c:pt idx="1">
                   <c:v>360</c:v>
                 </c:pt>
               </c:numCache>
@@ -186,10 +192,13 @@
           </c:spPr>
           <c:cat>
             <c:strRef>
-              <c:f>Sheet1!$A$2:$A$2</c:f>
+              <c:f>Sheet1!$A$2:$A$3</c:f>
               <c:strCache>
-                <c:ptCount val="1"/>
+                <c:ptCount val="2"/>
                 <c:pt idx="0">
+                  <c:v>Maio 2026</c:v>
+                </c:pt>
+                <c:pt idx="1">
                   <c:v>Abril 2026</c:v>
                 </c:pt>
               </c:strCache>
@@ -197,11 +206,14 @@
           </c:cat>
           <c:val>
             <c:numRef>
-              <c:f>Sheet1!$C$2:$C$2</c:f>
+              <c:f>Sheet1!$C$2:$C$3</c:f>
               <c:numCache>
                 <c:formatCode>General</c:formatCode>
-                <c:ptCount val="1"/>
+                <c:ptCount val="2"/>
                 <c:pt idx="0">
+                  <c:v>17</c:v>
+                </c:pt>
+                <c:pt idx="1">
                   <c:v>1</c:v>
                 </c:pt>
               </c:numCache>
@@ -4142,7 +4154,7 @@
                           </a:solidFill>
                           <a:latin typeface="Calibri"/>
                         </a:rPr>
-                        <a:t>Marco 2026</a:t>
+                        <a:t>Maio 2026</a:t>
                       </a:r>
                     </a:p>
                   </a:txBody>
@@ -4236,7 +4248,7 @@
                           </a:solidFill>
                           <a:latin typeface="Calibri"/>
                         </a:rPr>
-                        <a:t>-</a:t>
+                        <a:t>216</a:t>
                       </a:r>
                     </a:p>
                   </a:txBody>
@@ -4282,7 +4294,7 @@
                           </a:solidFill>
                           <a:latin typeface="Calibri"/>
                         </a:rPr>
-                        <a:t>-</a:t>
+                        <a:t>+ 145</a:t>
                       </a:r>
                     </a:p>
                   </a:txBody>
@@ -4330,7 +4342,7 @@
                           </a:solidFill>
                           <a:latin typeface="Calibri"/>
                         </a:rPr>
-                        <a:t>-</a:t>
+                        <a:t>199</a:t>
                       </a:r>
                     </a:p>
                   </a:txBody>
@@ -4376,7 +4388,7 @@
                           </a:solidFill>
                           <a:latin typeface="Calibri"/>
                         </a:rPr>
-                        <a:t>-</a:t>
+                        <a:t>+ 161</a:t>
                       </a:r>
                     </a:p>
                   </a:txBody>
@@ -4424,7 +4436,7 @@
                           </a:solidFill>
                           <a:latin typeface="Calibri"/>
                         </a:rPr>
-                        <a:t>-</a:t>
+                        <a:t>17</a:t>
                       </a:r>
                     </a:p>
                   </a:txBody>
@@ -4470,7 +4482,7 @@
                           </a:solidFill>
                           <a:latin typeface="Calibri"/>
                         </a:rPr>
-                        <a:t>-</a:t>
+                        <a:t>- 16</a:t>
                       </a:r>
                     </a:p>
                   </a:txBody>
@@ -4518,7 +4530,7 @@
                           </a:solidFill>
                           <a:latin typeface="Calibri"/>
                         </a:rPr>
-                        <a:t>-</a:t>
+                        <a:t>92.1%</a:t>
                       </a:r>
                     </a:p>
                   </a:txBody>
@@ -4564,7 +4576,7 @@
                           </a:solidFill>
                           <a:latin typeface="Calibri"/>
                         </a:rPr>
-                        <a:t>-</a:t>
+                        <a:t>+ 7.6pp</a:t>
                       </a:r>
                     </a:p>
                   </a:txBody>
@@ -4735,7 +4747,7 @@
         </p:nvGraphicFramePr>
         <p:xfrm>
           <a:off x="7955279" y="2286000"/>
-          <a:ext cx="4480560" cy="877824"/>
+          <a:ext cx="4480560" cy="1316736"/>
         </p:xfrm>
         <a:graphic>
           <a:graphicData uri="http://schemas.openxmlformats.org/drawingml/2006/table">
@@ -4881,13 +4893,130 @@
                           </a:solidFill>
                           <a:latin typeface="Calibri"/>
                         </a:rPr>
+                        <a:t>Maio 2026</a:t>
+                      </a:r>
+                    </a:p>
+                  </a:txBody>
+                  <a:tcPr>
+                    <a:solidFill>
+                      <a:srgbClr val="FFFFFF"/>
+                    </a:solidFill>
+                  </a:tcPr>
+                </a:tc>
+                <a:tc>
+                  <a:txBody>
+                    <a:bodyPr/>
+                    <a:lstStyle/>
+                    <a:p>
+                      <a:pPr algn="l"/>
+                      <a:r>
+                        <a:rPr sz="1000" b="0">
+                          <a:solidFill>
+                            <a:srgbClr val="1D1B43"/>
+                          </a:solidFill>
+                          <a:latin typeface="Calibri"/>
+                        </a:rPr>
+                        <a:t>216</a:t>
+                      </a:r>
+                    </a:p>
+                  </a:txBody>
+                  <a:tcPr>
+                    <a:solidFill>
+                      <a:srgbClr val="FFFFFF"/>
+                    </a:solidFill>
+                  </a:tcPr>
+                </a:tc>
+                <a:tc>
+                  <a:txBody>
+                    <a:bodyPr/>
+                    <a:lstStyle/>
+                    <a:p>
+                      <a:pPr algn="l"/>
+                      <a:r>
+                        <a:rPr sz="1000" b="0">
+                          <a:solidFill>
+                            <a:srgbClr val="1D1B43"/>
+                          </a:solidFill>
+                          <a:latin typeface="Calibri"/>
+                        </a:rPr>
+                        <a:t>199</a:t>
+                      </a:r>
+                    </a:p>
+                  </a:txBody>
+                  <a:tcPr>
+                    <a:solidFill>
+                      <a:srgbClr val="FFFFFF"/>
+                    </a:solidFill>
+                  </a:tcPr>
+                </a:tc>
+                <a:tc>
+                  <a:txBody>
+                    <a:bodyPr/>
+                    <a:lstStyle/>
+                    <a:p>
+                      <a:pPr algn="l"/>
+                      <a:r>
+                        <a:rPr sz="1000" b="0">
+                          <a:solidFill>
+                            <a:srgbClr val="1D1B43"/>
+                          </a:solidFill>
+                          <a:latin typeface="Calibri"/>
+                        </a:rPr>
+                        <a:t>17</a:t>
+                      </a:r>
+                    </a:p>
+                  </a:txBody>
+                  <a:tcPr>
+                    <a:solidFill>
+                      <a:srgbClr val="FFFFFF"/>
+                    </a:solidFill>
+                  </a:tcPr>
+                </a:tc>
+                <a:tc>
+                  <a:txBody>
+                    <a:bodyPr/>
+                    <a:lstStyle/>
+                    <a:p>
+                      <a:pPr algn="l"/>
+                      <a:r>
+                        <a:rPr sz="1000" b="0">
+                          <a:solidFill>
+                            <a:srgbClr val="1D1B43"/>
+                          </a:solidFill>
+                          <a:latin typeface="Calibri"/>
+                        </a:rPr>
+                        <a:t>92.1%</a:t>
+                      </a:r>
+                    </a:p>
+                  </a:txBody>
+                  <a:tcPr>
+                    <a:solidFill>
+                      <a:srgbClr val="FFFFFF"/>
+                    </a:solidFill>
+                  </a:tcPr>
+                </a:tc>
+              </a:tr>
+              <a:tr h="438912">
+                <a:tc>
+                  <a:txBody>
+                    <a:bodyPr/>
+                    <a:lstStyle/>
+                    <a:p>
+                      <a:pPr algn="l"/>
+                      <a:r>
+                        <a:rPr sz="1000" b="0">
+                          <a:solidFill>
+                            <a:srgbClr val="1D1B43"/>
+                          </a:solidFill>
+                          <a:latin typeface="Calibri"/>
+                        </a:rPr>
                         <a:t>Abril 2026</a:t>
                       </a:r>
                     </a:p>
                   </a:txBody>
                   <a:tcPr>
                     <a:solidFill>
-                      <a:srgbClr val="FFFFFF"/>
+                      <a:srgbClr val="F2F2F2"/>
                     </a:solidFill>
                   </a:tcPr>
                 </a:tc>
@@ -4910,7 +5039,7 @@
                   </a:txBody>
                   <a:tcPr>
                     <a:solidFill>
-                      <a:srgbClr val="FFFFFF"/>
+                      <a:srgbClr val="F2F2F2"/>
                     </a:solidFill>
                   </a:tcPr>
                 </a:tc>
@@ -4933,7 +5062,7 @@
                   </a:txBody>
                   <a:tcPr>
                     <a:solidFill>
-                      <a:srgbClr val="FFFFFF"/>
+                      <a:srgbClr val="F2F2F2"/>
                     </a:solidFill>
                   </a:tcPr>
                 </a:tc>
@@ -4956,7 +5085,7 @@
                   </a:txBody>
                   <a:tcPr>
                     <a:solidFill>
-                      <a:srgbClr val="FFFFFF"/>
+                      <a:srgbClr val="F2F2F2"/>
                     </a:solidFill>
                   </a:tcPr>
                 </a:tc>
@@ -4979,7 +5108,7 @@
                   </a:txBody>
                   <a:tcPr>
                     <a:solidFill>
-                      <a:srgbClr val="FFFFFF"/>
+                      <a:srgbClr val="F2F2F2"/>
                     </a:solidFill>
                   </a:tcPr>
                 </a:tc>

--- a/FORTE_TRANSPORTES_DO_BRASIL_LT.pptx
+++ b/FORTE_TRANSPORTES_DO_BRASIL_LT.pptx
@@ -162,7 +162,7 @@
                 <c:formatCode>General</c:formatCode>
                 <c:ptCount val="2"/>
                 <c:pt idx="0">
-                  <c:v>199</c:v>
+                  <c:v>281</c:v>
                 </c:pt>
                 <c:pt idx="1">
                   <c:v>360</c:v>
@@ -211,7 +211,7 @@
                 <c:formatCode>General</c:formatCode>
                 <c:ptCount val="2"/>
                 <c:pt idx="0">
-                  <c:v>17</c:v>
+                  <c:v>22</c:v>
                 </c:pt>
                 <c:pt idx="1">
                   <c:v>1</c:v>
@@ -4248,7 +4248,7 @@
                           </a:solidFill>
                           <a:latin typeface="Calibri"/>
                         </a:rPr>
-                        <a:t>216</a:t>
+                        <a:t>303</a:t>
                       </a:r>
                     </a:p>
                   </a:txBody>
@@ -4294,7 +4294,7 @@
                           </a:solidFill>
                           <a:latin typeface="Calibri"/>
                         </a:rPr>
-                        <a:t>+ 145</a:t>
+                        <a:t>+ 58</a:t>
                       </a:r>
                     </a:p>
                   </a:txBody>
@@ -4342,7 +4342,7 @@
                           </a:solidFill>
                           <a:latin typeface="Calibri"/>
                         </a:rPr>
-                        <a:t>199</a:t>
+                        <a:t>281</a:t>
                       </a:r>
                     </a:p>
                   </a:txBody>
@@ -4388,7 +4388,7 @@
                           </a:solidFill>
                           <a:latin typeface="Calibri"/>
                         </a:rPr>
-                        <a:t>+ 161</a:t>
+                        <a:t>+ 79</a:t>
                       </a:r>
                     </a:p>
                   </a:txBody>
@@ -4436,7 +4436,7 @@
                           </a:solidFill>
                           <a:latin typeface="Calibri"/>
                         </a:rPr>
-                        <a:t>17</a:t>
+                        <a:t>22</a:t>
                       </a:r>
                     </a:p>
                   </a:txBody>
@@ -4482,7 +4482,7 @@
                           </a:solidFill>
                           <a:latin typeface="Calibri"/>
                         </a:rPr>
-                        <a:t>- 16</a:t>
+                        <a:t>- 21</a:t>
                       </a:r>
                     </a:p>
                   </a:txBody>
@@ -4530,7 +4530,7 @@
                           </a:solidFill>
                           <a:latin typeface="Calibri"/>
                         </a:rPr>
-                        <a:t>92.1%</a:t>
+                        <a:t>92.7%</a:t>
                       </a:r>
                     </a:p>
                   </a:txBody>
@@ -4576,7 +4576,7 @@
                           </a:solidFill>
                           <a:latin typeface="Calibri"/>
                         </a:rPr>
-                        <a:t>+ 7.6pp</a:t>
+                        <a:t>+ 7.0pp</a:t>
                       </a:r>
                     </a:p>
                   </a:txBody>
@@ -4916,7 +4916,7 @@
                           </a:solidFill>
                           <a:latin typeface="Calibri"/>
                         </a:rPr>
-                        <a:t>216</a:t>
+                        <a:t>303</a:t>
                       </a:r>
                     </a:p>
                   </a:txBody>
@@ -4939,7 +4939,7 @@
                           </a:solidFill>
                           <a:latin typeface="Calibri"/>
                         </a:rPr>
-                        <a:t>199</a:t>
+                        <a:t>281</a:t>
                       </a:r>
                     </a:p>
                   </a:txBody>
@@ -4962,7 +4962,7 @@
                           </a:solidFill>
                           <a:latin typeface="Calibri"/>
                         </a:rPr>
-                        <a:t>17</a:t>
+                        <a:t>22</a:t>
                       </a:r>
                     </a:p>
                   </a:txBody>
@@ -4985,7 +4985,7 @@
                           </a:solidFill>
                           <a:latin typeface="Calibri"/>
                         </a:rPr>
-                        <a:t>92.1%</a:t>
+                        <a:t>92.7%</a:t>
                       </a:r>
                     </a:p>
                   </a:txBody>

--- a/FORTE_TRANSPORTES_DO_BRASIL_LT.pptx
+++ b/FORTE_TRANSPORTES_DO_BRASIL_LT.pptx
@@ -147,10 +147,10 @@
               <c:strCache>
                 <c:ptCount val="2"/>
                 <c:pt idx="0">
-                  <c:v>Maio 2026</c:v>
+                  <c:v>Abril 2026</c:v>
                 </c:pt>
                 <c:pt idx="1">
-                  <c:v>Abril 2026</c:v>
+                  <c:v>Maio 2026</c:v>
                 </c:pt>
               </c:strCache>
             </c:strRef>
@@ -162,10 +162,10 @@
                 <c:formatCode>General</c:formatCode>
                 <c:ptCount val="2"/>
                 <c:pt idx="0">
-                  <c:v>281</c:v>
+                  <c:v>360</c:v>
                 </c:pt>
                 <c:pt idx="1">
-                  <c:v>360</c:v>
+                  <c:v>357</c:v>
                 </c:pt>
               </c:numCache>
             </c:numRef>
@@ -196,10 +196,10 @@
               <c:strCache>
                 <c:ptCount val="2"/>
                 <c:pt idx="0">
-                  <c:v>Maio 2026</c:v>
+                  <c:v>Abril 2026</c:v>
                 </c:pt>
                 <c:pt idx="1">
-                  <c:v>Abril 2026</c:v>
+                  <c:v>Maio 2026</c:v>
                 </c:pt>
               </c:strCache>
             </c:strRef>
@@ -211,10 +211,10 @@
                 <c:formatCode>General</c:formatCode>
                 <c:ptCount val="2"/>
                 <c:pt idx="0">
-                  <c:v>22</c:v>
+                  <c:v>1</c:v>
                 </c:pt>
                 <c:pt idx="1">
-                  <c:v>1</c:v>
+                  <c:v>5</c:v>
                 </c:pt>
               </c:numCache>
             </c:numRef>
@@ -3387,7 +3387,7 @@
                 </a:solidFill>
                 <a:latin typeface="Calibri"/>
               </a:rPr>
-              <a:t>INDICADORES ABRIL 2026</a:t>
+              <a:t>INDICADORES MAIO 2026</a:t>
             </a:r>
           </a:p>
         </p:txBody>
@@ -3708,7 +3708,7 @@
                 </a:solidFill>
                 <a:latin typeface="Calibri"/>
               </a:rPr>
-              <a:t>361</a:t>
+              <a:t>362</a:t>
             </a:r>
           </a:p>
         </p:txBody>
@@ -3823,7 +3823,7 @@
                 </a:solidFill>
                 <a:latin typeface="Calibri"/>
               </a:rPr>
-              <a:t>360</a:t>
+              <a:t>357</a:t>
             </a:r>
           </a:p>
         </p:txBody>
@@ -3938,7 +3938,7 @@
                 </a:solidFill>
                 <a:latin typeface="Calibri"/>
               </a:rPr>
-              <a:t>1</a:t>
+              <a:t>5</a:t>
             </a:r>
           </a:p>
         </p:txBody>
@@ -4053,7 +4053,7 @@
                 </a:solidFill>
                 <a:latin typeface="Calibri"/>
               </a:rPr>
-              <a:t>99.7%</a:t>
+              <a:t>98.6%</a:t>
             </a:r>
           </a:p>
         </p:txBody>
@@ -4154,30 +4154,30 @@
                           </a:solidFill>
                           <a:latin typeface="Calibri"/>
                         </a:rPr>
+                        <a:t>Abril 2026</a:t>
+                      </a:r>
+                    </a:p>
+                  </a:txBody>
+                  <a:tcPr>
+                    <a:solidFill>
+                      <a:srgbClr val="1D1B43"/>
+                    </a:solidFill>
+                  </a:tcPr>
+                </a:tc>
+                <a:tc>
+                  <a:txBody>
+                    <a:bodyPr/>
+                    <a:lstStyle/>
+                    <a:p>
+                      <a:pPr algn="ctr"/>
+                      <a:r>
+                        <a:rPr sz="1100" b="1">
+                          <a:solidFill>
+                            <a:srgbClr val="FFFFFF"/>
+                          </a:solidFill>
+                          <a:latin typeface="Calibri"/>
+                        </a:rPr>
                         <a:t>Maio 2026</a:t>
-                      </a:r>
-                    </a:p>
-                  </a:txBody>
-                  <a:tcPr>
-                    <a:solidFill>
-                      <a:srgbClr val="1D1B43"/>
-                    </a:solidFill>
-                  </a:tcPr>
-                </a:tc>
-                <a:tc>
-                  <a:txBody>
-                    <a:bodyPr/>
-                    <a:lstStyle/>
-                    <a:p>
-                      <a:pPr algn="ctr"/>
-                      <a:r>
-                        <a:rPr sz="1100" b="1">
-                          <a:solidFill>
-                            <a:srgbClr val="FFFFFF"/>
-                          </a:solidFill>
-                          <a:latin typeface="Calibri"/>
-                        </a:rPr>
-                        <a:t>Abril 2026</a:t>
                       </a:r>
                     </a:p>
                   </a:txBody>
@@ -4248,7 +4248,7 @@
                           </a:solidFill>
                           <a:latin typeface="Calibri"/>
                         </a:rPr>
-                        <a:t>303</a:t>
+                        <a:t>361</a:t>
                       </a:r>
                     </a:p>
                   </a:txBody>
@@ -4271,7 +4271,7 @@
                           </a:solidFill>
                           <a:latin typeface="Calibri"/>
                         </a:rPr>
-                        <a:t>361</a:t>
+                        <a:t>362</a:t>
                       </a:r>
                     </a:p>
                   </a:txBody>
@@ -4294,7 +4294,7 @@
                           </a:solidFill>
                           <a:latin typeface="Calibri"/>
                         </a:rPr>
-                        <a:t>+ 58</a:t>
+                        <a:t>+ 1</a:t>
                       </a:r>
                     </a:p>
                   </a:txBody>
@@ -4342,7 +4342,7 @@
                           </a:solidFill>
                           <a:latin typeface="Calibri"/>
                         </a:rPr>
-                        <a:t>281</a:t>
+                        <a:t>360</a:t>
                       </a:r>
                     </a:p>
                   </a:txBody>
@@ -4365,7 +4365,7 @@
                           </a:solidFill>
                           <a:latin typeface="Calibri"/>
                         </a:rPr>
-                        <a:t>360</a:t>
+                        <a:t>357</a:t>
                       </a:r>
                     </a:p>
                   </a:txBody>
@@ -4388,7 +4388,7 @@
                           </a:solidFill>
                           <a:latin typeface="Calibri"/>
                         </a:rPr>
-                        <a:t>+ 79</a:t>
+                        <a:t>- 3</a:t>
                       </a:r>
                     </a:p>
                   </a:txBody>
@@ -4436,7 +4436,7 @@
                           </a:solidFill>
                           <a:latin typeface="Calibri"/>
                         </a:rPr>
-                        <a:t>22</a:t>
+                        <a:t>1</a:t>
                       </a:r>
                     </a:p>
                   </a:txBody>
@@ -4459,7 +4459,7 @@
                           </a:solidFill>
                           <a:latin typeface="Calibri"/>
                         </a:rPr>
-                        <a:t>1</a:t>
+                        <a:t>5</a:t>
                       </a:r>
                     </a:p>
                   </a:txBody>
@@ -4482,7 +4482,7 @@
                           </a:solidFill>
                           <a:latin typeface="Calibri"/>
                         </a:rPr>
-                        <a:t>- 21</a:t>
+                        <a:t>+ 4</a:t>
                       </a:r>
                     </a:p>
                   </a:txBody>
@@ -4530,7 +4530,7 @@
                           </a:solidFill>
                           <a:latin typeface="Calibri"/>
                         </a:rPr>
-                        <a:t>92.7%</a:t>
+                        <a:t>99.7%</a:t>
                       </a:r>
                     </a:p>
                   </a:txBody>
@@ -4553,7 +4553,7 @@
                           </a:solidFill>
                           <a:latin typeface="Calibri"/>
                         </a:rPr>
-                        <a:t>99.7%</a:t>
+                        <a:t>98.6%</a:t>
                       </a:r>
                     </a:p>
                   </a:txBody>
@@ -4576,7 +4576,7 @@
                           </a:solidFill>
                           <a:latin typeface="Calibri"/>
                         </a:rPr>
-                        <a:t>+ 7.0pp</a:t>
+                        <a:t>- 1.1pp</a:t>
                       </a:r>
                     </a:p>
                   </a:txBody>
@@ -4893,7 +4893,7 @@
                           </a:solidFill>
                           <a:latin typeface="Calibri"/>
                         </a:rPr>
-                        <a:t>Maio 2026</a:t>
+                        <a:t>Abril 2026</a:t>
                       </a:r>
                     </a:p>
                   </a:txBody>
@@ -4916,7 +4916,7 @@
                           </a:solidFill>
                           <a:latin typeface="Calibri"/>
                         </a:rPr>
-                        <a:t>303</a:t>
+                        <a:t>361</a:t>
                       </a:r>
                     </a:p>
                   </a:txBody>
@@ -4939,7 +4939,7 @@
                           </a:solidFill>
                           <a:latin typeface="Calibri"/>
                         </a:rPr>
-                        <a:t>281</a:t>
+                        <a:t>360</a:t>
                       </a:r>
                     </a:p>
                   </a:txBody>
@@ -4962,7 +4962,7 @@
                           </a:solidFill>
                           <a:latin typeface="Calibri"/>
                         </a:rPr>
-                        <a:t>22</a:t>
+                        <a:t>1</a:t>
                       </a:r>
                     </a:p>
                   </a:txBody>
@@ -4985,7 +4985,7 @@
                           </a:solidFill>
                           <a:latin typeface="Calibri"/>
                         </a:rPr>
-                        <a:t>92.7%</a:t>
+                        <a:t>99.7%</a:t>
                       </a:r>
                     </a:p>
                   </a:txBody>
@@ -5010,7 +5010,7 @@
                           </a:solidFill>
                           <a:latin typeface="Calibri"/>
                         </a:rPr>
-                        <a:t>Abril 2026</a:t>
+                        <a:t>Maio 2026</a:t>
                       </a:r>
                     </a:p>
                   </a:txBody>
@@ -5033,7 +5033,7 @@
                           </a:solidFill>
                           <a:latin typeface="Calibri"/>
                         </a:rPr>
-                        <a:t>361</a:t>
+                        <a:t>362</a:t>
                       </a:r>
                     </a:p>
                   </a:txBody>
@@ -5056,7 +5056,7 @@
                           </a:solidFill>
                           <a:latin typeface="Calibri"/>
                         </a:rPr>
-                        <a:t>360</a:t>
+                        <a:t>357</a:t>
                       </a:r>
                     </a:p>
                   </a:txBody>
@@ -5079,7 +5079,7 @@
                           </a:solidFill>
                           <a:latin typeface="Calibri"/>
                         </a:rPr>
-                        <a:t>1</a:t>
+                        <a:t>5</a:t>
                       </a:r>
                     </a:p>
                   </a:txBody>
@@ -5102,7 +5102,7 @@
                           </a:solidFill>
                           <a:latin typeface="Calibri"/>
                         </a:rPr>
-                        <a:t>99.7%</a:t>
+                        <a:t>98.6%</a:t>
                       </a:r>
                     </a:p>
                   </a:txBody>
@@ -5190,7 +5190,7 @@
                 </a:solidFill>
                 <a:latin typeface="Calibri"/>
               </a:rPr>
-              <a:t>PERFORMANCE: 99.7% - EXCELENTE</a:t>
+              <a:t>PERFORMANCE: 98.6% - EXCELENTE</a:t>
             </a:r>
           </a:p>
         </p:txBody>
@@ -5275,7 +5275,7 @@
                 </a:solidFill>
                 <a:latin typeface="Calibri"/>
               </a:rPr>
-              <a:t>OCORRENCIAS FORA DO PRAZO (1)</a:t>
+              <a:t>OCORRENCIAS FORA DO PRAZO (5)</a:t>
             </a:r>
           </a:p>
         </p:txBody>
@@ -5333,7 +5333,7 @@
         </p:nvGraphicFramePr>
         <p:xfrm>
           <a:off x="457200" y="1828800"/>
-          <a:ext cx="11429999" cy="768096"/>
+          <a:ext cx="11429999" cy="2304288"/>
         </p:xfrm>
         <a:graphic>
           <a:graphicData uri="http://schemas.openxmlformats.org/drawingml/2006/table">
@@ -5479,7 +5479,7 @@
                           </a:solidFill>
                           <a:latin typeface="Calibri"/>
                         </a:rPr>
-                        <a:t>279635</a:t>
+                        <a:t>282179</a:t>
                       </a:r>
                     </a:p>
                   </a:txBody>
@@ -5502,6 +5502,240 @@
                           </a:solidFill>
                           <a:latin typeface="Calibri"/>
                         </a:rPr>
+                        <a:t>BMQ AUTOMOVEIS LTDA - BELO HORIZONTE / MG</a:t>
+                      </a:r>
+                    </a:p>
+                  </a:txBody>
+                  <a:tcPr>
+                    <a:solidFill>
+                      <a:srgbClr val="FFFFFF"/>
+                    </a:solidFill>
+                  </a:tcPr>
+                </a:tc>
+                <a:tc>
+                  <a:txBody>
+                    <a:bodyPr/>
+                    <a:lstStyle/>
+                    <a:p>
+                      <a:pPr algn="l"/>
+                      <a:r>
+                        <a:rPr sz="1000" b="0">
+                          <a:solidFill>
+                            <a:srgbClr val="1D1B43"/>
+                          </a:solidFill>
+                          <a:latin typeface="Calibri"/>
+                        </a:rPr>
+                        <a:t>BELO HORIZONTE/MG</a:t>
+                      </a:r>
+                    </a:p>
+                  </a:txBody>
+                  <a:tcPr>
+                    <a:solidFill>
+                      <a:srgbClr val="FFFFFF"/>
+                    </a:solidFill>
+                  </a:tcPr>
+                </a:tc>
+                <a:tc>
+                  <a:txBody>
+                    <a:bodyPr/>
+                    <a:lstStyle/>
+                    <a:p>
+                      <a:pPr algn="l"/>
+                      <a:r>
+                        <a:rPr sz="1000" b="0">
+                          <a:solidFill>
+                            <a:srgbClr val="1D1B43"/>
+                          </a:solidFill>
+                          <a:latin typeface="Calibri"/>
+                        </a:rPr>
+                        <a:t>12/05/2026</a:t>
+                      </a:r>
+                    </a:p>
+                  </a:txBody>
+                  <a:tcPr>
+                    <a:solidFill>
+                      <a:srgbClr val="FFFFFF"/>
+                    </a:solidFill>
+                  </a:tcPr>
+                </a:tc>
+                <a:tc>
+                  <a:txBody>
+                    <a:bodyPr/>
+                    <a:lstStyle/>
+                    <a:p>
+                      <a:pPr algn="l"/>
+                      <a:r>
+                        <a:rPr sz="1000" b="0">
+                          <a:solidFill>
+                            <a:srgbClr val="1D1B43"/>
+                          </a:solidFill>
+                          <a:latin typeface="Calibri"/>
+                        </a:rPr>
+                        <a:t>ENTREGUE FORA DO PRAZO</a:t>
+                      </a:r>
+                    </a:p>
+                  </a:txBody>
+                  <a:tcPr>
+                    <a:solidFill>
+                      <a:srgbClr val="FFFFFF"/>
+                    </a:solidFill>
+                  </a:tcPr>
+                </a:tc>
+              </a:tr>
+              <a:tr h="384048">
+                <a:tc>
+                  <a:txBody>
+                    <a:bodyPr/>
+                    <a:lstStyle/>
+                    <a:p>
+                      <a:pPr algn="l"/>
+                      <a:r>
+                        <a:rPr sz="1000" b="0">
+                          <a:solidFill>
+                            <a:srgbClr val="1D1B43"/>
+                          </a:solidFill>
+                          <a:latin typeface="Calibri"/>
+                        </a:rPr>
+                        <a:t>283317</a:t>
+                      </a:r>
+                    </a:p>
+                  </a:txBody>
+                  <a:tcPr>
+                    <a:solidFill>
+                      <a:srgbClr val="F2F2F2"/>
+                    </a:solidFill>
+                  </a:tcPr>
+                </a:tc>
+                <a:tc>
+                  <a:txBody>
+                    <a:bodyPr/>
+                    <a:lstStyle/>
+                    <a:p>
+                      <a:pPr algn="l"/>
+                      <a:r>
+                        <a:rPr sz="1000" b="0">
+                          <a:solidFill>
+                            <a:srgbClr val="1D1B43"/>
+                          </a:solidFill>
+                          <a:latin typeface="Calibri"/>
+                        </a:rPr>
+                        <a:t>LIA E ANNETTE INDUST - RIO DE JANEIRO / RJ</a:t>
+                      </a:r>
+                    </a:p>
+                  </a:txBody>
+                  <a:tcPr>
+                    <a:solidFill>
+                      <a:srgbClr val="F2F2F2"/>
+                    </a:solidFill>
+                  </a:tcPr>
+                </a:tc>
+                <a:tc>
+                  <a:txBody>
+                    <a:bodyPr/>
+                    <a:lstStyle/>
+                    <a:p>
+                      <a:pPr algn="l"/>
+                      <a:r>
+                        <a:rPr sz="1000" b="0">
+                          <a:solidFill>
+                            <a:srgbClr val="1D1B43"/>
+                          </a:solidFill>
+                          <a:latin typeface="Calibri"/>
+                        </a:rPr>
+                        <a:t>RIO DE JANEIRO/RJ</a:t>
+                      </a:r>
+                    </a:p>
+                  </a:txBody>
+                  <a:tcPr>
+                    <a:solidFill>
+                      <a:srgbClr val="F2F2F2"/>
+                    </a:solidFill>
+                  </a:tcPr>
+                </a:tc>
+                <a:tc>
+                  <a:txBody>
+                    <a:bodyPr/>
+                    <a:lstStyle/>
+                    <a:p>
+                      <a:pPr algn="l"/>
+                      <a:r>
+                        <a:rPr sz="1000" b="0">
+                          <a:solidFill>
+                            <a:srgbClr val="1D1B43"/>
+                          </a:solidFill>
+                          <a:latin typeface="Calibri"/>
+                        </a:rPr>
+                        <a:t>19/05/2026</a:t>
+                      </a:r>
+                    </a:p>
+                  </a:txBody>
+                  <a:tcPr>
+                    <a:solidFill>
+                      <a:srgbClr val="F2F2F2"/>
+                    </a:solidFill>
+                  </a:tcPr>
+                </a:tc>
+                <a:tc>
+                  <a:txBody>
+                    <a:bodyPr/>
+                    <a:lstStyle/>
+                    <a:p>
+                      <a:pPr algn="l"/>
+                      <a:r>
+                        <a:rPr sz="1000" b="0">
+                          <a:solidFill>
+                            <a:srgbClr val="1D1B43"/>
+                          </a:solidFill>
+                          <a:latin typeface="Calibri"/>
+                        </a:rPr>
+                        <a:t>ENTREGUE FORA DO PRAZO</a:t>
+                      </a:r>
+                    </a:p>
+                  </a:txBody>
+                  <a:tcPr>
+                    <a:solidFill>
+                      <a:srgbClr val="F2F2F2"/>
+                    </a:solidFill>
+                  </a:tcPr>
+                </a:tc>
+              </a:tr>
+              <a:tr h="384048">
+                <a:tc>
+                  <a:txBody>
+                    <a:bodyPr/>
+                    <a:lstStyle/>
+                    <a:p>
+                      <a:pPr algn="l"/>
+                      <a:r>
+                        <a:rPr sz="1000" b="0">
+                          <a:solidFill>
+                            <a:srgbClr val="1D1B43"/>
+                          </a:solidFill>
+                          <a:latin typeface="Calibri"/>
+                        </a:rPr>
+                        <a:t>284774</a:t>
+                      </a:r>
+                    </a:p>
+                  </a:txBody>
+                  <a:tcPr>
+                    <a:solidFill>
+                      <a:srgbClr val="FFFFFF"/>
+                    </a:solidFill>
+                  </a:tcPr>
+                </a:tc>
+                <a:tc>
+                  <a:txBody>
+                    <a:bodyPr/>
+                    <a:lstStyle/>
+                    <a:p>
+                      <a:pPr algn="l"/>
+                      <a:r>
+                        <a:rPr sz="1000" b="0">
+                          <a:solidFill>
+                            <a:srgbClr val="1D1B43"/>
+                          </a:solidFill>
+                          <a:latin typeface="Calibri"/>
+                        </a:rPr>
                         <a:t>MRH VEICULOS LTDA - RIBEIRAO PRETO / SP</a:t>
                       </a:r>
                     </a:p>
@@ -5548,7 +5782,7 @@
                           </a:solidFill>
                           <a:latin typeface="Calibri"/>
                         </a:rPr>
-                        <a:t>23/04/2026</a:t>
+                        <a:t>27/05/2026</a:t>
                       </a:r>
                     </a:p>
                   </a:txBody>
@@ -5572,6 +5806,240 @@
                           <a:latin typeface="Calibri"/>
                         </a:rPr>
                         <a:t>ENTREGUE FORA DO PRAZO</a:t>
+                      </a:r>
+                    </a:p>
+                  </a:txBody>
+                  <a:tcPr>
+                    <a:solidFill>
+                      <a:srgbClr val="FFFFFF"/>
+                    </a:solidFill>
+                  </a:tcPr>
+                </a:tc>
+              </a:tr>
+              <a:tr h="384048">
+                <a:tc>
+                  <a:txBody>
+                    <a:bodyPr/>
+                    <a:lstStyle/>
+                    <a:p>
+                      <a:pPr algn="l"/>
+                      <a:r>
+                        <a:rPr sz="1000" b="0">
+                          <a:solidFill>
+                            <a:srgbClr val="1D1B43"/>
+                          </a:solidFill>
+                          <a:latin typeface="Calibri"/>
+                        </a:rPr>
+                        <a:t>285038</a:t>
+                      </a:r>
+                    </a:p>
+                  </a:txBody>
+                  <a:tcPr>
+                    <a:solidFill>
+                      <a:srgbClr val="F2F2F2"/>
+                    </a:solidFill>
+                  </a:tcPr>
+                </a:tc>
+                <a:tc>
+                  <a:txBody>
+                    <a:bodyPr/>
+                    <a:lstStyle/>
+                    <a:p>
+                      <a:pPr algn="l"/>
+                      <a:r>
+                        <a:rPr sz="1000" b="0">
+                          <a:solidFill>
+                            <a:srgbClr val="1D1B43"/>
+                          </a:solidFill>
+                          <a:latin typeface="Calibri"/>
+                        </a:rPr>
+                        <a:t>MRH VEICULOS - CURITIBA / PR</a:t>
+                      </a:r>
+                    </a:p>
+                  </a:txBody>
+                  <a:tcPr>
+                    <a:solidFill>
+                      <a:srgbClr val="F2F2F2"/>
+                    </a:solidFill>
+                  </a:tcPr>
+                </a:tc>
+                <a:tc>
+                  <a:txBody>
+                    <a:bodyPr/>
+                    <a:lstStyle/>
+                    <a:p>
+                      <a:pPr algn="l"/>
+                      <a:r>
+                        <a:rPr sz="1000" b="0">
+                          <a:solidFill>
+                            <a:srgbClr val="1D1B43"/>
+                          </a:solidFill>
+                          <a:latin typeface="Calibri"/>
+                        </a:rPr>
+                        <a:t>CURITIBA/PR</a:t>
+                      </a:r>
+                    </a:p>
+                  </a:txBody>
+                  <a:tcPr>
+                    <a:solidFill>
+                      <a:srgbClr val="F2F2F2"/>
+                    </a:solidFill>
+                  </a:tcPr>
+                </a:tc>
+                <a:tc>
+                  <a:txBody>
+                    <a:bodyPr/>
+                    <a:lstStyle/>
+                    <a:p>
+                      <a:pPr algn="l"/>
+                      <a:r>
+                        <a:rPr sz="1000" b="0">
+                          <a:solidFill>
+                            <a:srgbClr val="1D1B43"/>
+                          </a:solidFill>
+                          <a:latin typeface="Calibri"/>
+                        </a:rPr>
+                        <a:t>29/05/2026</a:t>
+                      </a:r>
+                    </a:p>
+                  </a:txBody>
+                  <a:tcPr>
+                    <a:solidFill>
+                      <a:srgbClr val="F2F2F2"/>
+                    </a:solidFill>
+                  </a:tcPr>
+                </a:tc>
+                <a:tc>
+                  <a:txBody>
+                    <a:bodyPr/>
+                    <a:lstStyle/>
+                    <a:p>
+                      <a:pPr algn="l"/>
+                      <a:r>
+                        <a:rPr sz="1000" b="0">
+                          <a:solidFill>
+                            <a:srgbClr val="1D1B43"/>
+                          </a:solidFill>
+                          <a:latin typeface="Calibri"/>
+                        </a:rPr>
+                        <a:t>ENTREGUE FORA DO PRAZO</a:t>
+                      </a:r>
+                    </a:p>
+                  </a:txBody>
+                  <a:tcPr>
+                    <a:solidFill>
+                      <a:srgbClr val="F2F2F2"/>
+                    </a:solidFill>
+                  </a:tcPr>
+                </a:tc>
+              </a:tr>
+              <a:tr h="384048">
+                <a:tc>
+                  <a:txBody>
+                    <a:bodyPr/>
+                    <a:lstStyle/>
+                    <a:p>
+                      <a:pPr algn="l"/>
+                      <a:r>
+                        <a:rPr sz="1000" b="0">
+                          <a:solidFill>
+                            <a:srgbClr val="1D1B43"/>
+                          </a:solidFill>
+                          <a:latin typeface="Calibri"/>
+                        </a:rPr>
+                        <a:t>285409</a:t>
+                      </a:r>
+                    </a:p>
+                  </a:txBody>
+                  <a:tcPr>
+                    <a:solidFill>
+                      <a:srgbClr val="FFFFFF"/>
+                    </a:solidFill>
+                  </a:tcPr>
+                </a:tc>
+                <a:tc>
+                  <a:txBody>
+                    <a:bodyPr/>
+                    <a:lstStyle/>
+                    <a:p>
+                      <a:pPr algn="l"/>
+                      <a:r>
+                        <a:rPr sz="1000" b="0">
+                          <a:solidFill>
+                            <a:srgbClr val="1D1B43"/>
+                          </a:solidFill>
+                          <a:latin typeface="Calibri"/>
+                        </a:rPr>
+                        <a:t>FORTE ARMAZENS GERAI - ITAJAI / SC</a:t>
+                      </a:r>
+                    </a:p>
+                  </a:txBody>
+                  <a:tcPr>
+                    <a:solidFill>
+                      <a:srgbClr val="FFFFFF"/>
+                    </a:solidFill>
+                  </a:tcPr>
+                </a:tc>
+                <a:tc>
+                  <a:txBody>
+                    <a:bodyPr/>
+                    <a:lstStyle/>
+                    <a:p>
+                      <a:pPr algn="l"/>
+                      <a:r>
+                        <a:rPr sz="1000" b="0">
+                          <a:solidFill>
+                            <a:srgbClr val="1D1B43"/>
+                          </a:solidFill>
+                          <a:latin typeface="Calibri"/>
+                        </a:rPr>
+                        <a:t>ITAJAI/SC</a:t>
+                      </a:r>
+                    </a:p>
+                  </a:txBody>
+                  <a:tcPr>
+                    <a:solidFill>
+                      <a:srgbClr val="FFFFFF"/>
+                    </a:solidFill>
+                  </a:tcPr>
+                </a:tc>
+                <a:tc>
+                  <a:txBody>
+                    <a:bodyPr/>
+                    <a:lstStyle/>
+                    <a:p>
+                      <a:pPr algn="l"/>
+                      <a:r>
+                        <a:rPr sz="1000" b="0">
+                          <a:solidFill>
+                            <a:srgbClr val="1D1B43"/>
+                          </a:solidFill>
+                          <a:latin typeface="Calibri"/>
+                        </a:rPr>
+                        <a:t>29/05/2026</a:t>
+                      </a:r>
+                    </a:p>
+                  </a:txBody>
+                  <a:tcPr>
+                    <a:solidFill>
+                      <a:srgbClr val="FFFFFF"/>
+                    </a:solidFill>
+                  </a:tcPr>
+                </a:tc>
+                <a:tc>
+                  <a:txBody>
+                    <a:bodyPr/>
+                    <a:lstStyle/>
+                    <a:p>
+                      <a:pPr algn="l"/>
+                      <a:r>
+                        <a:rPr sz="1000" b="0">
+                          <a:solidFill>
+                            <a:srgbClr val="1D1B43"/>
+                          </a:solidFill>
+                          <a:latin typeface="Calibri"/>
+                        </a:rPr>
+                        <a:t>FORA DO PRAZO</a:t>
                       </a:r>
                     </a:p>
                   </a:txBody>
@@ -5724,7 +6192,7 @@
         </p:nvGraphicFramePr>
         <p:xfrm>
           <a:off x="731520" y="1920240"/>
-          <a:ext cx="10698480" cy="4389120"/>
+          <a:ext cx="10698480" cy="4114800"/>
         </p:xfrm>
         <a:graphic>
           <a:graphicData uri="http://schemas.openxmlformats.org/drawingml/2006/table">
@@ -5740,7 +6208,7 @@
                 <a:gridCol w="1554480"/>
                 <a:gridCol w="3108960"/>
               </a:tblGrid>
-              <a:tr h="438912">
+              <a:tr h="457200">
                 <a:tc>
                   <a:txBody>
                     <a:bodyPr/>
@@ -5880,7 +6348,7 @@
                   </a:tcPr>
                 </a:tc>
               </a:tr>
-              <a:tr h="438912">
+              <a:tr h="457200">
                 <a:tc>
                   <a:txBody>
                     <a:bodyPr/>
@@ -5917,7 +6385,7 @@
                           </a:solidFill>
                           <a:latin typeface="Calibri"/>
                         </a:rPr>
-                        <a:t>150</a:t>
+                        <a:t>153</a:t>
                       </a:r>
                     </a:p>
                   </a:txBody>
@@ -5940,7 +6408,7 @@
                           </a:solidFill>
                           <a:latin typeface="Calibri"/>
                         </a:rPr>
-                        <a:t>149</a:t>
+                        <a:t>152</a:t>
                       </a:r>
                     </a:p>
                   </a:txBody>
@@ -6020,7 +6488,7 @@
                   </a:tcPr>
                 </a:tc>
               </a:tr>
-              <a:tr h="438912">
+              <a:tr h="457200">
                 <a:tc>
                   <a:txBody>
                     <a:bodyPr/>
@@ -6057,7 +6525,7 @@
                           </a:solidFill>
                           <a:latin typeface="Calibri"/>
                         </a:rPr>
-                        <a:t>44</a:t>
+                        <a:t>51</a:t>
                       </a:r>
                     </a:p>
                   </a:txBody>
@@ -6080,7 +6548,7 @@
                           </a:solidFill>
                           <a:latin typeface="Calibri"/>
                         </a:rPr>
-                        <a:t>44</a:t>
+                        <a:t>50</a:t>
                       </a:r>
                     </a:p>
                   </a:txBody>
@@ -6103,12 +6571,503 @@
                           </a:solidFill>
                           <a:latin typeface="Calibri"/>
                         </a:rPr>
+                        <a:t>1</a:t>
+                      </a:r>
+                    </a:p>
+                  </a:txBody>
+                  <a:tcPr>
+                    <a:solidFill>
+                      <a:srgbClr val="F2F2F2"/>
+                    </a:solidFill>
+                  </a:tcPr>
+                </a:tc>
+                <a:tc>
+                  <a:txBody>
+                    <a:bodyPr/>
+                    <a:lstStyle/>
+                    <a:p>
+                      <a:pPr algn="l"/>
+                      <a:r>
+                        <a:rPr sz="1000" b="0">
+                          <a:solidFill>
+                            <a:srgbClr val="1D1B43"/>
+                          </a:solidFill>
+                          <a:latin typeface="Calibri"/>
+                        </a:rPr>
+                        <a:t>98.0%</a:t>
+                      </a:r>
+                    </a:p>
+                  </a:txBody>
+                  <a:tcPr>
+                    <a:solidFill>
+                      <a:srgbClr val="F2F2F2"/>
+                    </a:solidFill>
+                  </a:tcPr>
+                </a:tc>
+                <a:tc>
+                  <a:txBody>
+                    <a:bodyPr/>
+                    <a:lstStyle/>
+                    <a:p>
+                      <a:pPr algn="l"/>
+                      <a:r>
+                        <a:rPr sz="1000" b="0">
+                          <a:solidFill>
+                            <a:srgbClr val="1D1B43"/>
+                          </a:solidFill>
+                          <a:latin typeface="Calibri"/>
+                        </a:rPr>
+                        <a:t>Excelente</a:t>
+                      </a:r>
+                    </a:p>
+                  </a:txBody>
+                  <a:tcPr>
+                    <a:solidFill>
+                      <a:srgbClr val="F2F2F2"/>
+                    </a:solidFill>
+                  </a:tcPr>
+                </a:tc>
+              </a:tr>
+              <a:tr h="457200">
+                <a:tc>
+                  <a:txBody>
+                    <a:bodyPr/>
+                    <a:lstStyle/>
+                    <a:p>
+                      <a:pPr algn="l"/>
+                      <a:r>
+                        <a:rPr sz="1000" b="0">
+                          <a:solidFill>
+                            <a:srgbClr val="1D1B43"/>
+                          </a:solidFill>
+                          <a:latin typeface="Calibri"/>
+                        </a:rPr>
+                        <a:t>RJ</a:t>
+                      </a:r>
+                    </a:p>
+                  </a:txBody>
+                  <a:tcPr>
+                    <a:solidFill>
+                      <a:srgbClr val="FFFFFF"/>
+                    </a:solidFill>
+                  </a:tcPr>
+                </a:tc>
+                <a:tc>
+                  <a:txBody>
+                    <a:bodyPr/>
+                    <a:lstStyle/>
+                    <a:p>
+                      <a:pPr algn="l"/>
+                      <a:r>
+                        <a:rPr sz="1000" b="0">
+                          <a:solidFill>
+                            <a:srgbClr val="1D1B43"/>
+                          </a:solidFill>
+                          <a:latin typeface="Calibri"/>
+                        </a:rPr>
+                        <a:t>38</a:t>
+                      </a:r>
+                    </a:p>
+                  </a:txBody>
+                  <a:tcPr>
+                    <a:solidFill>
+                      <a:srgbClr val="FFFFFF"/>
+                    </a:solidFill>
+                  </a:tcPr>
+                </a:tc>
+                <a:tc>
+                  <a:txBody>
+                    <a:bodyPr/>
+                    <a:lstStyle/>
+                    <a:p>
+                      <a:pPr algn="l"/>
+                      <a:r>
+                        <a:rPr sz="1000" b="0">
+                          <a:solidFill>
+                            <a:srgbClr val="1D1B43"/>
+                          </a:solidFill>
+                          <a:latin typeface="Calibri"/>
+                        </a:rPr>
+                        <a:t>37</a:t>
+                      </a:r>
+                    </a:p>
+                  </a:txBody>
+                  <a:tcPr>
+                    <a:solidFill>
+                      <a:srgbClr val="FFFFFF"/>
+                    </a:solidFill>
+                  </a:tcPr>
+                </a:tc>
+                <a:tc>
+                  <a:txBody>
+                    <a:bodyPr/>
+                    <a:lstStyle/>
+                    <a:p>
+                      <a:pPr algn="l"/>
+                      <a:r>
+                        <a:rPr sz="1000" b="0">
+                          <a:solidFill>
+                            <a:srgbClr val="1D1B43"/>
+                          </a:solidFill>
+                          <a:latin typeface="Calibri"/>
+                        </a:rPr>
+                        <a:t>1</a:t>
+                      </a:r>
+                    </a:p>
+                  </a:txBody>
+                  <a:tcPr>
+                    <a:solidFill>
+                      <a:srgbClr val="FFFFFF"/>
+                    </a:solidFill>
+                  </a:tcPr>
+                </a:tc>
+                <a:tc>
+                  <a:txBody>
+                    <a:bodyPr/>
+                    <a:lstStyle/>
+                    <a:p>
+                      <a:pPr algn="l"/>
+                      <a:r>
+                        <a:rPr sz="1000" b="0">
+                          <a:solidFill>
+                            <a:srgbClr val="1D1B43"/>
+                          </a:solidFill>
+                          <a:latin typeface="Calibri"/>
+                        </a:rPr>
+                        <a:t>97.4%</a:t>
+                      </a:r>
+                    </a:p>
+                  </a:txBody>
+                  <a:tcPr>
+                    <a:solidFill>
+                      <a:srgbClr val="FFFFFF"/>
+                    </a:solidFill>
+                  </a:tcPr>
+                </a:tc>
+                <a:tc>
+                  <a:txBody>
+                    <a:bodyPr/>
+                    <a:lstStyle/>
+                    <a:p>
+                      <a:pPr algn="l"/>
+                      <a:r>
+                        <a:rPr sz="1000" b="0">
+                          <a:solidFill>
+                            <a:srgbClr val="1D1B43"/>
+                          </a:solidFill>
+                          <a:latin typeface="Calibri"/>
+                        </a:rPr>
+                        <a:t>Excelente</a:t>
+                      </a:r>
+                    </a:p>
+                  </a:txBody>
+                  <a:tcPr>
+                    <a:solidFill>
+                      <a:srgbClr val="FFFFFF"/>
+                    </a:solidFill>
+                  </a:tcPr>
+                </a:tc>
+              </a:tr>
+              <a:tr h="457200">
+                <a:tc>
+                  <a:txBody>
+                    <a:bodyPr/>
+                    <a:lstStyle/>
+                    <a:p>
+                      <a:pPr algn="l"/>
+                      <a:r>
+                        <a:rPr sz="1000" b="0">
+                          <a:solidFill>
+                            <a:srgbClr val="1D1B43"/>
+                          </a:solidFill>
+                          <a:latin typeface="Calibri"/>
+                        </a:rPr>
+                        <a:t>PR</a:t>
+                      </a:r>
+                    </a:p>
+                  </a:txBody>
+                  <a:tcPr>
+                    <a:solidFill>
+                      <a:srgbClr val="F2F2F2"/>
+                    </a:solidFill>
+                  </a:tcPr>
+                </a:tc>
+                <a:tc>
+                  <a:txBody>
+                    <a:bodyPr/>
+                    <a:lstStyle/>
+                    <a:p>
+                      <a:pPr algn="l"/>
+                      <a:r>
+                        <a:rPr sz="1000" b="0">
+                          <a:solidFill>
+                            <a:srgbClr val="1D1B43"/>
+                          </a:solidFill>
+                          <a:latin typeface="Calibri"/>
+                        </a:rPr>
+                        <a:t>37</a:t>
+                      </a:r>
+                    </a:p>
+                  </a:txBody>
+                  <a:tcPr>
+                    <a:solidFill>
+                      <a:srgbClr val="F2F2F2"/>
+                    </a:solidFill>
+                  </a:tcPr>
+                </a:tc>
+                <a:tc>
+                  <a:txBody>
+                    <a:bodyPr/>
+                    <a:lstStyle/>
+                    <a:p>
+                      <a:pPr algn="l"/>
+                      <a:r>
+                        <a:rPr sz="1000" b="0">
+                          <a:solidFill>
+                            <a:srgbClr val="1D1B43"/>
+                          </a:solidFill>
+                          <a:latin typeface="Calibri"/>
+                        </a:rPr>
+                        <a:t>36</a:t>
+                      </a:r>
+                    </a:p>
+                  </a:txBody>
+                  <a:tcPr>
+                    <a:solidFill>
+                      <a:srgbClr val="F2F2F2"/>
+                    </a:solidFill>
+                  </a:tcPr>
+                </a:tc>
+                <a:tc>
+                  <a:txBody>
+                    <a:bodyPr/>
+                    <a:lstStyle/>
+                    <a:p>
+                      <a:pPr algn="l"/>
+                      <a:r>
+                        <a:rPr sz="1000" b="0">
+                          <a:solidFill>
+                            <a:srgbClr val="1D1B43"/>
+                          </a:solidFill>
+                          <a:latin typeface="Calibri"/>
+                        </a:rPr>
+                        <a:t>1</a:t>
+                      </a:r>
+                    </a:p>
+                  </a:txBody>
+                  <a:tcPr>
+                    <a:solidFill>
+                      <a:srgbClr val="F2F2F2"/>
+                    </a:solidFill>
+                  </a:tcPr>
+                </a:tc>
+                <a:tc>
+                  <a:txBody>
+                    <a:bodyPr/>
+                    <a:lstStyle/>
+                    <a:p>
+                      <a:pPr algn="l"/>
+                      <a:r>
+                        <a:rPr sz="1000" b="0">
+                          <a:solidFill>
+                            <a:srgbClr val="1D1B43"/>
+                          </a:solidFill>
+                          <a:latin typeface="Calibri"/>
+                        </a:rPr>
+                        <a:t>97.3%</a:t>
+                      </a:r>
+                    </a:p>
+                  </a:txBody>
+                  <a:tcPr>
+                    <a:solidFill>
+                      <a:srgbClr val="F2F2F2"/>
+                    </a:solidFill>
+                  </a:tcPr>
+                </a:tc>
+                <a:tc>
+                  <a:txBody>
+                    <a:bodyPr/>
+                    <a:lstStyle/>
+                    <a:p>
+                      <a:pPr algn="l"/>
+                      <a:r>
+                        <a:rPr sz="1000" b="0">
+                          <a:solidFill>
+                            <a:srgbClr val="1D1B43"/>
+                          </a:solidFill>
+                          <a:latin typeface="Calibri"/>
+                        </a:rPr>
+                        <a:t>Excelente</a:t>
+                      </a:r>
+                    </a:p>
+                  </a:txBody>
+                  <a:tcPr>
+                    <a:solidFill>
+                      <a:srgbClr val="F2F2F2"/>
+                    </a:solidFill>
+                  </a:tcPr>
+                </a:tc>
+              </a:tr>
+              <a:tr h="457200">
+                <a:tc>
+                  <a:txBody>
+                    <a:bodyPr/>
+                    <a:lstStyle/>
+                    <a:p>
+                      <a:pPr algn="l"/>
+                      <a:r>
+                        <a:rPr sz="1000" b="0">
+                          <a:solidFill>
+                            <a:srgbClr val="1D1B43"/>
+                          </a:solidFill>
+                          <a:latin typeface="Calibri"/>
+                        </a:rPr>
+                        <a:t>GO</a:t>
+                      </a:r>
+                    </a:p>
+                  </a:txBody>
+                  <a:tcPr>
+                    <a:solidFill>
+                      <a:srgbClr val="FFFFFF"/>
+                    </a:solidFill>
+                  </a:tcPr>
+                </a:tc>
+                <a:tc>
+                  <a:txBody>
+                    <a:bodyPr/>
+                    <a:lstStyle/>
+                    <a:p>
+                      <a:pPr algn="l"/>
+                      <a:r>
+                        <a:rPr sz="1000" b="0">
+                          <a:solidFill>
+                            <a:srgbClr val="1D1B43"/>
+                          </a:solidFill>
+                          <a:latin typeface="Calibri"/>
+                        </a:rPr>
+                        <a:t>22</a:t>
+                      </a:r>
+                    </a:p>
+                  </a:txBody>
+                  <a:tcPr>
+                    <a:solidFill>
+                      <a:srgbClr val="FFFFFF"/>
+                    </a:solidFill>
+                  </a:tcPr>
+                </a:tc>
+                <a:tc>
+                  <a:txBody>
+                    <a:bodyPr/>
+                    <a:lstStyle/>
+                    <a:p>
+                      <a:pPr algn="l"/>
+                      <a:r>
+                        <a:rPr sz="1000" b="0">
+                          <a:solidFill>
+                            <a:srgbClr val="1D1B43"/>
+                          </a:solidFill>
+                          <a:latin typeface="Calibri"/>
+                        </a:rPr>
+                        <a:t>22</a:t>
+                      </a:r>
+                    </a:p>
+                  </a:txBody>
+                  <a:tcPr>
+                    <a:solidFill>
+                      <a:srgbClr val="FFFFFF"/>
+                    </a:solidFill>
+                  </a:tcPr>
+                </a:tc>
+                <a:tc>
+                  <a:txBody>
+                    <a:bodyPr/>
+                    <a:lstStyle/>
+                    <a:p>
+                      <a:pPr algn="l"/>
+                      <a:r>
+                        <a:rPr sz="1000" b="0">
+                          <a:solidFill>
+                            <a:srgbClr val="1D1B43"/>
+                          </a:solidFill>
+                          <a:latin typeface="Calibri"/>
+                        </a:rPr>
                         <a:t>0</a:t>
                       </a:r>
                     </a:p>
                   </a:txBody>
                   <a:tcPr>
                     <a:solidFill>
+                      <a:srgbClr val="FFFFFF"/>
+                    </a:solidFill>
+                  </a:tcPr>
+                </a:tc>
+                <a:tc>
+                  <a:txBody>
+                    <a:bodyPr/>
+                    <a:lstStyle/>
+                    <a:p>
+                      <a:pPr algn="l"/>
+                      <a:r>
+                        <a:rPr sz="1000" b="0">
+                          <a:solidFill>
+                            <a:srgbClr val="1D1B43"/>
+                          </a:solidFill>
+                          <a:latin typeface="Calibri"/>
+                        </a:rPr>
+                        <a:t>100.0%</a:t>
+                      </a:r>
+                    </a:p>
+                  </a:txBody>
+                  <a:tcPr>
+                    <a:solidFill>
+                      <a:srgbClr val="FFFFFF"/>
+                    </a:solidFill>
+                  </a:tcPr>
+                </a:tc>
+                <a:tc>
+                  <a:txBody>
+                    <a:bodyPr/>
+                    <a:lstStyle/>
+                    <a:p>
+                      <a:pPr algn="l"/>
+                      <a:r>
+                        <a:rPr sz="1000" b="0">
+                          <a:solidFill>
+                            <a:srgbClr val="1D1B43"/>
+                          </a:solidFill>
+                          <a:latin typeface="Calibri"/>
+                        </a:rPr>
+                        <a:t>Excelente</a:t>
+                      </a:r>
+                    </a:p>
+                  </a:txBody>
+                  <a:tcPr>
+                    <a:solidFill>
+                      <a:srgbClr val="FFFFFF"/>
+                    </a:solidFill>
+                  </a:tcPr>
+                </a:tc>
+              </a:tr>
+              <a:tr h="457200">
+                <a:tc>
+                  <a:txBody>
+                    <a:bodyPr/>
+                    <a:lstStyle/>
+                    <a:p>
+                      <a:pPr algn="l"/>
+                      <a:r>
+                        <a:rPr sz="1000" b="0">
+                          <a:solidFill>
+                            <a:srgbClr val="1D1B43"/>
+                          </a:solidFill>
+                          <a:latin typeface="Calibri"/>
+                        </a:rPr>
+                        <a:t>MG</a:t>
+                      </a:r>
+                    </a:p>
+                  </a:txBody>
+                  <a:tcPr>
+                    <a:solidFill>
                       <a:srgbClr val="F2F2F2"/>
                     </a:solidFill>
                   </a:tcPr>
@@ -6126,12 +7085,269 @@
                           </a:solidFill>
                           <a:latin typeface="Calibri"/>
                         </a:rPr>
+                        <a:t>22</a:t>
+                      </a:r>
+                    </a:p>
+                  </a:txBody>
+                  <a:tcPr>
+                    <a:solidFill>
+                      <a:srgbClr val="F2F2F2"/>
+                    </a:solidFill>
+                  </a:tcPr>
+                </a:tc>
+                <a:tc>
+                  <a:txBody>
+                    <a:bodyPr/>
+                    <a:lstStyle/>
+                    <a:p>
+                      <a:pPr algn="l"/>
+                      <a:r>
+                        <a:rPr sz="1000" b="0">
+                          <a:solidFill>
+                            <a:srgbClr val="1D1B43"/>
+                          </a:solidFill>
+                          <a:latin typeface="Calibri"/>
+                        </a:rPr>
+                        <a:t>21</a:t>
+                      </a:r>
+                    </a:p>
+                  </a:txBody>
+                  <a:tcPr>
+                    <a:solidFill>
+                      <a:srgbClr val="F2F2F2"/>
+                    </a:solidFill>
+                  </a:tcPr>
+                </a:tc>
+                <a:tc>
+                  <a:txBody>
+                    <a:bodyPr/>
+                    <a:lstStyle/>
+                    <a:p>
+                      <a:pPr algn="l"/>
+                      <a:r>
+                        <a:rPr sz="1000" b="0">
+                          <a:solidFill>
+                            <a:srgbClr val="1D1B43"/>
+                          </a:solidFill>
+                          <a:latin typeface="Calibri"/>
+                        </a:rPr>
+                        <a:t>1</a:t>
+                      </a:r>
+                    </a:p>
+                  </a:txBody>
+                  <a:tcPr>
+                    <a:solidFill>
+                      <a:srgbClr val="F2F2F2"/>
+                    </a:solidFill>
+                  </a:tcPr>
+                </a:tc>
+                <a:tc>
+                  <a:txBody>
+                    <a:bodyPr/>
+                    <a:lstStyle/>
+                    <a:p>
+                      <a:pPr algn="l"/>
+                      <a:r>
+                        <a:rPr sz="1000" b="0">
+                          <a:solidFill>
+                            <a:srgbClr val="1D1B43"/>
+                          </a:solidFill>
+                          <a:latin typeface="Calibri"/>
+                        </a:rPr>
+                        <a:t>95.5%</a:t>
+                      </a:r>
+                    </a:p>
+                  </a:txBody>
+                  <a:tcPr>
+                    <a:solidFill>
+                      <a:srgbClr val="F2F2F2"/>
+                    </a:solidFill>
+                  </a:tcPr>
+                </a:tc>
+                <a:tc>
+                  <a:txBody>
+                    <a:bodyPr/>
+                    <a:lstStyle/>
+                    <a:p>
+                      <a:pPr algn="l"/>
+                      <a:r>
+                        <a:rPr sz="1000" b="0">
+                          <a:solidFill>
+                            <a:srgbClr val="1D1B43"/>
+                          </a:solidFill>
+                          <a:latin typeface="Calibri"/>
+                        </a:rPr>
+                        <a:t>Regular</a:t>
+                      </a:r>
+                    </a:p>
+                  </a:txBody>
+                  <a:tcPr>
+                    <a:solidFill>
+                      <a:srgbClr val="F2F2F2"/>
+                    </a:solidFill>
+                  </a:tcPr>
+                </a:tc>
+              </a:tr>
+              <a:tr h="457200">
+                <a:tc>
+                  <a:txBody>
+                    <a:bodyPr/>
+                    <a:lstStyle/>
+                    <a:p>
+                      <a:pPr algn="l"/>
+                      <a:r>
+                        <a:rPr sz="1000" b="0">
+                          <a:solidFill>
+                            <a:srgbClr val="1D1B43"/>
+                          </a:solidFill>
+                          <a:latin typeface="Calibri"/>
+                        </a:rPr>
+                        <a:t>RS</a:t>
+                      </a:r>
+                    </a:p>
+                  </a:txBody>
+                  <a:tcPr>
+                    <a:solidFill>
+                      <a:srgbClr val="FFFFFF"/>
+                    </a:solidFill>
+                  </a:tcPr>
+                </a:tc>
+                <a:tc>
+                  <a:txBody>
+                    <a:bodyPr/>
+                    <a:lstStyle/>
+                    <a:p>
+                      <a:pPr algn="l"/>
+                      <a:r>
+                        <a:rPr sz="1000" b="0">
+                          <a:solidFill>
+                            <a:srgbClr val="1D1B43"/>
+                          </a:solidFill>
+                          <a:latin typeface="Calibri"/>
+                        </a:rPr>
+                        <a:t>20</a:t>
+                      </a:r>
+                    </a:p>
+                  </a:txBody>
+                  <a:tcPr>
+                    <a:solidFill>
+                      <a:srgbClr val="FFFFFF"/>
+                    </a:solidFill>
+                  </a:tcPr>
+                </a:tc>
+                <a:tc>
+                  <a:txBody>
+                    <a:bodyPr/>
+                    <a:lstStyle/>
+                    <a:p>
+                      <a:pPr algn="l"/>
+                      <a:r>
+                        <a:rPr sz="1000" b="0">
+                          <a:solidFill>
+                            <a:srgbClr val="1D1B43"/>
+                          </a:solidFill>
+                          <a:latin typeface="Calibri"/>
+                        </a:rPr>
+                        <a:t>20</a:t>
+                      </a:r>
+                    </a:p>
+                  </a:txBody>
+                  <a:tcPr>
+                    <a:solidFill>
+                      <a:srgbClr val="FFFFFF"/>
+                    </a:solidFill>
+                  </a:tcPr>
+                </a:tc>
+                <a:tc>
+                  <a:txBody>
+                    <a:bodyPr/>
+                    <a:lstStyle/>
+                    <a:p>
+                      <a:pPr algn="l"/>
+                      <a:r>
+                        <a:rPr sz="1000" b="0">
+                          <a:solidFill>
+                            <a:srgbClr val="1D1B43"/>
+                          </a:solidFill>
+                          <a:latin typeface="Calibri"/>
+                        </a:rPr>
+                        <a:t>0</a:t>
+                      </a:r>
+                    </a:p>
+                  </a:txBody>
+                  <a:tcPr>
+                    <a:solidFill>
+                      <a:srgbClr val="FFFFFF"/>
+                    </a:solidFill>
+                  </a:tcPr>
+                </a:tc>
+                <a:tc>
+                  <a:txBody>
+                    <a:bodyPr/>
+                    <a:lstStyle/>
+                    <a:p>
+                      <a:pPr algn="l"/>
+                      <a:r>
+                        <a:rPr sz="1000" b="0">
+                          <a:solidFill>
+                            <a:srgbClr val="1D1B43"/>
+                          </a:solidFill>
+                          <a:latin typeface="Calibri"/>
+                        </a:rPr>
                         <a:t>100.0%</a:t>
                       </a:r>
                     </a:p>
                   </a:txBody>
                   <a:tcPr>
                     <a:solidFill>
+                      <a:srgbClr val="FFFFFF"/>
+                    </a:solidFill>
+                  </a:tcPr>
+                </a:tc>
+                <a:tc>
+                  <a:txBody>
+                    <a:bodyPr/>
+                    <a:lstStyle/>
+                    <a:p>
+                      <a:pPr algn="l"/>
+                      <a:r>
+                        <a:rPr sz="1000" b="0">
+                          <a:solidFill>
+                            <a:srgbClr val="1D1B43"/>
+                          </a:solidFill>
+                          <a:latin typeface="Calibri"/>
+                        </a:rPr>
+                        <a:t>Excelente</a:t>
+                      </a:r>
+                    </a:p>
+                  </a:txBody>
+                  <a:tcPr>
+                    <a:solidFill>
+                      <a:srgbClr val="FFFFFF"/>
+                    </a:solidFill>
+                  </a:tcPr>
+                </a:tc>
+              </a:tr>
+              <a:tr h="457200">
+                <a:tc>
+                  <a:txBody>
+                    <a:bodyPr/>
+                    <a:lstStyle/>
+                    <a:p>
+                      <a:pPr algn="l"/>
+                      <a:r>
+                        <a:rPr sz="1000" b="0">
+                          <a:solidFill>
+                            <a:srgbClr val="1D1B43"/>
+                          </a:solidFill>
+                          <a:latin typeface="Calibri"/>
+                        </a:rPr>
+                        <a:t>DF</a:t>
+                      </a:r>
+                    </a:p>
+                  </a:txBody>
+                  <a:tcPr>
+                    <a:solidFill>
                       <a:srgbClr val="F2F2F2"/>
                     </a:solidFill>
                   </a:tcPr>
@@ -6149,6 +7365,98 @@
                           </a:solidFill>
                           <a:latin typeface="Calibri"/>
                         </a:rPr>
+                        <a:t>19</a:t>
+                      </a:r>
+                    </a:p>
+                  </a:txBody>
+                  <a:tcPr>
+                    <a:solidFill>
+                      <a:srgbClr val="F2F2F2"/>
+                    </a:solidFill>
+                  </a:tcPr>
+                </a:tc>
+                <a:tc>
+                  <a:txBody>
+                    <a:bodyPr/>
+                    <a:lstStyle/>
+                    <a:p>
+                      <a:pPr algn="l"/>
+                      <a:r>
+                        <a:rPr sz="1000" b="0">
+                          <a:solidFill>
+                            <a:srgbClr val="1D1B43"/>
+                          </a:solidFill>
+                          <a:latin typeface="Calibri"/>
+                        </a:rPr>
+                        <a:t>19</a:t>
+                      </a:r>
+                    </a:p>
+                  </a:txBody>
+                  <a:tcPr>
+                    <a:solidFill>
+                      <a:srgbClr val="F2F2F2"/>
+                    </a:solidFill>
+                  </a:tcPr>
+                </a:tc>
+                <a:tc>
+                  <a:txBody>
+                    <a:bodyPr/>
+                    <a:lstStyle/>
+                    <a:p>
+                      <a:pPr algn="l"/>
+                      <a:r>
+                        <a:rPr sz="1000" b="0">
+                          <a:solidFill>
+                            <a:srgbClr val="1D1B43"/>
+                          </a:solidFill>
+                          <a:latin typeface="Calibri"/>
+                        </a:rPr>
+                        <a:t>0</a:t>
+                      </a:r>
+                    </a:p>
+                  </a:txBody>
+                  <a:tcPr>
+                    <a:solidFill>
+                      <a:srgbClr val="F2F2F2"/>
+                    </a:solidFill>
+                  </a:tcPr>
+                </a:tc>
+                <a:tc>
+                  <a:txBody>
+                    <a:bodyPr/>
+                    <a:lstStyle/>
+                    <a:p>
+                      <a:pPr algn="l"/>
+                      <a:r>
+                        <a:rPr sz="1000" b="0">
+                          <a:solidFill>
+                            <a:srgbClr val="1D1B43"/>
+                          </a:solidFill>
+                          <a:latin typeface="Calibri"/>
+                        </a:rPr>
+                        <a:t>100.0%</a:t>
+                      </a:r>
+                    </a:p>
+                  </a:txBody>
+                  <a:tcPr>
+                    <a:solidFill>
+                      <a:srgbClr val="F2F2F2"/>
+                    </a:solidFill>
+                  </a:tcPr>
+                </a:tc>
+                <a:tc>
+                  <a:txBody>
+                    <a:bodyPr/>
+                    <a:lstStyle/>
+                    <a:p>
+                      <a:pPr algn="l"/>
+                      <a:r>
+                        <a:rPr sz="1000" b="0">
+                          <a:solidFill>
+                            <a:srgbClr val="1D1B43"/>
+                          </a:solidFill>
+                          <a:latin typeface="Calibri"/>
+                        </a:rPr>
                         <a:t>Excelente</a:t>
                       </a:r>
                     </a:p>
@@ -6156,986 +7464,6 @@
                   <a:tcPr>
                     <a:solidFill>
                       <a:srgbClr val="F2F2F2"/>
-                    </a:solidFill>
-                  </a:tcPr>
-                </a:tc>
-              </a:tr>
-              <a:tr h="438912">
-                <a:tc>
-                  <a:txBody>
-                    <a:bodyPr/>
-                    <a:lstStyle/>
-                    <a:p>
-                      <a:pPr algn="l"/>
-                      <a:r>
-                        <a:rPr sz="1000" b="0">
-                          <a:solidFill>
-                            <a:srgbClr val="1D1B43"/>
-                          </a:solidFill>
-                          <a:latin typeface="Calibri"/>
-                        </a:rPr>
-                        <a:t>RJ</a:t>
-                      </a:r>
-                    </a:p>
-                  </a:txBody>
-                  <a:tcPr>
-                    <a:solidFill>
-                      <a:srgbClr val="FFFFFF"/>
-                    </a:solidFill>
-                  </a:tcPr>
-                </a:tc>
-                <a:tc>
-                  <a:txBody>
-                    <a:bodyPr/>
-                    <a:lstStyle/>
-                    <a:p>
-                      <a:pPr algn="l"/>
-                      <a:r>
-                        <a:rPr sz="1000" b="0">
-                          <a:solidFill>
-                            <a:srgbClr val="1D1B43"/>
-                          </a:solidFill>
-                          <a:latin typeface="Calibri"/>
-                        </a:rPr>
-                        <a:t>42</a:t>
-                      </a:r>
-                    </a:p>
-                  </a:txBody>
-                  <a:tcPr>
-                    <a:solidFill>
-                      <a:srgbClr val="FFFFFF"/>
-                    </a:solidFill>
-                  </a:tcPr>
-                </a:tc>
-                <a:tc>
-                  <a:txBody>
-                    <a:bodyPr/>
-                    <a:lstStyle/>
-                    <a:p>
-                      <a:pPr algn="l"/>
-                      <a:r>
-                        <a:rPr sz="1000" b="0">
-                          <a:solidFill>
-                            <a:srgbClr val="1D1B43"/>
-                          </a:solidFill>
-                          <a:latin typeface="Calibri"/>
-                        </a:rPr>
-                        <a:t>42</a:t>
-                      </a:r>
-                    </a:p>
-                  </a:txBody>
-                  <a:tcPr>
-                    <a:solidFill>
-                      <a:srgbClr val="FFFFFF"/>
-                    </a:solidFill>
-                  </a:tcPr>
-                </a:tc>
-                <a:tc>
-                  <a:txBody>
-                    <a:bodyPr/>
-                    <a:lstStyle/>
-                    <a:p>
-                      <a:pPr algn="l"/>
-                      <a:r>
-                        <a:rPr sz="1000" b="0">
-                          <a:solidFill>
-                            <a:srgbClr val="1D1B43"/>
-                          </a:solidFill>
-                          <a:latin typeface="Calibri"/>
-                        </a:rPr>
-                        <a:t>0</a:t>
-                      </a:r>
-                    </a:p>
-                  </a:txBody>
-                  <a:tcPr>
-                    <a:solidFill>
-                      <a:srgbClr val="FFFFFF"/>
-                    </a:solidFill>
-                  </a:tcPr>
-                </a:tc>
-                <a:tc>
-                  <a:txBody>
-                    <a:bodyPr/>
-                    <a:lstStyle/>
-                    <a:p>
-                      <a:pPr algn="l"/>
-                      <a:r>
-                        <a:rPr sz="1000" b="0">
-                          <a:solidFill>
-                            <a:srgbClr val="1D1B43"/>
-                          </a:solidFill>
-                          <a:latin typeface="Calibri"/>
-                        </a:rPr>
-                        <a:t>100.0%</a:t>
-                      </a:r>
-                    </a:p>
-                  </a:txBody>
-                  <a:tcPr>
-                    <a:solidFill>
-                      <a:srgbClr val="FFFFFF"/>
-                    </a:solidFill>
-                  </a:tcPr>
-                </a:tc>
-                <a:tc>
-                  <a:txBody>
-                    <a:bodyPr/>
-                    <a:lstStyle/>
-                    <a:p>
-                      <a:pPr algn="l"/>
-                      <a:r>
-                        <a:rPr sz="1000" b="0">
-                          <a:solidFill>
-                            <a:srgbClr val="1D1B43"/>
-                          </a:solidFill>
-                          <a:latin typeface="Calibri"/>
-                        </a:rPr>
-                        <a:t>Excelente</a:t>
-                      </a:r>
-                    </a:p>
-                  </a:txBody>
-                  <a:tcPr>
-                    <a:solidFill>
-                      <a:srgbClr val="FFFFFF"/>
-                    </a:solidFill>
-                  </a:tcPr>
-                </a:tc>
-              </a:tr>
-              <a:tr h="438912">
-                <a:tc>
-                  <a:txBody>
-                    <a:bodyPr/>
-                    <a:lstStyle/>
-                    <a:p>
-                      <a:pPr algn="l"/>
-                      <a:r>
-                        <a:rPr sz="1000" b="0">
-                          <a:solidFill>
-                            <a:srgbClr val="1D1B43"/>
-                          </a:solidFill>
-                          <a:latin typeface="Calibri"/>
-                        </a:rPr>
-                        <a:t>PR</a:t>
-                      </a:r>
-                    </a:p>
-                  </a:txBody>
-                  <a:tcPr>
-                    <a:solidFill>
-                      <a:srgbClr val="F2F2F2"/>
-                    </a:solidFill>
-                  </a:tcPr>
-                </a:tc>
-                <a:tc>
-                  <a:txBody>
-                    <a:bodyPr/>
-                    <a:lstStyle/>
-                    <a:p>
-                      <a:pPr algn="l"/>
-                      <a:r>
-                        <a:rPr sz="1000" b="0">
-                          <a:solidFill>
-                            <a:srgbClr val="1D1B43"/>
-                          </a:solidFill>
-                          <a:latin typeface="Calibri"/>
-                        </a:rPr>
-                        <a:t>38</a:t>
-                      </a:r>
-                    </a:p>
-                  </a:txBody>
-                  <a:tcPr>
-                    <a:solidFill>
-                      <a:srgbClr val="F2F2F2"/>
-                    </a:solidFill>
-                  </a:tcPr>
-                </a:tc>
-                <a:tc>
-                  <a:txBody>
-                    <a:bodyPr/>
-                    <a:lstStyle/>
-                    <a:p>
-                      <a:pPr algn="l"/>
-                      <a:r>
-                        <a:rPr sz="1000" b="0">
-                          <a:solidFill>
-                            <a:srgbClr val="1D1B43"/>
-                          </a:solidFill>
-                          <a:latin typeface="Calibri"/>
-                        </a:rPr>
-                        <a:t>38</a:t>
-                      </a:r>
-                    </a:p>
-                  </a:txBody>
-                  <a:tcPr>
-                    <a:solidFill>
-                      <a:srgbClr val="F2F2F2"/>
-                    </a:solidFill>
-                  </a:tcPr>
-                </a:tc>
-                <a:tc>
-                  <a:txBody>
-                    <a:bodyPr/>
-                    <a:lstStyle/>
-                    <a:p>
-                      <a:pPr algn="l"/>
-                      <a:r>
-                        <a:rPr sz="1000" b="0">
-                          <a:solidFill>
-                            <a:srgbClr val="1D1B43"/>
-                          </a:solidFill>
-                          <a:latin typeface="Calibri"/>
-                        </a:rPr>
-                        <a:t>0</a:t>
-                      </a:r>
-                    </a:p>
-                  </a:txBody>
-                  <a:tcPr>
-                    <a:solidFill>
-                      <a:srgbClr val="F2F2F2"/>
-                    </a:solidFill>
-                  </a:tcPr>
-                </a:tc>
-                <a:tc>
-                  <a:txBody>
-                    <a:bodyPr/>
-                    <a:lstStyle/>
-                    <a:p>
-                      <a:pPr algn="l"/>
-                      <a:r>
-                        <a:rPr sz="1000" b="0">
-                          <a:solidFill>
-                            <a:srgbClr val="1D1B43"/>
-                          </a:solidFill>
-                          <a:latin typeface="Calibri"/>
-                        </a:rPr>
-                        <a:t>100.0%</a:t>
-                      </a:r>
-                    </a:p>
-                  </a:txBody>
-                  <a:tcPr>
-                    <a:solidFill>
-                      <a:srgbClr val="F2F2F2"/>
-                    </a:solidFill>
-                  </a:tcPr>
-                </a:tc>
-                <a:tc>
-                  <a:txBody>
-                    <a:bodyPr/>
-                    <a:lstStyle/>
-                    <a:p>
-                      <a:pPr algn="l"/>
-                      <a:r>
-                        <a:rPr sz="1000" b="0">
-                          <a:solidFill>
-                            <a:srgbClr val="1D1B43"/>
-                          </a:solidFill>
-                          <a:latin typeface="Calibri"/>
-                        </a:rPr>
-                        <a:t>Excelente</a:t>
-                      </a:r>
-                    </a:p>
-                  </a:txBody>
-                  <a:tcPr>
-                    <a:solidFill>
-                      <a:srgbClr val="F2F2F2"/>
-                    </a:solidFill>
-                  </a:tcPr>
-                </a:tc>
-              </a:tr>
-              <a:tr h="438912">
-                <a:tc>
-                  <a:txBody>
-                    <a:bodyPr/>
-                    <a:lstStyle/>
-                    <a:p>
-                      <a:pPr algn="l"/>
-                      <a:r>
-                        <a:rPr sz="1000" b="0">
-                          <a:solidFill>
-                            <a:srgbClr val="1D1B43"/>
-                          </a:solidFill>
-                          <a:latin typeface="Calibri"/>
-                        </a:rPr>
-                        <a:t>MG</a:t>
-                      </a:r>
-                    </a:p>
-                  </a:txBody>
-                  <a:tcPr>
-                    <a:solidFill>
-                      <a:srgbClr val="FFFFFF"/>
-                    </a:solidFill>
-                  </a:tcPr>
-                </a:tc>
-                <a:tc>
-                  <a:txBody>
-                    <a:bodyPr/>
-                    <a:lstStyle/>
-                    <a:p>
-                      <a:pPr algn="l"/>
-                      <a:r>
-                        <a:rPr sz="1000" b="0">
-                          <a:solidFill>
-                            <a:srgbClr val="1D1B43"/>
-                          </a:solidFill>
-                          <a:latin typeface="Calibri"/>
-                        </a:rPr>
-                        <a:t>23</a:t>
-                      </a:r>
-                    </a:p>
-                  </a:txBody>
-                  <a:tcPr>
-                    <a:solidFill>
-                      <a:srgbClr val="FFFFFF"/>
-                    </a:solidFill>
-                  </a:tcPr>
-                </a:tc>
-                <a:tc>
-                  <a:txBody>
-                    <a:bodyPr/>
-                    <a:lstStyle/>
-                    <a:p>
-                      <a:pPr algn="l"/>
-                      <a:r>
-                        <a:rPr sz="1000" b="0">
-                          <a:solidFill>
-                            <a:srgbClr val="1D1B43"/>
-                          </a:solidFill>
-                          <a:latin typeface="Calibri"/>
-                        </a:rPr>
-                        <a:t>23</a:t>
-                      </a:r>
-                    </a:p>
-                  </a:txBody>
-                  <a:tcPr>
-                    <a:solidFill>
-                      <a:srgbClr val="FFFFFF"/>
-                    </a:solidFill>
-                  </a:tcPr>
-                </a:tc>
-                <a:tc>
-                  <a:txBody>
-                    <a:bodyPr/>
-                    <a:lstStyle/>
-                    <a:p>
-                      <a:pPr algn="l"/>
-                      <a:r>
-                        <a:rPr sz="1000" b="0">
-                          <a:solidFill>
-                            <a:srgbClr val="1D1B43"/>
-                          </a:solidFill>
-                          <a:latin typeface="Calibri"/>
-                        </a:rPr>
-                        <a:t>0</a:t>
-                      </a:r>
-                    </a:p>
-                  </a:txBody>
-                  <a:tcPr>
-                    <a:solidFill>
-                      <a:srgbClr val="FFFFFF"/>
-                    </a:solidFill>
-                  </a:tcPr>
-                </a:tc>
-                <a:tc>
-                  <a:txBody>
-                    <a:bodyPr/>
-                    <a:lstStyle/>
-                    <a:p>
-                      <a:pPr algn="l"/>
-                      <a:r>
-                        <a:rPr sz="1000" b="0">
-                          <a:solidFill>
-                            <a:srgbClr val="1D1B43"/>
-                          </a:solidFill>
-                          <a:latin typeface="Calibri"/>
-                        </a:rPr>
-                        <a:t>100.0%</a:t>
-                      </a:r>
-                    </a:p>
-                  </a:txBody>
-                  <a:tcPr>
-                    <a:solidFill>
-                      <a:srgbClr val="FFFFFF"/>
-                    </a:solidFill>
-                  </a:tcPr>
-                </a:tc>
-                <a:tc>
-                  <a:txBody>
-                    <a:bodyPr/>
-                    <a:lstStyle/>
-                    <a:p>
-                      <a:pPr algn="l"/>
-                      <a:r>
-                        <a:rPr sz="1000" b="0">
-                          <a:solidFill>
-                            <a:srgbClr val="1D1B43"/>
-                          </a:solidFill>
-                          <a:latin typeface="Calibri"/>
-                        </a:rPr>
-                        <a:t>Excelente</a:t>
-                      </a:r>
-                    </a:p>
-                  </a:txBody>
-                  <a:tcPr>
-                    <a:solidFill>
-                      <a:srgbClr val="FFFFFF"/>
-                    </a:solidFill>
-                  </a:tcPr>
-                </a:tc>
-              </a:tr>
-              <a:tr h="438912">
-                <a:tc>
-                  <a:txBody>
-                    <a:bodyPr/>
-                    <a:lstStyle/>
-                    <a:p>
-                      <a:pPr algn="l"/>
-                      <a:r>
-                        <a:rPr sz="1000" b="0">
-                          <a:solidFill>
-                            <a:srgbClr val="1D1B43"/>
-                          </a:solidFill>
-                          <a:latin typeface="Calibri"/>
-                        </a:rPr>
-                        <a:t>RS</a:t>
-                      </a:r>
-                    </a:p>
-                  </a:txBody>
-                  <a:tcPr>
-                    <a:solidFill>
-                      <a:srgbClr val="F2F2F2"/>
-                    </a:solidFill>
-                  </a:tcPr>
-                </a:tc>
-                <a:tc>
-                  <a:txBody>
-                    <a:bodyPr/>
-                    <a:lstStyle/>
-                    <a:p>
-                      <a:pPr algn="l"/>
-                      <a:r>
-                        <a:rPr sz="1000" b="0">
-                          <a:solidFill>
-                            <a:srgbClr val="1D1B43"/>
-                          </a:solidFill>
-                          <a:latin typeface="Calibri"/>
-                        </a:rPr>
-                        <a:t>23</a:t>
-                      </a:r>
-                    </a:p>
-                  </a:txBody>
-                  <a:tcPr>
-                    <a:solidFill>
-                      <a:srgbClr val="F2F2F2"/>
-                    </a:solidFill>
-                  </a:tcPr>
-                </a:tc>
-                <a:tc>
-                  <a:txBody>
-                    <a:bodyPr/>
-                    <a:lstStyle/>
-                    <a:p>
-                      <a:pPr algn="l"/>
-                      <a:r>
-                        <a:rPr sz="1000" b="0">
-                          <a:solidFill>
-                            <a:srgbClr val="1D1B43"/>
-                          </a:solidFill>
-                          <a:latin typeface="Calibri"/>
-                        </a:rPr>
-                        <a:t>23</a:t>
-                      </a:r>
-                    </a:p>
-                  </a:txBody>
-                  <a:tcPr>
-                    <a:solidFill>
-                      <a:srgbClr val="F2F2F2"/>
-                    </a:solidFill>
-                  </a:tcPr>
-                </a:tc>
-                <a:tc>
-                  <a:txBody>
-                    <a:bodyPr/>
-                    <a:lstStyle/>
-                    <a:p>
-                      <a:pPr algn="l"/>
-                      <a:r>
-                        <a:rPr sz="1000" b="0">
-                          <a:solidFill>
-                            <a:srgbClr val="1D1B43"/>
-                          </a:solidFill>
-                          <a:latin typeface="Calibri"/>
-                        </a:rPr>
-                        <a:t>0</a:t>
-                      </a:r>
-                    </a:p>
-                  </a:txBody>
-                  <a:tcPr>
-                    <a:solidFill>
-                      <a:srgbClr val="F2F2F2"/>
-                    </a:solidFill>
-                  </a:tcPr>
-                </a:tc>
-                <a:tc>
-                  <a:txBody>
-                    <a:bodyPr/>
-                    <a:lstStyle/>
-                    <a:p>
-                      <a:pPr algn="l"/>
-                      <a:r>
-                        <a:rPr sz="1000" b="0">
-                          <a:solidFill>
-                            <a:srgbClr val="1D1B43"/>
-                          </a:solidFill>
-                          <a:latin typeface="Calibri"/>
-                        </a:rPr>
-                        <a:t>100.0%</a:t>
-                      </a:r>
-                    </a:p>
-                  </a:txBody>
-                  <a:tcPr>
-                    <a:solidFill>
-                      <a:srgbClr val="F2F2F2"/>
-                    </a:solidFill>
-                  </a:tcPr>
-                </a:tc>
-                <a:tc>
-                  <a:txBody>
-                    <a:bodyPr/>
-                    <a:lstStyle/>
-                    <a:p>
-                      <a:pPr algn="l"/>
-                      <a:r>
-                        <a:rPr sz="1000" b="0">
-                          <a:solidFill>
-                            <a:srgbClr val="1D1B43"/>
-                          </a:solidFill>
-                          <a:latin typeface="Calibri"/>
-                        </a:rPr>
-                        <a:t>Excelente</a:t>
-                      </a:r>
-                    </a:p>
-                  </a:txBody>
-                  <a:tcPr>
-                    <a:solidFill>
-                      <a:srgbClr val="F2F2F2"/>
-                    </a:solidFill>
-                  </a:tcPr>
-                </a:tc>
-              </a:tr>
-              <a:tr h="438912">
-                <a:tc>
-                  <a:txBody>
-                    <a:bodyPr/>
-                    <a:lstStyle/>
-                    <a:p>
-                      <a:pPr algn="l"/>
-                      <a:r>
-                        <a:rPr sz="1000" b="0">
-                          <a:solidFill>
-                            <a:srgbClr val="1D1B43"/>
-                          </a:solidFill>
-                          <a:latin typeface="Calibri"/>
-                        </a:rPr>
-                        <a:t>GO</a:t>
-                      </a:r>
-                    </a:p>
-                  </a:txBody>
-                  <a:tcPr>
-                    <a:solidFill>
-                      <a:srgbClr val="FFFFFF"/>
-                    </a:solidFill>
-                  </a:tcPr>
-                </a:tc>
-                <a:tc>
-                  <a:txBody>
-                    <a:bodyPr/>
-                    <a:lstStyle/>
-                    <a:p>
-                      <a:pPr algn="l"/>
-                      <a:r>
-                        <a:rPr sz="1000" b="0">
-                          <a:solidFill>
-                            <a:srgbClr val="1D1B43"/>
-                          </a:solidFill>
-                          <a:latin typeface="Calibri"/>
-                        </a:rPr>
-                        <a:t>21</a:t>
-                      </a:r>
-                    </a:p>
-                  </a:txBody>
-                  <a:tcPr>
-                    <a:solidFill>
-                      <a:srgbClr val="FFFFFF"/>
-                    </a:solidFill>
-                  </a:tcPr>
-                </a:tc>
-                <a:tc>
-                  <a:txBody>
-                    <a:bodyPr/>
-                    <a:lstStyle/>
-                    <a:p>
-                      <a:pPr algn="l"/>
-                      <a:r>
-                        <a:rPr sz="1000" b="0">
-                          <a:solidFill>
-                            <a:srgbClr val="1D1B43"/>
-                          </a:solidFill>
-                          <a:latin typeface="Calibri"/>
-                        </a:rPr>
-                        <a:t>21</a:t>
-                      </a:r>
-                    </a:p>
-                  </a:txBody>
-                  <a:tcPr>
-                    <a:solidFill>
-                      <a:srgbClr val="FFFFFF"/>
-                    </a:solidFill>
-                  </a:tcPr>
-                </a:tc>
-                <a:tc>
-                  <a:txBody>
-                    <a:bodyPr/>
-                    <a:lstStyle/>
-                    <a:p>
-                      <a:pPr algn="l"/>
-                      <a:r>
-                        <a:rPr sz="1000" b="0">
-                          <a:solidFill>
-                            <a:srgbClr val="1D1B43"/>
-                          </a:solidFill>
-                          <a:latin typeface="Calibri"/>
-                        </a:rPr>
-                        <a:t>0</a:t>
-                      </a:r>
-                    </a:p>
-                  </a:txBody>
-                  <a:tcPr>
-                    <a:solidFill>
-                      <a:srgbClr val="FFFFFF"/>
-                    </a:solidFill>
-                  </a:tcPr>
-                </a:tc>
-                <a:tc>
-                  <a:txBody>
-                    <a:bodyPr/>
-                    <a:lstStyle/>
-                    <a:p>
-                      <a:pPr algn="l"/>
-                      <a:r>
-                        <a:rPr sz="1000" b="0">
-                          <a:solidFill>
-                            <a:srgbClr val="1D1B43"/>
-                          </a:solidFill>
-                          <a:latin typeface="Calibri"/>
-                        </a:rPr>
-                        <a:t>100.0%</a:t>
-                      </a:r>
-                    </a:p>
-                  </a:txBody>
-                  <a:tcPr>
-                    <a:solidFill>
-                      <a:srgbClr val="FFFFFF"/>
-                    </a:solidFill>
-                  </a:tcPr>
-                </a:tc>
-                <a:tc>
-                  <a:txBody>
-                    <a:bodyPr/>
-                    <a:lstStyle/>
-                    <a:p>
-                      <a:pPr algn="l"/>
-                      <a:r>
-                        <a:rPr sz="1000" b="0">
-                          <a:solidFill>
-                            <a:srgbClr val="1D1B43"/>
-                          </a:solidFill>
-                          <a:latin typeface="Calibri"/>
-                        </a:rPr>
-                        <a:t>Excelente</a:t>
-                      </a:r>
-                    </a:p>
-                  </a:txBody>
-                  <a:tcPr>
-                    <a:solidFill>
-                      <a:srgbClr val="FFFFFF"/>
-                    </a:solidFill>
-                  </a:tcPr>
-                </a:tc>
-              </a:tr>
-              <a:tr h="438912">
-                <a:tc>
-                  <a:txBody>
-                    <a:bodyPr/>
-                    <a:lstStyle/>
-                    <a:p>
-                      <a:pPr algn="l"/>
-                      <a:r>
-                        <a:rPr sz="1000" b="0">
-                          <a:solidFill>
-                            <a:srgbClr val="1D1B43"/>
-                          </a:solidFill>
-                          <a:latin typeface="Calibri"/>
-                        </a:rPr>
-                        <a:t>DF</a:t>
-                      </a:r>
-                    </a:p>
-                  </a:txBody>
-                  <a:tcPr>
-                    <a:solidFill>
-                      <a:srgbClr val="F2F2F2"/>
-                    </a:solidFill>
-                  </a:tcPr>
-                </a:tc>
-                <a:tc>
-                  <a:txBody>
-                    <a:bodyPr/>
-                    <a:lstStyle/>
-                    <a:p>
-                      <a:pPr algn="l"/>
-                      <a:r>
-                        <a:rPr sz="1000" b="0">
-                          <a:solidFill>
-                            <a:srgbClr val="1D1B43"/>
-                          </a:solidFill>
-                          <a:latin typeface="Calibri"/>
-                        </a:rPr>
-                        <a:t>18</a:t>
-                      </a:r>
-                    </a:p>
-                  </a:txBody>
-                  <a:tcPr>
-                    <a:solidFill>
-                      <a:srgbClr val="F2F2F2"/>
-                    </a:solidFill>
-                  </a:tcPr>
-                </a:tc>
-                <a:tc>
-                  <a:txBody>
-                    <a:bodyPr/>
-                    <a:lstStyle/>
-                    <a:p>
-                      <a:pPr algn="l"/>
-                      <a:r>
-                        <a:rPr sz="1000" b="0">
-                          <a:solidFill>
-                            <a:srgbClr val="1D1B43"/>
-                          </a:solidFill>
-                          <a:latin typeface="Calibri"/>
-                        </a:rPr>
-                        <a:t>18</a:t>
-                      </a:r>
-                    </a:p>
-                  </a:txBody>
-                  <a:tcPr>
-                    <a:solidFill>
-                      <a:srgbClr val="F2F2F2"/>
-                    </a:solidFill>
-                  </a:tcPr>
-                </a:tc>
-                <a:tc>
-                  <a:txBody>
-                    <a:bodyPr/>
-                    <a:lstStyle/>
-                    <a:p>
-                      <a:pPr algn="l"/>
-                      <a:r>
-                        <a:rPr sz="1000" b="0">
-                          <a:solidFill>
-                            <a:srgbClr val="1D1B43"/>
-                          </a:solidFill>
-                          <a:latin typeface="Calibri"/>
-                        </a:rPr>
-                        <a:t>0</a:t>
-                      </a:r>
-                    </a:p>
-                  </a:txBody>
-                  <a:tcPr>
-                    <a:solidFill>
-                      <a:srgbClr val="F2F2F2"/>
-                    </a:solidFill>
-                  </a:tcPr>
-                </a:tc>
-                <a:tc>
-                  <a:txBody>
-                    <a:bodyPr/>
-                    <a:lstStyle/>
-                    <a:p>
-                      <a:pPr algn="l"/>
-                      <a:r>
-                        <a:rPr sz="1000" b="0">
-                          <a:solidFill>
-                            <a:srgbClr val="1D1B43"/>
-                          </a:solidFill>
-                          <a:latin typeface="Calibri"/>
-                        </a:rPr>
-                        <a:t>100.0%</a:t>
-                      </a:r>
-                    </a:p>
-                  </a:txBody>
-                  <a:tcPr>
-                    <a:solidFill>
-                      <a:srgbClr val="F2F2F2"/>
-                    </a:solidFill>
-                  </a:tcPr>
-                </a:tc>
-                <a:tc>
-                  <a:txBody>
-                    <a:bodyPr/>
-                    <a:lstStyle/>
-                    <a:p>
-                      <a:pPr algn="l"/>
-                      <a:r>
-                        <a:rPr sz="1000" b="0">
-                          <a:solidFill>
-                            <a:srgbClr val="1D1B43"/>
-                          </a:solidFill>
-                          <a:latin typeface="Calibri"/>
-                        </a:rPr>
-                        <a:t>Excelente</a:t>
-                      </a:r>
-                    </a:p>
-                  </a:txBody>
-                  <a:tcPr>
-                    <a:solidFill>
-                      <a:srgbClr val="F2F2F2"/>
-                    </a:solidFill>
-                  </a:tcPr>
-                </a:tc>
-              </a:tr>
-              <a:tr h="438912">
-                <a:tc>
-                  <a:txBody>
-                    <a:bodyPr/>
-                    <a:lstStyle/>
-                    <a:p>
-                      <a:pPr algn="l"/>
-                      <a:r>
-                        <a:rPr sz="1000" b="0">
-                          <a:solidFill>
-                            <a:srgbClr val="1D1B43"/>
-                          </a:solidFill>
-                          <a:latin typeface="Calibri"/>
-                        </a:rPr>
-                        <a:t>ES</a:t>
-                      </a:r>
-                    </a:p>
-                  </a:txBody>
-                  <a:tcPr>
-                    <a:solidFill>
-                      <a:srgbClr val="FFFFFF"/>
-                    </a:solidFill>
-                  </a:tcPr>
-                </a:tc>
-                <a:tc>
-                  <a:txBody>
-                    <a:bodyPr/>
-                    <a:lstStyle/>
-                    <a:p>
-                      <a:pPr algn="l"/>
-                      <a:r>
-                        <a:rPr sz="1000" b="0">
-                          <a:solidFill>
-                            <a:srgbClr val="1D1B43"/>
-                          </a:solidFill>
-                          <a:latin typeface="Calibri"/>
-                        </a:rPr>
-                        <a:t>2</a:t>
-                      </a:r>
-                    </a:p>
-                  </a:txBody>
-                  <a:tcPr>
-                    <a:solidFill>
-                      <a:srgbClr val="FFFFFF"/>
-                    </a:solidFill>
-                  </a:tcPr>
-                </a:tc>
-                <a:tc>
-                  <a:txBody>
-                    <a:bodyPr/>
-                    <a:lstStyle/>
-                    <a:p>
-                      <a:pPr algn="l"/>
-                      <a:r>
-                        <a:rPr sz="1000" b="0">
-                          <a:solidFill>
-                            <a:srgbClr val="1D1B43"/>
-                          </a:solidFill>
-                          <a:latin typeface="Calibri"/>
-                        </a:rPr>
-                        <a:t>2</a:t>
-                      </a:r>
-                    </a:p>
-                  </a:txBody>
-                  <a:tcPr>
-                    <a:solidFill>
-                      <a:srgbClr val="FFFFFF"/>
-                    </a:solidFill>
-                  </a:tcPr>
-                </a:tc>
-                <a:tc>
-                  <a:txBody>
-                    <a:bodyPr/>
-                    <a:lstStyle/>
-                    <a:p>
-                      <a:pPr algn="l"/>
-                      <a:r>
-                        <a:rPr sz="1000" b="0">
-                          <a:solidFill>
-                            <a:srgbClr val="1D1B43"/>
-                          </a:solidFill>
-                          <a:latin typeface="Calibri"/>
-                        </a:rPr>
-                        <a:t>0</a:t>
-                      </a:r>
-                    </a:p>
-                  </a:txBody>
-                  <a:tcPr>
-                    <a:solidFill>
-                      <a:srgbClr val="FFFFFF"/>
-                    </a:solidFill>
-                  </a:tcPr>
-                </a:tc>
-                <a:tc>
-                  <a:txBody>
-                    <a:bodyPr/>
-                    <a:lstStyle/>
-                    <a:p>
-                      <a:pPr algn="l"/>
-                      <a:r>
-                        <a:rPr sz="1000" b="0">
-                          <a:solidFill>
-                            <a:srgbClr val="1D1B43"/>
-                          </a:solidFill>
-                          <a:latin typeface="Calibri"/>
-                        </a:rPr>
-                        <a:t>100.0%</a:t>
-                      </a:r>
-                    </a:p>
-                  </a:txBody>
-                  <a:tcPr>
-                    <a:solidFill>
-                      <a:srgbClr val="FFFFFF"/>
-                    </a:solidFill>
-                  </a:tcPr>
-                </a:tc>
-                <a:tc>
-                  <a:txBody>
-                    <a:bodyPr/>
-                    <a:lstStyle/>
-                    <a:p>
-                      <a:pPr algn="l"/>
-                      <a:r>
-                        <a:rPr sz="1000" b="0">
-                          <a:solidFill>
-                            <a:srgbClr val="1D1B43"/>
-                          </a:solidFill>
-                          <a:latin typeface="Calibri"/>
-                        </a:rPr>
-                        <a:t>Excelente</a:t>
-                      </a:r>
-                    </a:p>
-                  </a:txBody>
-                  <a:tcPr>
-                    <a:solidFill>
-                      <a:srgbClr val="FFFFFF"/>
                     </a:solidFill>
                   </a:tcPr>
                 </a:tc>
@@ -7224,7 +7552,7 @@
                 </a:solidFill>
                 <a:latin typeface="Calibri"/>
               </a:rPr>
-              <a:t>TOP DESTINATARIOS (25 pontos)</a:t>
+              <a:t>TOP DESTINATARIOS (26 pontos)</a:t>
             </a:r>
           </a:p>
         </p:txBody>
@@ -7522,7 +7850,7 @@
                           </a:solidFill>
                           <a:latin typeface="Calibri"/>
                         </a:rPr>
-                        <a:t>45</a:t>
+                        <a:t>38</a:t>
                       </a:r>
                     </a:p>
                   </a:txBody>
@@ -7545,7 +7873,7 @@
                           </a:solidFill>
                           <a:latin typeface="Calibri"/>
                         </a:rPr>
-                        <a:t>45</a:t>
+                        <a:t>38</a:t>
                       </a:r>
                     </a:p>
                   </a:txBody>
@@ -7848,7 +8176,7 @@
                           </a:solidFill>
                           <a:latin typeface="Calibri"/>
                         </a:rPr>
-                        <a:t>23</a:t>
+                        <a:t>22</a:t>
                       </a:r>
                     </a:p>
                   </a:txBody>
@@ -7871,7 +8199,7 @@
                           </a:solidFill>
                           <a:latin typeface="Calibri"/>
                         </a:rPr>
-                        <a:t>23</a:t>
+                        <a:t>21</a:t>
                       </a:r>
                     </a:p>
                   </a:txBody>
@@ -7894,7 +8222,7 @@
                           </a:solidFill>
                           <a:latin typeface="Calibri"/>
                         </a:rPr>
-                        <a:t>0</a:t>
+                        <a:t>1</a:t>
                       </a:r>
                     </a:p>
                   </a:txBody>
@@ -7917,7 +8245,7 @@
                           </a:solidFill>
                           <a:latin typeface="Calibri"/>
                         </a:rPr>
-                        <a:t>100.0%</a:t>
+                        <a:t>95.5%</a:t>
                       </a:r>
                     </a:p>
                   </a:txBody>
@@ -7940,7 +8268,7 @@
                           </a:solidFill>
                           <a:latin typeface="Calibri"/>
                         </a:rPr>
-                        <a:t>Excelente</a:t>
+                        <a:t>Regular</a:t>
                       </a:r>
                     </a:p>
                   </a:txBody>
@@ -7988,7 +8316,7 @@
                           </a:solidFill>
                           <a:latin typeface="Calibri"/>
                         </a:rPr>
-                        <a:t>MRH VEICULOS LTDA. - PORTO ALEGRE / RS</a:t>
+                        <a:t>BCLV COMERCIO DE VEI - GOIANIA / GO</a:t>
                       </a:r>
                     </a:p>
                   </a:txBody>
@@ -8011,7 +8339,7 @@
                           </a:solidFill>
                           <a:latin typeface="Calibri"/>
                         </a:rPr>
-                        <a:t>23</a:t>
+                        <a:t>22</a:t>
                       </a:r>
                     </a:p>
                   </a:txBody>
@@ -8034,7 +8362,7 @@
                           </a:solidFill>
                           <a:latin typeface="Calibri"/>
                         </a:rPr>
-                        <a:t>23</a:t>
+                        <a:t>22</a:t>
                       </a:r>
                     </a:p>
                   </a:txBody>
@@ -8151,7 +8479,7 @@
                           </a:solidFill>
                           <a:latin typeface="Calibri"/>
                         </a:rPr>
-                        <a:t>LIA E ANNETTE INDUST - RIO DE JANEIRO / RJ</a:t>
+                        <a:t>MRH VEICULOS - CURITIBA / PR</a:t>
                       </a:r>
                     </a:p>
                   </a:txBody>
@@ -8174,7 +8502,7 @@
                           </a:solidFill>
                           <a:latin typeface="Calibri"/>
                         </a:rPr>
-                        <a:t>22</a:t>
+                        <a:t>21</a:t>
                       </a:r>
                     </a:p>
                   </a:txBody>
@@ -8197,7 +8525,7 @@
                           </a:solidFill>
                           <a:latin typeface="Calibri"/>
                         </a:rPr>
-                        <a:t>22</a:t>
+                        <a:t>20</a:t>
                       </a:r>
                     </a:p>
                   </a:txBody>
@@ -8220,7 +8548,7 @@
                           </a:solidFill>
                           <a:latin typeface="Calibri"/>
                         </a:rPr>
-                        <a:t>0</a:t>
+                        <a:t>1</a:t>
                       </a:r>
                     </a:p>
                   </a:txBody>
@@ -8243,7 +8571,7 @@
                           </a:solidFill>
                           <a:latin typeface="Calibri"/>
                         </a:rPr>
-                        <a:t>100.0%</a:t>
+                        <a:t>95.2%</a:t>
                       </a:r>
                     </a:p>
                   </a:txBody>
@@ -8266,7 +8594,7 @@
                           </a:solidFill>
                           <a:latin typeface="Calibri"/>
                         </a:rPr>
-                        <a:t>Excelente</a:t>
+                        <a:t>Regular</a:t>
                       </a:r>
                     </a:p>
                   </a:txBody>
@@ -8314,7 +8642,7 @@
                           </a:solidFill>
                           <a:latin typeface="Calibri"/>
                         </a:rPr>
-                        <a:t>MRH VEICULOS - CURITIBA / PR</a:t>
+                        <a:t>MRH VEICULOS LTDA. - FLORIANOPOLIS / SC</a:t>
                       </a:r>
                     </a:p>
                   </a:txBody>
@@ -8337,7 +8665,7 @@
                           </a:solidFill>
                           <a:latin typeface="Calibri"/>
                         </a:rPr>
-                        <a:t>22</a:t>
+                        <a:t>21</a:t>
                       </a:r>
                     </a:p>
                   </a:txBody>
@@ -8360,7 +8688,7 @@
                           </a:solidFill>
                           <a:latin typeface="Calibri"/>
                         </a:rPr>
-                        <a:t>22</a:t>
+                        <a:t>21</a:t>
                       </a:r>
                     </a:p>
                   </a:txBody>
@@ -8477,7 +8805,7 @@
                           </a:solidFill>
                           <a:latin typeface="Calibri"/>
                         </a:rPr>
-                        <a:t>MRH VEICULOS LTDA. - FLORIANOPOLIS / SC</a:t>
+                        <a:t>PORSCHER BRASIL IMPO - SAO PAULO / SP</a:t>
                       </a:r>
                     </a:p>
                   </a:txBody>
@@ -8500,7 +8828,7 @@
                           </a:solidFill>
                           <a:latin typeface="Calibri"/>
                         </a:rPr>
-                        <a:t>22</a:t>
+                        <a:t>21</a:t>
                       </a:r>
                     </a:p>
                   </a:txBody>
@@ -8523,7 +8851,7 @@
                           </a:solidFill>
                           <a:latin typeface="Calibri"/>
                         </a:rPr>
-                        <a:t>22</a:t>
+                        <a:t>21</a:t>
                       </a:r>
                     </a:p>
                   </a:txBody>
@@ -8640,7 +8968,7 @@
                           </a:solidFill>
                           <a:latin typeface="Calibri"/>
                         </a:rPr>
-                        <a:t>BCLV COMERCIO DE VEI - GOIANIA / GO</a:t>
+                        <a:t>MRH VEICULOS LTDA. - PORTO ALEGRE / RS</a:t>
                       </a:r>
                     </a:p>
                   </a:txBody>
@@ -8663,7 +8991,7 @@
                           </a:solidFill>
                           <a:latin typeface="Calibri"/>
                         </a:rPr>
-                        <a:t>21</a:t>
+                        <a:t>20</a:t>
                       </a:r>
                     </a:p>
                   </a:txBody>
@@ -8686,7 +9014,7 @@
                           </a:solidFill>
                           <a:latin typeface="Calibri"/>
                         </a:rPr>
-                        <a:t>21</a:t>
+                        <a:t>20</a:t>
                       </a:r>
                     </a:p>
                   </a:txBody>
@@ -8826,7 +9154,7 @@
                           </a:solidFill>
                           <a:latin typeface="Calibri"/>
                         </a:rPr>
-                        <a:t>20</a:t>
+                        <a:t>19</a:t>
                       </a:r>
                     </a:p>
                   </a:txBody>
@@ -8849,7 +9177,7 @@
                           </a:solidFill>
                           <a:latin typeface="Calibri"/>
                         </a:rPr>
-                        <a:t>20</a:t>
+                        <a:t>19</a:t>
                       </a:r>
                     </a:p>
                   </a:txBody>
@@ -8966,7 +9294,7 @@
                           </a:solidFill>
                           <a:latin typeface="Calibri"/>
                         </a:rPr>
-                        <a:t>MRH VEICULOS LTDA - RIO DE JANEIRO / RJ</a:t>
+                        <a:t>BCLV COMERCIO DE VEI - BRASILIA / DF</a:t>
                       </a:r>
                     </a:p>
                   </a:txBody>
@@ -8989,7 +9317,7 @@
                           </a:solidFill>
                           <a:latin typeface="Calibri"/>
                         </a:rPr>
-                        <a:t>20</a:t>
+                        <a:t>19</a:t>
                       </a:r>
                     </a:p>
                   </a:txBody>
@@ -9012,7 +9340,7 @@
                           </a:solidFill>
                           <a:latin typeface="Calibri"/>
                         </a:rPr>
-                        <a:t>20</a:t>
+                        <a:t>19</a:t>
                       </a:r>
                     </a:p>
                   </a:txBody>
@@ -9129,7 +9457,7 @@
                           </a:solidFill>
                           <a:latin typeface="Calibri"/>
                         </a:rPr>
-                        <a:t>BCLV COMERCIO DE VEI - BRASILIA / DF</a:t>
+                        <a:t>MRH VEICULOS LTDA - RIO DE JANEIRO / RJ</a:t>
                       </a:r>
                     </a:p>
                   </a:txBody>
@@ -9152,7 +9480,7 @@
                           </a:solidFill>
                           <a:latin typeface="Calibri"/>
                         </a:rPr>
-                        <a:t>18</a:t>
+                        <a:t>19</a:t>
                       </a:r>
                     </a:p>
                   </a:txBody>
@@ -9175,7 +9503,7 @@
                           </a:solidFill>
                           <a:latin typeface="Calibri"/>
                         </a:rPr>
-                        <a:t>18</a:t>
+                        <a:t>19</a:t>
                       </a:r>
                     </a:p>
                   </a:txBody>
@@ -9292,7 +9620,7 @@
                           </a:solidFill>
                           <a:latin typeface="Calibri"/>
                         </a:rPr>
-                        <a:t>MRH VEICULOS LTDA. - CAMPINAS / SP</a:t>
+                        <a:t>LIA E ANNETTE INDUST - RIO DE JANEIRO / RJ</a:t>
                       </a:r>
                     </a:p>
                   </a:txBody>
@@ -9315,6 +9643,29 @@
                           </a:solidFill>
                           <a:latin typeface="Calibri"/>
                         </a:rPr>
+                        <a:t>19</a:t>
+                      </a:r>
+                    </a:p>
+                  </a:txBody>
+                  <a:tcPr>
+                    <a:solidFill>
+                      <a:srgbClr val="F2F2F2"/>
+                    </a:solidFill>
+                  </a:tcPr>
+                </a:tc>
+                <a:tc>
+                  <a:txBody>
+                    <a:bodyPr/>
+                    <a:lstStyle/>
+                    <a:p>
+                      <a:pPr algn="l"/>
+                      <a:r>
+                        <a:rPr sz="1000" b="0">
+                          <a:solidFill>
+                            <a:srgbClr val="1D1B43"/>
+                          </a:solidFill>
+                          <a:latin typeface="Calibri"/>
+                        </a:rPr>
                         <a:t>18</a:t>
                       </a:r>
                     </a:p>
@@ -9338,7 +9689,7 @@
                           </a:solidFill>
                           <a:latin typeface="Calibri"/>
                         </a:rPr>
-                        <a:t>18</a:t>
+                        <a:t>1</a:t>
                       </a:r>
                     </a:p>
                   </a:txBody>
@@ -9361,7 +9712,7 @@
                           </a:solidFill>
                           <a:latin typeface="Calibri"/>
                         </a:rPr>
-                        <a:t>0</a:t>
+                        <a:t>94.7%</a:t>
                       </a:r>
                     </a:p>
                   </a:txBody>
@@ -9384,30 +9735,7 @@
                           </a:solidFill>
                           <a:latin typeface="Calibri"/>
                         </a:rPr>
-                        <a:t>100.0%</a:t>
-                      </a:r>
-                    </a:p>
-                  </a:txBody>
-                  <a:tcPr>
-                    <a:solidFill>
-                      <a:srgbClr val="F2F2F2"/>
-                    </a:solidFill>
-                  </a:tcPr>
-                </a:tc>
-                <a:tc>
-                  <a:txBody>
-                    <a:bodyPr/>
-                    <a:lstStyle/>
-                    <a:p>
-                      <a:pPr algn="l"/>
-                      <a:r>
-                        <a:rPr sz="1000" b="0">
-                          <a:solidFill>
-                            <a:srgbClr val="1D1B43"/>
-                          </a:solidFill>
-                          <a:latin typeface="Calibri"/>
-                        </a:rPr>
-                        <a:t>Excelente</a:t>
+                        <a:t>Regular</a:t>
                       </a:r>
                     </a:p>
                   </a:txBody>
@@ -9455,7 +9783,7 @@
                           </a:solidFill>
                           <a:latin typeface="Calibri"/>
                         </a:rPr>
-                        <a:t>MRH VEICULOS LTDA. - MARINGA / PR</a:t>
+                        <a:t>MRH VEICULOS LTDA BL - BLUMENAU / SC</a:t>
                       </a:r>
                     </a:p>
                   </a:txBody>
@@ -9478,7 +9806,7 @@
                           </a:solidFill>
                           <a:latin typeface="Calibri"/>
                         </a:rPr>
-                        <a:t>16</a:t>
+                        <a:t>18</a:t>
                       </a:r>
                     </a:p>
                   </a:txBody>
@@ -9501,7 +9829,7 @@
                           </a:solidFill>
                           <a:latin typeface="Calibri"/>
                         </a:rPr>
-                        <a:t>16</a:t>
+                        <a:t>18</a:t>
                       </a:r>
                     </a:p>
                   </a:txBody>
@@ -9641,7 +9969,7 @@
                           </a:solidFill>
                           <a:latin typeface="Calibri"/>
                         </a:rPr>
-                        <a:t>15</a:t>
+                        <a:t>18</a:t>
                       </a:r>
                     </a:p>
                   </a:txBody>
@@ -9664,7 +9992,7 @@
                           </a:solidFill>
                           <a:latin typeface="Calibri"/>
                         </a:rPr>
-                        <a:t>14</a:t>
+                        <a:t>17</a:t>
                       </a:r>
                     </a:p>
                   </a:txBody>
@@ -9710,7 +10038,7 @@
                           </a:solidFill>
                           <a:latin typeface="Calibri"/>
                         </a:rPr>
-                        <a:t>93.3%</a:t>
+                        <a:t>94.4%</a:t>
                       </a:r>
                     </a:p>
                   </a:txBody>
